--- a/teaching/macro-applications/downloads/lecture_3.pptx
+++ b/teaching/macro-applications/downloads/lecture_3.pptx
@@ -2,45 +2,45 @@
 <file path=ppt/presentation.xml><?xml version="1.0" encoding="utf-8"?>
 <p:presentation xmlns:p="http://schemas.openxmlformats.org/presentationml/2006/main">
   <p:sldMasterIdLst>
-    <p:sldMasterId xmlns:r="http://schemas.openxmlformats.org/officeDocument/2006/relationships" id="2147483648" r:id="R6b539225b2bc4c3c"/>
+    <p:sldMasterId xmlns:r="http://schemas.openxmlformats.org/officeDocument/2006/relationships" id="2147483648" r:id="R41394840d08243b6"/>
   </p:sldMasterIdLst>
   <p:notesMasterIdLst>
-    <p:notesMasterId xmlns:r="http://schemas.openxmlformats.org/officeDocument/2006/relationships" r:id="Rd22b620405264ac8"/>
+    <p:notesMasterId xmlns:r="http://schemas.openxmlformats.org/officeDocument/2006/relationships" r:id="R890a109a0008498d"/>
   </p:notesMasterIdLst>
   <p:sldIdLst>
-    <p:sldId xmlns:r="http://schemas.openxmlformats.org/officeDocument/2006/relationships" id="256" r:id="R3266fbc7849b46ff"/>
-    <p:sldId xmlns:r="http://schemas.openxmlformats.org/officeDocument/2006/relationships" id="257" r:id="R405c476494244575"/>
-    <p:sldId xmlns:r="http://schemas.openxmlformats.org/officeDocument/2006/relationships" id="258" r:id="Rad14d716346c4235"/>
-    <p:sldId xmlns:r="http://schemas.openxmlformats.org/officeDocument/2006/relationships" id="259" r:id="Rd6ed0211b4f44065"/>
-    <p:sldId xmlns:r="http://schemas.openxmlformats.org/officeDocument/2006/relationships" id="260" r:id="R368746412db54ef4"/>
-    <p:sldId xmlns:r="http://schemas.openxmlformats.org/officeDocument/2006/relationships" id="261" r:id="R89f3289157404640"/>
-    <p:sldId xmlns:r="http://schemas.openxmlformats.org/officeDocument/2006/relationships" id="262" r:id="Reb3899baa8c74952"/>
-    <p:sldId xmlns:r="http://schemas.openxmlformats.org/officeDocument/2006/relationships" id="263" r:id="R8d31bc0e4f3147f3"/>
-    <p:sldId xmlns:r="http://schemas.openxmlformats.org/officeDocument/2006/relationships" id="264" r:id="R5db41004dec8452f"/>
-    <p:sldId xmlns:r="http://schemas.openxmlformats.org/officeDocument/2006/relationships" id="265" r:id="R543b80328bd54f07"/>
-    <p:sldId xmlns:r="http://schemas.openxmlformats.org/officeDocument/2006/relationships" id="266" r:id="R8c0e3cdcd6ac44ec"/>
-    <p:sldId xmlns:r="http://schemas.openxmlformats.org/officeDocument/2006/relationships" id="267" r:id="R28f72873edb243f2"/>
-    <p:sldId xmlns:r="http://schemas.openxmlformats.org/officeDocument/2006/relationships" id="268" r:id="R180c0ee9cdda492d"/>
-    <p:sldId xmlns:r="http://schemas.openxmlformats.org/officeDocument/2006/relationships" id="269" r:id="Re4060a1cc62946d4"/>
-    <p:sldId xmlns:r="http://schemas.openxmlformats.org/officeDocument/2006/relationships" id="270" r:id="R3aea73506bc347be"/>
-    <p:sldId xmlns:r="http://schemas.openxmlformats.org/officeDocument/2006/relationships" id="271" r:id="R8fde6b30604e4d66"/>
-    <p:sldId xmlns:r="http://schemas.openxmlformats.org/officeDocument/2006/relationships" id="272" r:id="Re164d23a48eb4062"/>
-    <p:sldId xmlns:r="http://schemas.openxmlformats.org/officeDocument/2006/relationships" id="273" r:id="Rc410c0823cc547e6"/>
-    <p:sldId xmlns:r="http://schemas.openxmlformats.org/officeDocument/2006/relationships" id="274" r:id="Rd10db64cf95d4a61"/>
-    <p:sldId xmlns:r="http://schemas.openxmlformats.org/officeDocument/2006/relationships" id="275" r:id="R4b4ff000cf354670"/>
-    <p:sldId xmlns:r="http://schemas.openxmlformats.org/officeDocument/2006/relationships" id="276" r:id="R3eb06269e9144ab7"/>
-    <p:sldId xmlns:r="http://schemas.openxmlformats.org/officeDocument/2006/relationships" id="277" r:id="R903ac552515c4223"/>
-    <p:sldId xmlns:r="http://schemas.openxmlformats.org/officeDocument/2006/relationships" id="278" r:id="R5a3e4d49a81b4379"/>
-    <p:sldId xmlns:r="http://schemas.openxmlformats.org/officeDocument/2006/relationships" id="279" r:id="R24cfaea7e7c14412"/>
-    <p:sldId xmlns:r="http://schemas.openxmlformats.org/officeDocument/2006/relationships" id="280" r:id="R51162e8554f64ac6"/>
-    <p:sldId xmlns:r="http://schemas.openxmlformats.org/officeDocument/2006/relationships" id="281" r:id="Ra9a00749b9414388"/>
-    <p:sldId xmlns:r="http://schemas.openxmlformats.org/officeDocument/2006/relationships" id="282" r:id="R391c75a0c85d4ea1"/>
-    <p:sldId xmlns:r="http://schemas.openxmlformats.org/officeDocument/2006/relationships" id="283" r:id="R07fe497626d44517"/>
-    <p:sldId xmlns:r="http://schemas.openxmlformats.org/officeDocument/2006/relationships" id="284" r:id="R08bc70b4cf974a2c"/>
-    <p:sldId xmlns:r="http://schemas.openxmlformats.org/officeDocument/2006/relationships" id="285" r:id="Rb4af5714ec6347be"/>
-    <p:sldId xmlns:r="http://schemas.openxmlformats.org/officeDocument/2006/relationships" id="286" r:id="R55b894aba916450b"/>
-    <p:sldId xmlns:r="http://schemas.openxmlformats.org/officeDocument/2006/relationships" id="287" r:id="R012b0d628c8c4cb4"/>
-    <p:sldId xmlns:r="http://schemas.openxmlformats.org/officeDocument/2006/relationships" id="288" r:id="Re6c3073238b941b2"/>
+    <p:sldId xmlns:r="http://schemas.openxmlformats.org/officeDocument/2006/relationships" id="256" r:id="Rd798f5338c0d4ef2"/>
+    <p:sldId xmlns:r="http://schemas.openxmlformats.org/officeDocument/2006/relationships" id="257" r:id="R6972485783a245aa"/>
+    <p:sldId xmlns:r="http://schemas.openxmlformats.org/officeDocument/2006/relationships" id="258" r:id="R33c7d5d41e65445c"/>
+    <p:sldId xmlns:r="http://schemas.openxmlformats.org/officeDocument/2006/relationships" id="259" r:id="R8d0571c088b547cc"/>
+    <p:sldId xmlns:r="http://schemas.openxmlformats.org/officeDocument/2006/relationships" id="260" r:id="R81044cc727a14b9c"/>
+    <p:sldId xmlns:r="http://schemas.openxmlformats.org/officeDocument/2006/relationships" id="261" r:id="R17f88dc88f284105"/>
+    <p:sldId xmlns:r="http://schemas.openxmlformats.org/officeDocument/2006/relationships" id="262" r:id="R2a3b214399fe4871"/>
+    <p:sldId xmlns:r="http://schemas.openxmlformats.org/officeDocument/2006/relationships" id="263" r:id="R791cc6f2f3dc4716"/>
+    <p:sldId xmlns:r="http://schemas.openxmlformats.org/officeDocument/2006/relationships" id="264" r:id="Re171ff6a82ba4613"/>
+    <p:sldId xmlns:r="http://schemas.openxmlformats.org/officeDocument/2006/relationships" id="265" r:id="Rf817574a0b4d422a"/>
+    <p:sldId xmlns:r="http://schemas.openxmlformats.org/officeDocument/2006/relationships" id="266" r:id="R83e9879e983941b5"/>
+    <p:sldId xmlns:r="http://schemas.openxmlformats.org/officeDocument/2006/relationships" id="267" r:id="Rc8890926911e4643"/>
+    <p:sldId xmlns:r="http://schemas.openxmlformats.org/officeDocument/2006/relationships" id="268" r:id="R8b3d5e46b4fa483e"/>
+    <p:sldId xmlns:r="http://schemas.openxmlformats.org/officeDocument/2006/relationships" id="269" r:id="R6b8c9c40f6864b20"/>
+    <p:sldId xmlns:r="http://schemas.openxmlformats.org/officeDocument/2006/relationships" id="270" r:id="Rd17b15e622ed4359"/>
+    <p:sldId xmlns:r="http://schemas.openxmlformats.org/officeDocument/2006/relationships" id="271" r:id="Rd0c705b157e64fb2"/>
+    <p:sldId xmlns:r="http://schemas.openxmlformats.org/officeDocument/2006/relationships" id="272" r:id="R4220ea6ef6ef4a08"/>
+    <p:sldId xmlns:r="http://schemas.openxmlformats.org/officeDocument/2006/relationships" id="273" r:id="Rdca18f9b7af6459b"/>
+    <p:sldId xmlns:r="http://schemas.openxmlformats.org/officeDocument/2006/relationships" id="274" r:id="Rcdf81b754aac4b03"/>
+    <p:sldId xmlns:r="http://schemas.openxmlformats.org/officeDocument/2006/relationships" id="275" r:id="R4bba6ac556de4698"/>
+    <p:sldId xmlns:r="http://schemas.openxmlformats.org/officeDocument/2006/relationships" id="276" r:id="Rb8f080a1d54c4710"/>
+    <p:sldId xmlns:r="http://schemas.openxmlformats.org/officeDocument/2006/relationships" id="277" r:id="R0edd0e3794614a68"/>
+    <p:sldId xmlns:r="http://schemas.openxmlformats.org/officeDocument/2006/relationships" id="278" r:id="Rd8a5b299f3dc43f1"/>
+    <p:sldId xmlns:r="http://schemas.openxmlformats.org/officeDocument/2006/relationships" id="279" r:id="R024e5eab2d9d4034"/>
+    <p:sldId xmlns:r="http://schemas.openxmlformats.org/officeDocument/2006/relationships" id="280" r:id="R1daf1960ac1b42c8"/>
+    <p:sldId xmlns:r="http://schemas.openxmlformats.org/officeDocument/2006/relationships" id="281" r:id="R94fc9cc4eccb4f2a"/>
+    <p:sldId xmlns:r="http://schemas.openxmlformats.org/officeDocument/2006/relationships" id="282" r:id="R1ae9585fc91c4c63"/>
+    <p:sldId xmlns:r="http://schemas.openxmlformats.org/officeDocument/2006/relationships" id="283" r:id="R4de1b93936c249b5"/>
+    <p:sldId xmlns:r="http://schemas.openxmlformats.org/officeDocument/2006/relationships" id="284" r:id="R3e295440e7be476c"/>
+    <p:sldId xmlns:r="http://schemas.openxmlformats.org/officeDocument/2006/relationships" id="285" r:id="R34df2dad114440a2"/>
+    <p:sldId xmlns:r="http://schemas.openxmlformats.org/officeDocument/2006/relationships" id="286" r:id="R240fc0d87df247ae"/>
+    <p:sldId xmlns:r="http://schemas.openxmlformats.org/officeDocument/2006/relationships" id="287" r:id="R18c8f50b92ca48e3"/>
+    <p:sldId xmlns:r="http://schemas.openxmlformats.org/officeDocument/2006/relationships" id="288" r:id="Rbcf86aaca4f6432c"/>
   </p:sldIdLst>
   <p:sldSz cx="12192000" cy="6858000"/>
   <p:notesSz cx="6858000" cy="9144000"/>
@@ -542,6 +542,16 @@
               <a:t/>
             </a:r>
           </a:p>
+          <a:p xmlns:a="http://schemas.openxmlformats.org/drawingml/2006/main">
+            <a:r>
+              <a:t/>
+            </a:r>
+          </a:p>
+          <a:p xmlns:a="http://schemas.openxmlformats.org/drawingml/2006/main">
+            <a:r>
+              <a:t/>
+            </a:r>
+          </a:p>
         </p:txBody>
       </p:sp>
       <p:sp>
@@ -752,6 +762,16 @@
               <a:t/>
             </a:r>
           </a:p>
+          <a:p xmlns:a="http://schemas.openxmlformats.org/drawingml/2006/main">
+            <a:r>
+              <a:t/>
+            </a:r>
+          </a:p>
+          <a:p xmlns:a="http://schemas.openxmlformats.org/drawingml/2006/main">
+            <a:r>
+              <a:t/>
+            </a:r>
+          </a:p>
         </p:txBody>
       </p:sp>
       <p:sp>
@@ -1082,6 +1102,16 @@
               <a:t/>
             </a:r>
           </a:p>
+          <a:p xmlns:a="http://schemas.openxmlformats.org/drawingml/2006/main">
+            <a:r>
+              <a:t/>
+            </a:r>
+          </a:p>
+          <a:p xmlns:a="http://schemas.openxmlformats.org/drawingml/2006/main">
+            <a:r>
+              <a:t/>
+            </a:r>
+          </a:p>
         </p:txBody>
       </p:sp>
       <p:sp>
@@ -1222,6 +1252,16 @@
               <a:t/>
             </a:r>
           </a:p>
+          <a:p xmlns:a="http://schemas.openxmlformats.org/drawingml/2006/main">
+            <a:r>
+              <a:t/>
+            </a:r>
+          </a:p>
+          <a:p xmlns:a="http://schemas.openxmlformats.org/drawingml/2006/main">
+            <a:r>
+              <a:t/>
+            </a:r>
+          </a:p>
         </p:txBody>
       </p:sp>
       <p:sp>
@@ -1377,6 +1417,16 @@
               <a:t/>
             </a:r>
           </a:p>
+          <a:p xmlns:a="http://schemas.openxmlformats.org/drawingml/2006/main">
+            <a:r>
+              <a:t/>
+            </a:r>
+          </a:p>
+          <a:p xmlns:a="http://schemas.openxmlformats.org/drawingml/2006/main">
+            <a:r>
+              <a:t/>
+            </a:r>
+          </a:p>
         </p:txBody>
       </p:sp>
       <p:sp>
@@ -1547,6 +1597,16 @@
               <a:t/>
             </a:r>
           </a:p>
+          <a:p xmlns:a="http://schemas.openxmlformats.org/drawingml/2006/main">
+            <a:r>
+              <a:t/>
+            </a:r>
+          </a:p>
+          <a:p xmlns:a="http://schemas.openxmlformats.org/drawingml/2006/main">
+            <a:r>
+              <a:t/>
+            </a:r>
+          </a:p>
         </p:txBody>
       </p:sp>
       <p:sp>
@@ -1702,6 +1762,16 @@
               <a:t/>
             </a:r>
           </a:p>
+          <a:p xmlns:a="http://schemas.openxmlformats.org/drawingml/2006/main">
+            <a:r>
+              <a:t/>
+            </a:r>
+          </a:p>
+          <a:p xmlns:a="http://schemas.openxmlformats.org/drawingml/2006/main">
+            <a:r>
+              <a:t/>
+            </a:r>
+          </a:p>
         </p:txBody>
       </p:sp>
       <p:sp>
@@ -1827,6 +1897,16 @@
               <a:t/>
             </a:r>
           </a:p>
+          <a:p xmlns:a="http://schemas.openxmlformats.org/drawingml/2006/main">
+            <a:r>
+              <a:t/>
+            </a:r>
+          </a:p>
+          <a:p xmlns:a="http://schemas.openxmlformats.org/drawingml/2006/main">
+            <a:r>
+              <a:t/>
+            </a:r>
+          </a:p>
         </p:txBody>
       </p:sp>
       <p:sp>
@@ -1947,6 +2027,16 @@
               <a:t/>
             </a:r>
           </a:p>
+          <a:p xmlns:a="http://schemas.openxmlformats.org/drawingml/2006/main">
+            <a:r>
+              <a:t/>
+            </a:r>
+          </a:p>
+          <a:p xmlns:a="http://schemas.openxmlformats.org/drawingml/2006/main">
+            <a:r>
+              <a:t/>
+            </a:r>
+          </a:p>
         </p:txBody>
       </p:sp>
       <p:sp>
@@ -2102,6 +2192,16 @@
               <a:t/>
             </a:r>
           </a:p>
+          <a:p xmlns:a="http://schemas.openxmlformats.org/drawingml/2006/main">
+            <a:r>
+              <a:t/>
+            </a:r>
+          </a:p>
+          <a:p xmlns:a="http://schemas.openxmlformats.org/drawingml/2006/main">
+            <a:r>
+              <a:t/>
+            </a:r>
+          </a:p>
         </p:txBody>
       </p:sp>
       <p:sp>
@@ -2382,6 +2482,16 @@
               <a:t/>
             </a:r>
           </a:p>
+          <a:p xmlns:a="http://schemas.openxmlformats.org/drawingml/2006/main">
+            <a:r>
+              <a:t/>
+            </a:r>
+          </a:p>
+          <a:p xmlns:a="http://schemas.openxmlformats.org/drawingml/2006/main">
+            <a:r>
+              <a:t/>
+            </a:r>
+          </a:p>
         </p:txBody>
       </p:sp>
       <p:sp>
@@ -2504,6 +2614,16 @@
           </a:p>
           <a:p xmlns:a="http://schemas.openxmlformats.org/drawingml/2006/main">
             <a:r>
+              <a:t/>
+            </a:r>
+          </a:p>
+          <a:p xmlns:a="http://schemas.openxmlformats.org/drawingml/2006/main">
+            <a:r>
+              <a:t/>
+            </a:r>
+          </a:p>
+          <a:p xmlns:a="http://schemas.openxmlformats.org/drawingml/2006/main">
+            <a:r>
               <a:t>http://ec.europa.eu/growth/single-market/index_en.htm</a:t>
             </a:r>
           </a:p>
@@ -2622,6 +2742,16 @@
               <a:t/>
             </a:r>
           </a:p>
+          <a:p xmlns:a="http://schemas.openxmlformats.org/drawingml/2006/main">
+            <a:r>
+              <a:t/>
+            </a:r>
+          </a:p>
+          <a:p xmlns:a="http://schemas.openxmlformats.org/drawingml/2006/main">
+            <a:r>
+              <a:t/>
+            </a:r>
+          </a:p>
         </p:txBody>
       </p:sp>
       <p:sp>
@@ -2727,6 +2857,16 @@
               <a:t/>
             </a:r>
           </a:p>
+          <a:p xmlns:a="http://schemas.openxmlformats.org/drawingml/2006/main">
+            <a:r>
+              <a:t/>
+            </a:r>
+          </a:p>
+          <a:p xmlns:a="http://schemas.openxmlformats.org/drawingml/2006/main">
+            <a:r>
+              <a:t/>
+            </a:r>
+          </a:p>
         </p:txBody>
       </p:sp>
       <p:sp>
@@ -2832,6 +2972,16 @@
               <a:t/>
             </a:r>
           </a:p>
+          <a:p xmlns:a="http://schemas.openxmlformats.org/drawingml/2006/main">
+            <a:r>
+              <a:t/>
+            </a:r>
+          </a:p>
+          <a:p xmlns:a="http://schemas.openxmlformats.org/drawingml/2006/main">
+            <a:r>
+              <a:t/>
+            </a:r>
+          </a:p>
         </p:txBody>
       </p:sp>
       <p:sp>
@@ -3007,6 +3157,16 @@
               <a:t/>
             </a:r>
           </a:p>
+          <a:p xmlns:a="http://schemas.openxmlformats.org/drawingml/2006/main">
+            <a:r>
+              <a:t/>
+            </a:r>
+          </a:p>
+          <a:p xmlns:a="http://schemas.openxmlformats.org/drawingml/2006/main">
+            <a:r>
+              <a:t/>
+            </a:r>
+          </a:p>
         </p:txBody>
       </p:sp>
       <p:sp>
@@ -3132,6 +3292,16 @@
               <a:t/>
             </a:r>
           </a:p>
+          <a:p xmlns:a="http://schemas.openxmlformats.org/drawingml/2006/main">
+            <a:r>
+              <a:t/>
+            </a:r>
+          </a:p>
+          <a:p xmlns:a="http://schemas.openxmlformats.org/drawingml/2006/main">
+            <a:r>
+              <a:t/>
+            </a:r>
+          </a:p>
         </p:txBody>
       </p:sp>
       <p:sp>
@@ -3287,6 +3457,16 @@
               <a:t/>
             </a:r>
           </a:p>
+          <a:p xmlns:a="http://schemas.openxmlformats.org/drawingml/2006/main">
+            <a:r>
+              <a:t/>
+            </a:r>
+          </a:p>
+          <a:p xmlns:a="http://schemas.openxmlformats.org/drawingml/2006/main">
+            <a:r>
+              <a:t/>
+            </a:r>
+          </a:p>
         </p:txBody>
       </p:sp>
       <p:sp>
@@ -3402,6 +3582,16 @@
               <a:t/>
             </a:r>
           </a:p>
+          <a:p xmlns:a="http://schemas.openxmlformats.org/drawingml/2006/main">
+            <a:r>
+              <a:t/>
+            </a:r>
+          </a:p>
+          <a:p xmlns:a="http://schemas.openxmlformats.org/drawingml/2006/main">
+            <a:r>
+              <a:t/>
+            </a:r>
+          </a:p>
         </p:txBody>
       </p:sp>
       <p:sp>
@@ -3512,6 +3702,16 @@
               <a:t/>
             </a:r>
           </a:p>
+          <a:p xmlns:a="http://schemas.openxmlformats.org/drawingml/2006/main">
+            <a:r>
+              <a:t/>
+            </a:r>
+          </a:p>
+          <a:p xmlns:a="http://schemas.openxmlformats.org/drawingml/2006/main">
+            <a:r>
+              <a:t/>
+            </a:r>
+          </a:p>
         </p:txBody>
       </p:sp>
       <p:sp>
@@ -3614,22 +3814,47 @@
           </a:p>
           <a:p xmlns:a="http://schemas.openxmlformats.org/drawingml/2006/main">
             <a:r>
-              <a:t/>
-            </a:r>
-          </a:p>
-          <a:p xmlns:a="http://schemas.openxmlformats.org/drawingml/2006/main">
-            <a:r>
-              <a:t/>
-            </a:r>
-          </a:p>
-          <a:p xmlns:a="http://schemas.openxmlformats.org/drawingml/2006/main">
-            <a:r>
-              <a:t/>
-            </a:r>
-          </a:p>
-          <a:p xmlns:a="http://schemas.openxmlformats.org/drawingml/2006/main">
-            <a:r>
-              <a:t/>
+              <a:t>Further reading</a:t>
+            </a:r>
+          </a:p>
+          <a:p xmlns:a="http://schemas.openxmlformats.org/drawingml/2006/main">
+            <a:r>
+              <a:t/>
+            </a:r>
+          </a:p>
+          <a:p xmlns:a="http://schemas.openxmlformats.org/drawingml/2006/main">
+            <a:r>
+              <a:t>See the ECON2271 Talis reading list, also available through Blackboard.</a:t>
+            </a:r>
+          </a:p>
+          <a:p xmlns:a="http://schemas.openxmlformats.org/drawingml/2006/main">
+            <a:r>
+              <a:t/>
+            </a:r>
+          </a:p>
+          <a:p xmlns:a="http://schemas.openxmlformats.org/drawingml/2006/main">
+            <a:r>
+              <a:t/>
+            </a:r>
+          </a:p>
+          <a:p xmlns:a="http://schemas.openxmlformats.org/drawingml/2006/main">
+            <a:r>
+              <a:t/>
+            </a:r>
+          </a:p>
+          <a:p xmlns:a="http://schemas.openxmlformats.org/drawingml/2006/main">
+            <a:r>
+              <a:t/>
+            </a:r>
+          </a:p>
+          <a:p xmlns:a="http://schemas.openxmlformats.org/drawingml/2006/main">
+            <a:r>
+              <a:t/>
+            </a:r>
+          </a:p>
+          <a:p xmlns:a="http://schemas.openxmlformats.org/drawingml/2006/main">
+            <a:r>
+              <a:t>https://durham.rl.talis.com/lists/d85d1ad3-e9ac-4daf-aa66-e3ddfcf902d7.html</a:t>
             </a:r>
           </a:p>
         </p:txBody>
@@ -4212,6 +4437,16 @@
               <a:t/>
             </a:r>
           </a:p>
+          <a:p xmlns:a="http://schemas.openxmlformats.org/drawingml/2006/main">
+            <a:r>
+              <a:t/>
+            </a:r>
+          </a:p>
+          <a:p xmlns:a="http://schemas.openxmlformats.org/drawingml/2006/main">
+            <a:r>
+              <a:t/>
+            </a:r>
+          </a:p>
         </p:txBody>
       </p:sp>
       <p:sp>
@@ -4357,6 +4592,16 @@
               <a:t/>
             </a:r>
           </a:p>
+          <a:p xmlns:a="http://schemas.openxmlformats.org/drawingml/2006/main">
+            <a:r>
+              <a:t/>
+            </a:r>
+          </a:p>
+          <a:p xmlns:a="http://schemas.openxmlformats.org/drawingml/2006/main">
+            <a:r>
+              <a:t/>
+            </a:r>
+          </a:p>
         </p:txBody>
       </p:sp>
       <p:sp>
@@ -4797,6 +5042,16 @@
               <a:t/>
             </a:r>
           </a:p>
+          <a:p xmlns:a="http://schemas.openxmlformats.org/drawingml/2006/main">
+            <a:r>
+              <a:t/>
+            </a:r>
+          </a:p>
+          <a:p xmlns:a="http://schemas.openxmlformats.org/drawingml/2006/main">
+            <a:r>
+              <a:t/>
+            </a:r>
+          </a:p>
         </p:txBody>
       </p:sp>
       <p:sp>
@@ -5037,6 +5292,16 @@
               <a:t/>
             </a:r>
           </a:p>
+          <a:p xmlns:a="http://schemas.openxmlformats.org/drawingml/2006/main">
+            <a:r>
+              <a:t/>
+            </a:r>
+          </a:p>
+          <a:p xmlns:a="http://schemas.openxmlformats.org/drawingml/2006/main">
+            <a:r>
+              <a:t/>
+            </a:r>
+          </a:p>
         </p:txBody>
       </p:sp>
       <p:sp>
@@ -5337,6 +5602,16 @@
               <a:t/>
             </a:r>
           </a:p>
+          <a:p xmlns:a="http://schemas.openxmlformats.org/drawingml/2006/main">
+            <a:r>
+              <a:t/>
+            </a:r>
+          </a:p>
+          <a:p xmlns:a="http://schemas.openxmlformats.org/drawingml/2006/main">
+            <a:r>
+              <a:t/>
+            </a:r>
+          </a:p>
         </p:txBody>
       </p:sp>
       <p:sp>
@@ -5577,6 +5852,16 @@
               <a:t/>
             </a:r>
           </a:p>
+          <a:p xmlns:a="http://schemas.openxmlformats.org/drawingml/2006/main">
+            <a:r>
+              <a:t/>
+            </a:r>
+          </a:p>
+          <a:p xmlns:a="http://schemas.openxmlformats.org/drawingml/2006/main">
+            <a:r>
+              <a:t/>
+            </a:r>
+          </a:p>
         </p:txBody>
       </p:sp>
       <p:sp>
@@ -5732,6 +6017,16 @@
               <a:t/>
             </a:r>
           </a:p>
+          <a:p xmlns:a="http://schemas.openxmlformats.org/drawingml/2006/main">
+            <a:r>
+              <a:t/>
+            </a:r>
+          </a:p>
+          <a:p xmlns:a="http://schemas.openxmlformats.org/drawingml/2006/main">
+            <a:r>
+              <a:t/>
+            </a:r>
+          </a:p>
         </p:txBody>
       </p:sp>
       <p:sp>
@@ -6122,6 +6417,16 @@
               <a:t/>
             </a:r>
           </a:p>
+          <a:p xmlns:a="http://schemas.openxmlformats.org/drawingml/2006/main">
+            <a:r>
+              <a:t/>
+            </a:r>
+          </a:p>
+          <a:p xmlns:a="http://schemas.openxmlformats.org/drawingml/2006/main">
+            <a:r>
+              <a:t/>
+            </a:r>
+          </a:p>
         </p:txBody>
       </p:sp>
       <p:sp>
@@ -6452,6 +6757,16 @@
               <a:t/>
             </a:r>
           </a:p>
+          <a:p xmlns:a="http://schemas.openxmlformats.org/drawingml/2006/main">
+            <a:r>
+              <a:t/>
+            </a:r>
+          </a:p>
+          <a:p xmlns:a="http://schemas.openxmlformats.org/drawingml/2006/main">
+            <a:r>
+              <a:t/>
+            </a:r>
+          </a:p>
         </p:txBody>
       </p:sp>
       <p:sp>
@@ -6887,6 +7202,16 @@
               <a:t/>
             </a:r>
           </a:p>
+          <a:p xmlns:a="http://schemas.openxmlformats.org/drawingml/2006/main">
+            <a:r>
+              <a:t/>
+            </a:r>
+          </a:p>
+          <a:p xmlns:a="http://schemas.openxmlformats.org/drawingml/2006/main">
+            <a:r>
+              <a:t/>
+            </a:r>
+          </a:p>
         </p:txBody>
       </p:sp>
       <p:sp>
@@ -7417,6 +7742,16 @@
               <a:t/>
             </a:r>
           </a:p>
+          <a:p xmlns:a="http://schemas.openxmlformats.org/drawingml/2006/main">
+            <a:r>
+              <a:t/>
+            </a:r>
+          </a:p>
+          <a:p xmlns:a="http://schemas.openxmlformats.org/drawingml/2006/main">
+            <a:r>
+              <a:t/>
+            </a:r>
+          </a:p>
         </p:txBody>
       </p:sp>
       <p:sp>
@@ -7645,6 +7980,16 @@
           <a:p xmlns:a="http://schemas.openxmlformats.org/drawingml/2006/main">
             <a:r>
               <a:t>.</a:t>
+            </a:r>
+          </a:p>
+          <a:p xmlns:a="http://schemas.openxmlformats.org/drawingml/2006/main">
+            <a:r>
+              <a:t/>
+            </a:r>
+          </a:p>
+          <a:p xmlns:a="http://schemas.openxmlformats.org/drawingml/2006/main">
+            <a:r>
+              <a:t/>
             </a:r>
           </a:p>
           <a:p xmlns:a="http://schemas.openxmlformats.org/drawingml/2006/main">
@@ -7732,7 +8077,7 @@
   </p:cSld>
   <p:clrMap bg1="lt1" tx1="dk1" bg2="lt2" tx2="dk2" accent1="accent1" accent2="accent2" accent3="accent3" accent4="accent4" accent5="accent5" accent6="accent6" hlink="hlink" folHlink="folHlink"/>
   <p:sldLayoutIdLst>
-    <p:sldLayoutId xmlns:r="http://schemas.openxmlformats.org/officeDocument/2006/relationships" id="2147483649" r:id="Rc37e0843cd1b4a47"/>
+    <p:sldLayoutId xmlns:r="http://schemas.openxmlformats.org/officeDocument/2006/relationships" id="2147483649" r:id="R75792c08f3f64e2c"/>
   </p:sldLayoutIdLst>
   <p:txStyles>
     <p:titleStyle>
@@ -8280,7 +8625,7 @@
           <p:nvPr/>
         </p:nvPicPr>
         <p:blipFill>
-          <a:blip xmlns:r="http://schemas.openxmlformats.org/officeDocument/2006/relationships" xmlns:a="http://schemas.openxmlformats.org/drawingml/2006/main" r:embed="Rb52877ec862a4970"/>
+          <a:blip xmlns:r="http://schemas.openxmlformats.org/officeDocument/2006/relationships" xmlns:a="http://schemas.openxmlformats.org/drawingml/2006/main" r:embed="Rba56e97a7a4d41b5"/>
           <a:stretch xmlns:a="http://schemas.openxmlformats.org/drawingml/2006/main"/>
         </p:blipFill>
         <p:spPr>
@@ -8296,7 +8641,7 @@
     </p:spTree>
     <p:extLst>
       <p:ext uri="{BB962C8B-B14F-4D97-AF65-F5344CB8AC3E}">
-        <p14:creationId xmlns:p14="http://schemas.microsoft.com/office/powerpoint/2010/main" val="370701204"/>
+        <p14:creationId xmlns:p14="http://schemas.microsoft.com/office/powerpoint/2010/main" val="1662890969"/>
       </p:ext>
     </p:extLst>
   </p:cSld>
@@ -8324,7 +8669,7 @@
           <p:nvPr/>
         </p:nvPicPr>
         <p:blipFill>
-          <a:blip xmlns:r="http://schemas.openxmlformats.org/officeDocument/2006/relationships" xmlns:a="http://schemas.openxmlformats.org/drawingml/2006/main" r:embed="R591bdaec027a4719"/>
+          <a:blip xmlns:r="http://schemas.openxmlformats.org/officeDocument/2006/relationships" xmlns:a="http://schemas.openxmlformats.org/drawingml/2006/main" r:embed="R06f30ab5644f43ac"/>
           <a:stretch xmlns:a="http://schemas.openxmlformats.org/drawingml/2006/main"/>
         </p:blipFill>
         <p:spPr>
@@ -8340,7 +8685,7 @@
     </p:spTree>
     <p:extLst>
       <p:ext uri="{BB962C8B-B14F-4D97-AF65-F5344CB8AC3E}">
-        <p14:creationId xmlns:p14="http://schemas.microsoft.com/office/powerpoint/2010/main" val="1996075133"/>
+        <p14:creationId xmlns:p14="http://schemas.microsoft.com/office/powerpoint/2010/main" val="2078517437"/>
       </p:ext>
     </p:extLst>
   </p:cSld>
@@ -8368,7 +8713,7 @@
           <p:nvPr/>
         </p:nvPicPr>
         <p:blipFill>
-          <a:blip xmlns:r="http://schemas.openxmlformats.org/officeDocument/2006/relationships" xmlns:a="http://schemas.openxmlformats.org/drawingml/2006/main" r:embed="Ref6e87b0f4134ec4"/>
+          <a:blip xmlns:r="http://schemas.openxmlformats.org/officeDocument/2006/relationships" xmlns:a="http://schemas.openxmlformats.org/drawingml/2006/main" r:embed="Ra2e42f6a77b44468"/>
           <a:stretch xmlns:a="http://schemas.openxmlformats.org/drawingml/2006/main"/>
         </p:blipFill>
         <p:spPr>
@@ -8384,7 +8729,7 @@
     </p:spTree>
     <p:extLst>
       <p:ext uri="{BB962C8B-B14F-4D97-AF65-F5344CB8AC3E}">
-        <p14:creationId xmlns:p14="http://schemas.microsoft.com/office/powerpoint/2010/main" val="585482766"/>
+        <p14:creationId xmlns:p14="http://schemas.microsoft.com/office/powerpoint/2010/main" val="1788212323"/>
       </p:ext>
     </p:extLst>
   </p:cSld>
@@ -8412,7 +8757,7 @@
           <p:nvPr/>
         </p:nvPicPr>
         <p:blipFill>
-          <a:blip xmlns:r="http://schemas.openxmlformats.org/officeDocument/2006/relationships" xmlns:a="http://schemas.openxmlformats.org/drawingml/2006/main" r:embed="R78d229a9a2a645ca"/>
+          <a:blip xmlns:r="http://schemas.openxmlformats.org/officeDocument/2006/relationships" xmlns:a="http://schemas.openxmlformats.org/drawingml/2006/main" r:embed="Rbfb8227ffae34fe9"/>
           <a:stretch xmlns:a="http://schemas.openxmlformats.org/drawingml/2006/main"/>
         </p:blipFill>
         <p:spPr>
@@ -8428,7 +8773,7 @@
     </p:spTree>
     <p:extLst>
       <p:ext uri="{BB962C8B-B14F-4D97-AF65-F5344CB8AC3E}">
-        <p14:creationId xmlns:p14="http://schemas.microsoft.com/office/powerpoint/2010/main" val="1180562211"/>
+        <p14:creationId xmlns:p14="http://schemas.microsoft.com/office/powerpoint/2010/main" val="1349628545"/>
       </p:ext>
     </p:extLst>
   </p:cSld>
@@ -8456,7 +8801,7 @@
           <p:nvPr/>
         </p:nvPicPr>
         <p:blipFill>
-          <a:blip xmlns:r="http://schemas.openxmlformats.org/officeDocument/2006/relationships" xmlns:a="http://schemas.openxmlformats.org/drawingml/2006/main" r:embed="Rb32fd6375bc84b8c"/>
+          <a:blip xmlns:r="http://schemas.openxmlformats.org/officeDocument/2006/relationships" xmlns:a="http://schemas.openxmlformats.org/drawingml/2006/main" r:embed="R16e8af2b240b492d"/>
           <a:stretch xmlns:a="http://schemas.openxmlformats.org/drawingml/2006/main"/>
         </p:blipFill>
         <p:spPr>
@@ -8472,7 +8817,7 @@
     </p:spTree>
     <p:extLst>
       <p:ext uri="{BB962C8B-B14F-4D97-AF65-F5344CB8AC3E}">
-        <p14:creationId xmlns:p14="http://schemas.microsoft.com/office/powerpoint/2010/main" val="1899735850"/>
+        <p14:creationId xmlns:p14="http://schemas.microsoft.com/office/powerpoint/2010/main" val="402614106"/>
       </p:ext>
     </p:extLst>
   </p:cSld>
@@ -8500,7 +8845,7 @@
           <p:nvPr/>
         </p:nvPicPr>
         <p:blipFill>
-          <a:blip xmlns:r="http://schemas.openxmlformats.org/officeDocument/2006/relationships" xmlns:a="http://schemas.openxmlformats.org/drawingml/2006/main" r:embed="R90928f246a094786"/>
+          <a:blip xmlns:r="http://schemas.openxmlformats.org/officeDocument/2006/relationships" xmlns:a="http://schemas.openxmlformats.org/drawingml/2006/main" r:embed="R8dc91b2997c94e0b"/>
           <a:stretch xmlns:a="http://schemas.openxmlformats.org/drawingml/2006/main"/>
         </p:blipFill>
         <p:spPr>
@@ -8516,7 +8861,7 @@
     </p:spTree>
     <p:extLst>
       <p:ext uri="{BB962C8B-B14F-4D97-AF65-F5344CB8AC3E}">
-        <p14:creationId xmlns:p14="http://schemas.microsoft.com/office/powerpoint/2010/main" val="1207729632"/>
+        <p14:creationId xmlns:p14="http://schemas.microsoft.com/office/powerpoint/2010/main" val="2035730044"/>
       </p:ext>
     </p:extLst>
   </p:cSld>
@@ -8544,7 +8889,7 @@
           <p:nvPr/>
         </p:nvPicPr>
         <p:blipFill>
-          <a:blip xmlns:r="http://schemas.openxmlformats.org/officeDocument/2006/relationships" xmlns:a="http://schemas.openxmlformats.org/drawingml/2006/main" r:embed="R2b3978d00e014c61"/>
+          <a:blip xmlns:r="http://schemas.openxmlformats.org/officeDocument/2006/relationships" xmlns:a="http://schemas.openxmlformats.org/drawingml/2006/main" r:embed="R39eb5bb2c1584304"/>
           <a:stretch xmlns:a="http://schemas.openxmlformats.org/drawingml/2006/main"/>
         </p:blipFill>
         <p:spPr>
@@ -8560,7 +8905,7 @@
     </p:spTree>
     <p:extLst>
       <p:ext uri="{BB962C8B-B14F-4D97-AF65-F5344CB8AC3E}">
-        <p14:creationId xmlns:p14="http://schemas.microsoft.com/office/powerpoint/2010/main" val="939022850"/>
+        <p14:creationId xmlns:p14="http://schemas.microsoft.com/office/powerpoint/2010/main" val="1113561433"/>
       </p:ext>
     </p:extLst>
   </p:cSld>
@@ -8588,7 +8933,7 @@
           <p:nvPr/>
         </p:nvPicPr>
         <p:blipFill>
-          <a:blip xmlns:r="http://schemas.openxmlformats.org/officeDocument/2006/relationships" xmlns:a="http://schemas.openxmlformats.org/drawingml/2006/main" r:embed="R38022e04d652425e"/>
+          <a:blip xmlns:r="http://schemas.openxmlformats.org/officeDocument/2006/relationships" xmlns:a="http://schemas.openxmlformats.org/drawingml/2006/main" r:embed="R4cef3f121a154ee3"/>
           <a:stretch xmlns:a="http://schemas.openxmlformats.org/drawingml/2006/main"/>
         </p:blipFill>
         <p:spPr>
@@ -8604,7 +8949,7 @@
     </p:spTree>
     <p:extLst>
       <p:ext uri="{BB962C8B-B14F-4D97-AF65-F5344CB8AC3E}">
-        <p14:creationId xmlns:p14="http://schemas.microsoft.com/office/powerpoint/2010/main" val="1290634873"/>
+        <p14:creationId xmlns:p14="http://schemas.microsoft.com/office/powerpoint/2010/main" val="1376133841"/>
       </p:ext>
     </p:extLst>
   </p:cSld>
@@ -8632,7 +8977,7 @@
           <p:nvPr/>
         </p:nvPicPr>
         <p:blipFill>
-          <a:blip xmlns:r="http://schemas.openxmlformats.org/officeDocument/2006/relationships" xmlns:a="http://schemas.openxmlformats.org/drawingml/2006/main" r:embed="R6e227a2908cd4ed0"/>
+          <a:blip xmlns:r="http://schemas.openxmlformats.org/officeDocument/2006/relationships" xmlns:a="http://schemas.openxmlformats.org/drawingml/2006/main" r:embed="Rd58df68026304ff3"/>
           <a:stretch xmlns:a="http://schemas.openxmlformats.org/drawingml/2006/main"/>
         </p:blipFill>
         <p:spPr>
@@ -8648,7 +8993,7 @@
     </p:spTree>
     <p:extLst>
       <p:ext uri="{BB962C8B-B14F-4D97-AF65-F5344CB8AC3E}">
-        <p14:creationId xmlns:p14="http://schemas.microsoft.com/office/powerpoint/2010/main" val="919906203"/>
+        <p14:creationId xmlns:p14="http://schemas.microsoft.com/office/powerpoint/2010/main" val="985445461"/>
       </p:ext>
     </p:extLst>
   </p:cSld>
@@ -8676,7 +9021,7 @@
           <p:nvPr/>
         </p:nvPicPr>
         <p:blipFill>
-          <a:blip xmlns:r="http://schemas.openxmlformats.org/officeDocument/2006/relationships" xmlns:a="http://schemas.openxmlformats.org/drawingml/2006/main" r:embed="R238907262cc14b08"/>
+          <a:blip xmlns:r="http://schemas.openxmlformats.org/officeDocument/2006/relationships" xmlns:a="http://schemas.openxmlformats.org/drawingml/2006/main" r:embed="R0db5a94067a84aa3"/>
           <a:stretch xmlns:a="http://schemas.openxmlformats.org/drawingml/2006/main"/>
         </p:blipFill>
         <p:spPr>
@@ -8692,7 +9037,7 @@
     </p:spTree>
     <p:extLst>
       <p:ext uri="{BB962C8B-B14F-4D97-AF65-F5344CB8AC3E}">
-        <p14:creationId xmlns:p14="http://schemas.microsoft.com/office/powerpoint/2010/main" val="1630530357"/>
+        <p14:creationId xmlns:p14="http://schemas.microsoft.com/office/powerpoint/2010/main" val="11011792"/>
       </p:ext>
     </p:extLst>
   </p:cSld>
@@ -8720,7 +9065,7 @@
           <p:nvPr/>
         </p:nvPicPr>
         <p:blipFill>
-          <a:blip xmlns:r="http://schemas.openxmlformats.org/officeDocument/2006/relationships" xmlns:a="http://schemas.openxmlformats.org/drawingml/2006/main" r:embed="R470329dc294e41aa"/>
+          <a:blip xmlns:r="http://schemas.openxmlformats.org/officeDocument/2006/relationships" xmlns:a="http://schemas.openxmlformats.org/drawingml/2006/main" r:embed="Rbca616a603814522"/>
           <a:stretch xmlns:a="http://schemas.openxmlformats.org/drawingml/2006/main"/>
         </p:blipFill>
         <p:spPr>
@@ -8736,7 +9081,7 @@
     </p:spTree>
     <p:extLst>
       <p:ext uri="{BB962C8B-B14F-4D97-AF65-F5344CB8AC3E}">
-        <p14:creationId xmlns:p14="http://schemas.microsoft.com/office/powerpoint/2010/main" val="335845767"/>
+        <p14:creationId xmlns:p14="http://schemas.microsoft.com/office/powerpoint/2010/main" val="330837843"/>
       </p:ext>
     </p:extLst>
   </p:cSld>
@@ -8764,7 +9109,7 @@
           <p:nvPr/>
         </p:nvPicPr>
         <p:blipFill>
-          <a:blip xmlns:r="http://schemas.openxmlformats.org/officeDocument/2006/relationships" xmlns:a="http://schemas.openxmlformats.org/drawingml/2006/main" r:embed="Rd531a364d621492a"/>
+          <a:blip xmlns:r="http://schemas.openxmlformats.org/officeDocument/2006/relationships" xmlns:a="http://schemas.openxmlformats.org/drawingml/2006/main" r:embed="Rebbce6b88bc84748"/>
           <a:stretch xmlns:a="http://schemas.openxmlformats.org/drawingml/2006/main"/>
         </p:blipFill>
         <p:spPr>
@@ -8780,7 +9125,7 @@
     </p:spTree>
     <p:extLst>
       <p:ext uri="{BB962C8B-B14F-4D97-AF65-F5344CB8AC3E}">
-        <p14:creationId xmlns:p14="http://schemas.microsoft.com/office/powerpoint/2010/main" val="2085293945"/>
+        <p14:creationId xmlns:p14="http://schemas.microsoft.com/office/powerpoint/2010/main" val="2120886581"/>
       </p:ext>
     </p:extLst>
   </p:cSld>
@@ -8808,7 +9153,7 @@
           <p:nvPr/>
         </p:nvPicPr>
         <p:blipFill>
-          <a:blip xmlns:r="http://schemas.openxmlformats.org/officeDocument/2006/relationships" xmlns:a="http://schemas.openxmlformats.org/drawingml/2006/main" r:embed="R4373be3dffc84309"/>
+          <a:blip xmlns:r="http://schemas.openxmlformats.org/officeDocument/2006/relationships" xmlns:a="http://schemas.openxmlformats.org/drawingml/2006/main" r:embed="R49131bdf42fc4dd1"/>
           <a:stretch xmlns:a="http://schemas.openxmlformats.org/drawingml/2006/main"/>
         </p:blipFill>
         <p:spPr>
@@ -8824,7 +9169,7 @@
     </p:spTree>
     <p:extLst>
       <p:ext uri="{BB962C8B-B14F-4D97-AF65-F5344CB8AC3E}">
-        <p14:creationId xmlns:p14="http://schemas.microsoft.com/office/powerpoint/2010/main" val="1450990150"/>
+        <p14:creationId xmlns:p14="http://schemas.microsoft.com/office/powerpoint/2010/main" val="2110653148"/>
       </p:ext>
     </p:extLst>
   </p:cSld>
@@ -8852,7 +9197,7 @@
           <p:nvPr/>
         </p:nvPicPr>
         <p:blipFill>
-          <a:blip xmlns:r="http://schemas.openxmlformats.org/officeDocument/2006/relationships" xmlns:a="http://schemas.openxmlformats.org/drawingml/2006/main" r:embed="R36c0b37bcd63450f"/>
+          <a:blip xmlns:r="http://schemas.openxmlformats.org/officeDocument/2006/relationships" xmlns:a="http://schemas.openxmlformats.org/drawingml/2006/main" r:embed="Rcde70aa956c64f19"/>
           <a:stretch xmlns:a="http://schemas.openxmlformats.org/drawingml/2006/main"/>
         </p:blipFill>
         <p:spPr>
@@ -8868,7 +9213,7 @@
     </p:spTree>
     <p:extLst>
       <p:ext uri="{BB962C8B-B14F-4D97-AF65-F5344CB8AC3E}">
-        <p14:creationId xmlns:p14="http://schemas.microsoft.com/office/powerpoint/2010/main" val="1367498535"/>
+        <p14:creationId xmlns:p14="http://schemas.microsoft.com/office/powerpoint/2010/main" val="1122562648"/>
       </p:ext>
     </p:extLst>
   </p:cSld>
@@ -8896,7 +9241,7 @@
           <p:nvPr/>
         </p:nvPicPr>
         <p:blipFill>
-          <a:blip xmlns:r="http://schemas.openxmlformats.org/officeDocument/2006/relationships" xmlns:a="http://schemas.openxmlformats.org/drawingml/2006/main" r:embed="R9358140831bf4127"/>
+          <a:blip xmlns:r="http://schemas.openxmlformats.org/officeDocument/2006/relationships" xmlns:a="http://schemas.openxmlformats.org/drawingml/2006/main" r:embed="R79baf655a5bc4118"/>
           <a:stretch xmlns:a="http://schemas.openxmlformats.org/drawingml/2006/main"/>
         </p:blipFill>
         <p:spPr>
@@ -8912,7 +9257,7 @@
     </p:spTree>
     <p:extLst>
       <p:ext uri="{BB962C8B-B14F-4D97-AF65-F5344CB8AC3E}">
-        <p14:creationId xmlns:p14="http://schemas.microsoft.com/office/powerpoint/2010/main" val="600129608"/>
+        <p14:creationId xmlns:p14="http://schemas.microsoft.com/office/powerpoint/2010/main" val="1616542398"/>
       </p:ext>
     </p:extLst>
   </p:cSld>
@@ -8940,7 +9285,7 @@
           <p:nvPr/>
         </p:nvPicPr>
         <p:blipFill>
-          <a:blip xmlns:r="http://schemas.openxmlformats.org/officeDocument/2006/relationships" xmlns:a="http://schemas.openxmlformats.org/drawingml/2006/main" r:embed="R5a87e78bf18549c6"/>
+          <a:blip xmlns:r="http://schemas.openxmlformats.org/officeDocument/2006/relationships" xmlns:a="http://schemas.openxmlformats.org/drawingml/2006/main" r:embed="Rce1734cf33754457"/>
           <a:stretch xmlns:a="http://schemas.openxmlformats.org/drawingml/2006/main"/>
         </p:blipFill>
         <p:spPr>
@@ -8956,7 +9301,7 @@
     </p:spTree>
     <p:extLst>
       <p:ext uri="{BB962C8B-B14F-4D97-AF65-F5344CB8AC3E}">
-        <p14:creationId xmlns:p14="http://schemas.microsoft.com/office/powerpoint/2010/main" val="1308779639"/>
+        <p14:creationId xmlns:p14="http://schemas.microsoft.com/office/powerpoint/2010/main" val="751632924"/>
       </p:ext>
     </p:extLst>
   </p:cSld>
@@ -8984,7 +9329,7 @@
           <p:nvPr/>
         </p:nvPicPr>
         <p:blipFill>
-          <a:blip xmlns:r="http://schemas.openxmlformats.org/officeDocument/2006/relationships" xmlns:a="http://schemas.openxmlformats.org/drawingml/2006/main" r:embed="R5ff9800f401e4f7b"/>
+          <a:blip xmlns:r="http://schemas.openxmlformats.org/officeDocument/2006/relationships" xmlns:a="http://schemas.openxmlformats.org/drawingml/2006/main" r:embed="R6f40e0832e804b70"/>
           <a:stretch xmlns:a="http://schemas.openxmlformats.org/drawingml/2006/main"/>
         </p:blipFill>
         <p:spPr>
@@ -9000,7 +9345,7 @@
     </p:spTree>
     <p:extLst>
       <p:ext uri="{BB962C8B-B14F-4D97-AF65-F5344CB8AC3E}">
-        <p14:creationId xmlns:p14="http://schemas.microsoft.com/office/powerpoint/2010/main" val="731499148"/>
+        <p14:creationId xmlns:p14="http://schemas.microsoft.com/office/powerpoint/2010/main" val="1320830979"/>
       </p:ext>
     </p:extLst>
   </p:cSld>
@@ -9028,7 +9373,7 @@
           <p:nvPr/>
         </p:nvPicPr>
         <p:blipFill>
-          <a:blip xmlns:r="http://schemas.openxmlformats.org/officeDocument/2006/relationships" xmlns:a="http://schemas.openxmlformats.org/drawingml/2006/main" r:embed="Ra7270d45f4374608"/>
+          <a:blip xmlns:r="http://schemas.openxmlformats.org/officeDocument/2006/relationships" xmlns:a="http://schemas.openxmlformats.org/drawingml/2006/main" r:embed="R5c6ae395fc7542b0"/>
           <a:stretch xmlns:a="http://schemas.openxmlformats.org/drawingml/2006/main"/>
         </p:blipFill>
         <p:spPr>
@@ -9044,7 +9389,7 @@
     </p:spTree>
     <p:extLst>
       <p:ext uri="{BB962C8B-B14F-4D97-AF65-F5344CB8AC3E}">
-        <p14:creationId xmlns:p14="http://schemas.microsoft.com/office/powerpoint/2010/main" val="254129109"/>
+        <p14:creationId xmlns:p14="http://schemas.microsoft.com/office/powerpoint/2010/main" val="1123750720"/>
       </p:ext>
     </p:extLst>
   </p:cSld>
@@ -9072,7 +9417,7 @@
           <p:nvPr/>
         </p:nvPicPr>
         <p:blipFill>
-          <a:blip xmlns:r="http://schemas.openxmlformats.org/officeDocument/2006/relationships" xmlns:a="http://schemas.openxmlformats.org/drawingml/2006/main" r:embed="Rf3644d9c940941b3"/>
+          <a:blip xmlns:r="http://schemas.openxmlformats.org/officeDocument/2006/relationships" xmlns:a="http://schemas.openxmlformats.org/drawingml/2006/main" r:embed="R066fa1d7a6e8412f"/>
           <a:stretch xmlns:a="http://schemas.openxmlformats.org/drawingml/2006/main"/>
         </p:blipFill>
         <p:spPr>
@@ -9088,7 +9433,7 @@
     </p:spTree>
     <p:extLst>
       <p:ext uri="{BB962C8B-B14F-4D97-AF65-F5344CB8AC3E}">
-        <p14:creationId xmlns:p14="http://schemas.microsoft.com/office/powerpoint/2010/main" val="1228975067"/>
+        <p14:creationId xmlns:p14="http://schemas.microsoft.com/office/powerpoint/2010/main" val="1662950621"/>
       </p:ext>
     </p:extLst>
   </p:cSld>
@@ -9116,7 +9461,7 @@
           <p:nvPr/>
         </p:nvPicPr>
         <p:blipFill>
-          <a:blip xmlns:r="http://schemas.openxmlformats.org/officeDocument/2006/relationships" xmlns:a="http://schemas.openxmlformats.org/drawingml/2006/main" r:embed="Rba5c82da91a94cfb"/>
+          <a:blip xmlns:r="http://schemas.openxmlformats.org/officeDocument/2006/relationships" xmlns:a="http://schemas.openxmlformats.org/drawingml/2006/main" r:embed="Rc7b0377c09d94017"/>
           <a:stretch xmlns:a="http://schemas.openxmlformats.org/drawingml/2006/main"/>
         </p:blipFill>
         <p:spPr>
@@ -9132,7 +9477,7 @@
     </p:spTree>
     <p:extLst>
       <p:ext uri="{BB962C8B-B14F-4D97-AF65-F5344CB8AC3E}">
-        <p14:creationId xmlns:p14="http://schemas.microsoft.com/office/powerpoint/2010/main" val="1928232874"/>
+        <p14:creationId xmlns:p14="http://schemas.microsoft.com/office/powerpoint/2010/main" val="236058719"/>
       </p:ext>
     </p:extLst>
   </p:cSld>
@@ -9160,7 +9505,7 @@
           <p:nvPr/>
         </p:nvPicPr>
         <p:blipFill>
-          <a:blip xmlns:r="http://schemas.openxmlformats.org/officeDocument/2006/relationships" xmlns:a="http://schemas.openxmlformats.org/drawingml/2006/main" r:embed="R99abb037d4b94486"/>
+          <a:blip xmlns:r="http://schemas.openxmlformats.org/officeDocument/2006/relationships" xmlns:a="http://schemas.openxmlformats.org/drawingml/2006/main" r:embed="Rd6c0358b128b4195"/>
           <a:stretch xmlns:a="http://schemas.openxmlformats.org/drawingml/2006/main"/>
         </p:blipFill>
         <p:spPr>
@@ -9176,7 +9521,7 @@
     </p:spTree>
     <p:extLst>
       <p:ext uri="{BB962C8B-B14F-4D97-AF65-F5344CB8AC3E}">
-        <p14:creationId xmlns:p14="http://schemas.microsoft.com/office/powerpoint/2010/main" val="1831376672"/>
+        <p14:creationId xmlns:p14="http://schemas.microsoft.com/office/powerpoint/2010/main" val="98544337"/>
       </p:ext>
     </p:extLst>
   </p:cSld>
@@ -9204,7 +9549,7 @@
           <p:nvPr/>
         </p:nvPicPr>
         <p:blipFill>
-          <a:blip xmlns:r="http://schemas.openxmlformats.org/officeDocument/2006/relationships" xmlns:a="http://schemas.openxmlformats.org/drawingml/2006/main" r:embed="R0161a5b3c9774f5f"/>
+          <a:blip xmlns:r="http://schemas.openxmlformats.org/officeDocument/2006/relationships" xmlns:a="http://schemas.openxmlformats.org/drawingml/2006/main" r:embed="Rd2bb7881c7ef44a7"/>
           <a:stretch xmlns:a="http://schemas.openxmlformats.org/drawingml/2006/main"/>
         </p:blipFill>
         <p:spPr>
@@ -9220,7 +9565,7 @@
     </p:spTree>
     <p:extLst>
       <p:ext uri="{BB962C8B-B14F-4D97-AF65-F5344CB8AC3E}">
-        <p14:creationId xmlns:p14="http://schemas.microsoft.com/office/powerpoint/2010/main" val="842818907"/>
+        <p14:creationId xmlns:p14="http://schemas.microsoft.com/office/powerpoint/2010/main" val="1866262473"/>
       </p:ext>
     </p:extLst>
   </p:cSld>
@@ -9248,7 +9593,7 @@
           <p:nvPr/>
         </p:nvPicPr>
         <p:blipFill>
-          <a:blip xmlns:r="http://schemas.openxmlformats.org/officeDocument/2006/relationships" xmlns:a="http://schemas.openxmlformats.org/drawingml/2006/main" r:embed="Rcc79efded9784ee1"/>
+          <a:blip xmlns:r="http://schemas.openxmlformats.org/officeDocument/2006/relationships" xmlns:a="http://schemas.openxmlformats.org/drawingml/2006/main" r:embed="R925afe37d28c425d"/>
           <a:stretch xmlns:a="http://schemas.openxmlformats.org/drawingml/2006/main"/>
         </p:blipFill>
         <p:spPr>
@@ -9264,7 +9609,7 @@
     </p:spTree>
     <p:extLst>
       <p:ext uri="{BB962C8B-B14F-4D97-AF65-F5344CB8AC3E}">
-        <p14:creationId xmlns:p14="http://schemas.microsoft.com/office/powerpoint/2010/main" val="98919391"/>
+        <p14:creationId xmlns:p14="http://schemas.microsoft.com/office/powerpoint/2010/main" val="169502510"/>
       </p:ext>
     </p:extLst>
   </p:cSld>
@@ -9292,7 +9637,7 @@
           <p:nvPr/>
         </p:nvPicPr>
         <p:blipFill>
-          <a:blip xmlns:r="http://schemas.openxmlformats.org/officeDocument/2006/relationships" xmlns:a="http://schemas.openxmlformats.org/drawingml/2006/main" r:embed="R4d170cb84b5f43c1"/>
+          <a:blip xmlns:r="http://schemas.openxmlformats.org/officeDocument/2006/relationships" xmlns:a="http://schemas.openxmlformats.org/drawingml/2006/main" r:embed="Ra3c8f3113610424a"/>
           <a:stretch xmlns:a="http://schemas.openxmlformats.org/drawingml/2006/main"/>
         </p:blipFill>
         <p:spPr>
@@ -9308,7 +9653,7 @@
     </p:spTree>
     <p:extLst>
       <p:ext uri="{BB962C8B-B14F-4D97-AF65-F5344CB8AC3E}">
-        <p14:creationId xmlns:p14="http://schemas.microsoft.com/office/powerpoint/2010/main" val="1143978037"/>
+        <p14:creationId xmlns:p14="http://schemas.microsoft.com/office/powerpoint/2010/main" val="1131870022"/>
       </p:ext>
     </p:extLst>
   </p:cSld>
@@ -9336,7 +9681,7 @@
           <p:nvPr/>
         </p:nvPicPr>
         <p:blipFill>
-          <a:blip xmlns:r="http://schemas.openxmlformats.org/officeDocument/2006/relationships" xmlns:a="http://schemas.openxmlformats.org/drawingml/2006/main" r:embed="R0303ac40424447e8"/>
+          <a:blip xmlns:r="http://schemas.openxmlformats.org/officeDocument/2006/relationships" xmlns:a="http://schemas.openxmlformats.org/drawingml/2006/main" r:embed="R1515cdee89de4118"/>
           <a:stretch xmlns:a="http://schemas.openxmlformats.org/drawingml/2006/main"/>
         </p:blipFill>
         <p:spPr>
@@ -9352,7 +9697,7 @@
     </p:spTree>
     <p:extLst>
       <p:ext uri="{BB962C8B-B14F-4D97-AF65-F5344CB8AC3E}">
-        <p14:creationId xmlns:p14="http://schemas.microsoft.com/office/powerpoint/2010/main" val="292580302"/>
+        <p14:creationId xmlns:p14="http://schemas.microsoft.com/office/powerpoint/2010/main" val="47132617"/>
       </p:ext>
     </p:extLst>
   </p:cSld>
@@ -9380,7 +9725,7 @@
           <p:nvPr/>
         </p:nvPicPr>
         <p:blipFill>
-          <a:blip xmlns:r="http://schemas.openxmlformats.org/officeDocument/2006/relationships" xmlns:a="http://schemas.openxmlformats.org/drawingml/2006/main" r:embed="R4fe71a0298a84fe3"/>
+          <a:blip xmlns:r="http://schemas.openxmlformats.org/officeDocument/2006/relationships" xmlns:a="http://schemas.openxmlformats.org/drawingml/2006/main" r:embed="Ra45e6ce6ead74b0d"/>
           <a:stretch xmlns:a="http://schemas.openxmlformats.org/drawingml/2006/main"/>
         </p:blipFill>
         <p:spPr>
@@ -9396,7 +9741,7 @@
     </p:spTree>
     <p:extLst>
       <p:ext uri="{BB962C8B-B14F-4D97-AF65-F5344CB8AC3E}">
-        <p14:creationId xmlns:p14="http://schemas.microsoft.com/office/powerpoint/2010/main" val="452577439"/>
+        <p14:creationId xmlns:p14="http://schemas.microsoft.com/office/powerpoint/2010/main" val="1121539078"/>
       </p:ext>
     </p:extLst>
   </p:cSld>
@@ -9424,7 +9769,7 @@
           <p:nvPr/>
         </p:nvPicPr>
         <p:blipFill>
-          <a:blip xmlns:r="http://schemas.openxmlformats.org/officeDocument/2006/relationships" xmlns:a="http://schemas.openxmlformats.org/drawingml/2006/main" r:embed="Re6612d885b524dd0"/>
+          <a:blip xmlns:r="http://schemas.openxmlformats.org/officeDocument/2006/relationships" xmlns:a="http://schemas.openxmlformats.org/drawingml/2006/main" r:embed="Rfd300bf223d34f18"/>
           <a:stretch xmlns:a="http://schemas.openxmlformats.org/drawingml/2006/main"/>
         </p:blipFill>
         <p:spPr>
@@ -9440,7 +9785,7 @@
     </p:spTree>
     <p:extLst>
       <p:ext uri="{BB962C8B-B14F-4D97-AF65-F5344CB8AC3E}">
-        <p14:creationId xmlns:p14="http://schemas.microsoft.com/office/powerpoint/2010/main" val="213296910"/>
+        <p14:creationId xmlns:p14="http://schemas.microsoft.com/office/powerpoint/2010/main" val="1791860052"/>
       </p:ext>
     </p:extLst>
   </p:cSld>
@@ -9468,7 +9813,7 @@
           <p:nvPr/>
         </p:nvPicPr>
         <p:blipFill>
-          <a:blip xmlns:r="http://schemas.openxmlformats.org/officeDocument/2006/relationships" xmlns:a="http://schemas.openxmlformats.org/drawingml/2006/main" r:embed="Re7f4af0c0947451f"/>
+          <a:blip xmlns:r="http://schemas.openxmlformats.org/officeDocument/2006/relationships" xmlns:a="http://schemas.openxmlformats.org/drawingml/2006/main" r:embed="Ref51de5c966b47dd"/>
           <a:stretch xmlns:a="http://schemas.openxmlformats.org/drawingml/2006/main"/>
         </p:blipFill>
         <p:spPr>
@@ -9484,7 +9829,7 @@
     </p:spTree>
     <p:extLst>
       <p:ext uri="{BB962C8B-B14F-4D97-AF65-F5344CB8AC3E}">
-        <p14:creationId xmlns:p14="http://schemas.microsoft.com/office/powerpoint/2010/main" val="140369891"/>
+        <p14:creationId xmlns:p14="http://schemas.microsoft.com/office/powerpoint/2010/main" val="485877200"/>
       </p:ext>
     </p:extLst>
   </p:cSld>
@@ -9512,7 +9857,7 @@
           <p:nvPr/>
         </p:nvPicPr>
         <p:blipFill>
-          <a:blip xmlns:r="http://schemas.openxmlformats.org/officeDocument/2006/relationships" xmlns:a="http://schemas.openxmlformats.org/drawingml/2006/main" r:embed="R2bf90f8a66bf4879"/>
+          <a:blip xmlns:r="http://schemas.openxmlformats.org/officeDocument/2006/relationships" xmlns:a="http://schemas.openxmlformats.org/drawingml/2006/main" r:embed="Rcface79e0b0a44d7"/>
           <a:stretch xmlns:a="http://schemas.openxmlformats.org/drawingml/2006/main"/>
         </p:blipFill>
         <p:spPr>
@@ -9528,7 +9873,7 @@
     </p:spTree>
     <p:extLst>
       <p:ext uri="{BB962C8B-B14F-4D97-AF65-F5344CB8AC3E}">
-        <p14:creationId xmlns:p14="http://schemas.microsoft.com/office/powerpoint/2010/main" val="292944953"/>
+        <p14:creationId xmlns:p14="http://schemas.microsoft.com/office/powerpoint/2010/main" val="603427945"/>
       </p:ext>
     </p:extLst>
   </p:cSld>
@@ -9556,7 +9901,7 @@
           <p:nvPr/>
         </p:nvPicPr>
         <p:blipFill>
-          <a:blip xmlns:r="http://schemas.openxmlformats.org/officeDocument/2006/relationships" xmlns:a="http://schemas.openxmlformats.org/drawingml/2006/main" r:embed="R2644fcff93404ed9"/>
+          <a:blip xmlns:r="http://schemas.openxmlformats.org/officeDocument/2006/relationships" xmlns:a="http://schemas.openxmlformats.org/drawingml/2006/main" r:embed="R221bf198a37f41ed"/>
           <a:stretch xmlns:a="http://schemas.openxmlformats.org/drawingml/2006/main"/>
         </p:blipFill>
         <p:spPr>
@@ -9572,7 +9917,7 @@
     </p:spTree>
     <p:extLst>
       <p:ext uri="{BB962C8B-B14F-4D97-AF65-F5344CB8AC3E}">
-        <p14:creationId xmlns:p14="http://schemas.microsoft.com/office/powerpoint/2010/main" val="479382283"/>
+        <p14:creationId xmlns:p14="http://schemas.microsoft.com/office/powerpoint/2010/main" val="905968661"/>
       </p:ext>
     </p:extLst>
   </p:cSld>
@@ -9600,7 +9945,7 @@
           <p:nvPr/>
         </p:nvPicPr>
         <p:blipFill>
-          <a:blip xmlns:r="http://schemas.openxmlformats.org/officeDocument/2006/relationships" xmlns:a="http://schemas.openxmlformats.org/drawingml/2006/main" r:embed="R956fd7c4ec974eed"/>
+          <a:blip xmlns:r="http://schemas.openxmlformats.org/officeDocument/2006/relationships" xmlns:a="http://schemas.openxmlformats.org/drawingml/2006/main" r:embed="Re81b706db7d14706"/>
           <a:stretch xmlns:a="http://schemas.openxmlformats.org/drawingml/2006/main"/>
         </p:blipFill>
         <p:spPr>
@@ -9616,7 +9961,7 @@
     </p:spTree>
     <p:extLst>
       <p:ext uri="{BB962C8B-B14F-4D97-AF65-F5344CB8AC3E}">
-        <p14:creationId xmlns:p14="http://schemas.microsoft.com/office/powerpoint/2010/main" val="1494735785"/>
+        <p14:creationId xmlns:p14="http://schemas.microsoft.com/office/powerpoint/2010/main" val="1572327062"/>
       </p:ext>
     </p:extLst>
   </p:cSld>
@@ -9644,7 +9989,7 @@
           <p:nvPr/>
         </p:nvPicPr>
         <p:blipFill>
-          <a:blip xmlns:r="http://schemas.openxmlformats.org/officeDocument/2006/relationships" xmlns:a="http://schemas.openxmlformats.org/drawingml/2006/main" r:embed="R7379fb8b65084cde"/>
+          <a:blip xmlns:r="http://schemas.openxmlformats.org/officeDocument/2006/relationships" xmlns:a="http://schemas.openxmlformats.org/drawingml/2006/main" r:embed="R1d76561ec415462b"/>
           <a:stretch xmlns:a="http://schemas.openxmlformats.org/drawingml/2006/main"/>
         </p:blipFill>
         <p:spPr>
@@ -9660,7 +10005,7 @@
     </p:spTree>
     <p:extLst>
       <p:ext uri="{BB962C8B-B14F-4D97-AF65-F5344CB8AC3E}">
-        <p14:creationId xmlns:p14="http://schemas.microsoft.com/office/powerpoint/2010/main" val="442325695"/>
+        <p14:creationId xmlns:p14="http://schemas.microsoft.com/office/powerpoint/2010/main" val="132672735"/>
       </p:ext>
     </p:extLst>
   </p:cSld>
@@ -9688,7 +10033,7 @@
           <p:nvPr/>
         </p:nvPicPr>
         <p:blipFill>
-          <a:blip xmlns:r="http://schemas.openxmlformats.org/officeDocument/2006/relationships" xmlns:a="http://schemas.openxmlformats.org/drawingml/2006/main" r:embed="R222329d731074af2"/>
+          <a:blip xmlns:r="http://schemas.openxmlformats.org/officeDocument/2006/relationships" xmlns:a="http://schemas.openxmlformats.org/drawingml/2006/main" r:embed="R72f1b6fd92e344f6"/>
           <a:stretch xmlns:a="http://schemas.openxmlformats.org/drawingml/2006/main"/>
         </p:blipFill>
         <p:spPr>
@@ -9704,7 +10049,7 @@
     </p:spTree>
     <p:extLst>
       <p:ext uri="{BB962C8B-B14F-4D97-AF65-F5344CB8AC3E}">
-        <p14:creationId xmlns:p14="http://schemas.microsoft.com/office/powerpoint/2010/main" val="1402922017"/>
+        <p14:creationId xmlns:p14="http://schemas.microsoft.com/office/powerpoint/2010/main" val="591822065"/>
       </p:ext>
     </p:extLst>
   </p:cSld>

--- a/teaching/macro-applications/downloads/lecture_3.pptx
+++ b/teaching/macro-applications/downloads/lecture_3.pptx
@@ -2,45 +2,45 @@
 <file path=ppt/presentation.xml><?xml version="1.0" encoding="utf-8"?>
 <p:presentation xmlns:p="http://schemas.openxmlformats.org/presentationml/2006/main">
   <p:sldMasterIdLst>
-    <p:sldMasterId xmlns:r="http://schemas.openxmlformats.org/officeDocument/2006/relationships" id="2147483648" r:id="R41394840d08243b6"/>
+    <p:sldMasterId xmlns:r="http://schemas.openxmlformats.org/officeDocument/2006/relationships" id="2147483648" r:id="Rc4613fa455eb4877"/>
   </p:sldMasterIdLst>
   <p:notesMasterIdLst>
-    <p:notesMasterId xmlns:r="http://schemas.openxmlformats.org/officeDocument/2006/relationships" r:id="R890a109a0008498d"/>
+    <p:notesMasterId xmlns:r="http://schemas.openxmlformats.org/officeDocument/2006/relationships" r:id="R4f5dde856672442a"/>
   </p:notesMasterIdLst>
   <p:sldIdLst>
-    <p:sldId xmlns:r="http://schemas.openxmlformats.org/officeDocument/2006/relationships" id="256" r:id="Rd798f5338c0d4ef2"/>
-    <p:sldId xmlns:r="http://schemas.openxmlformats.org/officeDocument/2006/relationships" id="257" r:id="R6972485783a245aa"/>
-    <p:sldId xmlns:r="http://schemas.openxmlformats.org/officeDocument/2006/relationships" id="258" r:id="R33c7d5d41e65445c"/>
-    <p:sldId xmlns:r="http://schemas.openxmlformats.org/officeDocument/2006/relationships" id="259" r:id="R8d0571c088b547cc"/>
-    <p:sldId xmlns:r="http://schemas.openxmlformats.org/officeDocument/2006/relationships" id="260" r:id="R81044cc727a14b9c"/>
-    <p:sldId xmlns:r="http://schemas.openxmlformats.org/officeDocument/2006/relationships" id="261" r:id="R17f88dc88f284105"/>
-    <p:sldId xmlns:r="http://schemas.openxmlformats.org/officeDocument/2006/relationships" id="262" r:id="R2a3b214399fe4871"/>
-    <p:sldId xmlns:r="http://schemas.openxmlformats.org/officeDocument/2006/relationships" id="263" r:id="R791cc6f2f3dc4716"/>
-    <p:sldId xmlns:r="http://schemas.openxmlformats.org/officeDocument/2006/relationships" id="264" r:id="Re171ff6a82ba4613"/>
-    <p:sldId xmlns:r="http://schemas.openxmlformats.org/officeDocument/2006/relationships" id="265" r:id="Rf817574a0b4d422a"/>
-    <p:sldId xmlns:r="http://schemas.openxmlformats.org/officeDocument/2006/relationships" id="266" r:id="R83e9879e983941b5"/>
-    <p:sldId xmlns:r="http://schemas.openxmlformats.org/officeDocument/2006/relationships" id="267" r:id="Rc8890926911e4643"/>
-    <p:sldId xmlns:r="http://schemas.openxmlformats.org/officeDocument/2006/relationships" id="268" r:id="R8b3d5e46b4fa483e"/>
-    <p:sldId xmlns:r="http://schemas.openxmlformats.org/officeDocument/2006/relationships" id="269" r:id="R6b8c9c40f6864b20"/>
-    <p:sldId xmlns:r="http://schemas.openxmlformats.org/officeDocument/2006/relationships" id="270" r:id="Rd17b15e622ed4359"/>
-    <p:sldId xmlns:r="http://schemas.openxmlformats.org/officeDocument/2006/relationships" id="271" r:id="Rd0c705b157e64fb2"/>
-    <p:sldId xmlns:r="http://schemas.openxmlformats.org/officeDocument/2006/relationships" id="272" r:id="R4220ea6ef6ef4a08"/>
-    <p:sldId xmlns:r="http://schemas.openxmlformats.org/officeDocument/2006/relationships" id="273" r:id="Rdca18f9b7af6459b"/>
-    <p:sldId xmlns:r="http://schemas.openxmlformats.org/officeDocument/2006/relationships" id="274" r:id="Rcdf81b754aac4b03"/>
-    <p:sldId xmlns:r="http://schemas.openxmlformats.org/officeDocument/2006/relationships" id="275" r:id="R4bba6ac556de4698"/>
-    <p:sldId xmlns:r="http://schemas.openxmlformats.org/officeDocument/2006/relationships" id="276" r:id="Rb8f080a1d54c4710"/>
-    <p:sldId xmlns:r="http://schemas.openxmlformats.org/officeDocument/2006/relationships" id="277" r:id="R0edd0e3794614a68"/>
-    <p:sldId xmlns:r="http://schemas.openxmlformats.org/officeDocument/2006/relationships" id="278" r:id="Rd8a5b299f3dc43f1"/>
-    <p:sldId xmlns:r="http://schemas.openxmlformats.org/officeDocument/2006/relationships" id="279" r:id="R024e5eab2d9d4034"/>
-    <p:sldId xmlns:r="http://schemas.openxmlformats.org/officeDocument/2006/relationships" id="280" r:id="R1daf1960ac1b42c8"/>
-    <p:sldId xmlns:r="http://schemas.openxmlformats.org/officeDocument/2006/relationships" id="281" r:id="R94fc9cc4eccb4f2a"/>
-    <p:sldId xmlns:r="http://schemas.openxmlformats.org/officeDocument/2006/relationships" id="282" r:id="R1ae9585fc91c4c63"/>
-    <p:sldId xmlns:r="http://schemas.openxmlformats.org/officeDocument/2006/relationships" id="283" r:id="R4de1b93936c249b5"/>
-    <p:sldId xmlns:r="http://schemas.openxmlformats.org/officeDocument/2006/relationships" id="284" r:id="R3e295440e7be476c"/>
-    <p:sldId xmlns:r="http://schemas.openxmlformats.org/officeDocument/2006/relationships" id="285" r:id="R34df2dad114440a2"/>
-    <p:sldId xmlns:r="http://schemas.openxmlformats.org/officeDocument/2006/relationships" id="286" r:id="R240fc0d87df247ae"/>
-    <p:sldId xmlns:r="http://schemas.openxmlformats.org/officeDocument/2006/relationships" id="287" r:id="R18c8f50b92ca48e3"/>
-    <p:sldId xmlns:r="http://schemas.openxmlformats.org/officeDocument/2006/relationships" id="288" r:id="Rbcf86aaca4f6432c"/>
+    <p:sldId xmlns:r="http://schemas.openxmlformats.org/officeDocument/2006/relationships" id="256" r:id="R02170ea269874f18"/>
+    <p:sldId xmlns:r="http://schemas.openxmlformats.org/officeDocument/2006/relationships" id="257" r:id="R215dff669dc44170"/>
+    <p:sldId xmlns:r="http://schemas.openxmlformats.org/officeDocument/2006/relationships" id="258" r:id="R0be566171e544a7a"/>
+    <p:sldId xmlns:r="http://schemas.openxmlformats.org/officeDocument/2006/relationships" id="259" r:id="Rc7e9ab2fe0a54d7d"/>
+    <p:sldId xmlns:r="http://schemas.openxmlformats.org/officeDocument/2006/relationships" id="260" r:id="R3f000d1f02974ed2"/>
+    <p:sldId xmlns:r="http://schemas.openxmlformats.org/officeDocument/2006/relationships" id="261" r:id="R8990d64007ac4d3f"/>
+    <p:sldId xmlns:r="http://schemas.openxmlformats.org/officeDocument/2006/relationships" id="262" r:id="R566d1c5cb37f4db5"/>
+    <p:sldId xmlns:r="http://schemas.openxmlformats.org/officeDocument/2006/relationships" id="263" r:id="R3f01676a6f5d4437"/>
+    <p:sldId xmlns:r="http://schemas.openxmlformats.org/officeDocument/2006/relationships" id="264" r:id="Rd19f72a024f1419e"/>
+    <p:sldId xmlns:r="http://schemas.openxmlformats.org/officeDocument/2006/relationships" id="265" r:id="R66f4c182ee824723"/>
+    <p:sldId xmlns:r="http://schemas.openxmlformats.org/officeDocument/2006/relationships" id="266" r:id="Rfeb7233fe8b44216"/>
+    <p:sldId xmlns:r="http://schemas.openxmlformats.org/officeDocument/2006/relationships" id="267" r:id="Ref407a978cfa45a3"/>
+    <p:sldId xmlns:r="http://schemas.openxmlformats.org/officeDocument/2006/relationships" id="268" r:id="R75e48663f682444c"/>
+    <p:sldId xmlns:r="http://schemas.openxmlformats.org/officeDocument/2006/relationships" id="269" r:id="Ra0ede555e0044128"/>
+    <p:sldId xmlns:r="http://schemas.openxmlformats.org/officeDocument/2006/relationships" id="270" r:id="R1f7ff7fc91f04d76"/>
+    <p:sldId xmlns:r="http://schemas.openxmlformats.org/officeDocument/2006/relationships" id="271" r:id="Rdfc3738a5e1d49c3"/>
+    <p:sldId xmlns:r="http://schemas.openxmlformats.org/officeDocument/2006/relationships" id="272" r:id="R0597f5388907465c"/>
+    <p:sldId xmlns:r="http://schemas.openxmlformats.org/officeDocument/2006/relationships" id="273" r:id="R6d0d2c8c113c4c96"/>
+    <p:sldId xmlns:r="http://schemas.openxmlformats.org/officeDocument/2006/relationships" id="274" r:id="R9a66721c55b04ff8"/>
+    <p:sldId xmlns:r="http://schemas.openxmlformats.org/officeDocument/2006/relationships" id="275" r:id="R658c076fd9b448a4"/>
+    <p:sldId xmlns:r="http://schemas.openxmlformats.org/officeDocument/2006/relationships" id="276" r:id="R858c67cc6f894e59"/>
+    <p:sldId xmlns:r="http://schemas.openxmlformats.org/officeDocument/2006/relationships" id="277" r:id="Rda83727111e54c6d"/>
+    <p:sldId xmlns:r="http://schemas.openxmlformats.org/officeDocument/2006/relationships" id="278" r:id="R9b094f9913ac4011"/>
+    <p:sldId xmlns:r="http://schemas.openxmlformats.org/officeDocument/2006/relationships" id="279" r:id="Rd670f69c8a064ca4"/>
+    <p:sldId xmlns:r="http://schemas.openxmlformats.org/officeDocument/2006/relationships" id="280" r:id="R6e9f996ac3314d6e"/>
+    <p:sldId xmlns:r="http://schemas.openxmlformats.org/officeDocument/2006/relationships" id="281" r:id="R5b4bf31563af4b78"/>
+    <p:sldId xmlns:r="http://schemas.openxmlformats.org/officeDocument/2006/relationships" id="282" r:id="R28f19b7b76924776"/>
+    <p:sldId xmlns:r="http://schemas.openxmlformats.org/officeDocument/2006/relationships" id="283" r:id="Ra9f22dbfcdec4c6b"/>
+    <p:sldId xmlns:r="http://schemas.openxmlformats.org/officeDocument/2006/relationships" id="284" r:id="R7225b91db9e9471d"/>
+    <p:sldId xmlns:r="http://schemas.openxmlformats.org/officeDocument/2006/relationships" id="285" r:id="R4b06b3c2c4fe4b36"/>
+    <p:sldId xmlns:r="http://schemas.openxmlformats.org/officeDocument/2006/relationships" id="286" r:id="R559d552eea2341e2"/>
+    <p:sldId xmlns:r="http://schemas.openxmlformats.org/officeDocument/2006/relationships" id="287" r:id="Rd9bc280fa2b841a1"/>
+    <p:sldId xmlns:r="http://schemas.openxmlformats.org/officeDocument/2006/relationships" id="288" r:id="Refa194ef1ba447b8"/>
   </p:sldIdLst>
   <p:sldSz cx="12192000" cy="6858000"/>
   <p:notesSz cx="6858000" cy="9144000"/>
@@ -3804,7 +3804,7 @@
           </a:p>
           <a:p xmlns:a="http://schemas.openxmlformats.org/drawingml/2006/main">
             <a:r>
-              <a:t>Baldwin R. and Wyplosz C. (2022), The Economics of European Integration, Chapter 6</a:t>
+              <a:t>Baldwin and Wyplosz, The Economics of European Integration, Chapter 6 (any edition).</a:t>
             </a:r>
           </a:p>
           <a:p xmlns:a="http://schemas.openxmlformats.org/drawingml/2006/main">
@@ -8077,7 +8077,7 @@
   </p:cSld>
   <p:clrMap bg1="lt1" tx1="dk1" bg2="lt2" tx2="dk2" accent1="accent1" accent2="accent2" accent3="accent3" accent4="accent4" accent5="accent5" accent6="accent6" hlink="hlink" folHlink="folHlink"/>
   <p:sldLayoutIdLst>
-    <p:sldLayoutId xmlns:r="http://schemas.openxmlformats.org/officeDocument/2006/relationships" id="2147483649" r:id="R75792c08f3f64e2c"/>
+    <p:sldLayoutId xmlns:r="http://schemas.openxmlformats.org/officeDocument/2006/relationships" id="2147483649" r:id="Recb8d1db4fb64261"/>
   </p:sldLayoutIdLst>
   <p:txStyles>
     <p:titleStyle>
@@ -8625,7 +8625,7 @@
           <p:nvPr/>
         </p:nvPicPr>
         <p:blipFill>
-          <a:blip xmlns:r="http://schemas.openxmlformats.org/officeDocument/2006/relationships" xmlns:a="http://schemas.openxmlformats.org/drawingml/2006/main" r:embed="Rba56e97a7a4d41b5"/>
+          <a:blip xmlns:r="http://schemas.openxmlformats.org/officeDocument/2006/relationships" xmlns:a="http://schemas.openxmlformats.org/drawingml/2006/main" r:embed="R7ca2f456f3654f2f"/>
           <a:stretch xmlns:a="http://schemas.openxmlformats.org/drawingml/2006/main"/>
         </p:blipFill>
         <p:spPr>
@@ -8641,7 +8641,7 @@
     </p:spTree>
     <p:extLst>
       <p:ext uri="{BB962C8B-B14F-4D97-AF65-F5344CB8AC3E}">
-        <p14:creationId xmlns:p14="http://schemas.microsoft.com/office/powerpoint/2010/main" val="1662890969"/>
+        <p14:creationId xmlns:p14="http://schemas.microsoft.com/office/powerpoint/2010/main" val="730208630"/>
       </p:ext>
     </p:extLst>
   </p:cSld>
@@ -8669,7 +8669,7 @@
           <p:nvPr/>
         </p:nvPicPr>
         <p:blipFill>
-          <a:blip xmlns:r="http://schemas.openxmlformats.org/officeDocument/2006/relationships" xmlns:a="http://schemas.openxmlformats.org/drawingml/2006/main" r:embed="R06f30ab5644f43ac"/>
+          <a:blip xmlns:r="http://schemas.openxmlformats.org/officeDocument/2006/relationships" xmlns:a="http://schemas.openxmlformats.org/drawingml/2006/main" r:embed="Rc6aeaa36afe14ca0"/>
           <a:stretch xmlns:a="http://schemas.openxmlformats.org/drawingml/2006/main"/>
         </p:blipFill>
         <p:spPr>
@@ -8685,7 +8685,7 @@
     </p:spTree>
     <p:extLst>
       <p:ext uri="{BB962C8B-B14F-4D97-AF65-F5344CB8AC3E}">
-        <p14:creationId xmlns:p14="http://schemas.microsoft.com/office/powerpoint/2010/main" val="2078517437"/>
+        <p14:creationId xmlns:p14="http://schemas.microsoft.com/office/powerpoint/2010/main" val="1290275323"/>
       </p:ext>
     </p:extLst>
   </p:cSld>
@@ -8713,7 +8713,7 @@
           <p:nvPr/>
         </p:nvPicPr>
         <p:blipFill>
-          <a:blip xmlns:r="http://schemas.openxmlformats.org/officeDocument/2006/relationships" xmlns:a="http://schemas.openxmlformats.org/drawingml/2006/main" r:embed="Ra2e42f6a77b44468"/>
+          <a:blip xmlns:r="http://schemas.openxmlformats.org/officeDocument/2006/relationships" xmlns:a="http://schemas.openxmlformats.org/drawingml/2006/main" r:embed="R3bba21ead0364eae"/>
           <a:stretch xmlns:a="http://schemas.openxmlformats.org/drawingml/2006/main"/>
         </p:blipFill>
         <p:spPr>
@@ -8729,7 +8729,7 @@
     </p:spTree>
     <p:extLst>
       <p:ext uri="{BB962C8B-B14F-4D97-AF65-F5344CB8AC3E}">
-        <p14:creationId xmlns:p14="http://schemas.microsoft.com/office/powerpoint/2010/main" val="1788212323"/>
+        <p14:creationId xmlns:p14="http://schemas.microsoft.com/office/powerpoint/2010/main" val="1568940190"/>
       </p:ext>
     </p:extLst>
   </p:cSld>
@@ -8757,7 +8757,7 @@
           <p:nvPr/>
         </p:nvPicPr>
         <p:blipFill>
-          <a:blip xmlns:r="http://schemas.openxmlformats.org/officeDocument/2006/relationships" xmlns:a="http://schemas.openxmlformats.org/drawingml/2006/main" r:embed="Rbfb8227ffae34fe9"/>
+          <a:blip xmlns:r="http://schemas.openxmlformats.org/officeDocument/2006/relationships" xmlns:a="http://schemas.openxmlformats.org/drawingml/2006/main" r:embed="R4e5d58706e4f4102"/>
           <a:stretch xmlns:a="http://schemas.openxmlformats.org/drawingml/2006/main"/>
         </p:blipFill>
         <p:spPr>
@@ -8773,7 +8773,7 @@
     </p:spTree>
     <p:extLst>
       <p:ext uri="{BB962C8B-B14F-4D97-AF65-F5344CB8AC3E}">
-        <p14:creationId xmlns:p14="http://schemas.microsoft.com/office/powerpoint/2010/main" val="1349628545"/>
+        <p14:creationId xmlns:p14="http://schemas.microsoft.com/office/powerpoint/2010/main" val="772422270"/>
       </p:ext>
     </p:extLst>
   </p:cSld>
@@ -8801,7 +8801,7 @@
           <p:nvPr/>
         </p:nvPicPr>
         <p:blipFill>
-          <a:blip xmlns:r="http://schemas.openxmlformats.org/officeDocument/2006/relationships" xmlns:a="http://schemas.openxmlformats.org/drawingml/2006/main" r:embed="R16e8af2b240b492d"/>
+          <a:blip xmlns:r="http://schemas.openxmlformats.org/officeDocument/2006/relationships" xmlns:a="http://schemas.openxmlformats.org/drawingml/2006/main" r:embed="R991496b0b2f94f06"/>
           <a:stretch xmlns:a="http://schemas.openxmlformats.org/drawingml/2006/main"/>
         </p:blipFill>
         <p:spPr>
@@ -8817,7 +8817,7 @@
     </p:spTree>
     <p:extLst>
       <p:ext uri="{BB962C8B-B14F-4D97-AF65-F5344CB8AC3E}">
-        <p14:creationId xmlns:p14="http://schemas.microsoft.com/office/powerpoint/2010/main" val="402614106"/>
+        <p14:creationId xmlns:p14="http://schemas.microsoft.com/office/powerpoint/2010/main" val="1641774883"/>
       </p:ext>
     </p:extLst>
   </p:cSld>
@@ -8845,7 +8845,7 @@
           <p:nvPr/>
         </p:nvPicPr>
         <p:blipFill>
-          <a:blip xmlns:r="http://schemas.openxmlformats.org/officeDocument/2006/relationships" xmlns:a="http://schemas.openxmlformats.org/drawingml/2006/main" r:embed="R8dc91b2997c94e0b"/>
+          <a:blip xmlns:r="http://schemas.openxmlformats.org/officeDocument/2006/relationships" xmlns:a="http://schemas.openxmlformats.org/drawingml/2006/main" r:embed="Rd55f50d3b6e04502"/>
           <a:stretch xmlns:a="http://schemas.openxmlformats.org/drawingml/2006/main"/>
         </p:blipFill>
         <p:spPr>
@@ -8861,7 +8861,7 @@
     </p:spTree>
     <p:extLst>
       <p:ext uri="{BB962C8B-B14F-4D97-AF65-F5344CB8AC3E}">
-        <p14:creationId xmlns:p14="http://schemas.microsoft.com/office/powerpoint/2010/main" val="2035730044"/>
+        <p14:creationId xmlns:p14="http://schemas.microsoft.com/office/powerpoint/2010/main" val="1718575186"/>
       </p:ext>
     </p:extLst>
   </p:cSld>
@@ -8889,7 +8889,7 @@
           <p:nvPr/>
         </p:nvPicPr>
         <p:blipFill>
-          <a:blip xmlns:r="http://schemas.openxmlformats.org/officeDocument/2006/relationships" xmlns:a="http://schemas.openxmlformats.org/drawingml/2006/main" r:embed="R39eb5bb2c1584304"/>
+          <a:blip xmlns:r="http://schemas.openxmlformats.org/officeDocument/2006/relationships" xmlns:a="http://schemas.openxmlformats.org/drawingml/2006/main" r:embed="R92f9f2983e8c42da"/>
           <a:stretch xmlns:a="http://schemas.openxmlformats.org/drawingml/2006/main"/>
         </p:blipFill>
         <p:spPr>
@@ -8905,7 +8905,7 @@
     </p:spTree>
     <p:extLst>
       <p:ext uri="{BB962C8B-B14F-4D97-AF65-F5344CB8AC3E}">
-        <p14:creationId xmlns:p14="http://schemas.microsoft.com/office/powerpoint/2010/main" val="1113561433"/>
+        <p14:creationId xmlns:p14="http://schemas.microsoft.com/office/powerpoint/2010/main" val="685744990"/>
       </p:ext>
     </p:extLst>
   </p:cSld>
@@ -8933,7 +8933,7 @@
           <p:nvPr/>
         </p:nvPicPr>
         <p:blipFill>
-          <a:blip xmlns:r="http://schemas.openxmlformats.org/officeDocument/2006/relationships" xmlns:a="http://schemas.openxmlformats.org/drawingml/2006/main" r:embed="R4cef3f121a154ee3"/>
+          <a:blip xmlns:r="http://schemas.openxmlformats.org/officeDocument/2006/relationships" xmlns:a="http://schemas.openxmlformats.org/drawingml/2006/main" r:embed="R18d721dcda6c460e"/>
           <a:stretch xmlns:a="http://schemas.openxmlformats.org/drawingml/2006/main"/>
         </p:blipFill>
         <p:spPr>
@@ -8949,7 +8949,7 @@
     </p:spTree>
     <p:extLst>
       <p:ext uri="{BB962C8B-B14F-4D97-AF65-F5344CB8AC3E}">
-        <p14:creationId xmlns:p14="http://schemas.microsoft.com/office/powerpoint/2010/main" val="1376133841"/>
+        <p14:creationId xmlns:p14="http://schemas.microsoft.com/office/powerpoint/2010/main" val="343734880"/>
       </p:ext>
     </p:extLst>
   </p:cSld>
@@ -8977,7 +8977,7 @@
           <p:nvPr/>
         </p:nvPicPr>
         <p:blipFill>
-          <a:blip xmlns:r="http://schemas.openxmlformats.org/officeDocument/2006/relationships" xmlns:a="http://schemas.openxmlformats.org/drawingml/2006/main" r:embed="Rd58df68026304ff3"/>
+          <a:blip xmlns:r="http://schemas.openxmlformats.org/officeDocument/2006/relationships" xmlns:a="http://schemas.openxmlformats.org/drawingml/2006/main" r:embed="R4d67481445904d1c"/>
           <a:stretch xmlns:a="http://schemas.openxmlformats.org/drawingml/2006/main"/>
         </p:blipFill>
         <p:spPr>
@@ -8993,7 +8993,7 @@
     </p:spTree>
     <p:extLst>
       <p:ext uri="{BB962C8B-B14F-4D97-AF65-F5344CB8AC3E}">
-        <p14:creationId xmlns:p14="http://schemas.microsoft.com/office/powerpoint/2010/main" val="985445461"/>
+        <p14:creationId xmlns:p14="http://schemas.microsoft.com/office/powerpoint/2010/main" val="636703067"/>
       </p:ext>
     </p:extLst>
   </p:cSld>
@@ -9021,7 +9021,7 @@
           <p:nvPr/>
         </p:nvPicPr>
         <p:blipFill>
-          <a:blip xmlns:r="http://schemas.openxmlformats.org/officeDocument/2006/relationships" xmlns:a="http://schemas.openxmlformats.org/drawingml/2006/main" r:embed="R0db5a94067a84aa3"/>
+          <a:blip xmlns:r="http://schemas.openxmlformats.org/officeDocument/2006/relationships" xmlns:a="http://schemas.openxmlformats.org/drawingml/2006/main" r:embed="Re9ad6eeca6aa4989"/>
           <a:stretch xmlns:a="http://schemas.openxmlformats.org/drawingml/2006/main"/>
         </p:blipFill>
         <p:spPr>
@@ -9037,7 +9037,7 @@
     </p:spTree>
     <p:extLst>
       <p:ext uri="{BB962C8B-B14F-4D97-AF65-F5344CB8AC3E}">
-        <p14:creationId xmlns:p14="http://schemas.microsoft.com/office/powerpoint/2010/main" val="11011792"/>
+        <p14:creationId xmlns:p14="http://schemas.microsoft.com/office/powerpoint/2010/main" val="357424713"/>
       </p:ext>
     </p:extLst>
   </p:cSld>
@@ -9065,7 +9065,7 @@
           <p:nvPr/>
         </p:nvPicPr>
         <p:blipFill>
-          <a:blip xmlns:r="http://schemas.openxmlformats.org/officeDocument/2006/relationships" xmlns:a="http://schemas.openxmlformats.org/drawingml/2006/main" r:embed="Rbca616a603814522"/>
+          <a:blip xmlns:r="http://schemas.openxmlformats.org/officeDocument/2006/relationships" xmlns:a="http://schemas.openxmlformats.org/drawingml/2006/main" r:embed="R70ce435d45ac4f63"/>
           <a:stretch xmlns:a="http://schemas.openxmlformats.org/drawingml/2006/main"/>
         </p:blipFill>
         <p:spPr>
@@ -9081,7 +9081,7 @@
     </p:spTree>
     <p:extLst>
       <p:ext uri="{BB962C8B-B14F-4D97-AF65-F5344CB8AC3E}">
-        <p14:creationId xmlns:p14="http://schemas.microsoft.com/office/powerpoint/2010/main" val="330837843"/>
+        <p14:creationId xmlns:p14="http://schemas.microsoft.com/office/powerpoint/2010/main" val="1760389807"/>
       </p:ext>
     </p:extLst>
   </p:cSld>
@@ -9109,7 +9109,7 @@
           <p:nvPr/>
         </p:nvPicPr>
         <p:blipFill>
-          <a:blip xmlns:r="http://schemas.openxmlformats.org/officeDocument/2006/relationships" xmlns:a="http://schemas.openxmlformats.org/drawingml/2006/main" r:embed="Rebbce6b88bc84748"/>
+          <a:blip xmlns:r="http://schemas.openxmlformats.org/officeDocument/2006/relationships" xmlns:a="http://schemas.openxmlformats.org/drawingml/2006/main" r:embed="R8bfc5e681fdd453c"/>
           <a:stretch xmlns:a="http://schemas.openxmlformats.org/drawingml/2006/main"/>
         </p:blipFill>
         <p:spPr>
@@ -9125,7 +9125,7 @@
     </p:spTree>
     <p:extLst>
       <p:ext uri="{BB962C8B-B14F-4D97-AF65-F5344CB8AC3E}">
-        <p14:creationId xmlns:p14="http://schemas.microsoft.com/office/powerpoint/2010/main" val="2120886581"/>
+        <p14:creationId xmlns:p14="http://schemas.microsoft.com/office/powerpoint/2010/main" val="599259677"/>
       </p:ext>
     </p:extLst>
   </p:cSld>
@@ -9153,7 +9153,7 @@
           <p:nvPr/>
         </p:nvPicPr>
         <p:blipFill>
-          <a:blip xmlns:r="http://schemas.openxmlformats.org/officeDocument/2006/relationships" xmlns:a="http://schemas.openxmlformats.org/drawingml/2006/main" r:embed="R49131bdf42fc4dd1"/>
+          <a:blip xmlns:r="http://schemas.openxmlformats.org/officeDocument/2006/relationships" xmlns:a="http://schemas.openxmlformats.org/drawingml/2006/main" r:embed="R1df0a5320c314e88"/>
           <a:stretch xmlns:a="http://schemas.openxmlformats.org/drawingml/2006/main"/>
         </p:blipFill>
         <p:spPr>
@@ -9169,7 +9169,7 @@
     </p:spTree>
     <p:extLst>
       <p:ext uri="{BB962C8B-B14F-4D97-AF65-F5344CB8AC3E}">
-        <p14:creationId xmlns:p14="http://schemas.microsoft.com/office/powerpoint/2010/main" val="2110653148"/>
+        <p14:creationId xmlns:p14="http://schemas.microsoft.com/office/powerpoint/2010/main" val="112991222"/>
       </p:ext>
     </p:extLst>
   </p:cSld>
@@ -9197,7 +9197,7 @@
           <p:nvPr/>
         </p:nvPicPr>
         <p:blipFill>
-          <a:blip xmlns:r="http://schemas.openxmlformats.org/officeDocument/2006/relationships" xmlns:a="http://schemas.openxmlformats.org/drawingml/2006/main" r:embed="Rcde70aa956c64f19"/>
+          <a:blip xmlns:r="http://schemas.openxmlformats.org/officeDocument/2006/relationships" xmlns:a="http://schemas.openxmlformats.org/drawingml/2006/main" r:embed="Rd9df7a2abbd4458b"/>
           <a:stretch xmlns:a="http://schemas.openxmlformats.org/drawingml/2006/main"/>
         </p:blipFill>
         <p:spPr>
@@ -9213,7 +9213,7 @@
     </p:spTree>
     <p:extLst>
       <p:ext uri="{BB962C8B-B14F-4D97-AF65-F5344CB8AC3E}">
-        <p14:creationId xmlns:p14="http://schemas.microsoft.com/office/powerpoint/2010/main" val="1122562648"/>
+        <p14:creationId xmlns:p14="http://schemas.microsoft.com/office/powerpoint/2010/main" val="172987080"/>
       </p:ext>
     </p:extLst>
   </p:cSld>
@@ -9241,7 +9241,7 @@
           <p:nvPr/>
         </p:nvPicPr>
         <p:blipFill>
-          <a:blip xmlns:r="http://schemas.openxmlformats.org/officeDocument/2006/relationships" xmlns:a="http://schemas.openxmlformats.org/drawingml/2006/main" r:embed="R79baf655a5bc4118"/>
+          <a:blip xmlns:r="http://schemas.openxmlformats.org/officeDocument/2006/relationships" xmlns:a="http://schemas.openxmlformats.org/drawingml/2006/main" r:embed="R51ec3b1c82b44978"/>
           <a:stretch xmlns:a="http://schemas.openxmlformats.org/drawingml/2006/main"/>
         </p:blipFill>
         <p:spPr>
@@ -9257,7 +9257,7 @@
     </p:spTree>
     <p:extLst>
       <p:ext uri="{BB962C8B-B14F-4D97-AF65-F5344CB8AC3E}">
-        <p14:creationId xmlns:p14="http://schemas.microsoft.com/office/powerpoint/2010/main" val="1616542398"/>
+        <p14:creationId xmlns:p14="http://schemas.microsoft.com/office/powerpoint/2010/main" val="430188842"/>
       </p:ext>
     </p:extLst>
   </p:cSld>
@@ -9285,7 +9285,7 @@
           <p:nvPr/>
         </p:nvPicPr>
         <p:blipFill>
-          <a:blip xmlns:r="http://schemas.openxmlformats.org/officeDocument/2006/relationships" xmlns:a="http://schemas.openxmlformats.org/drawingml/2006/main" r:embed="Rce1734cf33754457"/>
+          <a:blip xmlns:r="http://schemas.openxmlformats.org/officeDocument/2006/relationships" xmlns:a="http://schemas.openxmlformats.org/drawingml/2006/main" r:embed="R614d2488d54a4e43"/>
           <a:stretch xmlns:a="http://schemas.openxmlformats.org/drawingml/2006/main"/>
         </p:blipFill>
         <p:spPr>
@@ -9301,7 +9301,7 @@
     </p:spTree>
     <p:extLst>
       <p:ext uri="{BB962C8B-B14F-4D97-AF65-F5344CB8AC3E}">
-        <p14:creationId xmlns:p14="http://schemas.microsoft.com/office/powerpoint/2010/main" val="751632924"/>
+        <p14:creationId xmlns:p14="http://schemas.microsoft.com/office/powerpoint/2010/main" val="1235526068"/>
       </p:ext>
     </p:extLst>
   </p:cSld>
@@ -9329,7 +9329,7 @@
           <p:nvPr/>
         </p:nvPicPr>
         <p:blipFill>
-          <a:blip xmlns:r="http://schemas.openxmlformats.org/officeDocument/2006/relationships" xmlns:a="http://schemas.openxmlformats.org/drawingml/2006/main" r:embed="R6f40e0832e804b70"/>
+          <a:blip xmlns:r="http://schemas.openxmlformats.org/officeDocument/2006/relationships" xmlns:a="http://schemas.openxmlformats.org/drawingml/2006/main" r:embed="R47c058ae77a34377"/>
           <a:stretch xmlns:a="http://schemas.openxmlformats.org/drawingml/2006/main"/>
         </p:blipFill>
         <p:spPr>
@@ -9345,7 +9345,7 @@
     </p:spTree>
     <p:extLst>
       <p:ext uri="{BB962C8B-B14F-4D97-AF65-F5344CB8AC3E}">
-        <p14:creationId xmlns:p14="http://schemas.microsoft.com/office/powerpoint/2010/main" val="1320830979"/>
+        <p14:creationId xmlns:p14="http://schemas.microsoft.com/office/powerpoint/2010/main" val="1768702578"/>
       </p:ext>
     </p:extLst>
   </p:cSld>
@@ -9373,7 +9373,7 @@
           <p:nvPr/>
         </p:nvPicPr>
         <p:blipFill>
-          <a:blip xmlns:r="http://schemas.openxmlformats.org/officeDocument/2006/relationships" xmlns:a="http://schemas.openxmlformats.org/drawingml/2006/main" r:embed="R5c6ae395fc7542b0"/>
+          <a:blip xmlns:r="http://schemas.openxmlformats.org/officeDocument/2006/relationships" xmlns:a="http://schemas.openxmlformats.org/drawingml/2006/main" r:embed="R6fef4f87c98a4002"/>
           <a:stretch xmlns:a="http://schemas.openxmlformats.org/drawingml/2006/main"/>
         </p:blipFill>
         <p:spPr>
@@ -9389,7 +9389,7 @@
     </p:spTree>
     <p:extLst>
       <p:ext uri="{BB962C8B-B14F-4D97-AF65-F5344CB8AC3E}">
-        <p14:creationId xmlns:p14="http://schemas.microsoft.com/office/powerpoint/2010/main" val="1123750720"/>
+        <p14:creationId xmlns:p14="http://schemas.microsoft.com/office/powerpoint/2010/main" val="2059707571"/>
       </p:ext>
     </p:extLst>
   </p:cSld>
@@ -9417,7 +9417,7 @@
           <p:nvPr/>
         </p:nvPicPr>
         <p:blipFill>
-          <a:blip xmlns:r="http://schemas.openxmlformats.org/officeDocument/2006/relationships" xmlns:a="http://schemas.openxmlformats.org/drawingml/2006/main" r:embed="R066fa1d7a6e8412f"/>
+          <a:blip xmlns:r="http://schemas.openxmlformats.org/officeDocument/2006/relationships" xmlns:a="http://schemas.openxmlformats.org/drawingml/2006/main" r:embed="R7781546a7aee4e8f"/>
           <a:stretch xmlns:a="http://schemas.openxmlformats.org/drawingml/2006/main"/>
         </p:blipFill>
         <p:spPr>
@@ -9433,7 +9433,7 @@
     </p:spTree>
     <p:extLst>
       <p:ext uri="{BB962C8B-B14F-4D97-AF65-F5344CB8AC3E}">
-        <p14:creationId xmlns:p14="http://schemas.microsoft.com/office/powerpoint/2010/main" val="1662950621"/>
+        <p14:creationId xmlns:p14="http://schemas.microsoft.com/office/powerpoint/2010/main" val="658779497"/>
       </p:ext>
     </p:extLst>
   </p:cSld>
@@ -9461,7 +9461,7 @@
           <p:nvPr/>
         </p:nvPicPr>
         <p:blipFill>
-          <a:blip xmlns:r="http://schemas.openxmlformats.org/officeDocument/2006/relationships" xmlns:a="http://schemas.openxmlformats.org/drawingml/2006/main" r:embed="Rc7b0377c09d94017"/>
+          <a:blip xmlns:r="http://schemas.openxmlformats.org/officeDocument/2006/relationships" xmlns:a="http://schemas.openxmlformats.org/drawingml/2006/main" r:embed="R77868d59593c40b6"/>
           <a:stretch xmlns:a="http://schemas.openxmlformats.org/drawingml/2006/main"/>
         </p:blipFill>
         <p:spPr>
@@ -9477,7 +9477,7 @@
     </p:spTree>
     <p:extLst>
       <p:ext uri="{BB962C8B-B14F-4D97-AF65-F5344CB8AC3E}">
-        <p14:creationId xmlns:p14="http://schemas.microsoft.com/office/powerpoint/2010/main" val="236058719"/>
+        <p14:creationId xmlns:p14="http://schemas.microsoft.com/office/powerpoint/2010/main" val="1033401023"/>
       </p:ext>
     </p:extLst>
   </p:cSld>
@@ -9505,7 +9505,7 @@
           <p:nvPr/>
         </p:nvPicPr>
         <p:blipFill>
-          <a:blip xmlns:r="http://schemas.openxmlformats.org/officeDocument/2006/relationships" xmlns:a="http://schemas.openxmlformats.org/drawingml/2006/main" r:embed="Rd6c0358b128b4195"/>
+          <a:blip xmlns:r="http://schemas.openxmlformats.org/officeDocument/2006/relationships" xmlns:a="http://schemas.openxmlformats.org/drawingml/2006/main" r:embed="R68476122b2eb4838"/>
           <a:stretch xmlns:a="http://schemas.openxmlformats.org/drawingml/2006/main"/>
         </p:blipFill>
         <p:spPr>
@@ -9521,7 +9521,7 @@
     </p:spTree>
     <p:extLst>
       <p:ext uri="{BB962C8B-B14F-4D97-AF65-F5344CB8AC3E}">
-        <p14:creationId xmlns:p14="http://schemas.microsoft.com/office/powerpoint/2010/main" val="98544337"/>
+        <p14:creationId xmlns:p14="http://schemas.microsoft.com/office/powerpoint/2010/main" val="514865416"/>
       </p:ext>
     </p:extLst>
   </p:cSld>
@@ -9549,7 +9549,7 @@
           <p:nvPr/>
         </p:nvPicPr>
         <p:blipFill>
-          <a:blip xmlns:r="http://schemas.openxmlformats.org/officeDocument/2006/relationships" xmlns:a="http://schemas.openxmlformats.org/drawingml/2006/main" r:embed="Rd2bb7881c7ef44a7"/>
+          <a:blip xmlns:r="http://schemas.openxmlformats.org/officeDocument/2006/relationships" xmlns:a="http://schemas.openxmlformats.org/drawingml/2006/main" r:embed="Radf8f70f76b748f0"/>
           <a:stretch xmlns:a="http://schemas.openxmlformats.org/drawingml/2006/main"/>
         </p:blipFill>
         <p:spPr>
@@ -9565,7 +9565,7 @@
     </p:spTree>
     <p:extLst>
       <p:ext uri="{BB962C8B-B14F-4D97-AF65-F5344CB8AC3E}">
-        <p14:creationId xmlns:p14="http://schemas.microsoft.com/office/powerpoint/2010/main" val="1866262473"/>
+        <p14:creationId xmlns:p14="http://schemas.microsoft.com/office/powerpoint/2010/main" val="2031932851"/>
       </p:ext>
     </p:extLst>
   </p:cSld>
@@ -9593,7 +9593,7 @@
           <p:nvPr/>
         </p:nvPicPr>
         <p:blipFill>
-          <a:blip xmlns:r="http://schemas.openxmlformats.org/officeDocument/2006/relationships" xmlns:a="http://schemas.openxmlformats.org/drawingml/2006/main" r:embed="R925afe37d28c425d"/>
+          <a:blip xmlns:r="http://schemas.openxmlformats.org/officeDocument/2006/relationships" xmlns:a="http://schemas.openxmlformats.org/drawingml/2006/main" r:embed="Rbc3f306af2e14104"/>
           <a:stretch xmlns:a="http://schemas.openxmlformats.org/drawingml/2006/main"/>
         </p:blipFill>
         <p:spPr>
@@ -9609,7 +9609,7 @@
     </p:spTree>
     <p:extLst>
       <p:ext uri="{BB962C8B-B14F-4D97-AF65-F5344CB8AC3E}">
-        <p14:creationId xmlns:p14="http://schemas.microsoft.com/office/powerpoint/2010/main" val="169502510"/>
+        <p14:creationId xmlns:p14="http://schemas.microsoft.com/office/powerpoint/2010/main" val="1292999561"/>
       </p:ext>
     </p:extLst>
   </p:cSld>
@@ -9637,7 +9637,7 @@
           <p:nvPr/>
         </p:nvPicPr>
         <p:blipFill>
-          <a:blip xmlns:r="http://schemas.openxmlformats.org/officeDocument/2006/relationships" xmlns:a="http://schemas.openxmlformats.org/drawingml/2006/main" r:embed="Ra3c8f3113610424a"/>
+          <a:blip xmlns:r="http://schemas.openxmlformats.org/officeDocument/2006/relationships" xmlns:a="http://schemas.openxmlformats.org/drawingml/2006/main" r:embed="Raf53ce28d992480f"/>
           <a:stretch xmlns:a="http://schemas.openxmlformats.org/drawingml/2006/main"/>
         </p:blipFill>
         <p:spPr>
@@ -9653,7 +9653,7 @@
     </p:spTree>
     <p:extLst>
       <p:ext uri="{BB962C8B-B14F-4D97-AF65-F5344CB8AC3E}">
-        <p14:creationId xmlns:p14="http://schemas.microsoft.com/office/powerpoint/2010/main" val="1131870022"/>
+        <p14:creationId xmlns:p14="http://schemas.microsoft.com/office/powerpoint/2010/main" val="36797643"/>
       </p:ext>
     </p:extLst>
   </p:cSld>
@@ -9681,7 +9681,7 @@
           <p:nvPr/>
         </p:nvPicPr>
         <p:blipFill>
-          <a:blip xmlns:r="http://schemas.openxmlformats.org/officeDocument/2006/relationships" xmlns:a="http://schemas.openxmlformats.org/drawingml/2006/main" r:embed="R1515cdee89de4118"/>
+          <a:blip xmlns:r="http://schemas.openxmlformats.org/officeDocument/2006/relationships" xmlns:a="http://schemas.openxmlformats.org/drawingml/2006/main" r:embed="R93792bdd41ab4bd2"/>
           <a:stretch xmlns:a="http://schemas.openxmlformats.org/drawingml/2006/main"/>
         </p:blipFill>
         <p:spPr>
@@ -9697,7 +9697,7 @@
     </p:spTree>
     <p:extLst>
       <p:ext uri="{BB962C8B-B14F-4D97-AF65-F5344CB8AC3E}">
-        <p14:creationId xmlns:p14="http://schemas.microsoft.com/office/powerpoint/2010/main" val="47132617"/>
+        <p14:creationId xmlns:p14="http://schemas.microsoft.com/office/powerpoint/2010/main" val="1238093157"/>
       </p:ext>
     </p:extLst>
   </p:cSld>
@@ -9725,7 +9725,7 @@
           <p:nvPr/>
         </p:nvPicPr>
         <p:blipFill>
-          <a:blip xmlns:r="http://schemas.openxmlformats.org/officeDocument/2006/relationships" xmlns:a="http://schemas.openxmlformats.org/drawingml/2006/main" r:embed="Ra45e6ce6ead74b0d"/>
+          <a:blip xmlns:r="http://schemas.openxmlformats.org/officeDocument/2006/relationships" xmlns:a="http://schemas.openxmlformats.org/drawingml/2006/main" r:embed="Rea7a2e391d214974"/>
           <a:stretch xmlns:a="http://schemas.openxmlformats.org/drawingml/2006/main"/>
         </p:blipFill>
         <p:spPr>
@@ -9741,7 +9741,7 @@
     </p:spTree>
     <p:extLst>
       <p:ext uri="{BB962C8B-B14F-4D97-AF65-F5344CB8AC3E}">
-        <p14:creationId xmlns:p14="http://schemas.microsoft.com/office/powerpoint/2010/main" val="1121539078"/>
+        <p14:creationId xmlns:p14="http://schemas.microsoft.com/office/powerpoint/2010/main" val="488130477"/>
       </p:ext>
     </p:extLst>
   </p:cSld>
@@ -9769,7 +9769,7 @@
           <p:nvPr/>
         </p:nvPicPr>
         <p:blipFill>
-          <a:blip xmlns:r="http://schemas.openxmlformats.org/officeDocument/2006/relationships" xmlns:a="http://schemas.openxmlformats.org/drawingml/2006/main" r:embed="Rfd300bf223d34f18"/>
+          <a:blip xmlns:r="http://schemas.openxmlformats.org/officeDocument/2006/relationships" xmlns:a="http://schemas.openxmlformats.org/drawingml/2006/main" r:embed="R31022efe4dcd4877"/>
           <a:stretch xmlns:a="http://schemas.openxmlformats.org/drawingml/2006/main"/>
         </p:blipFill>
         <p:spPr>
@@ -9785,7 +9785,7 @@
     </p:spTree>
     <p:extLst>
       <p:ext uri="{BB962C8B-B14F-4D97-AF65-F5344CB8AC3E}">
-        <p14:creationId xmlns:p14="http://schemas.microsoft.com/office/powerpoint/2010/main" val="1791860052"/>
+        <p14:creationId xmlns:p14="http://schemas.microsoft.com/office/powerpoint/2010/main" val="516139923"/>
       </p:ext>
     </p:extLst>
   </p:cSld>
@@ -9813,7 +9813,7 @@
           <p:nvPr/>
         </p:nvPicPr>
         <p:blipFill>
-          <a:blip xmlns:r="http://schemas.openxmlformats.org/officeDocument/2006/relationships" xmlns:a="http://schemas.openxmlformats.org/drawingml/2006/main" r:embed="Ref51de5c966b47dd"/>
+          <a:blip xmlns:r="http://schemas.openxmlformats.org/officeDocument/2006/relationships" xmlns:a="http://schemas.openxmlformats.org/drawingml/2006/main" r:embed="Rce5dd81ddb464f9d"/>
           <a:stretch xmlns:a="http://schemas.openxmlformats.org/drawingml/2006/main"/>
         </p:blipFill>
         <p:spPr>
@@ -9829,7 +9829,7 @@
     </p:spTree>
     <p:extLst>
       <p:ext uri="{BB962C8B-B14F-4D97-AF65-F5344CB8AC3E}">
-        <p14:creationId xmlns:p14="http://schemas.microsoft.com/office/powerpoint/2010/main" val="485877200"/>
+        <p14:creationId xmlns:p14="http://schemas.microsoft.com/office/powerpoint/2010/main" val="1881968188"/>
       </p:ext>
     </p:extLst>
   </p:cSld>
@@ -9857,7 +9857,7 @@
           <p:nvPr/>
         </p:nvPicPr>
         <p:blipFill>
-          <a:blip xmlns:r="http://schemas.openxmlformats.org/officeDocument/2006/relationships" xmlns:a="http://schemas.openxmlformats.org/drawingml/2006/main" r:embed="Rcface79e0b0a44d7"/>
+          <a:blip xmlns:r="http://schemas.openxmlformats.org/officeDocument/2006/relationships" xmlns:a="http://schemas.openxmlformats.org/drawingml/2006/main" r:embed="R32a98937064f486c"/>
           <a:stretch xmlns:a="http://schemas.openxmlformats.org/drawingml/2006/main"/>
         </p:blipFill>
         <p:spPr>
@@ -9873,7 +9873,7 @@
     </p:spTree>
     <p:extLst>
       <p:ext uri="{BB962C8B-B14F-4D97-AF65-F5344CB8AC3E}">
-        <p14:creationId xmlns:p14="http://schemas.microsoft.com/office/powerpoint/2010/main" val="603427945"/>
+        <p14:creationId xmlns:p14="http://schemas.microsoft.com/office/powerpoint/2010/main" val="1922700190"/>
       </p:ext>
     </p:extLst>
   </p:cSld>
@@ -9901,7 +9901,7 @@
           <p:nvPr/>
         </p:nvPicPr>
         <p:blipFill>
-          <a:blip xmlns:r="http://schemas.openxmlformats.org/officeDocument/2006/relationships" xmlns:a="http://schemas.openxmlformats.org/drawingml/2006/main" r:embed="R221bf198a37f41ed"/>
+          <a:blip xmlns:r="http://schemas.openxmlformats.org/officeDocument/2006/relationships" xmlns:a="http://schemas.openxmlformats.org/drawingml/2006/main" r:embed="Rbee8e4c32c664822"/>
           <a:stretch xmlns:a="http://schemas.openxmlformats.org/drawingml/2006/main"/>
         </p:blipFill>
         <p:spPr>
@@ -9917,7 +9917,7 @@
     </p:spTree>
     <p:extLst>
       <p:ext uri="{BB962C8B-B14F-4D97-AF65-F5344CB8AC3E}">
-        <p14:creationId xmlns:p14="http://schemas.microsoft.com/office/powerpoint/2010/main" val="905968661"/>
+        <p14:creationId xmlns:p14="http://schemas.microsoft.com/office/powerpoint/2010/main" val="1580050360"/>
       </p:ext>
     </p:extLst>
   </p:cSld>
@@ -9945,7 +9945,7 @@
           <p:nvPr/>
         </p:nvPicPr>
         <p:blipFill>
-          <a:blip xmlns:r="http://schemas.openxmlformats.org/officeDocument/2006/relationships" xmlns:a="http://schemas.openxmlformats.org/drawingml/2006/main" r:embed="Re81b706db7d14706"/>
+          <a:blip xmlns:r="http://schemas.openxmlformats.org/officeDocument/2006/relationships" xmlns:a="http://schemas.openxmlformats.org/drawingml/2006/main" r:embed="R4e96ebf37660406d"/>
           <a:stretch xmlns:a="http://schemas.openxmlformats.org/drawingml/2006/main"/>
         </p:blipFill>
         <p:spPr>
@@ -9961,7 +9961,7 @@
     </p:spTree>
     <p:extLst>
       <p:ext uri="{BB962C8B-B14F-4D97-AF65-F5344CB8AC3E}">
-        <p14:creationId xmlns:p14="http://schemas.microsoft.com/office/powerpoint/2010/main" val="1572327062"/>
+        <p14:creationId xmlns:p14="http://schemas.microsoft.com/office/powerpoint/2010/main" val="1568591842"/>
       </p:ext>
     </p:extLst>
   </p:cSld>
@@ -9989,7 +9989,7 @@
           <p:nvPr/>
         </p:nvPicPr>
         <p:blipFill>
-          <a:blip xmlns:r="http://schemas.openxmlformats.org/officeDocument/2006/relationships" xmlns:a="http://schemas.openxmlformats.org/drawingml/2006/main" r:embed="R1d76561ec415462b"/>
+          <a:blip xmlns:r="http://schemas.openxmlformats.org/officeDocument/2006/relationships" xmlns:a="http://schemas.openxmlformats.org/drawingml/2006/main" r:embed="Rb03ae48d69ea4a63"/>
           <a:stretch xmlns:a="http://schemas.openxmlformats.org/drawingml/2006/main"/>
         </p:blipFill>
         <p:spPr>
@@ -10005,7 +10005,7 @@
     </p:spTree>
     <p:extLst>
       <p:ext uri="{BB962C8B-B14F-4D97-AF65-F5344CB8AC3E}">
-        <p14:creationId xmlns:p14="http://schemas.microsoft.com/office/powerpoint/2010/main" val="132672735"/>
+        <p14:creationId xmlns:p14="http://schemas.microsoft.com/office/powerpoint/2010/main" val="1814749150"/>
       </p:ext>
     </p:extLst>
   </p:cSld>
@@ -10033,7 +10033,7 @@
           <p:nvPr/>
         </p:nvPicPr>
         <p:blipFill>
-          <a:blip xmlns:r="http://schemas.openxmlformats.org/officeDocument/2006/relationships" xmlns:a="http://schemas.openxmlformats.org/drawingml/2006/main" r:embed="R72f1b6fd92e344f6"/>
+          <a:blip xmlns:r="http://schemas.openxmlformats.org/officeDocument/2006/relationships" xmlns:a="http://schemas.openxmlformats.org/drawingml/2006/main" r:embed="R8824a03df8f0431c"/>
           <a:stretch xmlns:a="http://schemas.openxmlformats.org/drawingml/2006/main"/>
         </p:blipFill>
         <p:spPr>
@@ -10049,7 +10049,7 @@
     </p:spTree>
     <p:extLst>
       <p:ext uri="{BB962C8B-B14F-4D97-AF65-F5344CB8AC3E}">
-        <p14:creationId xmlns:p14="http://schemas.microsoft.com/office/powerpoint/2010/main" val="591822065"/>
+        <p14:creationId xmlns:p14="http://schemas.microsoft.com/office/powerpoint/2010/main" val="1591897054"/>
       </p:ext>
     </p:extLst>
   </p:cSld>

--- a/teaching/macro-applications/downloads/lecture_3.pptx
+++ b/teaching/macro-applications/downloads/lecture_3.pptx
@@ -2,45 +2,44 @@
 <file path=ppt/presentation.xml><?xml version="1.0" encoding="utf-8"?>
 <p:presentation xmlns:p="http://schemas.openxmlformats.org/presentationml/2006/main">
   <p:sldMasterIdLst>
-    <p:sldMasterId xmlns:r="http://schemas.openxmlformats.org/officeDocument/2006/relationships" id="2147483648" r:id="Rc4613fa455eb4877"/>
+    <p:sldMasterId xmlns:r="http://schemas.openxmlformats.org/officeDocument/2006/relationships" id="2147483648" r:id="R50c393809d2f4320"/>
   </p:sldMasterIdLst>
   <p:notesMasterIdLst>
-    <p:notesMasterId xmlns:r="http://schemas.openxmlformats.org/officeDocument/2006/relationships" r:id="R4f5dde856672442a"/>
+    <p:notesMasterId xmlns:r="http://schemas.openxmlformats.org/officeDocument/2006/relationships" r:id="R5b15bebef47e4eb0"/>
   </p:notesMasterIdLst>
   <p:sldIdLst>
-    <p:sldId xmlns:r="http://schemas.openxmlformats.org/officeDocument/2006/relationships" id="256" r:id="R02170ea269874f18"/>
-    <p:sldId xmlns:r="http://schemas.openxmlformats.org/officeDocument/2006/relationships" id="257" r:id="R215dff669dc44170"/>
-    <p:sldId xmlns:r="http://schemas.openxmlformats.org/officeDocument/2006/relationships" id="258" r:id="R0be566171e544a7a"/>
-    <p:sldId xmlns:r="http://schemas.openxmlformats.org/officeDocument/2006/relationships" id="259" r:id="Rc7e9ab2fe0a54d7d"/>
-    <p:sldId xmlns:r="http://schemas.openxmlformats.org/officeDocument/2006/relationships" id="260" r:id="R3f000d1f02974ed2"/>
-    <p:sldId xmlns:r="http://schemas.openxmlformats.org/officeDocument/2006/relationships" id="261" r:id="R8990d64007ac4d3f"/>
-    <p:sldId xmlns:r="http://schemas.openxmlformats.org/officeDocument/2006/relationships" id="262" r:id="R566d1c5cb37f4db5"/>
-    <p:sldId xmlns:r="http://schemas.openxmlformats.org/officeDocument/2006/relationships" id="263" r:id="R3f01676a6f5d4437"/>
-    <p:sldId xmlns:r="http://schemas.openxmlformats.org/officeDocument/2006/relationships" id="264" r:id="Rd19f72a024f1419e"/>
-    <p:sldId xmlns:r="http://schemas.openxmlformats.org/officeDocument/2006/relationships" id="265" r:id="R66f4c182ee824723"/>
-    <p:sldId xmlns:r="http://schemas.openxmlformats.org/officeDocument/2006/relationships" id="266" r:id="Rfeb7233fe8b44216"/>
-    <p:sldId xmlns:r="http://schemas.openxmlformats.org/officeDocument/2006/relationships" id="267" r:id="Ref407a978cfa45a3"/>
-    <p:sldId xmlns:r="http://schemas.openxmlformats.org/officeDocument/2006/relationships" id="268" r:id="R75e48663f682444c"/>
-    <p:sldId xmlns:r="http://schemas.openxmlformats.org/officeDocument/2006/relationships" id="269" r:id="Ra0ede555e0044128"/>
-    <p:sldId xmlns:r="http://schemas.openxmlformats.org/officeDocument/2006/relationships" id="270" r:id="R1f7ff7fc91f04d76"/>
-    <p:sldId xmlns:r="http://schemas.openxmlformats.org/officeDocument/2006/relationships" id="271" r:id="Rdfc3738a5e1d49c3"/>
-    <p:sldId xmlns:r="http://schemas.openxmlformats.org/officeDocument/2006/relationships" id="272" r:id="R0597f5388907465c"/>
-    <p:sldId xmlns:r="http://schemas.openxmlformats.org/officeDocument/2006/relationships" id="273" r:id="R6d0d2c8c113c4c96"/>
-    <p:sldId xmlns:r="http://schemas.openxmlformats.org/officeDocument/2006/relationships" id="274" r:id="R9a66721c55b04ff8"/>
-    <p:sldId xmlns:r="http://schemas.openxmlformats.org/officeDocument/2006/relationships" id="275" r:id="R658c076fd9b448a4"/>
-    <p:sldId xmlns:r="http://schemas.openxmlformats.org/officeDocument/2006/relationships" id="276" r:id="R858c67cc6f894e59"/>
-    <p:sldId xmlns:r="http://schemas.openxmlformats.org/officeDocument/2006/relationships" id="277" r:id="Rda83727111e54c6d"/>
-    <p:sldId xmlns:r="http://schemas.openxmlformats.org/officeDocument/2006/relationships" id="278" r:id="R9b094f9913ac4011"/>
-    <p:sldId xmlns:r="http://schemas.openxmlformats.org/officeDocument/2006/relationships" id="279" r:id="Rd670f69c8a064ca4"/>
-    <p:sldId xmlns:r="http://schemas.openxmlformats.org/officeDocument/2006/relationships" id="280" r:id="R6e9f996ac3314d6e"/>
-    <p:sldId xmlns:r="http://schemas.openxmlformats.org/officeDocument/2006/relationships" id="281" r:id="R5b4bf31563af4b78"/>
-    <p:sldId xmlns:r="http://schemas.openxmlformats.org/officeDocument/2006/relationships" id="282" r:id="R28f19b7b76924776"/>
-    <p:sldId xmlns:r="http://schemas.openxmlformats.org/officeDocument/2006/relationships" id="283" r:id="Ra9f22dbfcdec4c6b"/>
-    <p:sldId xmlns:r="http://schemas.openxmlformats.org/officeDocument/2006/relationships" id="284" r:id="R7225b91db9e9471d"/>
-    <p:sldId xmlns:r="http://schemas.openxmlformats.org/officeDocument/2006/relationships" id="285" r:id="R4b06b3c2c4fe4b36"/>
-    <p:sldId xmlns:r="http://schemas.openxmlformats.org/officeDocument/2006/relationships" id="286" r:id="R559d552eea2341e2"/>
-    <p:sldId xmlns:r="http://schemas.openxmlformats.org/officeDocument/2006/relationships" id="287" r:id="Rd9bc280fa2b841a1"/>
-    <p:sldId xmlns:r="http://schemas.openxmlformats.org/officeDocument/2006/relationships" id="288" r:id="Refa194ef1ba447b8"/>
+    <p:sldId xmlns:r="http://schemas.openxmlformats.org/officeDocument/2006/relationships" id="256" r:id="R252c09e5729a441d"/>
+    <p:sldId xmlns:r="http://schemas.openxmlformats.org/officeDocument/2006/relationships" id="257" r:id="Rc985a8e7d2144049"/>
+    <p:sldId xmlns:r="http://schemas.openxmlformats.org/officeDocument/2006/relationships" id="258" r:id="Rf22156d1d08c4516"/>
+    <p:sldId xmlns:r="http://schemas.openxmlformats.org/officeDocument/2006/relationships" id="259" r:id="Re49233a4b5b84850"/>
+    <p:sldId xmlns:r="http://schemas.openxmlformats.org/officeDocument/2006/relationships" id="260" r:id="Rf07d86aefc6840b6"/>
+    <p:sldId xmlns:r="http://schemas.openxmlformats.org/officeDocument/2006/relationships" id="261" r:id="R2dbc37c34463404b"/>
+    <p:sldId xmlns:r="http://schemas.openxmlformats.org/officeDocument/2006/relationships" id="262" r:id="R1eecb2244ab948ac"/>
+    <p:sldId xmlns:r="http://schemas.openxmlformats.org/officeDocument/2006/relationships" id="263" r:id="Rb76cedb5378742af"/>
+    <p:sldId xmlns:r="http://schemas.openxmlformats.org/officeDocument/2006/relationships" id="264" r:id="R3217505334584724"/>
+    <p:sldId xmlns:r="http://schemas.openxmlformats.org/officeDocument/2006/relationships" id="265" r:id="Re97dfc4b37844def"/>
+    <p:sldId xmlns:r="http://schemas.openxmlformats.org/officeDocument/2006/relationships" id="266" r:id="Rb2441d981c614fed"/>
+    <p:sldId xmlns:r="http://schemas.openxmlformats.org/officeDocument/2006/relationships" id="267" r:id="R5dbcd65fdd834a02"/>
+    <p:sldId xmlns:r="http://schemas.openxmlformats.org/officeDocument/2006/relationships" id="268" r:id="R5210a919b857464e"/>
+    <p:sldId xmlns:r="http://schemas.openxmlformats.org/officeDocument/2006/relationships" id="269" r:id="R5314bd8dfa9f4e3b"/>
+    <p:sldId xmlns:r="http://schemas.openxmlformats.org/officeDocument/2006/relationships" id="270" r:id="R1ef619e6079844f7"/>
+    <p:sldId xmlns:r="http://schemas.openxmlformats.org/officeDocument/2006/relationships" id="271" r:id="Re11dce7cebd34d4a"/>
+    <p:sldId xmlns:r="http://schemas.openxmlformats.org/officeDocument/2006/relationships" id="272" r:id="R4a163c9e0e2449e7"/>
+    <p:sldId xmlns:r="http://schemas.openxmlformats.org/officeDocument/2006/relationships" id="273" r:id="Rc413555e1ddb4c8c"/>
+    <p:sldId xmlns:r="http://schemas.openxmlformats.org/officeDocument/2006/relationships" id="274" r:id="Re5a3ba9066754ab7"/>
+    <p:sldId xmlns:r="http://schemas.openxmlformats.org/officeDocument/2006/relationships" id="275" r:id="R6c6aee24b238410a"/>
+    <p:sldId xmlns:r="http://schemas.openxmlformats.org/officeDocument/2006/relationships" id="276" r:id="R9312c297670e4d03"/>
+    <p:sldId xmlns:r="http://schemas.openxmlformats.org/officeDocument/2006/relationships" id="277" r:id="Ra272090f07724bb1"/>
+    <p:sldId xmlns:r="http://schemas.openxmlformats.org/officeDocument/2006/relationships" id="278" r:id="R08df9296c9584852"/>
+    <p:sldId xmlns:r="http://schemas.openxmlformats.org/officeDocument/2006/relationships" id="279" r:id="Ra46cb714fd944bf1"/>
+    <p:sldId xmlns:r="http://schemas.openxmlformats.org/officeDocument/2006/relationships" id="280" r:id="R2a1c653fda07419e"/>
+    <p:sldId xmlns:r="http://schemas.openxmlformats.org/officeDocument/2006/relationships" id="281" r:id="R8e081b0b21dc4266"/>
+    <p:sldId xmlns:r="http://schemas.openxmlformats.org/officeDocument/2006/relationships" id="282" r:id="Re83a14fcd2b243ab"/>
+    <p:sldId xmlns:r="http://schemas.openxmlformats.org/officeDocument/2006/relationships" id="283" r:id="Rf890eef86b0949c0"/>
+    <p:sldId xmlns:r="http://schemas.openxmlformats.org/officeDocument/2006/relationships" id="284" r:id="Rd532589008c34c4b"/>
+    <p:sldId xmlns:r="http://schemas.openxmlformats.org/officeDocument/2006/relationships" id="285" r:id="R6a49e00e3ad74a17"/>
+    <p:sldId xmlns:r="http://schemas.openxmlformats.org/officeDocument/2006/relationships" id="286" r:id="R872d0432b6ce41a4"/>
+    <p:sldId xmlns:r="http://schemas.openxmlformats.org/officeDocument/2006/relationships" id="287" r:id="R4360b04ad37f4b87"/>
   </p:sldIdLst>
   <p:sldSz cx="12192000" cy="6858000"/>
   <p:notesSz cx="6858000" cy="9144000"/>
@@ -230,16 +229,16 @@
         <a:srgbClr val="96607D"/>
       </a:folHlink>
     </a:clrScheme>
-    <a:fontScheme name="Office">
+    <a:fontScheme name="">
       <a:majorFont>
-        <a:latin typeface="Calibri Light"/>
-        <a:ea typeface="Calibri Light"/>
-        <a:cs typeface="Calibri Light"/>
+        <a:latin typeface="Aptos"/>
+        <a:ea typeface=""/>
+        <a:cs typeface=""/>
       </a:majorFont>
       <a:minorFont>
-        <a:latin typeface="Calibri"/>
-        <a:ea typeface="Calibri"/>
-        <a:cs typeface="Calibri"/>
+        <a:latin typeface="Aptos"/>
+        <a:ea typeface=""/>
+        <a:cs typeface=""/>
       </a:minorFont>
     </a:fontScheme>
     <a:fmtScheme name="ChatGPT">
@@ -489,37 +488,7 @@
           </a:p>
           <a:p xmlns:a="http://schemas.openxmlformats.org/drawingml/2006/main">
             <a:r>
-              <a:t>The Economics of Brexit</a:t>
-            </a:r>
-          </a:p>
-          <a:p xmlns:a="http://schemas.openxmlformats.org/drawingml/2006/main">
-            <a:r>
-              <a:t/>
-            </a:r>
-          </a:p>
-          <a:p xmlns:a="http://schemas.openxmlformats.org/drawingml/2006/main">
-            <a:r>
-              <a:t>Lecture 3: The Single Market</a:t>
-            </a:r>
-          </a:p>
-          <a:p xmlns:a="http://schemas.openxmlformats.org/drawingml/2006/main">
-            <a:r>
-              <a:t/>
-            </a:r>
-          </a:p>
-          <a:p xmlns:a="http://schemas.openxmlformats.org/drawingml/2006/main">
-            <a:r>
-              <a:t>Dr David Chivers</a:t>
-            </a:r>
-          </a:p>
-          <a:p xmlns:a="http://schemas.openxmlformats.org/drawingml/2006/main">
-            <a:r>
-              <a:t/>
-            </a:r>
-          </a:p>
-          <a:p xmlns:a="http://schemas.openxmlformats.org/drawingml/2006/main">
-            <a:r>
-              <a:t>Macroeconomic Applications and Policy</a:t>
+              <a:t>The Economics of Brexit Lecture 3: The Single Market Dr David Chivers Macroeconomic Applications and Policy</a:t>
             </a:r>
           </a:p>
           <a:p xmlns:a="http://schemas.openxmlformats.org/drawingml/2006/main">
@@ -624,132 +593,27 @@
           </a:p>
           <a:p xmlns:a="http://schemas.openxmlformats.org/drawingml/2006/main">
             <a:r>
-              <a:t>https://davidchivers.co.uk/teaching/macro-applications/lecture_3.html#/l3-s10</a:t>
-            </a:r>
-          </a:p>
-          <a:p xmlns:a="http://schemas.openxmlformats.org/drawingml/2006/main">
-            <a:r>
-              <a:t/>
-            </a:r>
-          </a:p>
-          <a:p xmlns:a="http://schemas.openxmlformats.org/drawingml/2006/main">
-            <a:r>
-              <a:t>Equilibrium in the Home market</a:t>
-            </a:r>
-          </a:p>
-          <a:p xmlns:a="http://schemas.openxmlformats.org/drawingml/2006/main">
-            <a:r>
-              <a:t/>
-            </a:r>
-          </a:p>
-          <a:p xmlns:a="http://schemas.openxmlformats.org/drawingml/2006/main">
-            <a:r>
-              <a:t>Notice that </a:t>
-            </a:r>
-          </a:p>
-          <a:p xmlns:a="http://schemas.openxmlformats.org/drawingml/2006/main">
-            <a:r>
-              <a:t>𝑥</a:t>
-            </a:r>
-          </a:p>
-          <a:p xmlns:a="http://schemas.openxmlformats.org/drawingml/2006/main">
-            <a:r>
-              <a:t>&gt;</a:t>
-            </a:r>
-          </a:p>
-          <a:p xmlns:a="http://schemas.openxmlformats.org/drawingml/2006/main">
-            <a:r>
-              <a:t>𝑦</a:t>
-            </a:r>
-          </a:p>
-          <a:p xmlns:a="http://schemas.openxmlformats.org/drawingml/2006/main">
-            <a:r>
-              <a:t> when transport costs are positive.</a:t>
-            </a:r>
-          </a:p>
-          <a:p xmlns:a="http://schemas.openxmlformats.org/drawingml/2006/main">
-            <a:r>
-              <a:t/>
-            </a:r>
-          </a:p>
-          <a:p xmlns:a="http://schemas.openxmlformats.org/drawingml/2006/main">
-            <a:r>
-              <a:t>By symmetry,</a:t>
-            </a:r>
-          </a:p>
-          <a:p xmlns:a="http://schemas.openxmlformats.org/drawingml/2006/main">
-            <a:r>
-              <a:t/>
-            </a:r>
-          </a:p>
-          <a:p xmlns:a="http://schemas.openxmlformats.org/drawingml/2006/main">
-            <a:r>
-              <a:t>𝑥</a:t>
-            </a:r>
-          </a:p>
-          <a:p xmlns:a="http://schemas.openxmlformats.org/drawingml/2006/main">
-            <a:r>
-              <a:t>*</a:t>
-            </a:r>
-          </a:p>
-          <a:p xmlns:a="http://schemas.openxmlformats.org/drawingml/2006/main">
-            <a:r>
-              <a:t>=</a:t>
-            </a:r>
-          </a:p>
-          <a:p xmlns:a="http://schemas.openxmlformats.org/drawingml/2006/main">
-            <a:r>
-              <a:t>𝑦</a:t>
-            </a:r>
-          </a:p>
-          <a:p xmlns:a="http://schemas.openxmlformats.org/drawingml/2006/main">
-            <a:r>
-              <a:t>,</a:t>
-            </a:r>
-          </a:p>
-          <a:p xmlns:a="http://schemas.openxmlformats.org/drawingml/2006/main">
-            <a:r>
-              <a:t>𝑦</a:t>
-            </a:r>
-          </a:p>
-          <a:p xmlns:a="http://schemas.openxmlformats.org/drawingml/2006/main">
-            <a:r>
-              <a:t>*</a:t>
-            </a:r>
-          </a:p>
-          <a:p xmlns:a="http://schemas.openxmlformats.org/drawingml/2006/main">
-            <a:r>
-              <a:t>=</a:t>
-            </a:r>
-          </a:p>
-          <a:p xmlns:a="http://schemas.openxmlformats.org/drawingml/2006/main">
-            <a:r>
-              <a:t>𝑥</a:t>
-            </a:r>
-          </a:p>
-          <a:p xmlns:a="http://schemas.openxmlformats.org/drawingml/2006/main">
-            <a:r>
-              <a:t>.</a:t>
-            </a:r>
-          </a:p>
-          <a:p xmlns:a="http://schemas.openxmlformats.org/drawingml/2006/main">
-            <a:r>
-              <a:t/>
-            </a:r>
-          </a:p>
-          <a:p xmlns:a="http://schemas.openxmlformats.org/drawingml/2006/main">
-            <a:r>
-              <a:t>Each firm takes a larger share of its domestic market because it faces no transport costs there.</a:t>
-            </a:r>
-          </a:p>
-          <a:p xmlns:a="http://schemas.openxmlformats.org/drawingml/2006/main">
-            <a:r>
-              <a:t/>
-            </a:r>
-          </a:p>
-          <a:p xmlns:a="http://schemas.openxmlformats.org/drawingml/2006/main">
-            <a:r>
-              <a:t>Home-market reaction functions for the two firms. The downward-sloping reactions intersect at equilibrium, with the domestic firm selling more than the foreign firm when transport costs are positive.</a:t>
+              <a:t>https://davidchivers.co.uk/teaching/macro-applications/lecture_3.html#/l3-s11</a:t>
+            </a:r>
+          </a:p>
+          <a:p xmlns:a="http://schemas.openxmlformats.org/drawingml/2006/main">
+            <a:r>
+              <a:t/>
+            </a:r>
+          </a:p>
+          <a:p xmlns:a="http://schemas.openxmlformats.org/drawingml/2006/main">
+            <a:r>
+              <a:t>“Reciprocal dumping” The Home firm’s mark-up is its price minus marginal cost: At home μ ≡ p − c \mu\equiv p-c Abroad μ * ≡ p * − c g \mu^*\equiv p^*-\frac{c}{g} Proposition: with positive transport costs, the domestic mark-up is higher than the foreign mark-up. Proof: the countries are identical, so Z = Z * Z=Z^* and p = p * ≡ p F T p=p^*\equiv p^{FT} . Since g &lt; 1 g&lt;1 , it follows that μ &gt; μ * \mu&gt;\mu^* .</a:t>
+            </a:r>
+          </a:p>
+          <a:p xmlns:a="http://schemas.openxmlformats.org/drawingml/2006/main">
+            <a:r>
+              <a:t/>
+            </a:r>
+          </a:p>
+          <a:p xmlns:a="http://schemas.openxmlformats.org/drawingml/2006/main">
+            <a:r>
+              <a:t/>
             </a:r>
           </a:p>
           <a:p xmlns:a="http://schemas.openxmlformats.org/drawingml/2006/main">
@@ -844,242 +708,17 @@
           </a:p>
           <a:p xmlns:a="http://schemas.openxmlformats.org/drawingml/2006/main">
             <a:r>
-              <a:t>https://davidchivers.co.uk/teaching/macro-applications/lecture_3.html#/l3-s11</a:t>
-            </a:r>
-          </a:p>
-          <a:p xmlns:a="http://schemas.openxmlformats.org/drawingml/2006/main">
-            <a:r>
-              <a:t/>
-            </a:r>
-          </a:p>
-          <a:p xmlns:a="http://schemas.openxmlformats.org/drawingml/2006/main">
-            <a:r>
-              <a:t>“Reciprocal dumping”</a:t>
-            </a:r>
-          </a:p>
-          <a:p xmlns:a="http://schemas.openxmlformats.org/drawingml/2006/main">
-            <a:r>
-              <a:t/>
-            </a:r>
-          </a:p>
-          <a:p xmlns:a="http://schemas.openxmlformats.org/drawingml/2006/main">
-            <a:r>
-              <a:t>Define Home’s mark-up in each country:</a:t>
-            </a:r>
-          </a:p>
-          <a:p xmlns:a="http://schemas.openxmlformats.org/drawingml/2006/main">
-            <a:r>
-              <a:t/>
-            </a:r>
-          </a:p>
-          <a:p xmlns:a="http://schemas.openxmlformats.org/drawingml/2006/main">
-            <a:r>
-              <a:t>𝜇</a:t>
-            </a:r>
-          </a:p>
-          <a:p xmlns:a="http://schemas.openxmlformats.org/drawingml/2006/main">
-            <a:r>
-              <a:t>≡</a:t>
-            </a:r>
-          </a:p>
-          <a:p xmlns:a="http://schemas.openxmlformats.org/drawingml/2006/main">
-            <a:r>
-              <a:t>𝑝</a:t>
-            </a:r>
-          </a:p>
-          <a:p xmlns:a="http://schemas.openxmlformats.org/drawingml/2006/main">
-            <a:r>
-              <a:t>−</a:t>
-            </a:r>
-          </a:p>
-          <a:p xmlns:a="http://schemas.openxmlformats.org/drawingml/2006/main">
-            <a:r>
-              <a:t>𝑐</a:t>
-            </a:r>
-          </a:p>
-          <a:p xmlns:a="http://schemas.openxmlformats.org/drawingml/2006/main">
-            <a:r>
-              <a:t>,</a:t>
-            </a:r>
-          </a:p>
-          <a:p xmlns:a="http://schemas.openxmlformats.org/drawingml/2006/main">
-            <a:r>
-              <a:t>𝜇</a:t>
-            </a:r>
-          </a:p>
-          <a:p xmlns:a="http://schemas.openxmlformats.org/drawingml/2006/main">
-            <a:r>
-              <a:t>*</a:t>
-            </a:r>
-          </a:p>
-          <a:p xmlns:a="http://schemas.openxmlformats.org/drawingml/2006/main">
-            <a:r>
-              <a:t>≡</a:t>
-            </a:r>
-          </a:p>
-          <a:p xmlns:a="http://schemas.openxmlformats.org/drawingml/2006/main">
-            <a:r>
-              <a:t>𝑝</a:t>
-            </a:r>
-          </a:p>
-          <a:p xmlns:a="http://schemas.openxmlformats.org/drawingml/2006/main">
-            <a:r>
-              <a:t>*</a:t>
-            </a:r>
-          </a:p>
-          <a:p xmlns:a="http://schemas.openxmlformats.org/drawingml/2006/main">
-            <a:r>
-              <a:t>−</a:t>
-            </a:r>
-          </a:p>
-          <a:p xmlns:a="http://schemas.openxmlformats.org/drawingml/2006/main">
-            <a:r>
-              <a:t>𝑐</a:t>
-            </a:r>
-          </a:p>
-          <a:p xmlns:a="http://schemas.openxmlformats.org/drawingml/2006/main">
-            <a:r>
-              <a:t>𝑔</a:t>
-            </a:r>
-          </a:p>
-          <a:p xmlns:a="http://schemas.openxmlformats.org/drawingml/2006/main">
-            <a:r>
-              <a:t>.</a:t>
-            </a:r>
-          </a:p>
-          <a:p xmlns:a="http://schemas.openxmlformats.org/drawingml/2006/main">
-            <a:r>
-              <a:t/>
-            </a:r>
-          </a:p>
-          <a:p xmlns:a="http://schemas.openxmlformats.org/drawingml/2006/main">
-            <a:r>
-              <a:t>Proposition: with positive transport costs, the domestic mark-up is higher than the foreign mark-up.</a:t>
-            </a:r>
-          </a:p>
-          <a:p xmlns:a="http://schemas.openxmlformats.org/drawingml/2006/main">
-            <a:r>
-              <a:t/>
-            </a:r>
-          </a:p>
-          <a:p xmlns:a="http://schemas.openxmlformats.org/drawingml/2006/main">
-            <a:r>
-              <a:t>Proof: the countries are identical, so </a:t>
-            </a:r>
-          </a:p>
-          <a:p xmlns:a="http://schemas.openxmlformats.org/drawingml/2006/main">
-            <a:r>
-              <a:t>𝑍</a:t>
-            </a:r>
-          </a:p>
-          <a:p xmlns:a="http://schemas.openxmlformats.org/drawingml/2006/main">
-            <a:r>
-              <a:t>=</a:t>
-            </a:r>
-          </a:p>
-          <a:p xmlns:a="http://schemas.openxmlformats.org/drawingml/2006/main">
-            <a:r>
-              <a:t>𝑍</a:t>
-            </a:r>
-          </a:p>
-          <a:p xmlns:a="http://schemas.openxmlformats.org/drawingml/2006/main">
-            <a:r>
-              <a:t>*</a:t>
-            </a:r>
-          </a:p>
-          <a:p xmlns:a="http://schemas.openxmlformats.org/drawingml/2006/main">
-            <a:r>
-              <a:t> and </a:t>
-            </a:r>
-          </a:p>
-          <a:p xmlns:a="http://schemas.openxmlformats.org/drawingml/2006/main">
-            <a:r>
-              <a:t>𝑝</a:t>
-            </a:r>
-          </a:p>
-          <a:p xmlns:a="http://schemas.openxmlformats.org/drawingml/2006/main">
-            <a:r>
-              <a:t>=</a:t>
-            </a:r>
-          </a:p>
-          <a:p xmlns:a="http://schemas.openxmlformats.org/drawingml/2006/main">
-            <a:r>
-              <a:t>𝑝</a:t>
-            </a:r>
-          </a:p>
-          <a:p xmlns:a="http://schemas.openxmlformats.org/drawingml/2006/main">
-            <a:r>
-              <a:t>*</a:t>
-            </a:r>
-          </a:p>
-          <a:p xmlns:a="http://schemas.openxmlformats.org/drawingml/2006/main">
-            <a:r>
-              <a:t>≡</a:t>
-            </a:r>
-          </a:p>
-          <a:p xmlns:a="http://schemas.openxmlformats.org/drawingml/2006/main">
-            <a:r>
-              <a:t>𝑝</a:t>
-            </a:r>
-          </a:p>
-          <a:p xmlns:a="http://schemas.openxmlformats.org/drawingml/2006/main">
-            <a:r>
-              <a:t>𝐹</a:t>
-            </a:r>
-          </a:p>
-          <a:p xmlns:a="http://schemas.openxmlformats.org/drawingml/2006/main">
-            <a:r>
-              <a:t>𝑇</a:t>
-            </a:r>
-          </a:p>
-          <a:p xmlns:a="http://schemas.openxmlformats.org/drawingml/2006/main">
-            <a:r>
-              <a:t>. Since </a:t>
-            </a:r>
-          </a:p>
-          <a:p xmlns:a="http://schemas.openxmlformats.org/drawingml/2006/main">
-            <a:r>
-              <a:t>𝑔</a:t>
-            </a:r>
-          </a:p>
-          <a:p xmlns:a="http://schemas.openxmlformats.org/drawingml/2006/main">
-            <a:r>
-              <a:t>&lt;</a:t>
-            </a:r>
-          </a:p>
-          <a:p xmlns:a="http://schemas.openxmlformats.org/drawingml/2006/main">
-            <a:r>
-              <a:t>1</a:t>
-            </a:r>
-          </a:p>
-          <a:p xmlns:a="http://schemas.openxmlformats.org/drawingml/2006/main">
-            <a:r>
-              <a:t>, it follows that </a:t>
-            </a:r>
-          </a:p>
-          <a:p xmlns:a="http://schemas.openxmlformats.org/drawingml/2006/main">
-            <a:r>
-              <a:t>𝜇</a:t>
-            </a:r>
-          </a:p>
-          <a:p xmlns:a="http://schemas.openxmlformats.org/drawingml/2006/main">
-            <a:r>
-              <a:t>&gt;</a:t>
-            </a:r>
-          </a:p>
-          <a:p xmlns:a="http://schemas.openxmlformats.org/drawingml/2006/main">
-            <a:r>
-              <a:t>𝜇</a:t>
-            </a:r>
-          </a:p>
-          <a:p xmlns:a="http://schemas.openxmlformats.org/drawingml/2006/main">
-            <a:r>
-              <a:t>*</a:t>
-            </a:r>
-          </a:p>
-          <a:p xmlns:a="http://schemas.openxmlformats.org/drawingml/2006/main">
-            <a:r>
-              <a:t>.</a:t>
+              <a:t>https://davidchivers.co.uk/teaching/macro-applications/lecture_3.html#/l3-s12</a:t>
+            </a:r>
+          </a:p>
+          <a:p xmlns:a="http://schemas.openxmlformats.org/drawingml/2006/main">
+            <a:r>
+              <a:t/>
+            </a:r>
+          </a:p>
+          <a:p xmlns:a="http://schemas.openxmlformats.org/drawingml/2006/main">
+            <a:r>
+              <a:t>Consequences of international trade Is there a pro-competitive effect? If so, does it increase welfare in all countries?</a:t>
             </a:r>
           </a:p>
           <a:p xmlns:a="http://schemas.openxmlformats.org/drawingml/2006/main">
@@ -1184,62 +823,27 @@
           </a:p>
           <a:p xmlns:a="http://schemas.openxmlformats.org/drawingml/2006/main">
             <a:r>
-              <a:t>https://davidchivers.co.uk/teaching/macro-applications/lecture_3.html#/l3-s12</a:t>
-            </a:r>
-          </a:p>
-          <a:p xmlns:a="http://schemas.openxmlformats.org/drawingml/2006/main">
-            <a:r>
-              <a:t/>
-            </a:r>
-          </a:p>
-          <a:p xmlns:a="http://schemas.openxmlformats.org/drawingml/2006/main">
-            <a:r>
-              <a:t>Consequences of international trade</a:t>
-            </a:r>
-          </a:p>
-          <a:p xmlns:a="http://schemas.openxmlformats.org/drawingml/2006/main">
-            <a:r>
-              <a:t>Question 1</a:t>
-            </a:r>
-          </a:p>
-          <a:p xmlns:a="http://schemas.openxmlformats.org/drawingml/2006/main">
-            <a:r>
-              <a:t/>
-            </a:r>
-          </a:p>
-          <a:p xmlns:a="http://schemas.openxmlformats.org/drawingml/2006/main">
-            <a:r>
-              <a:t>Is there a pro-competitive effect?</a:t>
-            </a:r>
-          </a:p>
-          <a:p xmlns:a="http://schemas.openxmlformats.org/drawingml/2006/main">
-            <a:r>
-              <a:t/>
-            </a:r>
-          </a:p>
-          <a:p xmlns:a="http://schemas.openxmlformats.org/drawingml/2006/main">
-            <a:r>
-              <a:t>Question 2</a:t>
-            </a:r>
-          </a:p>
-          <a:p xmlns:a="http://schemas.openxmlformats.org/drawingml/2006/main">
-            <a:r>
-              <a:t/>
-            </a:r>
-          </a:p>
-          <a:p xmlns:a="http://schemas.openxmlformats.org/drawingml/2006/main">
-            <a:r>
-              <a:t>If so, does it increase welfare in all countries?</a:t>
-            </a:r>
-          </a:p>
-          <a:p xmlns:a="http://schemas.openxmlformats.org/drawingml/2006/main">
-            <a:r>
-              <a:t/>
-            </a:r>
-          </a:p>
-          <a:p xmlns:a="http://schemas.openxmlformats.org/drawingml/2006/main">
-            <a:r>
-              <a:t/>
+              <a:t>https://davidchivers.co.uk/teaching/macro-applications/lecture_3.html#/l3-s13</a:t>
+            </a:r>
+          </a:p>
+          <a:p xmlns:a="http://schemas.openxmlformats.org/drawingml/2006/main">
+            <a:r>
+              <a:t/>
+            </a:r>
+          </a:p>
+          <a:p xmlns:a="http://schemas.openxmlformats.org/drawingml/2006/main">
+            <a:r>
+              <a:t>Welfare effects: consumer surplus Δ C S = A + B \Delta CS=A+B A Lower price on existing consumption. B Surplus from additional consumption. Consumers buy more at a lower price: the pro-competitive effect . Blue: monopoly. Orange: after trade. Consumption rises from x M x^M to Z Z .</a:t>
+            </a:r>
+          </a:p>
+          <a:p xmlns:a="http://schemas.openxmlformats.org/drawingml/2006/main">
+            <a:r>
+              <a:t/>
+            </a:r>
+          </a:p>
+          <a:p xmlns:a="http://schemas.openxmlformats.org/drawingml/2006/main">
+            <a:r>
+              <a:t>Consumer surplus rises by A plus B as the price falls from p M to p FT. A is the saving on original consumption; B is the surplus from additional consumption.</a:t>
             </a:r>
           </a:p>
           <a:p xmlns:a="http://schemas.openxmlformats.org/drawingml/2006/main">
@@ -1334,77 +938,27 @@
           </a:p>
           <a:p xmlns:a="http://schemas.openxmlformats.org/drawingml/2006/main">
             <a:r>
-              <a:t>https://davidchivers.co.uk/teaching/macro-applications/lecture_3.html#/l3-s13</a:t>
-            </a:r>
-          </a:p>
-          <a:p xmlns:a="http://schemas.openxmlformats.org/drawingml/2006/main">
-            <a:r>
-              <a:t/>
-            </a:r>
-          </a:p>
-          <a:p xmlns:a="http://schemas.openxmlformats.org/drawingml/2006/main">
-            <a:r>
-              <a:t>Welfare effects: consumer surplus</a:t>
-            </a:r>
-          </a:p>
-          <a:p xmlns:a="http://schemas.openxmlformats.org/drawingml/2006/main">
-            <a:r>
-              <a:t/>
-            </a:r>
-          </a:p>
-          <a:p xmlns:a="http://schemas.openxmlformats.org/drawingml/2006/main">
-            <a:r>
-              <a:t>Δ</a:t>
-            </a:r>
-          </a:p>
-          <a:p xmlns:a="http://schemas.openxmlformats.org/drawingml/2006/main">
-            <a:r>
-              <a:t>𝐶</a:t>
-            </a:r>
-          </a:p>
-          <a:p xmlns:a="http://schemas.openxmlformats.org/drawingml/2006/main">
-            <a:r>
-              <a:t>𝑆</a:t>
-            </a:r>
-          </a:p>
-          <a:p xmlns:a="http://schemas.openxmlformats.org/drawingml/2006/main">
-            <a:r>
-              <a:t>=</a:t>
-            </a:r>
-          </a:p>
-          <a:p xmlns:a="http://schemas.openxmlformats.org/drawingml/2006/main">
-            <a:r>
-              <a:t>𝐴</a:t>
-            </a:r>
-          </a:p>
-          <a:p xmlns:a="http://schemas.openxmlformats.org/drawingml/2006/main">
-            <a:r>
-              <a:t>+</a:t>
-            </a:r>
-          </a:p>
-          <a:p xmlns:a="http://schemas.openxmlformats.org/drawingml/2006/main">
-            <a:r>
-              <a:t>𝐵</a:t>
-            </a:r>
-          </a:p>
-          <a:p xmlns:a="http://schemas.openxmlformats.org/drawingml/2006/main">
-            <a:r>
-              <a:t/>
-            </a:r>
-          </a:p>
-          <a:p xmlns:a="http://schemas.openxmlformats.org/drawingml/2006/main">
-            <a:r>
-              <a:t>Consumers can consume a larger quantity at a lower price under free trade: the pro-competitive effect.</a:t>
-            </a:r>
-          </a:p>
-          <a:p xmlns:a="http://schemas.openxmlformats.org/drawingml/2006/main">
-            <a:r>
-              <a:t/>
-            </a:r>
-          </a:p>
-          <a:p xmlns:a="http://schemas.openxmlformats.org/drawingml/2006/main">
-            <a:r>
-              <a:t>Consumer-surplus gain from integration. Price falls from the monopoly price to the free-trade price and consumption rises. The gain comprises areas A and B.</a:t>
+              <a:t>https://davidchivers.co.uk/teaching/macro-applications/lecture_3.html#/l3-s14</a:t>
+            </a:r>
+          </a:p>
+          <a:p xmlns:a="http://schemas.openxmlformats.org/drawingml/2006/main">
+            <a:r>
+              <a:t/>
+            </a:r>
+          </a:p>
+          <a:p xmlns:a="http://schemas.openxmlformats.org/drawingml/2006/main">
+            <a:r>
+              <a:t>Welfare effects: producer surplus Δ P S = − A − C + D \Delta PS=-A-C+D −A Lower price on original monopoly sales. −C Extra transport cost on original sales now made abroad. +D Margin on new sales, after export costs. By symmetry, each firm’s total sales equal Home consumption, Z Z . Its domestic sales are x x .</a:t>
+            </a:r>
+          </a:p>
+          <a:p xmlns:a="http://schemas.openxmlformats.org/drawingml/2006/main">
+            <a:r>
+              <a:t/>
+            </a:r>
+          </a:p>
+          <a:p xmlns:a="http://schemas.openxmlformats.org/drawingml/2006/main">
+            <a:r>
+              <a:t>Producer surplus changes by minus A minus C plus D. C is extra transport cost on original monopoly sales shifted abroad; D is the margin on additional sales after export costs.</a:t>
             </a:r>
           </a:p>
           <a:p xmlns:a="http://schemas.openxmlformats.org/drawingml/2006/main">
@@ -1499,92 +1053,27 @@
           </a:p>
           <a:p xmlns:a="http://schemas.openxmlformats.org/drawingml/2006/main">
             <a:r>
-              <a:t>https://davidchivers.co.uk/teaching/macro-applications/lecture_3.html#/l3-s14</a:t>
-            </a:r>
-          </a:p>
-          <a:p xmlns:a="http://schemas.openxmlformats.org/drawingml/2006/main">
-            <a:r>
-              <a:t/>
-            </a:r>
-          </a:p>
-          <a:p xmlns:a="http://schemas.openxmlformats.org/drawingml/2006/main">
-            <a:r>
-              <a:t>Welfare effects: producer surplus</a:t>
-            </a:r>
-          </a:p>
-          <a:p xmlns:a="http://schemas.openxmlformats.org/drawingml/2006/main">
-            <a:r>
-              <a:t/>
-            </a:r>
-          </a:p>
-          <a:p xmlns:a="http://schemas.openxmlformats.org/drawingml/2006/main">
-            <a:r>
-              <a:t>Fall in the mark-up on monopoly sales: </a:t>
-            </a:r>
-          </a:p>
-          <a:p xmlns:a="http://schemas.openxmlformats.org/drawingml/2006/main">
-            <a:r>
-              <a:t>−</a:t>
-            </a:r>
-          </a:p>
-          <a:p xmlns:a="http://schemas.openxmlformats.org/drawingml/2006/main">
-            <a:r>
-              <a:t>𝐴</a:t>
-            </a:r>
-          </a:p>
-          <a:p xmlns:a="http://schemas.openxmlformats.org/drawingml/2006/main">
-            <a:r>
-              <a:t>.</a:t>
-            </a:r>
-          </a:p>
-          <a:p xmlns:a="http://schemas.openxmlformats.org/drawingml/2006/main">
-            <a:r>
-              <a:t>Further fall in the mark-up on monopoly sales now made in the foreign market: </a:t>
-            </a:r>
-          </a:p>
-          <a:p xmlns:a="http://schemas.openxmlformats.org/drawingml/2006/main">
-            <a:r>
-              <a:t>−</a:t>
-            </a:r>
-          </a:p>
-          <a:p xmlns:a="http://schemas.openxmlformats.org/drawingml/2006/main">
-            <a:r>
-              <a:t>𝐶</a:t>
-            </a:r>
-          </a:p>
-          <a:p xmlns:a="http://schemas.openxmlformats.org/drawingml/2006/main">
-            <a:r>
-              <a:t>.</a:t>
-            </a:r>
-          </a:p>
-          <a:p xmlns:a="http://schemas.openxmlformats.org/drawingml/2006/main">
-            <a:r>
-              <a:t>Additional mark-up on new sales: </a:t>
-            </a:r>
-          </a:p>
-          <a:p xmlns:a="http://schemas.openxmlformats.org/drawingml/2006/main">
-            <a:r>
-              <a:t>+</a:t>
-            </a:r>
-          </a:p>
-          <a:p xmlns:a="http://schemas.openxmlformats.org/drawingml/2006/main">
-            <a:r>
-              <a:t>𝐷</a:t>
-            </a:r>
-          </a:p>
-          <a:p xmlns:a="http://schemas.openxmlformats.org/drawingml/2006/main">
-            <a:r>
-              <a:t>.</a:t>
-            </a:r>
-          </a:p>
-          <a:p xmlns:a="http://schemas.openxmlformats.org/drawingml/2006/main">
-            <a:r>
-              <a:t/>
-            </a:r>
-          </a:p>
-          <a:p xmlns:a="http://schemas.openxmlformats.org/drawingml/2006/main">
-            <a:r>
-              <a:t>Producer-surplus decomposition under integration. Domestic mark-ups fall, exports incur transport costs, and new sales generate additional margin. The diagram labels the losses A and C and gain D.</a:t>
+              <a:t>https://davidchivers.co.uk/teaching/macro-applications/lecture_3.html#/l3-s15</a:t>
+            </a:r>
+          </a:p>
+          <a:p xmlns:a="http://schemas.openxmlformats.org/drawingml/2006/main">
+            <a:r>
+              <a:t/>
+            </a:r>
+          </a:p>
+          <a:p xmlns:a="http://schemas.openxmlformats.org/drawingml/2006/main">
+            <a:r>
+              <a:t>Welfare effects: aggregate Add the two effects Δ W = B + D − C \Delta W=B+D-C A cancels: it is a transfer from producers to consumers. Welfare rises if B + D &gt; C B+D&gt;C and falls if B + D &lt; C B+D&lt;C . What if transport costs are zero? Then C = 0 C=0 : welfare rises. Green areas are net gains; the hatched orange area is a resource cost.</a:t>
+            </a:r>
+          </a:p>
+          <a:p xmlns:a="http://schemas.openxmlformats.org/drawingml/2006/main">
+            <a:r>
+              <a:t/>
+            </a:r>
+          </a:p>
+          <a:p xmlns:a="http://schemas.openxmlformats.org/drawingml/2006/main">
+            <a:r>
+              <a:t>Area A cancels between consumers and producers. Net welfare is B plus D minus C. With no transport costs C is zero.</a:t>
             </a:r>
           </a:p>
           <a:p xmlns:a="http://schemas.openxmlformats.org/drawingml/2006/main">
@@ -1679,77 +1168,27 @@
           </a:p>
           <a:p xmlns:a="http://schemas.openxmlformats.org/drawingml/2006/main">
             <a:r>
-              <a:t>https://davidchivers.co.uk/teaching/macro-applications/lecture_3.html#/l3-s15</a:t>
-            </a:r>
-          </a:p>
-          <a:p xmlns:a="http://schemas.openxmlformats.org/drawingml/2006/main">
-            <a:r>
-              <a:t/>
-            </a:r>
-          </a:p>
-          <a:p xmlns:a="http://schemas.openxmlformats.org/drawingml/2006/main">
-            <a:r>
-              <a:t>Welfare effects: aggregate</a:t>
-            </a:r>
-          </a:p>
-          <a:p xmlns:a="http://schemas.openxmlformats.org/drawingml/2006/main">
-            <a:r>
-              <a:t/>
-            </a:r>
-          </a:p>
-          <a:p xmlns:a="http://schemas.openxmlformats.org/drawingml/2006/main">
-            <a:r>
-              <a:t>Overall welfare change</a:t>
-            </a:r>
-          </a:p>
-          <a:p xmlns:a="http://schemas.openxmlformats.org/drawingml/2006/main">
-            <a:r>
-              <a:t/>
-            </a:r>
-          </a:p>
-          <a:p xmlns:a="http://schemas.openxmlformats.org/drawingml/2006/main">
-            <a:r>
-              <a:t>𝐵</a:t>
-            </a:r>
-          </a:p>
-          <a:p xmlns:a="http://schemas.openxmlformats.org/drawingml/2006/main">
-            <a:r>
-              <a:t>+</a:t>
-            </a:r>
-          </a:p>
-          <a:p xmlns:a="http://schemas.openxmlformats.org/drawingml/2006/main">
-            <a:r>
-              <a:t>𝐷</a:t>
-            </a:r>
-          </a:p>
-          <a:p xmlns:a="http://schemas.openxmlformats.org/drawingml/2006/main">
-            <a:r>
-              <a:t>−</a:t>
-            </a:r>
-          </a:p>
-          <a:p xmlns:a="http://schemas.openxmlformats.org/drawingml/2006/main">
-            <a:r>
-              <a:t>𝐶</a:t>
-            </a:r>
-          </a:p>
-          <a:p xmlns:a="http://schemas.openxmlformats.org/drawingml/2006/main">
-            <a:r>
-              <a:t/>
-            </a:r>
-          </a:p>
-          <a:p xmlns:a="http://schemas.openxmlformats.org/drawingml/2006/main">
-            <a:r>
-              <a:t>What if there are no transport costs?</a:t>
-            </a:r>
-          </a:p>
-          <a:p xmlns:a="http://schemas.openxmlformats.org/drawingml/2006/main">
-            <a:r>
-              <a:t/>
-            </a:r>
-          </a:p>
-          <a:p xmlns:a="http://schemas.openxmlformats.org/drawingml/2006/main">
-            <a:r>
-              <a:t>Aggregate welfare diagram. Consumer and producer effects combine to B plus D minus C, with C representing a cost associated with transporting exports.</a:t>
+              <a:t>https://davidchivers.co.uk/teaching/macro-applications/lecture_3.html#/l3-s16</a:t>
+            </a:r>
+          </a:p>
+          <a:p xmlns:a="http://schemas.openxmlformats.org/drawingml/2006/main">
+            <a:r>
+              <a:t/>
+            </a:r>
+          </a:p>
+          <a:p xmlns:a="http://schemas.openxmlformats.org/drawingml/2006/main">
+            <a:r>
+              <a:t>Market size and industrial restructuring Questions What is the effect of an increased market size on the industry itself? Can some firms leave the market because of the increased competition? If so, is this beneficial for the countries involved?</a:t>
+            </a:r>
+          </a:p>
+          <a:p xmlns:a="http://schemas.openxmlformats.org/drawingml/2006/main">
+            <a:r>
+              <a:t/>
+            </a:r>
+          </a:p>
+          <a:p xmlns:a="http://schemas.openxmlformats.org/drawingml/2006/main">
+            <a:r>
+              <a:t/>
             </a:r>
           </a:p>
           <a:p xmlns:a="http://schemas.openxmlformats.org/drawingml/2006/main">
@@ -1844,37 +1283,17 @@
           </a:p>
           <a:p xmlns:a="http://schemas.openxmlformats.org/drawingml/2006/main">
             <a:r>
-              <a:t>https://davidchivers.co.uk/teaching/macro-applications/lecture_3.html#/l3-s16</a:t>
-            </a:r>
-          </a:p>
-          <a:p xmlns:a="http://schemas.openxmlformats.org/drawingml/2006/main">
-            <a:r>
-              <a:t/>
-            </a:r>
-          </a:p>
-          <a:p xmlns:a="http://schemas.openxmlformats.org/drawingml/2006/main">
-            <a:r>
-              <a:t>Market size and industrial restructuring</a:t>
-            </a:r>
-          </a:p>
-          <a:p xmlns:a="http://schemas.openxmlformats.org/drawingml/2006/main">
-            <a:r>
-              <a:t>Questions</a:t>
-            </a:r>
-          </a:p>
-          <a:p xmlns:a="http://schemas.openxmlformats.org/drawingml/2006/main">
-            <a:r>
-              <a:t>What is the effect of an increased market size on the industry itself?</a:t>
-            </a:r>
-          </a:p>
-          <a:p xmlns:a="http://schemas.openxmlformats.org/drawingml/2006/main">
-            <a:r>
-              <a:t>Can some firms leave the market because of the increased competition?</a:t>
-            </a:r>
-          </a:p>
-          <a:p xmlns:a="http://schemas.openxmlformats.org/drawingml/2006/main">
-            <a:r>
-              <a:t>If so, is this beneficial for the countries involved?</a:t>
+              <a:t>https://davidchivers.co.uk/teaching/macro-applications/lecture_3.html#/l3-s17</a:t>
+            </a:r>
+          </a:p>
+          <a:p xmlns:a="http://schemas.openxmlformats.org/drawingml/2006/main">
+            <a:r>
+              <a:t/>
+            </a:r>
+          </a:p>
+          <a:p xmlns:a="http://schemas.openxmlformats.org/drawingml/2006/main">
+            <a:r>
+              <a:t>Market size and industrial restructuring Brander and Krugman’s model (1983) with free entry provides an answer. The free entry condition allows us to pin down the number of firms in the market and therefore to understand the effect of trade on the number of firms. First, we look at the closed economy model.</a:t>
             </a:r>
           </a:p>
           <a:p xmlns:a="http://schemas.openxmlformats.org/drawingml/2006/main">
@@ -1979,42 +1398,27 @@
           </a:p>
           <a:p xmlns:a="http://schemas.openxmlformats.org/drawingml/2006/main">
             <a:r>
-              <a:t>https://davidchivers.co.uk/teaching/macro-applications/lecture_3.html#/l3-s17</a:t>
-            </a:r>
-          </a:p>
-          <a:p xmlns:a="http://schemas.openxmlformats.org/drawingml/2006/main">
-            <a:r>
-              <a:t/>
-            </a:r>
-          </a:p>
-          <a:p xmlns:a="http://schemas.openxmlformats.org/drawingml/2006/main">
-            <a:r>
-              <a:t>Market size and industrial restructuring</a:t>
-            </a:r>
-          </a:p>
-          <a:p xmlns:a="http://schemas.openxmlformats.org/drawingml/2006/main">
-            <a:r>
-              <a:t>Brander and Krugman’s model (1983) with free entry provides an answer.</a:t>
-            </a:r>
-          </a:p>
-          <a:p xmlns:a="http://schemas.openxmlformats.org/drawingml/2006/main">
-            <a:r>
-              <a:t>The free entry condition allows us to pin down the number of firms in the market and therefore to understand the effect of trade on the number of firms.</a:t>
-            </a:r>
-          </a:p>
-          <a:p xmlns:a="http://schemas.openxmlformats.org/drawingml/2006/main">
-            <a:r>
-              <a:t>First, we look at the closed economy model.</a:t>
-            </a:r>
-          </a:p>
-          <a:p xmlns:a="http://schemas.openxmlformats.org/drawingml/2006/main">
-            <a:r>
-              <a:t/>
-            </a:r>
-          </a:p>
-          <a:p xmlns:a="http://schemas.openxmlformats.org/drawingml/2006/main">
-            <a:r>
-              <a:t/>
+              <a:t>https://davidchivers.co.uk/teaching/macro-applications/lecture_3.html#/l3-s18</a:t>
+            </a:r>
+          </a:p>
+          <a:p xmlns:a="http://schemas.openxmlformats.org/drawingml/2006/main">
+            <a:r>
+              <a:t/>
+            </a:r>
+          </a:p>
+          <a:p xmlns:a="http://schemas.openxmlformats.org/drawingml/2006/main">
+            <a:r>
+              <a:t>The COMP curve Competition Each firm takes the number of competitors as given. More firms mean a smaller output per firm and a lower mark-up . COMP therefore slopes down . The appendix derives the relationship from each firm’s profit-maximisation problem.</a:t>
+            </a:r>
+          </a:p>
+          <a:p xmlns:a="http://schemas.openxmlformats.org/drawingml/2006/main">
+            <a:r>
+              <a:t/>
+            </a:r>
+          </a:p>
+          <a:p xmlns:a="http://schemas.openxmlformats.org/drawingml/2006/main">
+            <a:r>
+              <a:t>COMP slopes down: as the number of firms rises, competition reduces the mark-up.</a:t>
             </a:r>
           </a:p>
           <a:p xmlns:a="http://schemas.openxmlformats.org/drawingml/2006/main">
@@ -2109,77 +1513,27 @@
           </a:p>
           <a:p xmlns:a="http://schemas.openxmlformats.org/drawingml/2006/main">
             <a:r>
-              <a:t>https://davidchivers.co.uk/teaching/macro-applications/lecture_3.html#/l3-s18</a:t>
-            </a:r>
-          </a:p>
-          <a:p xmlns:a="http://schemas.openxmlformats.org/drawingml/2006/main">
-            <a:r>
-              <a:t/>
-            </a:r>
-          </a:p>
-          <a:p xmlns:a="http://schemas.openxmlformats.org/drawingml/2006/main">
-            <a:r>
-              <a:t>The COMP curve</a:t>
-            </a:r>
-          </a:p>
-          <a:p xmlns:a="http://schemas.openxmlformats.org/drawingml/2006/main">
-            <a:r>
-              <a:t/>
-            </a:r>
-          </a:p>
-          <a:p xmlns:a="http://schemas.openxmlformats.org/drawingml/2006/main">
-            <a:r>
-              <a:t>Each firm takes the number of firms in the market as given.</a:t>
-            </a:r>
-          </a:p>
-          <a:p xmlns:a="http://schemas.openxmlformats.org/drawingml/2006/main">
-            <a:r>
-              <a:t/>
-            </a:r>
-          </a:p>
-          <a:p xmlns:a="http://schemas.openxmlformats.org/drawingml/2006/main">
-            <a:r>
-              <a:t>The profit-maximisation problem shows that the more firms there are, the less each firm produces (see the appendix).</a:t>
-            </a:r>
-          </a:p>
-          <a:p xmlns:a="http://schemas.openxmlformats.org/drawingml/2006/main">
-            <a:r>
-              <a:t/>
-            </a:r>
-          </a:p>
-          <a:p xmlns:a="http://schemas.openxmlformats.org/drawingml/2006/main">
-            <a:r>
-              <a:t>There is a negative relationship between the number of firms </a:t>
-            </a:r>
-          </a:p>
-          <a:p xmlns:a="http://schemas.openxmlformats.org/drawingml/2006/main">
-            <a:r>
-              <a:t>𝑛</a:t>
-            </a:r>
-          </a:p>
-          <a:p xmlns:a="http://schemas.openxmlformats.org/drawingml/2006/main">
-            <a:r>
-              <a:t> and the mark-up </a:t>
-            </a:r>
-          </a:p>
-          <a:p xmlns:a="http://schemas.openxmlformats.org/drawingml/2006/main">
-            <a:r>
-              <a:t>𝜇</a:t>
-            </a:r>
-          </a:p>
-          <a:p xmlns:a="http://schemas.openxmlformats.org/drawingml/2006/main">
-            <a:r>
-              <a:t>.</a:t>
-            </a:r>
-          </a:p>
-          <a:p xmlns:a="http://schemas.openxmlformats.org/drawingml/2006/main">
-            <a:r>
-              <a:t/>
-            </a:r>
-          </a:p>
-          <a:p xmlns:a="http://schemas.openxmlformats.org/drawingml/2006/main">
-            <a:r>
-              <a:t/>
+              <a:t>https://davidchivers.co.uk/teaching/macro-applications/lecture_3.html#/l3-s19</a:t>
+            </a:r>
+          </a:p>
+          <a:p xmlns:a="http://schemas.openxmlformats.org/drawingml/2006/main">
+            <a:r>
+              <a:t/>
+            </a:r>
+          </a:p>
+          <a:p xmlns:a="http://schemas.openxmlformats.org/drawingml/2006/main">
+            <a:r>
+              <a:t>The BE curve Break even Free entry implies zero profits: μ x = F \mu x=F More firms mean smaller sales per firm. A higher mark-up is needed to cover the fixed cost. BE therefore slopes up . BE gives the mark-up needed to cover costs; COMP gives the mark-up competition permits.</a:t>
+            </a:r>
+          </a:p>
+          <a:p xmlns:a="http://schemas.openxmlformats.org/drawingml/2006/main">
+            <a:r>
+              <a:t/>
+            </a:r>
+          </a:p>
+          <a:p xmlns:a="http://schemas.openxmlformats.org/drawingml/2006/main">
+            <a:r>
+              <a:t>BE slopes up: with more firms, each firm is smaller and needs a higher mark-up to cover its fixed cost.</a:t>
             </a:r>
           </a:p>
           <a:p xmlns:a="http://schemas.openxmlformats.org/drawingml/2006/main">
@@ -2274,202 +1628,27 @@
           </a:p>
           <a:p xmlns:a="http://schemas.openxmlformats.org/drawingml/2006/main">
             <a:r>
-              <a:t>https://davidchivers.co.uk/teaching/macro-applications/lecture_3.html#/l3-s19</a:t>
-            </a:r>
-          </a:p>
-          <a:p xmlns:a="http://schemas.openxmlformats.org/drawingml/2006/main">
-            <a:r>
-              <a:t/>
-            </a:r>
-          </a:p>
-          <a:p xmlns:a="http://schemas.openxmlformats.org/drawingml/2006/main">
-            <a:r>
-              <a:t>The BE curve</a:t>
-            </a:r>
-          </a:p>
-          <a:p xmlns:a="http://schemas.openxmlformats.org/drawingml/2006/main">
-            <a:r>
-              <a:t/>
-            </a:r>
-          </a:p>
-          <a:p xmlns:a="http://schemas.openxmlformats.org/drawingml/2006/main">
-            <a:r>
-              <a:t>Free entry implies zero profits in the long run:</a:t>
-            </a:r>
-          </a:p>
-          <a:p xmlns:a="http://schemas.openxmlformats.org/drawingml/2006/main">
-            <a:r>
-              <a:t/>
-            </a:r>
-          </a:p>
-          <a:p xmlns:a="http://schemas.openxmlformats.org/drawingml/2006/main">
-            <a:r>
-              <a:t>(</a:t>
-            </a:r>
-          </a:p>
-          <a:p xmlns:a="http://schemas.openxmlformats.org/drawingml/2006/main">
-            <a:r>
-              <a:t>𝑝</a:t>
-            </a:r>
-          </a:p>
-          <a:p xmlns:a="http://schemas.openxmlformats.org/drawingml/2006/main">
-            <a:r>
-              <a:t>−</a:t>
-            </a:r>
-          </a:p>
-          <a:p xmlns:a="http://schemas.openxmlformats.org/drawingml/2006/main">
-            <a:r>
-              <a:t>𝑐</a:t>
-            </a:r>
-          </a:p>
-          <a:p xmlns:a="http://schemas.openxmlformats.org/drawingml/2006/main">
-            <a:r>
-              <a:t>)</a:t>
-            </a:r>
-          </a:p>
-          <a:p xmlns:a="http://schemas.openxmlformats.org/drawingml/2006/main">
-            <a:r>
-              <a:t>𝑥</a:t>
-            </a:r>
-          </a:p>
-          <a:p xmlns:a="http://schemas.openxmlformats.org/drawingml/2006/main">
-            <a:r>
-              <a:t>−</a:t>
-            </a:r>
-          </a:p>
-          <a:p xmlns:a="http://schemas.openxmlformats.org/drawingml/2006/main">
-            <a:r>
-              <a:t>𝐹</a:t>
-            </a:r>
-          </a:p>
-          <a:p xmlns:a="http://schemas.openxmlformats.org/drawingml/2006/main">
-            <a:r>
-              <a:t>=</a:t>
-            </a:r>
-          </a:p>
-          <a:p xmlns:a="http://schemas.openxmlformats.org/drawingml/2006/main">
-            <a:r>
-              <a:t>𝜇</a:t>
-            </a:r>
-          </a:p>
-          <a:p xmlns:a="http://schemas.openxmlformats.org/drawingml/2006/main">
-            <a:r>
-              <a:t>𝑥</a:t>
-            </a:r>
-          </a:p>
-          <a:p xmlns:a="http://schemas.openxmlformats.org/drawingml/2006/main">
-            <a:r>
-              <a:t>−</a:t>
-            </a:r>
-          </a:p>
-          <a:p xmlns:a="http://schemas.openxmlformats.org/drawingml/2006/main">
-            <a:r>
-              <a:t>𝐹</a:t>
-            </a:r>
-          </a:p>
-          <a:p xmlns:a="http://schemas.openxmlformats.org/drawingml/2006/main">
-            <a:r>
-              <a:t>=</a:t>
-            </a:r>
-          </a:p>
-          <a:p xmlns:a="http://schemas.openxmlformats.org/drawingml/2006/main">
-            <a:r>
-              <a:t>0</a:t>
-            </a:r>
-          </a:p>
-          <a:p xmlns:a="http://schemas.openxmlformats.org/drawingml/2006/main">
-            <a:r>
-              <a:t>.</a:t>
-            </a:r>
-          </a:p>
-          <a:p xmlns:a="http://schemas.openxmlformats.org/drawingml/2006/main">
-            <a:r>
-              <a:t/>
-            </a:r>
-          </a:p>
-          <a:p xmlns:a="http://schemas.openxmlformats.org/drawingml/2006/main">
-            <a:r>
-              <a:t>As </a:t>
-            </a:r>
-          </a:p>
-          <a:p xmlns:a="http://schemas.openxmlformats.org/drawingml/2006/main">
-            <a:r>
-              <a:t>𝑛</a:t>
-            </a:r>
-          </a:p>
-          <a:p xmlns:a="http://schemas.openxmlformats.org/drawingml/2006/main">
-            <a:r>
-              <a:t> rises, </a:t>
-            </a:r>
-          </a:p>
-          <a:p xmlns:a="http://schemas.openxmlformats.org/drawingml/2006/main">
-            <a:r>
-              <a:t>𝑥</a:t>
-            </a:r>
-          </a:p>
-          <a:p xmlns:a="http://schemas.openxmlformats.org/drawingml/2006/main">
-            <a:r>
-              <a:t> falls. A firm therefore needs a higher </a:t>
-            </a:r>
-          </a:p>
-          <a:p xmlns:a="http://schemas.openxmlformats.org/drawingml/2006/main">
-            <a:r>
-              <a:t>𝜇</a:t>
-            </a:r>
-          </a:p>
-          <a:p xmlns:a="http://schemas.openxmlformats.org/drawingml/2006/main">
-            <a:r>
-              <a:t> to cover </a:t>
-            </a:r>
-          </a:p>
-          <a:p xmlns:a="http://schemas.openxmlformats.org/drawingml/2006/main">
-            <a:r>
-              <a:t>𝐹</a:t>
-            </a:r>
-          </a:p>
-          <a:p xmlns:a="http://schemas.openxmlformats.org/drawingml/2006/main">
-            <a:r>
-              <a:t>.</a:t>
-            </a:r>
-          </a:p>
-          <a:p xmlns:a="http://schemas.openxmlformats.org/drawingml/2006/main">
-            <a:r>
-              <a:t/>
-            </a:r>
-          </a:p>
-          <a:p xmlns:a="http://schemas.openxmlformats.org/drawingml/2006/main">
-            <a:r>
-              <a:t>There is a positive relationship between the number of firms </a:t>
-            </a:r>
-          </a:p>
-          <a:p xmlns:a="http://schemas.openxmlformats.org/drawingml/2006/main">
-            <a:r>
-              <a:t>𝑛</a:t>
-            </a:r>
-          </a:p>
-          <a:p xmlns:a="http://schemas.openxmlformats.org/drawingml/2006/main">
-            <a:r>
-              <a:t> and the break-even mark-up </a:t>
-            </a:r>
-          </a:p>
-          <a:p xmlns:a="http://schemas.openxmlformats.org/drawingml/2006/main">
-            <a:r>
-              <a:t>𝜇</a:t>
-            </a:r>
-          </a:p>
-          <a:p xmlns:a="http://schemas.openxmlformats.org/drawingml/2006/main">
-            <a:r>
-              <a:t>.</a:t>
-            </a:r>
-          </a:p>
-          <a:p xmlns:a="http://schemas.openxmlformats.org/drawingml/2006/main">
-            <a:r>
-              <a:t/>
-            </a:r>
-          </a:p>
-          <a:p xmlns:a="http://schemas.openxmlformats.org/drawingml/2006/main">
-            <a:r>
-              <a:t/>
+              <a:t>https://davidchivers.co.uk/teaching/macro-applications/lecture_3.html#/l3-s20</a:t>
+            </a:r>
+          </a:p>
+          <a:p xmlns:a="http://schemas.openxmlformats.org/drawingml/2006/main">
+            <a:r>
+              <a:t/>
+            </a:r>
+          </a:p>
+          <a:p xmlns:a="http://schemas.openxmlformats.org/drawingml/2006/main">
+            <a:r>
+              <a:t>Equilibrium Both conditions must hold At E ′ E' , the mark-up allowed by competition is just enough to cover costs. The intersection determines: The number of firms, n ′ n' . The mark-up, μ ′ \mu' . Profits are zero.</a:t>
+            </a:r>
+          </a:p>
+          <a:p xmlns:a="http://schemas.openxmlformats.org/drawingml/2006/main">
+            <a:r>
+              <a:t/>
+            </a:r>
+          </a:p>
+          <a:p xmlns:a="http://schemas.openxmlformats.org/drawingml/2006/main">
+            <a:r>
+              <a:t>COMP and BE intersect at E prime. This determines the equilibrium number of firms n prime and mark-up mu prime.</a:t>
             </a:r>
           </a:p>
           <a:p xmlns:a="http://schemas.openxmlformats.org/drawingml/2006/main">
@@ -2574,27 +1753,7 @@
           </a:p>
           <a:p xmlns:a="http://schemas.openxmlformats.org/drawingml/2006/main">
             <a:r>
-              <a:t>Context</a:t>
-            </a:r>
-          </a:p>
-          <a:p xmlns:a="http://schemas.openxmlformats.org/drawingml/2006/main">
-            <a:r>
-              <a:t/>
-            </a:r>
-          </a:p>
-          <a:p xmlns:a="http://schemas.openxmlformats.org/drawingml/2006/main">
-            <a:r>
-              <a:t>One of the main benefits of the Single Market is that firms have access to a bigger market.</a:t>
-            </a:r>
-          </a:p>
-          <a:p xmlns:a="http://schemas.openxmlformats.org/drawingml/2006/main">
-            <a:r>
-              <a:t/>
-            </a:r>
-          </a:p>
-          <a:p xmlns:a="http://schemas.openxmlformats.org/drawingml/2006/main">
-            <a:r>
-              <a:t>A larger market means more competition between firms, lower prices and increased consumer welfare.</a:t>
+              <a:t>Context One of the main benefits of the Single Market is that firms have access to a bigger market . A larger market means more competition between firms, lower prices and increased consumer welfare.</a:t>
             </a:r>
           </a:p>
           <a:p xmlns:a="http://schemas.openxmlformats.org/drawingml/2006/main">
@@ -2699,37 +1858,27 @@
           </a:p>
           <a:p xmlns:a="http://schemas.openxmlformats.org/drawingml/2006/main">
             <a:r>
-              <a:t>https://davidchivers.co.uk/teaching/macro-applications/lecture_3.html#/l3-s20</a:t>
-            </a:r>
-          </a:p>
-          <a:p xmlns:a="http://schemas.openxmlformats.org/drawingml/2006/main">
-            <a:r>
-              <a:t/>
-            </a:r>
-          </a:p>
-          <a:p xmlns:a="http://schemas.openxmlformats.org/drawingml/2006/main">
-            <a:r>
-              <a:t>Equilibrium</a:t>
-            </a:r>
-          </a:p>
-          <a:p xmlns:a="http://schemas.openxmlformats.org/drawingml/2006/main">
-            <a:r>
-              <a:t/>
-            </a:r>
-          </a:p>
-          <a:p xmlns:a="http://schemas.openxmlformats.org/drawingml/2006/main">
-            <a:r>
-              <a:t>See the appendix for a derivation.</a:t>
-            </a:r>
-          </a:p>
-          <a:p xmlns:a="http://schemas.openxmlformats.org/drawingml/2006/main">
-            <a:r>
-              <a:t/>
-            </a:r>
-          </a:p>
-          <a:p xmlns:a="http://schemas.openxmlformats.org/drawingml/2006/main">
-            <a:r>
-              <a:t>The downward-sloping COMP curve and upward-sloping BE curve intersect at equilibrium firm count n prime and mark-up mu prime.</a:t>
+              <a:t>https://davidchivers.co.uk/teaching/macro-applications/lecture_3.html#/l3-s21</a:t>
+            </a:r>
+          </a:p>
+          <a:p xmlns:a="http://schemas.openxmlformats.org/drawingml/2006/main">
+            <a:r>
+              <a:t/>
+            </a:r>
+          </a:p>
+          <a:p xmlns:a="http://schemas.openxmlformats.org/drawingml/2006/main">
+            <a:r>
+              <a:t>Before market integration Each separate market has n ′ n' firms. Price equals average cost, so profits are zero. Next, open the two identical markets to trade. For this illustration, assume no transport costs .</a:t>
+            </a:r>
+          </a:p>
+          <a:p xmlns:a="http://schemas.openxmlformats.org/drawingml/2006/main">
+            <a:r>
+              <a:t/>
+            </a:r>
+          </a:p>
+          <a:p xmlns:a="http://schemas.openxmlformats.org/drawingml/2006/main">
+            <a:r>
+              <a:t>Before integration, each country has n prime firms. The linked panels show output per firm x prime, Home consumption C prime, price p prime equal to average cost, and mark-up mu prime.</a:t>
             </a:r>
           </a:p>
           <a:p xmlns:a="http://schemas.openxmlformats.org/drawingml/2006/main">
@@ -2824,27 +1973,27 @@
           </a:p>
           <a:p xmlns:a="http://schemas.openxmlformats.org/drawingml/2006/main">
             <a:r>
-              <a:t>https://davidchivers.co.uk/teaching/macro-applications/lecture_3.html#/l3-s21</a:t>
-            </a:r>
-          </a:p>
-          <a:p xmlns:a="http://schemas.openxmlformats.org/drawingml/2006/main">
-            <a:r>
-              <a:t/>
-            </a:r>
-          </a:p>
-          <a:p xmlns:a="http://schemas.openxmlformats.org/drawingml/2006/main">
-            <a:r>
-              <a:t>Before market integration</a:t>
-            </a:r>
-          </a:p>
-          <a:p xmlns:a="http://schemas.openxmlformats.org/drawingml/2006/main">
-            <a:r>
-              <a:t/>
-            </a:r>
-          </a:p>
-          <a:p xmlns:a="http://schemas.openxmlformats.org/drawingml/2006/main">
-            <a:r>
-              <a:t>Three linked panels before integration: firm average and marginal cost, market demand, and the BE-COMP equilibrium. Dashed guides connect equilibrium firm output, price, sales and mark-up.</a:t>
+              <a:t>https://davidchivers.co.uk/teaching/macro-applications/lecture_3.html#/l3-s22</a:t>
+            </a:r>
+          </a:p>
+          <a:p xmlns:a="http://schemas.openxmlformats.org/drawingml/2006/main">
+            <a:r>
+              <a:t/>
+            </a:r>
+          </a:p>
+          <a:p xmlns:a="http://schemas.openxmlformats.org/drawingml/2006/main">
+            <a:r>
+              <a:t>Immediately after market integration Pro-competitive effect: 2 n ′ 2n' firms now compete in each market, pushing the price down to p A p_A . At A, price is below average cost. Firms make losses, so this cannot be the long-run equilibrium.</a:t>
+            </a:r>
+          </a:p>
+          <a:p xmlns:a="http://schemas.openxmlformats.org/drawingml/2006/main">
+            <a:r>
+              <a:t/>
+            </a:r>
+          </a:p>
+          <a:p xmlns:a="http://schemas.openxmlformats.org/drawingml/2006/main">
+            <a:r>
+              <a:t>With 2 n prime firms competing in the integrated market, the economy moves to A. The price falls below average cost and firms make losses. The larger market shifts BE down to BE FT.</a:t>
             </a:r>
           </a:p>
           <a:p xmlns:a="http://schemas.openxmlformats.org/drawingml/2006/main">
@@ -2939,27 +2088,27 @@
           </a:p>
           <a:p xmlns:a="http://schemas.openxmlformats.org/drawingml/2006/main">
             <a:r>
-              <a:t>https://davidchivers.co.uk/teaching/macro-applications/lecture_3.html#/l3-s22</a:t>
-            </a:r>
-          </a:p>
-          <a:p xmlns:a="http://schemas.openxmlformats.org/drawingml/2006/main">
-            <a:r>
-              <a:t/>
-            </a:r>
-          </a:p>
-          <a:p xmlns:a="http://schemas.openxmlformats.org/drawingml/2006/main">
-            <a:r>
-              <a:t>After market integration</a:t>
-            </a:r>
-          </a:p>
-          <a:p xmlns:a="http://schemas.openxmlformats.org/drawingml/2006/main">
-            <a:r>
-              <a:t/>
-            </a:r>
-          </a:p>
-          <a:p xmlns:a="http://schemas.openxmlformats.org/drawingml/2006/main">
-            <a:r>
-              <a:t>The same three panels after integration. The initial increase in competing firms lowers the mark-up; exit and restructuring then raise output per surviving firm. The new equilibrium differs from the short-run point A.</a:t>
+              <a:t>https://davidchivers.co.uk/teaching/macro-applications/lecture_3.html#/l3-s23</a:t>
+            </a:r>
+          </a:p>
+          <a:p xmlns:a="http://schemas.openxmlformats.org/drawingml/2006/main">
+            <a:r>
+              <a:t/>
+            </a:r>
+          </a:p>
+          <a:p xmlns:a="http://schemas.openxmlformats.org/drawingml/2006/main">
+            <a:r>
+              <a:t>After industrial restructuring Exit: n ′ &lt; n ″ &lt; 2 n ′ n'&lt;n''&lt;2n' . Fewer firms overall, but more competitors in each market; surviving firms are larger. Profits return to zero and consumers pay less than in autarky. Why does welfare rise?</a:t>
+            </a:r>
+          </a:p>
+          <a:p xmlns:a="http://schemas.openxmlformats.org/drawingml/2006/main">
+            <a:r>
+              <a:t/>
+            </a:r>
+          </a:p>
+          <a:p xmlns:a="http://schemas.openxmlformats.org/drawingml/2006/main">
+            <a:r>
+              <a:t>Exit moves the economy from A to E double prime. There are fewer firms overall but more competitors in each market than before trade: n prime is less than n double prime, which is less than 2 n prime. Surviving firms are larger and the price is below autarky.</a:t>
             </a:r>
           </a:p>
           <a:p xmlns:a="http://schemas.openxmlformats.org/drawingml/2006/main">
@@ -3054,97 +2203,27 @@
           </a:p>
           <a:p xmlns:a="http://schemas.openxmlformats.org/drawingml/2006/main">
             <a:r>
-              <a:t>https://davidchivers.co.uk/teaching/macro-applications/lecture_3.html#/l3-s23</a:t>
-            </a:r>
-          </a:p>
-          <a:p xmlns:a="http://schemas.openxmlformats.org/drawingml/2006/main">
-            <a:r>
-              <a:t/>
-            </a:r>
-          </a:p>
-          <a:p xmlns:a="http://schemas.openxmlformats.org/drawingml/2006/main">
-            <a:r>
-              <a:t>EU: a bigger market</a:t>
-            </a:r>
-          </a:p>
-          <a:p xmlns:a="http://schemas.openxmlformats.org/drawingml/2006/main">
-            <a:r>
-              <a:t>Pro-competitive effect</a:t>
-            </a:r>
-          </a:p>
-          <a:p xmlns:a="http://schemas.openxmlformats.org/drawingml/2006/main">
-            <a:r>
-              <a:t/>
-            </a:r>
-          </a:p>
-          <a:p xmlns:a="http://schemas.openxmlformats.org/drawingml/2006/main">
-            <a:r>
-              <a:t>The mark-up falls and output rises because twice as many firms compete in the market.</a:t>
-            </a:r>
-          </a:p>
-          <a:p xmlns:a="http://schemas.openxmlformats.org/drawingml/2006/main">
-            <a:r>
-              <a:t/>
-            </a:r>
-          </a:p>
-          <a:p xmlns:a="http://schemas.openxmlformats.org/drawingml/2006/main">
-            <a:r>
-              <a:t>Industrial restructuring</a:t>
-            </a:r>
-          </a:p>
-          <a:p xmlns:a="http://schemas.openxmlformats.org/drawingml/2006/main">
-            <a:r>
-              <a:t>Some firms exit because point A is not feasible: </a:t>
-            </a:r>
-          </a:p>
-          <a:p xmlns:a="http://schemas.openxmlformats.org/drawingml/2006/main">
-            <a:r>
-              <a:t>𝑃</a:t>
-            </a:r>
-          </a:p>
-          <a:p xmlns:a="http://schemas.openxmlformats.org/drawingml/2006/main">
-            <a:r>
-              <a:t>&lt;</a:t>
-            </a:r>
-          </a:p>
-          <a:p xmlns:a="http://schemas.openxmlformats.org/drawingml/2006/main">
-            <a:r>
-              <a:t>𝐴</a:t>
-            </a:r>
-          </a:p>
-          <a:p xmlns:a="http://schemas.openxmlformats.org/drawingml/2006/main">
-            <a:r>
-              <a:t>𝐶</a:t>
-            </a:r>
-          </a:p>
-          <a:p xmlns:a="http://schemas.openxmlformats.org/drawingml/2006/main">
-            <a:r>
-              <a:t>.</a:t>
-            </a:r>
-          </a:p>
-          <a:p xmlns:a="http://schemas.openxmlformats.org/drawingml/2006/main">
-            <a:r>
-              <a:t>The remaining firms are larger and exploit increasing returns to scale more effectively.</a:t>
-            </a:r>
-          </a:p>
-          <a:p xmlns:a="http://schemas.openxmlformats.org/drawingml/2006/main">
-            <a:r>
-              <a:t/>
-            </a:r>
-          </a:p>
-          <a:p xmlns:a="http://schemas.openxmlformats.org/drawingml/2006/main">
-            <a:r>
-              <a:t>Trade liberalisation is always welfare-improving with free entry in this model. Why?</a:t>
-            </a:r>
-          </a:p>
-          <a:p xmlns:a="http://schemas.openxmlformats.org/drawingml/2006/main">
-            <a:r>
-              <a:t/>
-            </a:r>
-          </a:p>
-          <a:p xmlns:a="http://schemas.openxmlformats.org/drawingml/2006/main">
-            <a:r>
-              <a:t/>
+              <a:t>https://davidchivers.co.uk/teaching/macro-applications/lecture_3.html#/l3-s24</a:t>
+            </a:r>
+          </a:p>
+          <a:p xmlns:a="http://schemas.openxmlformats.org/drawingml/2006/main">
+            <a:r>
+              <a:t/>
+            </a:r>
+          </a:p>
+          <a:p xmlns:a="http://schemas.openxmlformats.org/drawingml/2006/main">
+            <a:r>
+              <a:t>Empirical evidence Price-cost margins for French industry, 1986–2004 . Source: Baldwin and Wyplosz (2012).</a:t>
+            </a:r>
+          </a:p>
+          <a:p xmlns:a="http://schemas.openxmlformats.org/drawingml/2006/main">
+            <a:r>
+              <a:t/>
+            </a:r>
+          </a:p>
+          <a:p xmlns:a="http://schemas.openxmlformats.org/drawingml/2006/main">
+            <a:r>
+              <a:t>Line chart of French industrial price-cost margins, 1986 to 2004. Margins fluctuate but are lower at the end of the period than at the beginning. Source: Baldwin and Wyplosz, 2012.</a:t>
             </a:r>
           </a:p>
           <a:p xmlns:a="http://schemas.openxmlformats.org/drawingml/2006/main">
@@ -3239,47 +2318,27 @@
           </a:p>
           <a:p xmlns:a="http://schemas.openxmlformats.org/drawingml/2006/main">
             <a:r>
-              <a:t>https://davidchivers.co.uk/teaching/macro-applications/lecture_3.html#/l3-s24</a:t>
-            </a:r>
-          </a:p>
-          <a:p xmlns:a="http://schemas.openxmlformats.org/drawingml/2006/main">
-            <a:r>
-              <a:t/>
-            </a:r>
-          </a:p>
-          <a:p xmlns:a="http://schemas.openxmlformats.org/drawingml/2006/main">
-            <a:r>
-              <a:t>Empirical evidence</a:t>
-            </a:r>
-          </a:p>
-          <a:p xmlns:a="http://schemas.openxmlformats.org/drawingml/2006/main">
-            <a:r>
-              <a:t/>
-            </a:r>
-          </a:p>
-          <a:p xmlns:a="http://schemas.openxmlformats.org/drawingml/2006/main">
-            <a:r>
-              <a:t>Price-cost margins for French industry, 1986–2004.</a:t>
-            </a:r>
-          </a:p>
-          <a:p xmlns:a="http://schemas.openxmlformats.org/drawingml/2006/main">
-            <a:r>
-              <a:t/>
-            </a:r>
-          </a:p>
-          <a:p xmlns:a="http://schemas.openxmlformats.org/drawingml/2006/main">
-            <a:r>
-              <a:t>Source: Baldwin and Wyplosz (2012).</a:t>
-            </a:r>
-          </a:p>
-          <a:p xmlns:a="http://schemas.openxmlformats.org/drawingml/2006/main">
-            <a:r>
-              <a:t/>
-            </a:r>
-          </a:p>
-          <a:p xmlns:a="http://schemas.openxmlformats.org/drawingml/2006/main">
-            <a:r>
-              <a:t>Line chart of French industrial price-cost margins, 1986 to 2004. Margins fluctuate but are lower at the end of the period than at the beginning. Source: Baldwin and Wyplosz, 2012.</a:t>
+              <a:t>https://davidchivers.co.uk/teaching/macro-applications/lecture_3.html#/l3-s25</a:t>
+            </a:r>
+          </a:p>
+          <a:p xmlns:a="http://schemas.openxmlformats.org/drawingml/2006/main">
+            <a:r>
+              <a:t/>
+            </a:r>
+          </a:p>
+          <a:p xmlns:a="http://schemas.openxmlformats.org/drawingml/2006/main">
+            <a:r>
+              <a:t>Controversies Trade liberalisation is beneficial for consumers, but not necessarily for firms: Profits normally fall. Some firms exit the market (job losses). As a result: The incentives to collude can increase as the remaining firms are bigger. Governments might be tempted to provide subsidies to national firms.</a:t>
+            </a:r>
+          </a:p>
+          <a:p xmlns:a="http://schemas.openxmlformats.org/drawingml/2006/main">
+            <a:r>
+              <a:t/>
+            </a:r>
+          </a:p>
+          <a:p xmlns:a="http://schemas.openxmlformats.org/drawingml/2006/main">
+            <a:r>
+              <a:t/>
             </a:r>
           </a:p>
           <a:p xmlns:a="http://schemas.openxmlformats.org/drawingml/2006/main">
@@ -3374,67 +2433,17 @@
           </a:p>
           <a:p xmlns:a="http://schemas.openxmlformats.org/drawingml/2006/main">
             <a:r>
-              <a:t>https://davidchivers.co.uk/teaching/macro-applications/lecture_3.html#/l3-s25</a:t>
-            </a:r>
-          </a:p>
-          <a:p xmlns:a="http://schemas.openxmlformats.org/drawingml/2006/main">
-            <a:r>
-              <a:t/>
-            </a:r>
-          </a:p>
-          <a:p xmlns:a="http://schemas.openxmlformats.org/drawingml/2006/main">
-            <a:r>
-              <a:t>Controversies</a:t>
-            </a:r>
-          </a:p>
-          <a:p xmlns:a="http://schemas.openxmlformats.org/drawingml/2006/main">
-            <a:r>
-              <a:t/>
-            </a:r>
-          </a:p>
-          <a:p xmlns:a="http://schemas.openxmlformats.org/drawingml/2006/main">
-            <a:r>
-              <a:t>Trade liberalisation is beneficial for consumers, but not necessarily for firms:</a:t>
-            </a:r>
-          </a:p>
-          <a:p xmlns:a="http://schemas.openxmlformats.org/drawingml/2006/main">
-            <a:r>
-              <a:t/>
-            </a:r>
-          </a:p>
-          <a:p xmlns:a="http://schemas.openxmlformats.org/drawingml/2006/main">
-            <a:r>
-              <a:t>Profits normally fall.</a:t>
-            </a:r>
-          </a:p>
-          <a:p xmlns:a="http://schemas.openxmlformats.org/drawingml/2006/main">
-            <a:r>
-              <a:t>Some firms exit the market (job losses).</a:t>
-            </a:r>
-          </a:p>
-          <a:p xmlns:a="http://schemas.openxmlformats.org/drawingml/2006/main">
-            <a:r>
-              <a:t/>
-            </a:r>
-          </a:p>
-          <a:p xmlns:a="http://schemas.openxmlformats.org/drawingml/2006/main">
-            <a:r>
-              <a:t>As a result:</a:t>
-            </a:r>
-          </a:p>
-          <a:p xmlns:a="http://schemas.openxmlformats.org/drawingml/2006/main">
-            <a:r>
-              <a:t/>
-            </a:r>
-          </a:p>
-          <a:p xmlns:a="http://schemas.openxmlformats.org/drawingml/2006/main">
-            <a:r>
-              <a:t>The incentives to collude can increase as the remaining firms are bigger.</a:t>
-            </a:r>
-          </a:p>
-          <a:p xmlns:a="http://schemas.openxmlformats.org/drawingml/2006/main">
-            <a:r>
-              <a:t>Governments might be tempted to provide subsidies to national firms.</a:t>
+              <a:t>https://davidchivers.co.uk/teaching/macro-applications/lecture_3.html#/l3-s26</a:t>
+            </a:r>
+          </a:p>
+          <a:p xmlns:a="http://schemas.openxmlformats.org/drawingml/2006/main">
+            <a:r>
+              <a:t/>
+            </a:r>
+          </a:p>
+          <a:p xmlns:a="http://schemas.openxmlformats.org/drawingml/2006/main">
+            <a:r>
+              <a:t>Summing up Free mobility of goods is beneficial as consumers benefit from the higher competition triggered by the increased market size. Market integration also leads to a process of industrial restructuring (job losses if labour mobility across sectors and countries is not perfect).</a:t>
             </a:r>
           </a:p>
           <a:p xmlns:a="http://schemas.openxmlformats.org/drawingml/2006/main">
@@ -3539,27 +2548,17 @@
           </a:p>
           <a:p xmlns:a="http://schemas.openxmlformats.org/drawingml/2006/main">
             <a:r>
-              <a:t>https://davidchivers.co.uk/teaching/macro-applications/lecture_3.html#/l3-s26</a:t>
-            </a:r>
-          </a:p>
-          <a:p xmlns:a="http://schemas.openxmlformats.org/drawingml/2006/main">
-            <a:r>
-              <a:t/>
-            </a:r>
-          </a:p>
-          <a:p xmlns:a="http://schemas.openxmlformats.org/drawingml/2006/main">
-            <a:r>
-              <a:t>Summing up</a:t>
-            </a:r>
-          </a:p>
-          <a:p xmlns:a="http://schemas.openxmlformats.org/drawingml/2006/main">
-            <a:r>
-              <a:t>Free mobility of goods is beneficial as consumers benefit from the higher competition triggered by the increased market size.</a:t>
-            </a:r>
-          </a:p>
-          <a:p xmlns:a="http://schemas.openxmlformats.org/drawingml/2006/main">
-            <a:r>
-              <a:t>Market integration also leads to a process of industrial restructuring (job losses if labour mobility across sectors and countries is not perfect).</a:t>
+              <a:t>https://davidchivers.co.uk/teaching/macro-applications/lecture_3.html#/l3-s27</a:t>
+            </a:r>
+          </a:p>
+          <a:p xmlns:a="http://schemas.openxmlformats.org/drawingml/2006/main">
+            <a:r>
+              <a:t/>
+            </a:r>
+          </a:p>
+          <a:p xmlns:a="http://schemas.openxmlformats.org/drawingml/2006/main">
+            <a:r>
+              <a:t>Next lecture We will talk about migration.</a:t>
             </a:r>
           </a:p>
           <a:p xmlns:a="http://schemas.openxmlformats.org/drawingml/2006/main">
@@ -3664,52 +2663,47 @@
           </a:p>
           <a:p xmlns:a="http://schemas.openxmlformats.org/drawingml/2006/main">
             <a:r>
-              <a:t>https://davidchivers.co.uk/teaching/macro-applications/lecture_3.html#/l3-s27</a:t>
-            </a:r>
-          </a:p>
-          <a:p xmlns:a="http://schemas.openxmlformats.org/drawingml/2006/main">
-            <a:r>
-              <a:t/>
-            </a:r>
-          </a:p>
-          <a:p xmlns:a="http://schemas.openxmlformats.org/drawingml/2006/main">
-            <a:r>
-              <a:t>Next lecture</a:t>
-            </a:r>
-          </a:p>
-          <a:p xmlns:a="http://schemas.openxmlformats.org/drawingml/2006/main">
-            <a:r>
-              <a:t>We will talk about migration.</a:t>
-            </a:r>
-          </a:p>
-          <a:p xmlns:a="http://schemas.openxmlformats.org/drawingml/2006/main">
-            <a:r>
-              <a:t/>
-            </a:r>
-          </a:p>
-          <a:p xmlns:a="http://schemas.openxmlformats.org/drawingml/2006/main">
-            <a:r>
-              <a:t/>
-            </a:r>
-          </a:p>
-          <a:p xmlns:a="http://schemas.openxmlformats.org/drawingml/2006/main">
-            <a:r>
-              <a:t/>
-            </a:r>
-          </a:p>
-          <a:p xmlns:a="http://schemas.openxmlformats.org/drawingml/2006/main">
-            <a:r>
-              <a:t/>
-            </a:r>
-          </a:p>
-          <a:p xmlns:a="http://schemas.openxmlformats.org/drawingml/2006/main">
-            <a:r>
-              <a:t/>
-            </a:r>
-          </a:p>
-          <a:p xmlns:a="http://schemas.openxmlformats.org/drawingml/2006/main">
-            <a:r>
-              <a:t/>
+              <a:t>https://davidchivers.co.uk/teaching/macro-applications/lecture_3.html#/l3-s28</a:t>
+            </a:r>
+          </a:p>
+          <a:p xmlns:a="http://schemas.openxmlformats.org/drawingml/2006/main">
+            <a:r>
+              <a:t/>
+            </a:r>
+          </a:p>
+          <a:p xmlns:a="http://schemas.openxmlformats.org/drawingml/2006/main">
+            <a:r>
+              <a:t>References Essential reading Baldwin and Wyplosz, The Economics of European Integration , Chapter 6 (any edition) . Brander J., and Krugman P. (1983), A ‘reciprocal dumping’ model of international trade, Journal of International Economics, 15, 313-321. Further reading See the ECON2271 Talis reading list , also available through Blackboard.</a:t>
+            </a:r>
+          </a:p>
+          <a:p xmlns:a="http://schemas.openxmlformats.org/drawingml/2006/main">
+            <a:r>
+              <a:t/>
+            </a:r>
+          </a:p>
+          <a:p xmlns:a="http://schemas.openxmlformats.org/drawingml/2006/main">
+            <a:r>
+              <a:t/>
+            </a:r>
+          </a:p>
+          <a:p xmlns:a="http://schemas.openxmlformats.org/drawingml/2006/main">
+            <a:r>
+              <a:t/>
+            </a:r>
+          </a:p>
+          <a:p xmlns:a="http://schemas.openxmlformats.org/drawingml/2006/main">
+            <a:r>
+              <a:t/>
+            </a:r>
+          </a:p>
+          <a:p xmlns:a="http://schemas.openxmlformats.org/drawingml/2006/main">
+            <a:r>
+              <a:t/>
+            </a:r>
+          </a:p>
+          <a:p xmlns:a="http://schemas.openxmlformats.org/drawingml/2006/main">
+            <a:r>
+              <a:t>https://durham.rl.talis.com/lists/d85d1ad3-e9ac-4daf-aa66-e3ddfcf902d7.html</a:t>
             </a:r>
           </a:p>
         </p:txBody>
@@ -3784,77 +2778,47 @@
           </a:p>
           <a:p xmlns:a="http://schemas.openxmlformats.org/drawingml/2006/main">
             <a:r>
-              <a:t>https://davidchivers.co.uk/teaching/macro-applications/lecture_3.html#/l3-s28</a:t>
-            </a:r>
-          </a:p>
-          <a:p xmlns:a="http://schemas.openxmlformats.org/drawingml/2006/main">
-            <a:r>
-              <a:t/>
-            </a:r>
-          </a:p>
-          <a:p xmlns:a="http://schemas.openxmlformats.org/drawingml/2006/main">
-            <a:r>
-              <a:t>References</a:t>
-            </a:r>
-          </a:p>
-          <a:p xmlns:a="http://schemas.openxmlformats.org/drawingml/2006/main">
-            <a:r>
-              <a:t>Essential reading</a:t>
-            </a:r>
-          </a:p>
-          <a:p xmlns:a="http://schemas.openxmlformats.org/drawingml/2006/main">
-            <a:r>
-              <a:t>Baldwin and Wyplosz, The Economics of European Integration, Chapter 6 (any edition).</a:t>
-            </a:r>
-          </a:p>
-          <a:p xmlns:a="http://schemas.openxmlformats.org/drawingml/2006/main">
-            <a:r>
-              <a:t>Brander J., and Krugman P. (1983), A ‘reciprocal dumping’ model of international trade, Journal of International Economics, 15, 313-321.</a:t>
-            </a:r>
-          </a:p>
-          <a:p xmlns:a="http://schemas.openxmlformats.org/drawingml/2006/main">
-            <a:r>
-              <a:t>Further reading</a:t>
-            </a:r>
-          </a:p>
-          <a:p xmlns:a="http://schemas.openxmlformats.org/drawingml/2006/main">
-            <a:r>
-              <a:t/>
-            </a:r>
-          </a:p>
-          <a:p xmlns:a="http://schemas.openxmlformats.org/drawingml/2006/main">
-            <a:r>
-              <a:t>See the ECON2271 Talis reading list, also available through Blackboard.</a:t>
-            </a:r>
-          </a:p>
-          <a:p xmlns:a="http://schemas.openxmlformats.org/drawingml/2006/main">
-            <a:r>
-              <a:t/>
-            </a:r>
-          </a:p>
-          <a:p xmlns:a="http://schemas.openxmlformats.org/drawingml/2006/main">
-            <a:r>
-              <a:t/>
-            </a:r>
-          </a:p>
-          <a:p xmlns:a="http://schemas.openxmlformats.org/drawingml/2006/main">
-            <a:r>
-              <a:t/>
-            </a:r>
-          </a:p>
-          <a:p xmlns:a="http://schemas.openxmlformats.org/drawingml/2006/main">
-            <a:r>
-              <a:t/>
-            </a:r>
-          </a:p>
-          <a:p xmlns:a="http://schemas.openxmlformats.org/drawingml/2006/main">
-            <a:r>
-              <a:t/>
-            </a:r>
-          </a:p>
-          <a:p xmlns:a="http://schemas.openxmlformats.org/drawingml/2006/main">
-            <a:r>
-              <a:t>https://durham.rl.talis.com/lists/d85d1ad3-e9ac-4daf-aa66-e3ddfcf902d7.html</a:t>
+              <a:t>https://davidchivers.co.uk/teaching/macro-applications/lecture_3.html#/l3-s29</a:t>
+            </a:r>
+          </a:p>
+          <a:p xmlns:a="http://schemas.openxmlformats.org/drawingml/2006/main">
+            <a:r>
+              <a:t/>
+            </a:r>
+          </a:p>
+          <a:p xmlns:a="http://schemas.openxmlformats.org/drawingml/2006/main">
+            <a:r>
+              <a:t>Appendix: the firm’s problem Firm i i faces the following maximisation problem: max x i π i = ( p − c ) x i − F , \max_{x_i}\;\pi_i=(p-c)x_i-F, p = a − b Z , Z = x i + ∑ j ≠ i n x j . p=a-bZ,\qquad Z=x_i+\sum_{j\ne i}^{n}x_j. Substituting the demand function gives max x i [ a − b ( x i + ∑ j ≠ i n x j ) − c ] x i − F . \max_{x_i}\;\left[a-b\left(x_i+\sum_{j\ne i}^{n}x_j\right)-c\right]x_i-F. The first-order condition is a − 2 b x i − b ∑ j ≠ i n x j − c = 0 . a-2bx_i-b\sum_{j\ne i}^{n}x_j-c=0.</a:t>
+            </a:r>
+          </a:p>
+          <a:p xmlns:a="http://schemas.openxmlformats.org/drawingml/2006/main">
+            <a:r>
+              <a:t/>
+            </a:r>
+          </a:p>
+          <a:p xmlns:a="http://schemas.openxmlformats.org/drawingml/2006/main">
+            <a:r>
+              <a:t/>
+            </a:r>
+          </a:p>
+          <a:p xmlns:a="http://schemas.openxmlformats.org/drawingml/2006/main">
+            <a:r>
+              <a:t/>
+            </a:r>
+          </a:p>
+          <a:p xmlns:a="http://schemas.openxmlformats.org/drawingml/2006/main">
+            <a:r>
+              <a:t/>
+            </a:r>
+          </a:p>
+          <a:p xmlns:a="http://schemas.openxmlformats.org/drawingml/2006/main">
+            <a:r>
+              <a:t/>
+            </a:r>
+          </a:p>
+          <a:p xmlns:a="http://schemas.openxmlformats.org/drawingml/2006/main">
+            <a:r>
+              <a:t/>
             </a:r>
           </a:p>
         </p:txBody>
@@ -3929,492 +2893,17 @@
           </a:p>
           <a:p xmlns:a="http://schemas.openxmlformats.org/drawingml/2006/main">
             <a:r>
-              <a:t>https://davidchivers.co.uk/teaching/macro-applications/lecture_3.html#/l3-s29</a:t>
-            </a:r>
-          </a:p>
-          <a:p xmlns:a="http://schemas.openxmlformats.org/drawingml/2006/main">
-            <a:r>
-              <a:t/>
-            </a:r>
-          </a:p>
-          <a:p xmlns:a="http://schemas.openxmlformats.org/drawingml/2006/main">
-            <a:r>
-              <a:t>Appendix: the firm’s problem</a:t>
-            </a:r>
-          </a:p>
-          <a:p xmlns:a="http://schemas.openxmlformats.org/drawingml/2006/main">
-            <a:r>
-              <a:t/>
-            </a:r>
-          </a:p>
-          <a:p xmlns:a="http://schemas.openxmlformats.org/drawingml/2006/main">
-            <a:r>
-              <a:t>Firm </a:t>
-            </a:r>
-          </a:p>
-          <a:p xmlns:a="http://schemas.openxmlformats.org/drawingml/2006/main">
-            <a:r>
-              <a:t>𝑖</a:t>
-            </a:r>
-          </a:p>
-          <a:p xmlns:a="http://schemas.openxmlformats.org/drawingml/2006/main">
-            <a:r>
-              <a:t> faces the following maximisation problem:</a:t>
-            </a:r>
-          </a:p>
-          <a:p xmlns:a="http://schemas.openxmlformats.org/drawingml/2006/main">
-            <a:r>
-              <a:t/>
-            </a:r>
-          </a:p>
-          <a:p xmlns:a="http://schemas.openxmlformats.org/drawingml/2006/main">
-            <a:r>
-              <a:t>max</a:t>
-            </a:r>
-          </a:p>
-          <a:p xmlns:a="http://schemas.openxmlformats.org/drawingml/2006/main">
-            <a:r>
-              <a:t>𝑥</a:t>
-            </a:r>
-          </a:p>
-          <a:p xmlns:a="http://schemas.openxmlformats.org/drawingml/2006/main">
-            <a:r>
-              <a:t>𝑖</a:t>
-            </a:r>
-          </a:p>
-          <a:p xmlns:a="http://schemas.openxmlformats.org/drawingml/2006/main">
-            <a:r>
-              <a:t>𝜋</a:t>
-            </a:r>
-          </a:p>
-          <a:p xmlns:a="http://schemas.openxmlformats.org/drawingml/2006/main">
-            <a:r>
-              <a:t>𝑖</a:t>
-            </a:r>
-          </a:p>
-          <a:p xmlns:a="http://schemas.openxmlformats.org/drawingml/2006/main">
-            <a:r>
-              <a:t>=</a:t>
-            </a:r>
-          </a:p>
-          <a:p xmlns:a="http://schemas.openxmlformats.org/drawingml/2006/main">
-            <a:r>
-              <a:t>(</a:t>
-            </a:r>
-          </a:p>
-          <a:p xmlns:a="http://schemas.openxmlformats.org/drawingml/2006/main">
-            <a:r>
-              <a:t>𝑝</a:t>
-            </a:r>
-          </a:p>
-          <a:p xmlns:a="http://schemas.openxmlformats.org/drawingml/2006/main">
-            <a:r>
-              <a:t>−</a:t>
-            </a:r>
-          </a:p>
-          <a:p xmlns:a="http://schemas.openxmlformats.org/drawingml/2006/main">
-            <a:r>
-              <a:t>𝑐</a:t>
-            </a:r>
-          </a:p>
-          <a:p xmlns:a="http://schemas.openxmlformats.org/drawingml/2006/main">
-            <a:r>
-              <a:t>)</a:t>
-            </a:r>
-          </a:p>
-          <a:p xmlns:a="http://schemas.openxmlformats.org/drawingml/2006/main">
-            <a:r>
-              <a:t>𝑥</a:t>
-            </a:r>
-          </a:p>
-          <a:p xmlns:a="http://schemas.openxmlformats.org/drawingml/2006/main">
-            <a:r>
-              <a:t>𝑖</a:t>
-            </a:r>
-          </a:p>
-          <a:p xmlns:a="http://schemas.openxmlformats.org/drawingml/2006/main">
-            <a:r>
-              <a:t>−</a:t>
-            </a:r>
-          </a:p>
-          <a:p xmlns:a="http://schemas.openxmlformats.org/drawingml/2006/main">
-            <a:r>
-              <a:t>𝐹</a:t>
-            </a:r>
-          </a:p>
-          <a:p xmlns:a="http://schemas.openxmlformats.org/drawingml/2006/main">
-            <a:r>
-              <a:t>,</a:t>
-            </a:r>
-          </a:p>
-          <a:p xmlns:a="http://schemas.openxmlformats.org/drawingml/2006/main">
-            <a:r>
-              <a:t/>
-            </a:r>
-          </a:p>
-          <a:p xmlns:a="http://schemas.openxmlformats.org/drawingml/2006/main">
-            <a:r>
-              <a:t>𝑝</a:t>
-            </a:r>
-          </a:p>
-          <a:p xmlns:a="http://schemas.openxmlformats.org/drawingml/2006/main">
-            <a:r>
-              <a:t>=</a:t>
-            </a:r>
-          </a:p>
-          <a:p xmlns:a="http://schemas.openxmlformats.org/drawingml/2006/main">
-            <a:r>
-              <a:t>𝑎</a:t>
-            </a:r>
-          </a:p>
-          <a:p xmlns:a="http://schemas.openxmlformats.org/drawingml/2006/main">
-            <a:r>
-              <a:t>−</a:t>
-            </a:r>
-          </a:p>
-          <a:p xmlns:a="http://schemas.openxmlformats.org/drawingml/2006/main">
-            <a:r>
-              <a:t>𝑏</a:t>
-            </a:r>
-          </a:p>
-          <a:p xmlns:a="http://schemas.openxmlformats.org/drawingml/2006/main">
-            <a:r>
-              <a:t>𝑍</a:t>
-            </a:r>
-          </a:p>
-          <a:p xmlns:a="http://schemas.openxmlformats.org/drawingml/2006/main">
-            <a:r>
-              <a:t>,</a:t>
-            </a:r>
-          </a:p>
-          <a:p xmlns:a="http://schemas.openxmlformats.org/drawingml/2006/main">
-            <a:r>
-              <a:t>𝑍</a:t>
-            </a:r>
-          </a:p>
-          <a:p xmlns:a="http://schemas.openxmlformats.org/drawingml/2006/main">
-            <a:r>
-              <a:t>=</a:t>
-            </a:r>
-          </a:p>
-          <a:p xmlns:a="http://schemas.openxmlformats.org/drawingml/2006/main">
-            <a:r>
-              <a:t>𝑥</a:t>
-            </a:r>
-          </a:p>
-          <a:p xmlns:a="http://schemas.openxmlformats.org/drawingml/2006/main">
-            <a:r>
-              <a:t>𝑖</a:t>
-            </a:r>
-          </a:p>
-          <a:p xmlns:a="http://schemas.openxmlformats.org/drawingml/2006/main">
-            <a:r>
-              <a:t>+</a:t>
-            </a:r>
-          </a:p>
-          <a:p xmlns:a="http://schemas.openxmlformats.org/drawingml/2006/main">
-            <a:r>
-              <a:t>∑</a:t>
-            </a:r>
-          </a:p>
-          <a:p xmlns:a="http://schemas.openxmlformats.org/drawingml/2006/main">
-            <a:r>
-              <a:t>𝑗</a:t>
-            </a:r>
-          </a:p>
-          <a:p xmlns:a="http://schemas.openxmlformats.org/drawingml/2006/main">
-            <a:r>
-              <a:t>≠</a:t>
-            </a:r>
-          </a:p>
-          <a:p xmlns:a="http://schemas.openxmlformats.org/drawingml/2006/main">
-            <a:r>
-              <a:t>𝑖</a:t>
-            </a:r>
-          </a:p>
-          <a:p xmlns:a="http://schemas.openxmlformats.org/drawingml/2006/main">
-            <a:r>
-              <a:t>𝑛</a:t>
-            </a:r>
-          </a:p>
-          <a:p xmlns:a="http://schemas.openxmlformats.org/drawingml/2006/main">
-            <a:r>
-              <a:t>𝑥</a:t>
-            </a:r>
-          </a:p>
-          <a:p xmlns:a="http://schemas.openxmlformats.org/drawingml/2006/main">
-            <a:r>
-              <a:t>𝑗</a:t>
-            </a:r>
-          </a:p>
-          <a:p xmlns:a="http://schemas.openxmlformats.org/drawingml/2006/main">
-            <a:r>
-              <a:t>.</a:t>
-            </a:r>
-          </a:p>
-          <a:p xmlns:a="http://schemas.openxmlformats.org/drawingml/2006/main">
-            <a:r>
-              <a:t/>
-            </a:r>
-          </a:p>
-          <a:p xmlns:a="http://schemas.openxmlformats.org/drawingml/2006/main">
-            <a:r>
-              <a:t>Substituting the demand function gives</a:t>
-            </a:r>
-          </a:p>
-          <a:p xmlns:a="http://schemas.openxmlformats.org/drawingml/2006/main">
-            <a:r>
-              <a:t/>
-            </a:r>
-          </a:p>
-          <a:p xmlns:a="http://schemas.openxmlformats.org/drawingml/2006/main">
-            <a:r>
-              <a:t>max</a:t>
-            </a:r>
-          </a:p>
-          <a:p xmlns:a="http://schemas.openxmlformats.org/drawingml/2006/main">
-            <a:r>
-              <a:t>𝑥</a:t>
-            </a:r>
-          </a:p>
-          <a:p xmlns:a="http://schemas.openxmlformats.org/drawingml/2006/main">
-            <a:r>
-              <a:t>𝑖</a:t>
-            </a:r>
-          </a:p>
-          <a:p xmlns:a="http://schemas.openxmlformats.org/drawingml/2006/main">
-            <a:r>
-              <a:t>[</a:t>
-            </a:r>
-          </a:p>
-          <a:p xmlns:a="http://schemas.openxmlformats.org/drawingml/2006/main">
-            <a:r>
-              <a:t>𝑎</a:t>
-            </a:r>
-          </a:p>
-          <a:p xmlns:a="http://schemas.openxmlformats.org/drawingml/2006/main">
-            <a:r>
-              <a:t>−</a:t>
-            </a:r>
-          </a:p>
-          <a:p xmlns:a="http://schemas.openxmlformats.org/drawingml/2006/main">
-            <a:r>
-              <a:t>𝑏</a:t>
-            </a:r>
-          </a:p>
-          <a:p xmlns:a="http://schemas.openxmlformats.org/drawingml/2006/main">
-            <a:r>
-              <a:t>(</a:t>
-            </a:r>
-          </a:p>
-          <a:p xmlns:a="http://schemas.openxmlformats.org/drawingml/2006/main">
-            <a:r>
-              <a:t>𝑥</a:t>
-            </a:r>
-          </a:p>
-          <a:p xmlns:a="http://schemas.openxmlformats.org/drawingml/2006/main">
-            <a:r>
-              <a:t>𝑖</a:t>
-            </a:r>
-          </a:p>
-          <a:p xmlns:a="http://schemas.openxmlformats.org/drawingml/2006/main">
-            <a:r>
-              <a:t>+</a:t>
-            </a:r>
-          </a:p>
-          <a:p xmlns:a="http://schemas.openxmlformats.org/drawingml/2006/main">
-            <a:r>
-              <a:t>∑</a:t>
-            </a:r>
-          </a:p>
-          <a:p xmlns:a="http://schemas.openxmlformats.org/drawingml/2006/main">
-            <a:r>
-              <a:t>𝑗</a:t>
-            </a:r>
-          </a:p>
-          <a:p xmlns:a="http://schemas.openxmlformats.org/drawingml/2006/main">
-            <a:r>
-              <a:t>≠</a:t>
-            </a:r>
-          </a:p>
-          <a:p xmlns:a="http://schemas.openxmlformats.org/drawingml/2006/main">
-            <a:r>
-              <a:t>𝑖</a:t>
-            </a:r>
-          </a:p>
-          <a:p xmlns:a="http://schemas.openxmlformats.org/drawingml/2006/main">
-            <a:r>
-              <a:t>𝑛</a:t>
-            </a:r>
-          </a:p>
-          <a:p xmlns:a="http://schemas.openxmlformats.org/drawingml/2006/main">
-            <a:r>
-              <a:t>𝑥</a:t>
-            </a:r>
-          </a:p>
-          <a:p xmlns:a="http://schemas.openxmlformats.org/drawingml/2006/main">
-            <a:r>
-              <a:t>𝑗</a:t>
-            </a:r>
-          </a:p>
-          <a:p xmlns:a="http://schemas.openxmlformats.org/drawingml/2006/main">
-            <a:r>
-              <a:t>)</a:t>
-            </a:r>
-          </a:p>
-          <a:p xmlns:a="http://schemas.openxmlformats.org/drawingml/2006/main">
-            <a:r>
-              <a:t>−</a:t>
-            </a:r>
-          </a:p>
-          <a:p xmlns:a="http://schemas.openxmlformats.org/drawingml/2006/main">
-            <a:r>
-              <a:t>𝑐</a:t>
-            </a:r>
-          </a:p>
-          <a:p xmlns:a="http://schemas.openxmlformats.org/drawingml/2006/main">
-            <a:r>
-              <a:t>]</a:t>
-            </a:r>
-          </a:p>
-          <a:p xmlns:a="http://schemas.openxmlformats.org/drawingml/2006/main">
-            <a:r>
-              <a:t>𝑥</a:t>
-            </a:r>
-          </a:p>
-          <a:p xmlns:a="http://schemas.openxmlformats.org/drawingml/2006/main">
-            <a:r>
-              <a:t>𝑖</a:t>
-            </a:r>
-          </a:p>
-          <a:p xmlns:a="http://schemas.openxmlformats.org/drawingml/2006/main">
-            <a:r>
-              <a:t>−</a:t>
-            </a:r>
-          </a:p>
-          <a:p xmlns:a="http://schemas.openxmlformats.org/drawingml/2006/main">
-            <a:r>
-              <a:t>𝐹</a:t>
-            </a:r>
-          </a:p>
-          <a:p xmlns:a="http://schemas.openxmlformats.org/drawingml/2006/main">
-            <a:r>
-              <a:t>.</a:t>
-            </a:r>
-          </a:p>
-          <a:p xmlns:a="http://schemas.openxmlformats.org/drawingml/2006/main">
-            <a:r>
-              <a:t/>
-            </a:r>
-          </a:p>
-          <a:p xmlns:a="http://schemas.openxmlformats.org/drawingml/2006/main">
-            <a:r>
-              <a:t>The first-order condition is</a:t>
-            </a:r>
-          </a:p>
-          <a:p xmlns:a="http://schemas.openxmlformats.org/drawingml/2006/main">
-            <a:r>
-              <a:t/>
-            </a:r>
-          </a:p>
-          <a:p xmlns:a="http://schemas.openxmlformats.org/drawingml/2006/main">
-            <a:r>
-              <a:t>𝑎</a:t>
-            </a:r>
-          </a:p>
-          <a:p xmlns:a="http://schemas.openxmlformats.org/drawingml/2006/main">
-            <a:r>
-              <a:t>−</a:t>
-            </a:r>
-          </a:p>
-          <a:p xmlns:a="http://schemas.openxmlformats.org/drawingml/2006/main">
-            <a:r>
-              <a:t>2</a:t>
-            </a:r>
-          </a:p>
-          <a:p xmlns:a="http://schemas.openxmlformats.org/drawingml/2006/main">
-            <a:r>
-              <a:t>𝑏</a:t>
-            </a:r>
-          </a:p>
-          <a:p xmlns:a="http://schemas.openxmlformats.org/drawingml/2006/main">
-            <a:r>
-              <a:t>𝑥</a:t>
-            </a:r>
-          </a:p>
-          <a:p xmlns:a="http://schemas.openxmlformats.org/drawingml/2006/main">
-            <a:r>
-              <a:t>𝑖</a:t>
-            </a:r>
-          </a:p>
-          <a:p xmlns:a="http://schemas.openxmlformats.org/drawingml/2006/main">
-            <a:r>
-              <a:t>−</a:t>
-            </a:r>
-          </a:p>
-          <a:p xmlns:a="http://schemas.openxmlformats.org/drawingml/2006/main">
-            <a:r>
-              <a:t>𝑏</a:t>
-            </a:r>
-          </a:p>
-          <a:p xmlns:a="http://schemas.openxmlformats.org/drawingml/2006/main">
-            <a:r>
-              <a:t>∑</a:t>
-            </a:r>
-          </a:p>
-          <a:p xmlns:a="http://schemas.openxmlformats.org/drawingml/2006/main">
-            <a:r>
-              <a:t>𝑗</a:t>
-            </a:r>
-          </a:p>
-          <a:p xmlns:a="http://schemas.openxmlformats.org/drawingml/2006/main">
-            <a:r>
-              <a:t>≠</a:t>
-            </a:r>
-          </a:p>
-          <a:p xmlns:a="http://schemas.openxmlformats.org/drawingml/2006/main">
-            <a:r>
-              <a:t>𝑖</a:t>
-            </a:r>
-          </a:p>
-          <a:p xmlns:a="http://schemas.openxmlformats.org/drawingml/2006/main">
-            <a:r>
-              <a:t>𝑛</a:t>
-            </a:r>
-          </a:p>
-          <a:p xmlns:a="http://schemas.openxmlformats.org/drawingml/2006/main">
-            <a:r>
-              <a:t>𝑥</a:t>
-            </a:r>
-          </a:p>
-          <a:p xmlns:a="http://schemas.openxmlformats.org/drawingml/2006/main">
-            <a:r>
-              <a:t>𝑗</a:t>
-            </a:r>
-          </a:p>
-          <a:p xmlns:a="http://schemas.openxmlformats.org/drawingml/2006/main">
-            <a:r>
-              <a:t>−</a:t>
-            </a:r>
-          </a:p>
-          <a:p xmlns:a="http://schemas.openxmlformats.org/drawingml/2006/main">
-            <a:r>
-              <a:t>𝑐</a:t>
-            </a:r>
-          </a:p>
-          <a:p xmlns:a="http://schemas.openxmlformats.org/drawingml/2006/main">
-            <a:r>
-              <a:t>=</a:t>
-            </a:r>
-          </a:p>
-          <a:p xmlns:a="http://schemas.openxmlformats.org/drawingml/2006/main">
-            <a:r>
-              <a:t>0</a:t>
-            </a:r>
-          </a:p>
-          <a:p xmlns:a="http://schemas.openxmlformats.org/drawingml/2006/main">
-            <a:r>
-              <a:t>.</a:t>
+              <a:t>https://davidchivers.co.uk/teaching/macro-applications/lecture_3.html#/l3-s30</a:t>
+            </a:r>
+          </a:p>
+          <a:p xmlns:a="http://schemas.openxmlformats.org/drawingml/2006/main">
+            <a:r>
+              <a:t/>
+            </a:r>
+          </a:p>
+          <a:p xmlns:a="http://schemas.openxmlformats.org/drawingml/2006/main">
+            <a:r>
+              <a:t>Appendix: symmetric firms Assume symmetric firms: x j = x i = x x_j=x_i=x . Then a − 2 b x i − b ( n − 1 ) x i − c = 0 , a-2bx_i-b(n-1)x_i-c=0, so x i = x = a − c b ( 1 + n ) . x_i=x=\frac{a-c}{b(1+n)}. Using the demand function and Z = n x Z=nx , the market price is p = a + n c 1 + n . p=\frac{a+nc}{1+n}.</a:t>
             </a:r>
           </a:p>
           <a:p xmlns:a="http://schemas.openxmlformats.org/drawingml/2006/main">
@@ -4529,47 +3018,7 @@
           </a:p>
           <a:p xmlns:a="http://schemas.openxmlformats.org/drawingml/2006/main">
             <a:r>
-              <a:t>Learning objectives</a:t>
-            </a:r>
-          </a:p>
-          <a:p xmlns:a="http://schemas.openxmlformats.org/drawingml/2006/main">
-            <a:r>
-              <a:t/>
-            </a:r>
-          </a:p>
-          <a:p xmlns:a="http://schemas.openxmlformats.org/drawingml/2006/main">
-            <a:r>
-              <a:t>At the end of this topic, you will be able to:</a:t>
-            </a:r>
-          </a:p>
-          <a:p xmlns:a="http://schemas.openxmlformats.org/drawingml/2006/main">
-            <a:r>
-              <a:t/>
-            </a:r>
-          </a:p>
-          <a:p xmlns:a="http://schemas.openxmlformats.org/drawingml/2006/main">
-            <a:r>
-              <a:t>Analyse how increased market size affects:</a:t>
-            </a:r>
-          </a:p>
-          <a:p xmlns:a="http://schemas.openxmlformats.org/drawingml/2006/main">
-            <a:r>
-              <a:t>Competitiveness: the pro-competitive effect.</a:t>
-            </a:r>
-          </a:p>
-          <a:p xmlns:a="http://schemas.openxmlformats.org/drawingml/2006/main">
-            <a:r>
-              <a:t>The scale of firms: industrial restructuring.</a:t>
-            </a:r>
-          </a:p>
-          <a:p xmlns:a="http://schemas.openxmlformats.org/drawingml/2006/main">
-            <a:r>
-              <a:t>Welfare.</a:t>
-            </a:r>
-          </a:p>
-          <a:p xmlns:a="http://schemas.openxmlformats.org/drawingml/2006/main">
-            <a:r>
-              <a:t>Discuss the empirical evidence on the effects of the Single Market Act on European price-cost margins.</a:t>
+              <a:t>Learning objectives At the end of this topic, you will be able to: Analyse how increased market size affects: Competitiveness: the pro-competitive effect . The scale of firms: industrial restructuring . Welfare. Discuss the empirical evidence on the effects of the Single Market Programme on European price-cost margins.</a:t>
             </a:r>
           </a:p>
           <a:p xmlns:a="http://schemas.openxmlformats.org/drawingml/2006/main">
@@ -4674,352 +3123,17 @@
           </a:p>
           <a:p xmlns:a="http://schemas.openxmlformats.org/drawingml/2006/main">
             <a:r>
-              <a:t>https://davidchivers.co.uk/teaching/macro-applications/lecture_3.html#/l3-s30</a:t>
-            </a:r>
-          </a:p>
-          <a:p xmlns:a="http://schemas.openxmlformats.org/drawingml/2006/main">
-            <a:r>
-              <a:t/>
-            </a:r>
-          </a:p>
-          <a:p xmlns:a="http://schemas.openxmlformats.org/drawingml/2006/main">
-            <a:r>
-              <a:t>Appendix: symmetric firms</a:t>
-            </a:r>
-          </a:p>
-          <a:p xmlns:a="http://schemas.openxmlformats.org/drawingml/2006/main">
-            <a:r>
-              <a:t/>
-            </a:r>
-          </a:p>
-          <a:p xmlns:a="http://schemas.openxmlformats.org/drawingml/2006/main">
-            <a:r>
-              <a:t>Assume symmetric firms: </a:t>
-            </a:r>
-          </a:p>
-          <a:p xmlns:a="http://schemas.openxmlformats.org/drawingml/2006/main">
-            <a:r>
-              <a:t>𝑥</a:t>
-            </a:r>
-          </a:p>
-          <a:p xmlns:a="http://schemas.openxmlformats.org/drawingml/2006/main">
-            <a:r>
-              <a:t>𝑗</a:t>
-            </a:r>
-          </a:p>
-          <a:p xmlns:a="http://schemas.openxmlformats.org/drawingml/2006/main">
-            <a:r>
-              <a:t>=</a:t>
-            </a:r>
-          </a:p>
-          <a:p xmlns:a="http://schemas.openxmlformats.org/drawingml/2006/main">
-            <a:r>
-              <a:t>𝑥</a:t>
-            </a:r>
-          </a:p>
-          <a:p xmlns:a="http://schemas.openxmlformats.org/drawingml/2006/main">
-            <a:r>
-              <a:t>𝑖</a:t>
-            </a:r>
-          </a:p>
-          <a:p xmlns:a="http://schemas.openxmlformats.org/drawingml/2006/main">
-            <a:r>
-              <a:t>=</a:t>
-            </a:r>
-          </a:p>
-          <a:p xmlns:a="http://schemas.openxmlformats.org/drawingml/2006/main">
-            <a:r>
-              <a:t>𝑥</a:t>
-            </a:r>
-          </a:p>
-          <a:p xmlns:a="http://schemas.openxmlformats.org/drawingml/2006/main">
-            <a:r>
-              <a:t>. Then</a:t>
-            </a:r>
-          </a:p>
-          <a:p xmlns:a="http://schemas.openxmlformats.org/drawingml/2006/main">
-            <a:r>
-              <a:t/>
-            </a:r>
-          </a:p>
-          <a:p xmlns:a="http://schemas.openxmlformats.org/drawingml/2006/main">
-            <a:r>
-              <a:t>𝑎</a:t>
-            </a:r>
-          </a:p>
-          <a:p xmlns:a="http://schemas.openxmlformats.org/drawingml/2006/main">
-            <a:r>
-              <a:t>−</a:t>
-            </a:r>
-          </a:p>
-          <a:p xmlns:a="http://schemas.openxmlformats.org/drawingml/2006/main">
-            <a:r>
-              <a:t>2</a:t>
-            </a:r>
-          </a:p>
-          <a:p xmlns:a="http://schemas.openxmlformats.org/drawingml/2006/main">
-            <a:r>
-              <a:t>𝑏</a:t>
-            </a:r>
-          </a:p>
-          <a:p xmlns:a="http://schemas.openxmlformats.org/drawingml/2006/main">
-            <a:r>
-              <a:t>𝑥</a:t>
-            </a:r>
-          </a:p>
-          <a:p xmlns:a="http://schemas.openxmlformats.org/drawingml/2006/main">
-            <a:r>
-              <a:t>𝑖</a:t>
-            </a:r>
-          </a:p>
-          <a:p xmlns:a="http://schemas.openxmlformats.org/drawingml/2006/main">
-            <a:r>
-              <a:t>−</a:t>
-            </a:r>
-          </a:p>
-          <a:p xmlns:a="http://schemas.openxmlformats.org/drawingml/2006/main">
-            <a:r>
-              <a:t>𝑏</a:t>
-            </a:r>
-          </a:p>
-          <a:p xmlns:a="http://schemas.openxmlformats.org/drawingml/2006/main">
-            <a:r>
-              <a:t>(</a:t>
-            </a:r>
-          </a:p>
-          <a:p xmlns:a="http://schemas.openxmlformats.org/drawingml/2006/main">
-            <a:r>
-              <a:t>𝑛</a:t>
-            </a:r>
-          </a:p>
-          <a:p xmlns:a="http://schemas.openxmlformats.org/drawingml/2006/main">
-            <a:r>
-              <a:t>−</a:t>
-            </a:r>
-          </a:p>
-          <a:p xmlns:a="http://schemas.openxmlformats.org/drawingml/2006/main">
-            <a:r>
-              <a:t>1</a:t>
-            </a:r>
-          </a:p>
-          <a:p xmlns:a="http://schemas.openxmlformats.org/drawingml/2006/main">
-            <a:r>
-              <a:t>)</a:t>
-            </a:r>
-          </a:p>
-          <a:p xmlns:a="http://schemas.openxmlformats.org/drawingml/2006/main">
-            <a:r>
-              <a:t>𝑥</a:t>
-            </a:r>
-          </a:p>
-          <a:p xmlns:a="http://schemas.openxmlformats.org/drawingml/2006/main">
-            <a:r>
-              <a:t>𝑖</a:t>
-            </a:r>
-          </a:p>
-          <a:p xmlns:a="http://schemas.openxmlformats.org/drawingml/2006/main">
-            <a:r>
-              <a:t>−</a:t>
-            </a:r>
-          </a:p>
-          <a:p xmlns:a="http://schemas.openxmlformats.org/drawingml/2006/main">
-            <a:r>
-              <a:t>𝑐</a:t>
-            </a:r>
-          </a:p>
-          <a:p xmlns:a="http://schemas.openxmlformats.org/drawingml/2006/main">
-            <a:r>
-              <a:t>=</a:t>
-            </a:r>
-          </a:p>
-          <a:p xmlns:a="http://schemas.openxmlformats.org/drawingml/2006/main">
-            <a:r>
-              <a:t>0</a:t>
-            </a:r>
-          </a:p>
-          <a:p xmlns:a="http://schemas.openxmlformats.org/drawingml/2006/main">
-            <a:r>
-              <a:t>,</a:t>
-            </a:r>
-          </a:p>
-          <a:p xmlns:a="http://schemas.openxmlformats.org/drawingml/2006/main">
-            <a:r>
-              <a:t/>
-            </a:r>
-          </a:p>
-          <a:p xmlns:a="http://schemas.openxmlformats.org/drawingml/2006/main">
-            <a:r>
-              <a:t>so</a:t>
-            </a:r>
-          </a:p>
-          <a:p xmlns:a="http://schemas.openxmlformats.org/drawingml/2006/main">
-            <a:r>
-              <a:t/>
-            </a:r>
-          </a:p>
-          <a:p xmlns:a="http://schemas.openxmlformats.org/drawingml/2006/main">
-            <a:r>
-              <a:t>𝑥</a:t>
-            </a:r>
-          </a:p>
-          <a:p xmlns:a="http://schemas.openxmlformats.org/drawingml/2006/main">
-            <a:r>
-              <a:t>𝑖</a:t>
-            </a:r>
-          </a:p>
-          <a:p xmlns:a="http://schemas.openxmlformats.org/drawingml/2006/main">
-            <a:r>
-              <a:t>=</a:t>
-            </a:r>
-          </a:p>
-          <a:p xmlns:a="http://schemas.openxmlformats.org/drawingml/2006/main">
-            <a:r>
-              <a:t>𝑥</a:t>
-            </a:r>
-          </a:p>
-          <a:p xmlns:a="http://schemas.openxmlformats.org/drawingml/2006/main">
-            <a:r>
-              <a:t>=</a:t>
-            </a:r>
-          </a:p>
-          <a:p xmlns:a="http://schemas.openxmlformats.org/drawingml/2006/main">
-            <a:r>
-              <a:t>𝑎</a:t>
-            </a:r>
-          </a:p>
-          <a:p xmlns:a="http://schemas.openxmlformats.org/drawingml/2006/main">
-            <a:r>
-              <a:t>−</a:t>
-            </a:r>
-          </a:p>
-          <a:p xmlns:a="http://schemas.openxmlformats.org/drawingml/2006/main">
-            <a:r>
-              <a:t>𝑐</a:t>
-            </a:r>
-          </a:p>
-          <a:p xmlns:a="http://schemas.openxmlformats.org/drawingml/2006/main">
-            <a:r>
-              <a:t>𝑏</a:t>
-            </a:r>
-          </a:p>
-          <a:p xmlns:a="http://schemas.openxmlformats.org/drawingml/2006/main">
-            <a:r>
-              <a:t>(</a:t>
-            </a:r>
-          </a:p>
-          <a:p xmlns:a="http://schemas.openxmlformats.org/drawingml/2006/main">
-            <a:r>
-              <a:t>1</a:t>
-            </a:r>
-          </a:p>
-          <a:p xmlns:a="http://schemas.openxmlformats.org/drawingml/2006/main">
-            <a:r>
-              <a:t>+</a:t>
-            </a:r>
-          </a:p>
-          <a:p xmlns:a="http://schemas.openxmlformats.org/drawingml/2006/main">
-            <a:r>
-              <a:t>𝑛</a:t>
-            </a:r>
-          </a:p>
-          <a:p xmlns:a="http://schemas.openxmlformats.org/drawingml/2006/main">
-            <a:r>
-              <a:t>)</a:t>
-            </a:r>
-          </a:p>
-          <a:p xmlns:a="http://schemas.openxmlformats.org/drawingml/2006/main">
-            <a:r>
-              <a:t>.</a:t>
-            </a:r>
-          </a:p>
-          <a:p xmlns:a="http://schemas.openxmlformats.org/drawingml/2006/main">
-            <a:r>
-              <a:t/>
-            </a:r>
-          </a:p>
-          <a:p xmlns:a="http://schemas.openxmlformats.org/drawingml/2006/main">
-            <a:r>
-              <a:t>Using the demand function and </a:t>
-            </a:r>
-          </a:p>
-          <a:p xmlns:a="http://schemas.openxmlformats.org/drawingml/2006/main">
-            <a:r>
-              <a:t>𝑍</a:t>
-            </a:r>
-          </a:p>
-          <a:p xmlns:a="http://schemas.openxmlformats.org/drawingml/2006/main">
-            <a:r>
-              <a:t>=</a:t>
-            </a:r>
-          </a:p>
-          <a:p xmlns:a="http://schemas.openxmlformats.org/drawingml/2006/main">
-            <a:r>
-              <a:t>𝑛</a:t>
-            </a:r>
-          </a:p>
-          <a:p xmlns:a="http://schemas.openxmlformats.org/drawingml/2006/main">
-            <a:r>
-              <a:t>𝑥</a:t>
-            </a:r>
-          </a:p>
-          <a:p xmlns:a="http://schemas.openxmlformats.org/drawingml/2006/main">
-            <a:r>
-              <a:t>, the market price is</a:t>
-            </a:r>
-          </a:p>
-          <a:p xmlns:a="http://schemas.openxmlformats.org/drawingml/2006/main">
-            <a:r>
-              <a:t/>
-            </a:r>
-          </a:p>
-          <a:p xmlns:a="http://schemas.openxmlformats.org/drawingml/2006/main">
-            <a:r>
-              <a:t>𝑝</a:t>
-            </a:r>
-          </a:p>
-          <a:p xmlns:a="http://schemas.openxmlformats.org/drawingml/2006/main">
-            <a:r>
-              <a:t>=</a:t>
-            </a:r>
-          </a:p>
-          <a:p xmlns:a="http://schemas.openxmlformats.org/drawingml/2006/main">
-            <a:r>
-              <a:t>𝑎</a:t>
-            </a:r>
-          </a:p>
-          <a:p xmlns:a="http://schemas.openxmlformats.org/drawingml/2006/main">
-            <a:r>
-              <a:t>+</a:t>
-            </a:r>
-          </a:p>
-          <a:p xmlns:a="http://schemas.openxmlformats.org/drawingml/2006/main">
-            <a:r>
-              <a:t>𝑛</a:t>
-            </a:r>
-          </a:p>
-          <a:p xmlns:a="http://schemas.openxmlformats.org/drawingml/2006/main">
-            <a:r>
-              <a:t>𝑐</a:t>
-            </a:r>
-          </a:p>
-          <a:p xmlns:a="http://schemas.openxmlformats.org/drawingml/2006/main">
-            <a:r>
-              <a:t>1</a:t>
-            </a:r>
-          </a:p>
-          <a:p xmlns:a="http://schemas.openxmlformats.org/drawingml/2006/main">
-            <a:r>
-              <a:t>+</a:t>
-            </a:r>
-          </a:p>
-          <a:p xmlns:a="http://schemas.openxmlformats.org/drawingml/2006/main">
-            <a:r>
-              <a:t>𝑛</a:t>
-            </a:r>
-          </a:p>
-          <a:p xmlns:a="http://schemas.openxmlformats.org/drawingml/2006/main">
-            <a:r>
-              <a:t>.</a:t>
+              <a:t>https://davidchivers.co.uk/teaching/macro-applications/lecture_3.html#/l3-s31</a:t>
+            </a:r>
+          </a:p>
+          <a:p xmlns:a="http://schemas.openxmlformats.org/drawingml/2006/main">
+            <a:r>
+              <a:t/>
+            </a:r>
+          </a:p>
+          <a:p xmlns:a="http://schemas.openxmlformats.org/drawingml/2006/main">
+            <a:r>
+              <a:t>Appendix: the COMP equation The mark-up for a given number of firms gives the COMP equation : μ ≡ p − c = a − c 1 + n . \mu\equiv p-c=\frac{a-c}{1+n}. The mark-up decreases with the number of firms. It approaches zero as the number of firms tends to infinity, as under perfect competition: lim n → ∞ μ = 0 . \lim_{n\to\infty}\mu=0.</a:t>
             </a:r>
           </a:p>
           <a:p xmlns:a="http://schemas.openxmlformats.org/drawingml/2006/main">
@@ -5124,152 +3238,17 @@
           </a:p>
           <a:p xmlns:a="http://schemas.openxmlformats.org/drawingml/2006/main">
             <a:r>
-              <a:t>https://davidchivers.co.uk/teaching/macro-applications/lecture_3.html#/l3-s31</a:t>
-            </a:r>
-          </a:p>
-          <a:p xmlns:a="http://schemas.openxmlformats.org/drawingml/2006/main">
-            <a:r>
-              <a:t/>
-            </a:r>
-          </a:p>
-          <a:p xmlns:a="http://schemas.openxmlformats.org/drawingml/2006/main">
-            <a:r>
-              <a:t>Appendix: the COMP equation</a:t>
-            </a:r>
-          </a:p>
-          <a:p xmlns:a="http://schemas.openxmlformats.org/drawingml/2006/main">
-            <a:r>
-              <a:t/>
-            </a:r>
-          </a:p>
-          <a:p xmlns:a="http://schemas.openxmlformats.org/drawingml/2006/main">
-            <a:r>
-              <a:t>The mark-up for a given number of firms gives the COMP equation:</a:t>
-            </a:r>
-          </a:p>
-          <a:p xmlns:a="http://schemas.openxmlformats.org/drawingml/2006/main">
-            <a:r>
-              <a:t/>
-            </a:r>
-          </a:p>
-          <a:p xmlns:a="http://schemas.openxmlformats.org/drawingml/2006/main">
-            <a:r>
-              <a:t>𝜇</a:t>
-            </a:r>
-          </a:p>
-          <a:p xmlns:a="http://schemas.openxmlformats.org/drawingml/2006/main">
-            <a:r>
-              <a:t>≡</a:t>
-            </a:r>
-          </a:p>
-          <a:p xmlns:a="http://schemas.openxmlformats.org/drawingml/2006/main">
-            <a:r>
-              <a:t>𝑝</a:t>
-            </a:r>
-          </a:p>
-          <a:p xmlns:a="http://schemas.openxmlformats.org/drawingml/2006/main">
-            <a:r>
-              <a:t>−</a:t>
-            </a:r>
-          </a:p>
-          <a:p xmlns:a="http://schemas.openxmlformats.org/drawingml/2006/main">
-            <a:r>
-              <a:t>𝑐</a:t>
-            </a:r>
-          </a:p>
-          <a:p xmlns:a="http://schemas.openxmlformats.org/drawingml/2006/main">
-            <a:r>
-              <a:t>=</a:t>
-            </a:r>
-          </a:p>
-          <a:p xmlns:a="http://schemas.openxmlformats.org/drawingml/2006/main">
-            <a:r>
-              <a:t>𝑎</a:t>
-            </a:r>
-          </a:p>
-          <a:p xmlns:a="http://schemas.openxmlformats.org/drawingml/2006/main">
-            <a:r>
-              <a:t>−</a:t>
-            </a:r>
-          </a:p>
-          <a:p xmlns:a="http://schemas.openxmlformats.org/drawingml/2006/main">
-            <a:r>
-              <a:t>𝑐</a:t>
-            </a:r>
-          </a:p>
-          <a:p xmlns:a="http://schemas.openxmlformats.org/drawingml/2006/main">
-            <a:r>
-              <a:t>1</a:t>
-            </a:r>
-          </a:p>
-          <a:p xmlns:a="http://schemas.openxmlformats.org/drawingml/2006/main">
-            <a:r>
-              <a:t>+</a:t>
-            </a:r>
-          </a:p>
-          <a:p xmlns:a="http://schemas.openxmlformats.org/drawingml/2006/main">
-            <a:r>
-              <a:t>𝑛</a:t>
-            </a:r>
-          </a:p>
-          <a:p xmlns:a="http://schemas.openxmlformats.org/drawingml/2006/main">
-            <a:r>
-              <a:t>.</a:t>
-            </a:r>
-          </a:p>
-          <a:p xmlns:a="http://schemas.openxmlformats.org/drawingml/2006/main">
-            <a:r>
-              <a:t/>
-            </a:r>
-          </a:p>
-          <a:p xmlns:a="http://schemas.openxmlformats.org/drawingml/2006/main">
-            <a:r>
-              <a:t>The mark-up decreases with the number of firms. It approaches zero as the number of firms tends to infinity, as under perfect competition:</a:t>
-            </a:r>
-          </a:p>
-          <a:p xmlns:a="http://schemas.openxmlformats.org/drawingml/2006/main">
-            <a:r>
-              <a:t/>
-            </a:r>
-          </a:p>
-          <a:p xmlns:a="http://schemas.openxmlformats.org/drawingml/2006/main">
-            <a:r>
-              <a:t>lim</a:t>
-            </a:r>
-          </a:p>
-          <a:p xmlns:a="http://schemas.openxmlformats.org/drawingml/2006/main">
-            <a:r>
-              <a:t>𝑛</a:t>
-            </a:r>
-          </a:p>
-          <a:p xmlns:a="http://schemas.openxmlformats.org/drawingml/2006/main">
-            <a:r>
-              <a:t>→</a:t>
-            </a:r>
-          </a:p>
-          <a:p xmlns:a="http://schemas.openxmlformats.org/drawingml/2006/main">
-            <a:r>
-              <a:t>∞</a:t>
-            </a:r>
-          </a:p>
-          <a:p xmlns:a="http://schemas.openxmlformats.org/drawingml/2006/main">
-            <a:r>
-              <a:t>𝜇</a:t>
-            </a:r>
-          </a:p>
-          <a:p xmlns:a="http://schemas.openxmlformats.org/drawingml/2006/main">
-            <a:r>
-              <a:t>=</a:t>
-            </a:r>
-          </a:p>
-          <a:p xmlns:a="http://schemas.openxmlformats.org/drawingml/2006/main">
-            <a:r>
-              <a:t>0</a:t>
-            </a:r>
-          </a:p>
-          <a:p xmlns:a="http://schemas.openxmlformats.org/drawingml/2006/main">
-            <a:r>
-              <a:t>.</a:t>
+              <a:t>https://davidchivers.co.uk/teaching/macro-applications/lecture_3.html#/l3-s32</a:t>
+            </a:r>
+          </a:p>
+          <a:p xmlns:a="http://schemas.openxmlformats.org/drawingml/2006/main">
+            <a:r>
+              <a:t/>
+            </a:r>
+          </a:p>
+          <a:p xmlns:a="http://schemas.openxmlformats.org/drawingml/2006/main">
+            <a:r>
+              <a:t>Appendix: the BE equation The free-entry condition is μ x = F . \mu x=F. The firm’s optimal quantity satisfies x = a − c b ( 1 + n ) . x=\frac{a-c}{b(1+n)}. Substitution gives the BE equation : μ = F b ( 1 + n ) a − c . \mu=\frac{Fb(1+n)}{a-c}.</a:t>
             </a:r>
           </a:p>
           <a:p xmlns:a="http://schemas.openxmlformats.org/drawingml/2006/main">
@@ -5374,316 +3353,6 @@
           </a:p>
           <a:p xmlns:a="http://schemas.openxmlformats.org/drawingml/2006/main">
             <a:r>
-              <a:t>https://davidchivers.co.uk/teaching/macro-applications/lecture_3.html#/l3-s32</a:t>
-            </a:r>
-          </a:p>
-          <a:p xmlns:a="http://schemas.openxmlformats.org/drawingml/2006/main">
-            <a:r>
-              <a:t/>
-            </a:r>
-          </a:p>
-          <a:p xmlns:a="http://schemas.openxmlformats.org/drawingml/2006/main">
-            <a:r>
-              <a:t>Appendix: the BE equation</a:t>
-            </a:r>
-          </a:p>
-          <a:p xmlns:a="http://schemas.openxmlformats.org/drawingml/2006/main">
-            <a:r>
-              <a:t/>
-            </a:r>
-          </a:p>
-          <a:p xmlns:a="http://schemas.openxmlformats.org/drawingml/2006/main">
-            <a:r>
-              <a:t>The free-entry condition is</a:t>
-            </a:r>
-          </a:p>
-          <a:p xmlns:a="http://schemas.openxmlformats.org/drawingml/2006/main">
-            <a:r>
-              <a:t/>
-            </a:r>
-          </a:p>
-          <a:p xmlns:a="http://schemas.openxmlformats.org/drawingml/2006/main">
-            <a:r>
-              <a:t>𝜇</a:t>
-            </a:r>
-          </a:p>
-          <a:p xmlns:a="http://schemas.openxmlformats.org/drawingml/2006/main">
-            <a:r>
-              <a:t>𝑥</a:t>
-            </a:r>
-          </a:p>
-          <a:p xmlns:a="http://schemas.openxmlformats.org/drawingml/2006/main">
-            <a:r>
-              <a:t>=</a:t>
-            </a:r>
-          </a:p>
-          <a:p xmlns:a="http://schemas.openxmlformats.org/drawingml/2006/main">
-            <a:r>
-              <a:t>𝐹</a:t>
-            </a:r>
-          </a:p>
-          <a:p xmlns:a="http://schemas.openxmlformats.org/drawingml/2006/main">
-            <a:r>
-              <a:t>.</a:t>
-            </a:r>
-          </a:p>
-          <a:p xmlns:a="http://schemas.openxmlformats.org/drawingml/2006/main">
-            <a:r>
-              <a:t/>
-            </a:r>
-          </a:p>
-          <a:p xmlns:a="http://schemas.openxmlformats.org/drawingml/2006/main">
-            <a:r>
-              <a:t>The firm’s optimal quantity satisfies</a:t>
-            </a:r>
-          </a:p>
-          <a:p xmlns:a="http://schemas.openxmlformats.org/drawingml/2006/main">
-            <a:r>
-              <a:t/>
-            </a:r>
-          </a:p>
-          <a:p xmlns:a="http://schemas.openxmlformats.org/drawingml/2006/main">
-            <a:r>
-              <a:t>𝑥</a:t>
-            </a:r>
-          </a:p>
-          <a:p xmlns:a="http://schemas.openxmlformats.org/drawingml/2006/main">
-            <a:r>
-              <a:t>=</a:t>
-            </a:r>
-          </a:p>
-          <a:p xmlns:a="http://schemas.openxmlformats.org/drawingml/2006/main">
-            <a:r>
-              <a:t>𝑎</a:t>
-            </a:r>
-          </a:p>
-          <a:p xmlns:a="http://schemas.openxmlformats.org/drawingml/2006/main">
-            <a:r>
-              <a:t>−</a:t>
-            </a:r>
-          </a:p>
-          <a:p xmlns:a="http://schemas.openxmlformats.org/drawingml/2006/main">
-            <a:r>
-              <a:t>𝑐</a:t>
-            </a:r>
-          </a:p>
-          <a:p xmlns:a="http://schemas.openxmlformats.org/drawingml/2006/main">
-            <a:r>
-              <a:t>𝑏</a:t>
-            </a:r>
-          </a:p>
-          <a:p xmlns:a="http://schemas.openxmlformats.org/drawingml/2006/main">
-            <a:r>
-              <a:t>(</a:t>
-            </a:r>
-          </a:p>
-          <a:p xmlns:a="http://schemas.openxmlformats.org/drawingml/2006/main">
-            <a:r>
-              <a:t>1</a:t>
-            </a:r>
-          </a:p>
-          <a:p xmlns:a="http://schemas.openxmlformats.org/drawingml/2006/main">
-            <a:r>
-              <a:t>+</a:t>
-            </a:r>
-          </a:p>
-          <a:p xmlns:a="http://schemas.openxmlformats.org/drawingml/2006/main">
-            <a:r>
-              <a:t>𝑛</a:t>
-            </a:r>
-          </a:p>
-          <a:p xmlns:a="http://schemas.openxmlformats.org/drawingml/2006/main">
-            <a:r>
-              <a:t>)</a:t>
-            </a:r>
-          </a:p>
-          <a:p xmlns:a="http://schemas.openxmlformats.org/drawingml/2006/main">
-            <a:r>
-              <a:t>.</a:t>
-            </a:r>
-          </a:p>
-          <a:p xmlns:a="http://schemas.openxmlformats.org/drawingml/2006/main">
-            <a:r>
-              <a:t/>
-            </a:r>
-          </a:p>
-          <a:p xmlns:a="http://schemas.openxmlformats.org/drawingml/2006/main">
-            <a:r>
-              <a:t>Substitution gives the BE equation:</a:t>
-            </a:r>
-          </a:p>
-          <a:p xmlns:a="http://schemas.openxmlformats.org/drawingml/2006/main">
-            <a:r>
-              <a:t/>
-            </a:r>
-          </a:p>
-          <a:p xmlns:a="http://schemas.openxmlformats.org/drawingml/2006/main">
-            <a:r>
-              <a:t>𝜇</a:t>
-            </a:r>
-          </a:p>
-          <a:p xmlns:a="http://schemas.openxmlformats.org/drawingml/2006/main">
-            <a:r>
-              <a:t>=</a:t>
-            </a:r>
-          </a:p>
-          <a:p xmlns:a="http://schemas.openxmlformats.org/drawingml/2006/main">
-            <a:r>
-              <a:t>𝐹</a:t>
-            </a:r>
-          </a:p>
-          <a:p xmlns:a="http://schemas.openxmlformats.org/drawingml/2006/main">
-            <a:r>
-              <a:t>𝑏</a:t>
-            </a:r>
-          </a:p>
-          <a:p xmlns:a="http://schemas.openxmlformats.org/drawingml/2006/main">
-            <a:r>
-              <a:t>(</a:t>
-            </a:r>
-          </a:p>
-          <a:p xmlns:a="http://schemas.openxmlformats.org/drawingml/2006/main">
-            <a:r>
-              <a:t>1</a:t>
-            </a:r>
-          </a:p>
-          <a:p xmlns:a="http://schemas.openxmlformats.org/drawingml/2006/main">
-            <a:r>
-              <a:t>+</a:t>
-            </a:r>
-          </a:p>
-          <a:p xmlns:a="http://schemas.openxmlformats.org/drawingml/2006/main">
-            <a:r>
-              <a:t>𝑛</a:t>
-            </a:r>
-          </a:p>
-          <a:p xmlns:a="http://schemas.openxmlformats.org/drawingml/2006/main">
-            <a:r>
-              <a:t>)</a:t>
-            </a:r>
-          </a:p>
-          <a:p xmlns:a="http://schemas.openxmlformats.org/drawingml/2006/main">
-            <a:r>
-              <a:t>𝑎</a:t>
-            </a:r>
-          </a:p>
-          <a:p xmlns:a="http://schemas.openxmlformats.org/drawingml/2006/main">
-            <a:r>
-              <a:t>−</a:t>
-            </a:r>
-          </a:p>
-          <a:p xmlns:a="http://schemas.openxmlformats.org/drawingml/2006/main">
-            <a:r>
-              <a:t>𝑐</a:t>
-            </a:r>
-          </a:p>
-          <a:p xmlns:a="http://schemas.openxmlformats.org/drawingml/2006/main">
-            <a:r>
-              <a:t>.</a:t>
-            </a:r>
-          </a:p>
-          <a:p xmlns:a="http://schemas.openxmlformats.org/drawingml/2006/main">
-            <a:r>
-              <a:t/>
-            </a:r>
-          </a:p>
-          <a:p xmlns:a="http://schemas.openxmlformats.org/drawingml/2006/main">
-            <a:r>
-              <a:t/>
-            </a:r>
-          </a:p>
-          <a:p xmlns:a="http://schemas.openxmlformats.org/drawingml/2006/main">
-            <a:r>
-              <a:t/>
-            </a:r>
-          </a:p>
-          <a:p xmlns:a="http://schemas.openxmlformats.org/drawingml/2006/main">
-            <a:r>
-              <a:t/>
-            </a:r>
-          </a:p>
-          <a:p xmlns:a="http://schemas.openxmlformats.org/drawingml/2006/main">
-            <a:r>
-              <a:t/>
-            </a:r>
-          </a:p>
-          <a:p xmlns:a="http://schemas.openxmlformats.org/drawingml/2006/main">
-            <a:r>
-              <a:t/>
-            </a:r>
-          </a:p>
-        </p:txBody>
-      </p:sp>
-      <p:sp>
-        <p:nvSpPr>
-          <p:cNvPr id="4" name="Slide Number Placeholder 3"/>
-          <p:cNvSpPr>
-            <a:spLocks xmlns:a="http://schemas.openxmlformats.org/drawingml/2006/main" noGrp="1"/>
-          </p:cNvSpPr>
-          <p:nvPr>
-            <p:ph type="sldNum" idx="5"/>
-          </p:nvPr>
-        </p:nvSpPr>
-        <p:spPr/>
-        <p:txBody>
-          <a:bodyPr xmlns:a="http://schemas.openxmlformats.org/drawingml/2006/main"/>
-          <a:lstStyle xmlns:a="http://schemas.openxmlformats.org/drawingml/2006/main"/>
-          <a:p xmlns:a="http://schemas.openxmlformats.org/drawingml/2006/main"/>
-        </p:txBody>
-      </p:sp>
-    </p:spTree>
-  </p:cSld>
-  <p:clrMapOvr>
-    <a:masterClrMapping xmlns:a="http://schemas.openxmlformats.org/drawingml/2006/main"/>
-  </p:clrMapOvr>
-</p:notes>
-</file>
-
-<file path=ppt/notesSlides/notesSlide33.xml><?xml version="1.0" encoding="utf-8"?>
-<p:notes xmlns:p="http://schemas.openxmlformats.org/presentationml/2006/main">
-  <p:cSld>
-    <p:spTree>
-      <p:nvGrpSpPr>
-        <p:cNvPr id="1" name=""/>
-        <p:cNvGrpSpPr/>
-        <p:nvPr/>
-      </p:nvGrpSpPr>
-      <p:grpSpPr>
-        <a:xfrm xmlns:a="http://schemas.openxmlformats.org/drawingml/2006/main"/>
-      </p:grpSpPr>
-      <p:sp>
-        <p:nvSpPr>
-          <p:cNvPr id="2" name="Slide Image Placeholder 1"/>
-          <p:cNvSpPr>
-            <a:spLocks xmlns:a="http://schemas.openxmlformats.org/drawingml/2006/main" noGrp="1"/>
-          </p:cNvSpPr>
-          <p:nvPr>
-            <p:ph type="sldImg" idx="0"/>
-          </p:nvPr>
-        </p:nvSpPr>
-        <p:spPr/>
-      </p:sp>
-      <p:sp>
-        <p:nvSpPr>
-          <p:cNvPr id="3" name="Notes Placeholder 2"/>
-          <p:cNvSpPr>
-            <a:spLocks xmlns:a="http://schemas.openxmlformats.org/drawingml/2006/main" noGrp="1"/>
-          </p:cNvSpPr>
-          <p:nvPr>
-            <p:ph type="body" idx="1"/>
-          </p:nvPr>
-        </p:nvSpPr>
-        <p:spPr/>
-        <p:txBody>
-          <a:bodyPr xmlns:a="http://schemas.openxmlformats.org/drawingml/2006/main"/>
-          <a:lstStyle xmlns:a="http://schemas.openxmlformats.org/drawingml/2006/main"/>
-          <a:p xmlns:a="http://schemas.openxmlformats.org/drawingml/2006/main">
-            <a:r>
-              <a:t>Static student copy of the current web slide. Slide artwork is flattened; add personal notes here. Interactive explanations, playback and accessible HTML are available at:</a:t>
-            </a:r>
-          </a:p>
-          <a:p xmlns:a="http://schemas.openxmlformats.org/drawingml/2006/main">
-            <a:r>
               <a:t>https://davidchivers.co.uk/teaching/macro-applications/lecture_3.html#/l3-s33</a:t>
             </a:r>
           </a:p>
@@ -5694,142 +3363,7 @@
           </a:p>
           <a:p xmlns:a="http://schemas.openxmlformats.org/drawingml/2006/main">
             <a:r>
-              <a:t>Appendix: equilibrium</a:t>
-            </a:r>
-          </a:p>
-          <a:p xmlns:a="http://schemas.openxmlformats.org/drawingml/2006/main">
-            <a:r>
-              <a:t/>
-            </a:r>
-          </a:p>
-          <a:p xmlns:a="http://schemas.openxmlformats.org/drawingml/2006/main">
-            <a:r>
-              <a:t>We have two equations in two unknowns: </a:t>
-            </a:r>
-          </a:p>
-          <a:p xmlns:a="http://schemas.openxmlformats.org/drawingml/2006/main">
-            <a:r>
-              <a:t>𝜇</a:t>
-            </a:r>
-          </a:p>
-          <a:p xmlns:a="http://schemas.openxmlformats.org/drawingml/2006/main">
-            <a:r>
-              <a:t> and </a:t>
-            </a:r>
-          </a:p>
-          <a:p xmlns:a="http://schemas.openxmlformats.org/drawingml/2006/main">
-            <a:r>
-              <a:t>𝑛</a:t>
-            </a:r>
-          </a:p>
-          <a:p xmlns:a="http://schemas.openxmlformats.org/drawingml/2006/main">
-            <a:r>
-              <a:t>.</a:t>
-            </a:r>
-          </a:p>
-          <a:p xmlns:a="http://schemas.openxmlformats.org/drawingml/2006/main">
-            <a:r>
-              <a:t/>
-            </a:r>
-          </a:p>
-          <a:p xmlns:a="http://schemas.openxmlformats.org/drawingml/2006/main">
-            <a:r>
-              <a:t>Solving the BE and COMP equations simultaneously gives the equilibrium mark-up and number of firms:</a:t>
-            </a:r>
-          </a:p>
-          <a:p xmlns:a="http://schemas.openxmlformats.org/drawingml/2006/main">
-            <a:r>
-              <a:t/>
-            </a:r>
-          </a:p>
-          <a:p xmlns:a="http://schemas.openxmlformats.org/drawingml/2006/main">
-            <a:r>
-              <a:t>𝜇</a:t>
-            </a:r>
-          </a:p>
-          <a:p xmlns:a="http://schemas.openxmlformats.org/drawingml/2006/main">
-            <a:r>
-              <a:t>′</a:t>
-            </a:r>
-          </a:p>
-          <a:p xmlns:a="http://schemas.openxmlformats.org/drawingml/2006/main">
-            <a:r>
-              <a:t>=</a:t>
-            </a:r>
-          </a:p>
-          <a:p xmlns:a="http://schemas.openxmlformats.org/drawingml/2006/main">
-            <a:r>
-              <a:t>𝐹</a:t>
-            </a:r>
-          </a:p>
-          <a:p xmlns:a="http://schemas.openxmlformats.org/drawingml/2006/main">
-            <a:r>
-              <a:t>𝑏</a:t>
-            </a:r>
-          </a:p>
-          <a:p xmlns:a="http://schemas.openxmlformats.org/drawingml/2006/main">
-            <a:r>
-              <a:t>,</a:t>
-            </a:r>
-          </a:p>
-          <a:p xmlns:a="http://schemas.openxmlformats.org/drawingml/2006/main">
-            <a:r>
-              <a:t/>
-            </a:r>
-          </a:p>
-          <a:p xmlns:a="http://schemas.openxmlformats.org/drawingml/2006/main">
-            <a:r>
-              <a:t>𝑛</a:t>
-            </a:r>
-          </a:p>
-          <a:p xmlns:a="http://schemas.openxmlformats.org/drawingml/2006/main">
-            <a:r>
-              <a:t>′</a:t>
-            </a:r>
-          </a:p>
-          <a:p xmlns:a="http://schemas.openxmlformats.org/drawingml/2006/main">
-            <a:r>
-              <a:t>=</a:t>
-            </a:r>
-          </a:p>
-          <a:p xmlns:a="http://schemas.openxmlformats.org/drawingml/2006/main">
-            <a:r>
-              <a:t>𝑎</a:t>
-            </a:r>
-          </a:p>
-          <a:p xmlns:a="http://schemas.openxmlformats.org/drawingml/2006/main">
-            <a:r>
-              <a:t>−</a:t>
-            </a:r>
-          </a:p>
-          <a:p xmlns:a="http://schemas.openxmlformats.org/drawingml/2006/main">
-            <a:r>
-              <a:t>𝑐</a:t>
-            </a:r>
-          </a:p>
-          <a:p xmlns:a="http://schemas.openxmlformats.org/drawingml/2006/main">
-            <a:r>
-              <a:t>𝐹</a:t>
-            </a:r>
-          </a:p>
-          <a:p xmlns:a="http://schemas.openxmlformats.org/drawingml/2006/main">
-            <a:r>
-              <a:t>𝑏</a:t>
-            </a:r>
-          </a:p>
-          <a:p xmlns:a="http://schemas.openxmlformats.org/drawingml/2006/main">
-            <a:r>
-              <a:t>−</a:t>
-            </a:r>
-          </a:p>
-          <a:p xmlns:a="http://schemas.openxmlformats.org/drawingml/2006/main">
-            <a:r>
-              <a:t>1</a:t>
-            </a:r>
-          </a:p>
-          <a:p xmlns:a="http://schemas.openxmlformats.org/drawingml/2006/main">
-            <a:r>
-              <a:t>.</a:t>
+              <a:t>Appendix: equilibrium We have two equations in two unknowns: μ \mu and n n . Solving the BE and COMP equations simultaneously gives the equilibrium mark-up and number of firms: μ ′ = F b , \mu'=\sqrt{Fb}, n ′ = a − c F b − 1 . n'=\frac{a-c}{\sqrt{Fb}}-1.</a:t>
             </a:r>
           </a:p>
           <a:p xmlns:a="http://schemas.openxmlformats.org/drawingml/2006/main">
@@ -5944,57 +3478,7 @@
           </a:p>
           <a:p xmlns:a="http://schemas.openxmlformats.org/drawingml/2006/main">
             <a:r>
-              <a:t>Analytical framework</a:t>
-            </a:r>
-          </a:p>
-          <a:p xmlns:a="http://schemas.openxmlformats.org/drawingml/2006/main">
-            <a:r>
-              <a:t>Brander and Krugman (1983)</a:t>
-            </a:r>
-          </a:p>
-          <a:p xmlns:a="http://schemas.openxmlformats.org/drawingml/2006/main">
-            <a:r>
-              <a:t>One good.</a:t>
-            </a:r>
-          </a:p>
-          <a:p xmlns:a="http://schemas.openxmlformats.org/drawingml/2006/main">
-            <a:r>
-              <a:t>Two countries: Home and Foreign.</a:t>
-            </a:r>
-          </a:p>
-          <a:p xmlns:a="http://schemas.openxmlformats.org/drawingml/2006/main">
-            <a:r>
-              <a:t>A fixed entry cost and constant marginal cost: increasing returns to scale.</a:t>
-            </a:r>
-          </a:p>
-          <a:p xmlns:a="http://schemas.openxmlformats.org/drawingml/2006/main">
-            <a:r>
-              <a:t>Linear demand.</a:t>
-            </a:r>
-          </a:p>
-          <a:p xmlns:a="http://schemas.openxmlformats.org/drawingml/2006/main">
-            <a:r>
-              <a:t>Two versions</a:t>
-            </a:r>
-          </a:p>
-          <a:p xmlns:a="http://schemas.openxmlformats.org/drawingml/2006/main">
-            <a:r>
-              <a:t>Fixed number of firms: one per country.</a:t>
-            </a:r>
-          </a:p>
-          <a:p xmlns:a="http://schemas.openxmlformats.org/drawingml/2006/main">
-            <a:r>
-              <a:t>Autarky: two monopolists.</a:t>
-            </a:r>
-          </a:p>
-          <a:p xmlns:a="http://schemas.openxmlformats.org/drawingml/2006/main">
-            <a:r>
-              <a:t>Open economy: Cournot competition.</a:t>
-            </a:r>
-          </a:p>
-          <a:p xmlns:a="http://schemas.openxmlformats.org/drawingml/2006/main">
-            <a:r>
-              <a:t>Free entry: the number of firms is determined endogenously.</a:t>
+              <a:t>Analytical framework Brander and Krugman (1983) One good. Two countries: Home and Foreign. A fixed entry cost and constant marginal cost: increasing returns to scale. Linear demand. Two versions Fixed number of firms: one per country. Autarky: two monopolists. Open economy: Cournot competition. Free entry: the number of firms is determined endogenously.</a:t>
             </a:r>
           </a:p>
           <a:p xmlns:a="http://schemas.openxmlformats.org/drawingml/2006/main">
@@ -6109,302 +3593,17 @@
           </a:p>
           <a:p xmlns:a="http://schemas.openxmlformats.org/drawingml/2006/main">
             <a:r>
-              <a:t>Two monopolistic markets</a:t>
-            </a:r>
-          </a:p>
-          <a:p xmlns:a="http://schemas.openxmlformats.org/drawingml/2006/main">
-            <a:r>
-              <a:t/>
-            </a:r>
-          </a:p>
-          <a:p xmlns:a="http://schemas.openxmlformats.org/drawingml/2006/main">
-            <a:r>
-              <a:t>Monopolist’s problem</a:t>
-            </a:r>
-          </a:p>
-          <a:p xmlns:a="http://schemas.openxmlformats.org/drawingml/2006/main">
-            <a:r>
-              <a:t/>
-            </a:r>
-          </a:p>
-          <a:p xmlns:a="http://schemas.openxmlformats.org/drawingml/2006/main">
-            <a:r>
-              <a:t>max</a:t>
-            </a:r>
-          </a:p>
-          <a:p xmlns:a="http://schemas.openxmlformats.org/drawingml/2006/main">
-            <a:r>
-              <a:t>𝑥</a:t>
-            </a:r>
-          </a:p>
-          <a:p xmlns:a="http://schemas.openxmlformats.org/drawingml/2006/main">
-            <a:r>
-              <a:t>𝑝</a:t>
-            </a:r>
-          </a:p>
-          <a:p xmlns:a="http://schemas.openxmlformats.org/drawingml/2006/main">
-            <a:r>
-              <a:t>𝑥</a:t>
-            </a:r>
-          </a:p>
-          <a:p xmlns:a="http://schemas.openxmlformats.org/drawingml/2006/main">
-            <a:r>
-              <a:t>−</a:t>
-            </a:r>
-          </a:p>
-          <a:p xmlns:a="http://schemas.openxmlformats.org/drawingml/2006/main">
-            <a:r>
-              <a:t>(</a:t>
-            </a:r>
-          </a:p>
-          <a:p xmlns:a="http://schemas.openxmlformats.org/drawingml/2006/main">
-            <a:r>
-              <a:t>𝑐</a:t>
-            </a:r>
-          </a:p>
-          <a:p xmlns:a="http://schemas.openxmlformats.org/drawingml/2006/main">
-            <a:r>
-              <a:t>𝑥</a:t>
-            </a:r>
-          </a:p>
-          <a:p xmlns:a="http://schemas.openxmlformats.org/drawingml/2006/main">
-            <a:r>
-              <a:t>+</a:t>
-            </a:r>
-          </a:p>
-          <a:p xmlns:a="http://schemas.openxmlformats.org/drawingml/2006/main">
-            <a:r>
-              <a:t>𝐹</a:t>
-            </a:r>
-          </a:p>
-          <a:p xmlns:a="http://schemas.openxmlformats.org/drawingml/2006/main">
-            <a:r>
-              <a:t>)</a:t>
-            </a:r>
-          </a:p>
-          <a:p xmlns:a="http://schemas.openxmlformats.org/drawingml/2006/main">
-            <a:r>
-              <a:t>,</a:t>
-            </a:r>
-          </a:p>
-          <a:p xmlns:a="http://schemas.openxmlformats.org/drawingml/2006/main">
-            <a:r>
-              <a:t>𝑝</a:t>
-            </a:r>
-          </a:p>
-          <a:p xmlns:a="http://schemas.openxmlformats.org/drawingml/2006/main">
-            <a:r>
-              <a:t>=</a:t>
-            </a:r>
-          </a:p>
-          <a:p xmlns:a="http://schemas.openxmlformats.org/drawingml/2006/main">
-            <a:r>
-              <a:t>𝑎</a:t>
-            </a:r>
-          </a:p>
-          <a:p xmlns:a="http://schemas.openxmlformats.org/drawingml/2006/main">
-            <a:r>
-              <a:t>−</a:t>
-            </a:r>
-          </a:p>
-          <a:p xmlns:a="http://schemas.openxmlformats.org/drawingml/2006/main">
-            <a:r>
-              <a:t>𝑏</a:t>
-            </a:r>
-          </a:p>
-          <a:p xmlns:a="http://schemas.openxmlformats.org/drawingml/2006/main">
-            <a:r>
-              <a:t>𝑥</a:t>
-            </a:r>
-          </a:p>
-          <a:p xmlns:a="http://schemas.openxmlformats.org/drawingml/2006/main">
-            <a:r>
-              <a:t>.</a:t>
-            </a:r>
-          </a:p>
-          <a:p xmlns:a="http://schemas.openxmlformats.org/drawingml/2006/main">
-            <a:r>
-              <a:t/>
-            </a:r>
-          </a:p>
-          <a:p xmlns:a="http://schemas.openxmlformats.org/drawingml/2006/main">
-            <a:r>
-              <a:t>Solution</a:t>
-            </a:r>
-          </a:p>
-          <a:p xmlns:a="http://schemas.openxmlformats.org/drawingml/2006/main">
-            <a:r>
-              <a:t/>
-            </a:r>
-          </a:p>
-          <a:p xmlns:a="http://schemas.openxmlformats.org/drawingml/2006/main">
-            <a:r>
-              <a:t>𝑥</a:t>
-            </a:r>
-          </a:p>
-          <a:p xmlns:a="http://schemas.openxmlformats.org/drawingml/2006/main">
-            <a:r>
-              <a:t>𝑀</a:t>
-            </a:r>
-          </a:p>
-          <a:p xmlns:a="http://schemas.openxmlformats.org/drawingml/2006/main">
-            <a:r>
-              <a:t>=</a:t>
-            </a:r>
-          </a:p>
-          <a:p xmlns:a="http://schemas.openxmlformats.org/drawingml/2006/main">
-            <a:r>
-              <a:t>𝑎</a:t>
-            </a:r>
-          </a:p>
-          <a:p xmlns:a="http://schemas.openxmlformats.org/drawingml/2006/main">
-            <a:r>
-              <a:t>−</a:t>
-            </a:r>
-          </a:p>
-          <a:p xmlns:a="http://schemas.openxmlformats.org/drawingml/2006/main">
-            <a:r>
-              <a:t>𝑐</a:t>
-            </a:r>
-          </a:p>
-          <a:p xmlns:a="http://schemas.openxmlformats.org/drawingml/2006/main">
-            <a:r>
-              <a:t>2</a:t>
-            </a:r>
-          </a:p>
-          <a:p xmlns:a="http://schemas.openxmlformats.org/drawingml/2006/main">
-            <a:r>
-              <a:t>𝑏</a:t>
-            </a:r>
-          </a:p>
-          <a:p xmlns:a="http://schemas.openxmlformats.org/drawingml/2006/main">
-            <a:r>
-              <a:t>,</a:t>
-            </a:r>
-          </a:p>
-          <a:p xmlns:a="http://schemas.openxmlformats.org/drawingml/2006/main">
-            <a:r>
-              <a:t>𝑝</a:t>
-            </a:r>
-          </a:p>
-          <a:p xmlns:a="http://schemas.openxmlformats.org/drawingml/2006/main">
-            <a:r>
-              <a:t>𝑀</a:t>
-            </a:r>
-          </a:p>
-          <a:p xmlns:a="http://schemas.openxmlformats.org/drawingml/2006/main">
-            <a:r>
-              <a:t>=</a:t>
-            </a:r>
-          </a:p>
-          <a:p xmlns:a="http://schemas.openxmlformats.org/drawingml/2006/main">
-            <a:r>
-              <a:t>𝑎</a:t>
-            </a:r>
-          </a:p>
-          <a:p xmlns:a="http://schemas.openxmlformats.org/drawingml/2006/main">
-            <a:r>
-              <a:t>+</a:t>
-            </a:r>
-          </a:p>
-          <a:p xmlns:a="http://schemas.openxmlformats.org/drawingml/2006/main">
-            <a:r>
-              <a:t>𝑐</a:t>
-            </a:r>
-          </a:p>
-          <a:p xmlns:a="http://schemas.openxmlformats.org/drawingml/2006/main">
-            <a:r>
-              <a:t>2</a:t>
-            </a:r>
-          </a:p>
-          <a:p xmlns:a="http://schemas.openxmlformats.org/drawingml/2006/main">
-            <a:r>
-              <a:t>.</a:t>
-            </a:r>
-          </a:p>
-          <a:p xmlns:a="http://schemas.openxmlformats.org/drawingml/2006/main">
-            <a:r>
-              <a:t/>
-            </a:r>
-          </a:p>
-          <a:p xmlns:a="http://schemas.openxmlformats.org/drawingml/2006/main">
-            <a:r>
-              <a:t>𝜋</a:t>
-            </a:r>
-          </a:p>
-          <a:p xmlns:a="http://schemas.openxmlformats.org/drawingml/2006/main">
-            <a:r>
-              <a:t>𝑀</a:t>
-            </a:r>
-          </a:p>
-          <a:p xmlns:a="http://schemas.openxmlformats.org/drawingml/2006/main">
-            <a:r>
-              <a:t>=</a:t>
-            </a:r>
-          </a:p>
-          <a:p xmlns:a="http://schemas.openxmlformats.org/drawingml/2006/main">
-            <a:r>
-              <a:t>(</a:t>
-            </a:r>
-          </a:p>
-          <a:p xmlns:a="http://schemas.openxmlformats.org/drawingml/2006/main">
-            <a:r>
-              <a:t>𝑎</a:t>
-            </a:r>
-          </a:p>
-          <a:p xmlns:a="http://schemas.openxmlformats.org/drawingml/2006/main">
-            <a:r>
-              <a:t>−</a:t>
-            </a:r>
-          </a:p>
-          <a:p xmlns:a="http://schemas.openxmlformats.org/drawingml/2006/main">
-            <a:r>
-              <a:t>𝑐</a:t>
-            </a:r>
-          </a:p>
-          <a:p xmlns:a="http://schemas.openxmlformats.org/drawingml/2006/main">
-            <a:r>
-              <a:t>)</a:t>
-            </a:r>
-          </a:p>
-          <a:p xmlns:a="http://schemas.openxmlformats.org/drawingml/2006/main">
-            <a:r>
-              <a:t>2</a:t>
-            </a:r>
-          </a:p>
-          <a:p xmlns:a="http://schemas.openxmlformats.org/drawingml/2006/main">
-            <a:r>
-              <a:t>4</a:t>
-            </a:r>
-          </a:p>
-          <a:p xmlns:a="http://schemas.openxmlformats.org/drawingml/2006/main">
-            <a:r>
-              <a:t>𝑏</a:t>
-            </a:r>
-          </a:p>
-          <a:p xmlns:a="http://schemas.openxmlformats.org/drawingml/2006/main">
-            <a:r>
-              <a:t>−</a:t>
-            </a:r>
-          </a:p>
-          <a:p xmlns:a="http://schemas.openxmlformats.org/drawingml/2006/main">
-            <a:r>
-              <a:t>𝐹</a:t>
-            </a:r>
-          </a:p>
-          <a:p xmlns:a="http://schemas.openxmlformats.org/drawingml/2006/main">
-            <a:r>
-              <a:t>.</a:t>
-            </a:r>
-          </a:p>
-          <a:p xmlns:a="http://schemas.openxmlformats.org/drawingml/2006/main">
-            <a:r>
-              <a:t/>
-            </a:r>
-          </a:p>
-          <a:p xmlns:a="http://schemas.openxmlformats.org/drawingml/2006/main">
-            <a:r>
-              <a:t>Monopoly diagram: marginal revenue crosses marginal cost at monopoly output. Demand determines monopoly price. Average cost lies below price at that output.</a:t>
+              <a:t>Two monopolistic markets One monopolist in each country max x ( p − c ) x − F \max_x\;(p-c)x-F p = a − b x p=a-bx Set MR = MC x M = a − c 2 b , p M = a + c 2 x^M=\frac{a-c}{2b},\quad p^M=\frac{a+c}{2} π M = ( a − c ) 2 4 b − F \pi^M=\frac{(a-c)^2}{4b}-F F F is the fixed cost. The same diagram applies to Home and Foreign before trade.</a:t>
+            </a:r>
+          </a:p>
+          <a:p xmlns:a="http://schemas.openxmlformats.org/drawingml/2006/main">
+            <a:r>
+              <a:t/>
+            </a:r>
+          </a:p>
+          <a:p xmlns:a="http://schemas.openxmlformats.org/drawingml/2006/main">
+            <a:r>
+              <a:t>Each country has a monopolist. Marginal revenue equals marginal cost at x M; demand determines p M. The shaded rectangle is profit after fixed costs.</a:t>
             </a:r>
           </a:p>
           <a:p xmlns:a="http://schemas.openxmlformats.org/drawingml/2006/main">
@@ -6509,232 +3708,7 @@
           </a:p>
           <a:p xmlns:a="http://schemas.openxmlformats.org/drawingml/2006/main">
             <a:r>
-              <a:t>The two markets integrate</a:t>
-            </a:r>
-          </a:p>
-          <a:p xmlns:a="http://schemas.openxmlformats.org/drawingml/2006/main">
-            <a:r>
-              <a:t/>
-            </a:r>
-          </a:p>
-          <a:p xmlns:a="http://schemas.openxmlformats.org/drawingml/2006/main">
-            <a:r>
-              <a:t>Each firm can sell in both markets. Demand in each country is met by the domestic or foreign firm:</a:t>
-            </a:r>
-          </a:p>
-          <a:p xmlns:a="http://schemas.openxmlformats.org/drawingml/2006/main">
-            <a:r>
-              <a:t/>
-            </a:r>
-          </a:p>
-          <a:p xmlns:a="http://schemas.openxmlformats.org/drawingml/2006/main">
-            <a:r>
-              <a:t>𝑍</a:t>
-            </a:r>
-          </a:p>
-          <a:p xmlns:a="http://schemas.openxmlformats.org/drawingml/2006/main">
-            <a:r>
-              <a:t>=</a:t>
-            </a:r>
-          </a:p>
-          <a:p xmlns:a="http://schemas.openxmlformats.org/drawingml/2006/main">
-            <a:r>
-              <a:t>𝑥</a:t>
-            </a:r>
-          </a:p>
-          <a:p xmlns:a="http://schemas.openxmlformats.org/drawingml/2006/main">
-            <a:r>
-              <a:t>+</a:t>
-            </a:r>
-          </a:p>
-          <a:p xmlns:a="http://schemas.openxmlformats.org/drawingml/2006/main">
-            <a:r>
-              <a:t>𝑦</a:t>
-            </a:r>
-          </a:p>
-          <a:p xmlns:a="http://schemas.openxmlformats.org/drawingml/2006/main">
-            <a:r>
-              <a:t>(Home demand)</a:t>
-            </a:r>
-          </a:p>
-          <a:p xmlns:a="http://schemas.openxmlformats.org/drawingml/2006/main">
-            <a:r>
-              <a:t/>
-            </a:r>
-          </a:p>
-          <a:p xmlns:a="http://schemas.openxmlformats.org/drawingml/2006/main">
-            <a:r>
-              <a:t>𝑍</a:t>
-            </a:r>
-          </a:p>
-          <a:p xmlns:a="http://schemas.openxmlformats.org/drawingml/2006/main">
-            <a:r>
-              <a:t>*</a:t>
-            </a:r>
-          </a:p>
-          <a:p xmlns:a="http://schemas.openxmlformats.org/drawingml/2006/main">
-            <a:r>
-              <a:t>=</a:t>
-            </a:r>
-          </a:p>
-          <a:p xmlns:a="http://schemas.openxmlformats.org/drawingml/2006/main">
-            <a:r>
-              <a:t>𝑥</a:t>
-            </a:r>
-          </a:p>
-          <a:p xmlns:a="http://schemas.openxmlformats.org/drawingml/2006/main">
-            <a:r>
-              <a:t>*</a:t>
-            </a:r>
-          </a:p>
-          <a:p xmlns:a="http://schemas.openxmlformats.org/drawingml/2006/main">
-            <a:r>
-              <a:t>+</a:t>
-            </a:r>
-          </a:p>
-          <a:p xmlns:a="http://schemas.openxmlformats.org/drawingml/2006/main">
-            <a:r>
-              <a:t>𝑦</a:t>
-            </a:r>
-          </a:p>
-          <a:p xmlns:a="http://schemas.openxmlformats.org/drawingml/2006/main">
-            <a:r>
-              <a:t>*</a:t>
-            </a:r>
-          </a:p>
-          <a:p xmlns:a="http://schemas.openxmlformats.org/drawingml/2006/main">
-            <a:r>
-              <a:t>(Foreign demand)</a:t>
-            </a:r>
-          </a:p>
-          <a:p xmlns:a="http://schemas.openxmlformats.org/drawingml/2006/main">
-            <a:r>
-              <a:t/>
-            </a:r>
-          </a:p>
-          <a:p xmlns:a="http://schemas.openxmlformats.org/drawingml/2006/main">
-            <a:r>
-              <a:t>Here, </a:t>
-            </a:r>
-          </a:p>
-          <a:p xmlns:a="http://schemas.openxmlformats.org/drawingml/2006/main">
-            <a:r>
-              <a:t>𝑥</a:t>
-            </a:r>
-          </a:p>
-          <a:p xmlns:a="http://schemas.openxmlformats.org/drawingml/2006/main">
-            <a:r>
-              <a:t> and </a:t>
-            </a:r>
-          </a:p>
-          <a:p xmlns:a="http://schemas.openxmlformats.org/drawingml/2006/main">
-            <a:r>
-              <a:t>𝑥</a:t>
-            </a:r>
-          </a:p>
-          <a:p xmlns:a="http://schemas.openxmlformats.org/drawingml/2006/main">
-            <a:r>
-              <a:t>*</a:t>
-            </a:r>
-          </a:p>
-          <a:p xmlns:a="http://schemas.openxmlformats.org/drawingml/2006/main">
-            <a:r>
-              <a:t> are Home-firm sales; </a:t>
-            </a:r>
-          </a:p>
-          <a:p xmlns:a="http://schemas.openxmlformats.org/drawingml/2006/main">
-            <a:r>
-              <a:t>𝑦</a:t>
-            </a:r>
-          </a:p>
-          <a:p xmlns:a="http://schemas.openxmlformats.org/drawingml/2006/main">
-            <a:r>
-              <a:t> and </a:t>
-            </a:r>
-          </a:p>
-          <a:p xmlns:a="http://schemas.openxmlformats.org/drawingml/2006/main">
-            <a:r>
-              <a:t>𝑦</a:t>
-            </a:r>
-          </a:p>
-          <a:p xmlns:a="http://schemas.openxmlformats.org/drawingml/2006/main">
-            <a:r>
-              <a:t>*</a:t>
-            </a:r>
-          </a:p>
-          <a:p xmlns:a="http://schemas.openxmlformats.org/drawingml/2006/main">
-            <a:r>
-              <a:t> are Foreign-firm sales.</a:t>
-            </a:r>
-          </a:p>
-          <a:p xmlns:a="http://schemas.openxmlformats.org/drawingml/2006/main">
-            <a:r>
-              <a:t/>
-            </a:r>
-          </a:p>
-          <a:p xmlns:a="http://schemas.openxmlformats.org/drawingml/2006/main">
-            <a:r>
-              <a:t>“Iceberg” transport costs</a:t>
-            </a:r>
-          </a:p>
-          <a:p xmlns:a="http://schemas.openxmlformats.org/drawingml/2006/main">
-            <a:r>
-              <a:t/>
-            </a:r>
-          </a:p>
-          <a:p xmlns:a="http://schemas.openxmlformats.org/drawingml/2006/main">
-            <a:r>
-              <a:t>The marginal cost of exporting is </a:t>
-            </a:r>
-          </a:p>
-          <a:p xmlns:a="http://schemas.openxmlformats.org/drawingml/2006/main">
-            <a:r>
-              <a:t>𝑐</a:t>
-            </a:r>
-          </a:p>
-          <a:p xmlns:a="http://schemas.openxmlformats.org/drawingml/2006/main">
-            <a:r>
-              <a:t>/</a:t>
-            </a:r>
-          </a:p>
-          <a:p xmlns:a="http://schemas.openxmlformats.org/drawingml/2006/main">
-            <a:r>
-              <a:t>𝑔</a:t>
-            </a:r>
-          </a:p>
-          <a:p xmlns:a="http://schemas.openxmlformats.org/drawingml/2006/main">
-            <a:r>
-              <a:t>, where </a:t>
-            </a:r>
-          </a:p>
-          <a:p xmlns:a="http://schemas.openxmlformats.org/drawingml/2006/main">
-            <a:r>
-              <a:t>0</a:t>
-            </a:r>
-          </a:p>
-          <a:p xmlns:a="http://schemas.openxmlformats.org/drawingml/2006/main">
-            <a:r>
-              <a:t>&lt;</a:t>
-            </a:r>
-          </a:p>
-          <a:p xmlns:a="http://schemas.openxmlformats.org/drawingml/2006/main">
-            <a:r>
-              <a:t>𝑔</a:t>
-            </a:r>
-          </a:p>
-          <a:p xmlns:a="http://schemas.openxmlformats.org/drawingml/2006/main">
-            <a:r>
-              <a:t>≤</a:t>
-            </a:r>
-          </a:p>
-          <a:p xmlns:a="http://schemas.openxmlformats.org/drawingml/2006/main">
-            <a:r>
-              <a:t>1</a:t>
-            </a:r>
-          </a:p>
-          <a:p xmlns:a="http://schemas.openxmlformats.org/drawingml/2006/main">
-            <a:r>
-              <a:t>.</a:t>
+              <a:t>The two markets integrate Each firm now sells in both markets . Sales by Home market Foreign market Home firm x x x * x^* Foreign firm y y y * y^* Total consumption Z = x + y Z=x+y Z * = x * + y * Z^*=x^*+y^* Selling at home Marginal cost: c c . Exporting Marginal cost: c / g c/g , with 0 &lt; g ≤ 1 0&lt;g\leq1 . g = 1 g=1 : no transport costs; a lower g g : higher costs.</a:t>
             </a:r>
           </a:p>
           <a:p xmlns:a="http://schemas.openxmlformats.org/drawingml/2006/main">
@@ -6849,337 +3823,7 @@
           </a:p>
           <a:p xmlns:a="http://schemas.openxmlformats.org/drawingml/2006/main">
             <a:r>
-              <a:t>Oligopoly: the Home firm’s problem</a:t>
-            </a:r>
-          </a:p>
-          <a:p xmlns:a="http://schemas.openxmlformats.org/drawingml/2006/main">
-            <a:r>
-              <a:t>Home firm</a:t>
-            </a:r>
-          </a:p>
-          <a:p xmlns:a="http://schemas.openxmlformats.org/drawingml/2006/main">
-            <a:r>
-              <a:t/>
-            </a:r>
-          </a:p>
-          <a:p xmlns:a="http://schemas.openxmlformats.org/drawingml/2006/main">
-            <a:r>
-              <a:t>max</a:t>
-            </a:r>
-          </a:p>
-          <a:p xmlns:a="http://schemas.openxmlformats.org/drawingml/2006/main">
-            <a:r>
-              <a:t>𝑥</a:t>
-            </a:r>
-          </a:p>
-          <a:p xmlns:a="http://schemas.openxmlformats.org/drawingml/2006/main">
-            <a:r>
-              <a:t>,</a:t>
-            </a:r>
-          </a:p>
-          <a:p xmlns:a="http://schemas.openxmlformats.org/drawingml/2006/main">
-            <a:r>
-              <a:t>𝑥</a:t>
-            </a:r>
-          </a:p>
-          <a:p xmlns:a="http://schemas.openxmlformats.org/drawingml/2006/main">
-            <a:r>
-              <a:t>*</a:t>
-            </a:r>
-          </a:p>
-          <a:p xmlns:a="http://schemas.openxmlformats.org/drawingml/2006/main">
-            <a:r>
-              <a:t>𝑝</a:t>
-            </a:r>
-          </a:p>
-          <a:p xmlns:a="http://schemas.openxmlformats.org/drawingml/2006/main">
-            <a:r>
-              <a:t>𝑥</a:t>
-            </a:r>
-          </a:p>
-          <a:p xmlns:a="http://schemas.openxmlformats.org/drawingml/2006/main">
-            <a:r>
-              <a:t>+</a:t>
-            </a:r>
-          </a:p>
-          <a:p xmlns:a="http://schemas.openxmlformats.org/drawingml/2006/main">
-            <a:r>
-              <a:t>𝑝</a:t>
-            </a:r>
-          </a:p>
-          <a:p xmlns:a="http://schemas.openxmlformats.org/drawingml/2006/main">
-            <a:r>
-              <a:t>*</a:t>
-            </a:r>
-          </a:p>
-          <a:p xmlns:a="http://schemas.openxmlformats.org/drawingml/2006/main">
-            <a:r>
-              <a:t>𝑥</a:t>
-            </a:r>
-          </a:p>
-          <a:p xmlns:a="http://schemas.openxmlformats.org/drawingml/2006/main">
-            <a:r>
-              <a:t>*</a:t>
-            </a:r>
-          </a:p>
-          <a:p xmlns:a="http://schemas.openxmlformats.org/drawingml/2006/main">
-            <a:r>
-              <a:t>−</a:t>
-            </a:r>
-          </a:p>
-          <a:p xmlns:a="http://schemas.openxmlformats.org/drawingml/2006/main">
-            <a:r>
-              <a:t>𝑐</a:t>
-            </a:r>
-          </a:p>
-          <a:p xmlns:a="http://schemas.openxmlformats.org/drawingml/2006/main">
-            <a:r>
-              <a:t>𝑥</a:t>
-            </a:r>
-          </a:p>
-          <a:p xmlns:a="http://schemas.openxmlformats.org/drawingml/2006/main">
-            <a:r>
-              <a:t>−</a:t>
-            </a:r>
-          </a:p>
-          <a:p xmlns:a="http://schemas.openxmlformats.org/drawingml/2006/main">
-            <a:r>
-              <a:t>𝑐</a:t>
-            </a:r>
-          </a:p>
-          <a:p xmlns:a="http://schemas.openxmlformats.org/drawingml/2006/main">
-            <a:r>
-              <a:t>𝑔</a:t>
-            </a:r>
-          </a:p>
-          <a:p xmlns:a="http://schemas.openxmlformats.org/drawingml/2006/main">
-            <a:r>
-              <a:t>𝑥</a:t>
-            </a:r>
-          </a:p>
-          <a:p xmlns:a="http://schemas.openxmlformats.org/drawingml/2006/main">
-            <a:r>
-              <a:t>*</a:t>
-            </a:r>
-          </a:p>
-          <a:p xmlns:a="http://schemas.openxmlformats.org/drawingml/2006/main">
-            <a:r>
-              <a:t>−</a:t>
-            </a:r>
-          </a:p>
-          <a:p xmlns:a="http://schemas.openxmlformats.org/drawingml/2006/main">
-            <a:r>
-              <a:t>𝐹</a:t>
-            </a:r>
-          </a:p>
-          <a:p xmlns:a="http://schemas.openxmlformats.org/drawingml/2006/main">
-            <a:r>
-              <a:t/>
-            </a:r>
-          </a:p>
-          <a:p xmlns:a="http://schemas.openxmlformats.org/drawingml/2006/main">
-            <a:r>
-              <a:t>subject to</a:t>
-            </a:r>
-          </a:p>
-          <a:p xmlns:a="http://schemas.openxmlformats.org/drawingml/2006/main">
-            <a:r>
-              <a:t/>
-            </a:r>
-          </a:p>
-          <a:p xmlns:a="http://schemas.openxmlformats.org/drawingml/2006/main">
-            <a:r>
-              <a:t>𝑝</a:t>
-            </a:r>
-          </a:p>
-          <a:p xmlns:a="http://schemas.openxmlformats.org/drawingml/2006/main">
-            <a:r>
-              <a:t>=</a:t>
-            </a:r>
-          </a:p>
-          <a:p xmlns:a="http://schemas.openxmlformats.org/drawingml/2006/main">
-            <a:r>
-              <a:t>𝑎</a:t>
-            </a:r>
-          </a:p>
-          <a:p xmlns:a="http://schemas.openxmlformats.org/drawingml/2006/main">
-            <a:r>
-              <a:t>−</a:t>
-            </a:r>
-          </a:p>
-          <a:p xmlns:a="http://schemas.openxmlformats.org/drawingml/2006/main">
-            <a:r>
-              <a:t>𝑏</a:t>
-            </a:r>
-          </a:p>
-          <a:p xmlns:a="http://schemas.openxmlformats.org/drawingml/2006/main">
-            <a:r>
-              <a:t>𝑍</a:t>
-            </a:r>
-          </a:p>
-          <a:p xmlns:a="http://schemas.openxmlformats.org/drawingml/2006/main">
-            <a:r>
-              <a:t>=</a:t>
-            </a:r>
-          </a:p>
-          <a:p xmlns:a="http://schemas.openxmlformats.org/drawingml/2006/main">
-            <a:r>
-              <a:t>𝑎</a:t>
-            </a:r>
-          </a:p>
-          <a:p xmlns:a="http://schemas.openxmlformats.org/drawingml/2006/main">
-            <a:r>
-              <a:t>−</a:t>
-            </a:r>
-          </a:p>
-          <a:p xmlns:a="http://schemas.openxmlformats.org/drawingml/2006/main">
-            <a:r>
-              <a:t>𝑏</a:t>
-            </a:r>
-          </a:p>
-          <a:p xmlns:a="http://schemas.openxmlformats.org/drawingml/2006/main">
-            <a:r>
-              <a:t>(</a:t>
-            </a:r>
-          </a:p>
-          <a:p xmlns:a="http://schemas.openxmlformats.org/drawingml/2006/main">
-            <a:r>
-              <a:t>𝑥</a:t>
-            </a:r>
-          </a:p>
-          <a:p xmlns:a="http://schemas.openxmlformats.org/drawingml/2006/main">
-            <a:r>
-              <a:t>+</a:t>
-            </a:r>
-          </a:p>
-          <a:p xmlns:a="http://schemas.openxmlformats.org/drawingml/2006/main">
-            <a:r>
-              <a:t>𝑦</a:t>
-            </a:r>
-          </a:p>
-          <a:p xmlns:a="http://schemas.openxmlformats.org/drawingml/2006/main">
-            <a:r>
-              <a:t>)</a:t>
-            </a:r>
-          </a:p>
-          <a:p xmlns:a="http://schemas.openxmlformats.org/drawingml/2006/main">
-            <a:r>
-              <a:t>,</a:t>
-            </a:r>
-          </a:p>
-          <a:p xmlns:a="http://schemas.openxmlformats.org/drawingml/2006/main">
-            <a:r>
-              <a:t/>
-            </a:r>
-          </a:p>
-          <a:p xmlns:a="http://schemas.openxmlformats.org/drawingml/2006/main">
-            <a:r>
-              <a:t>𝑝</a:t>
-            </a:r>
-          </a:p>
-          <a:p xmlns:a="http://schemas.openxmlformats.org/drawingml/2006/main">
-            <a:r>
-              <a:t>*</a:t>
-            </a:r>
-          </a:p>
-          <a:p xmlns:a="http://schemas.openxmlformats.org/drawingml/2006/main">
-            <a:r>
-              <a:t>=</a:t>
-            </a:r>
-          </a:p>
-          <a:p xmlns:a="http://schemas.openxmlformats.org/drawingml/2006/main">
-            <a:r>
-              <a:t>𝑎</a:t>
-            </a:r>
-          </a:p>
-          <a:p xmlns:a="http://schemas.openxmlformats.org/drawingml/2006/main">
-            <a:r>
-              <a:t>−</a:t>
-            </a:r>
-          </a:p>
-          <a:p xmlns:a="http://schemas.openxmlformats.org/drawingml/2006/main">
-            <a:r>
-              <a:t>𝑏</a:t>
-            </a:r>
-          </a:p>
-          <a:p xmlns:a="http://schemas.openxmlformats.org/drawingml/2006/main">
-            <a:r>
-              <a:t>𝑍</a:t>
-            </a:r>
-          </a:p>
-          <a:p xmlns:a="http://schemas.openxmlformats.org/drawingml/2006/main">
-            <a:r>
-              <a:t>*</a:t>
-            </a:r>
-          </a:p>
-          <a:p xmlns:a="http://schemas.openxmlformats.org/drawingml/2006/main">
-            <a:r>
-              <a:t>=</a:t>
-            </a:r>
-          </a:p>
-          <a:p xmlns:a="http://schemas.openxmlformats.org/drawingml/2006/main">
-            <a:r>
-              <a:t>𝑎</a:t>
-            </a:r>
-          </a:p>
-          <a:p xmlns:a="http://schemas.openxmlformats.org/drawingml/2006/main">
-            <a:r>
-              <a:t>−</a:t>
-            </a:r>
-          </a:p>
-          <a:p xmlns:a="http://schemas.openxmlformats.org/drawingml/2006/main">
-            <a:r>
-              <a:t>𝑏</a:t>
-            </a:r>
-          </a:p>
-          <a:p xmlns:a="http://schemas.openxmlformats.org/drawingml/2006/main">
-            <a:r>
-              <a:t>(</a:t>
-            </a:r>
-          </a:p>
-          <a:p xmlns:a="http://schemas.openxmlformats.org/drawingml/2006/main">
-            <a:r>
-              <a:t>𝑥</a:t>
-            </a:r>
-          </a:p>
-          <a:p xmlns:a="http://schemas.openxmlformats.org/drawingml/2006/main">
-            <a:r>
-              <a:t>*</a:t>
-            </a:r>
-          </a:p>
-          <a:p xmlns:a="http://schemas.openxmlformats.org/drawingml/2006/main">
-            <a:r>
-              <a:t>+</a:t>
-            </a:r>
-          </a:p>
-          <a:p xmlns:a="http://schemas.openxmlformats.org/drawingml/2006/main">
-            <a:r>
-              <a:t>𝑦</a:t>
-            </a:r>
-          </a:p>
-          <a:p xmlns:a="http://schemas.openxmlformats.org/drawingml/2006/main">
-            <a:r>
-              <a:t>*</a:t>
-            </a:r>
-          </a:p>
-          <a:p xmlns:a="http://schemas.openxmlformats.org/drawingml/2006/main">
-            <a:r>
-              <a:t>)</a:t>
-            </a:r>
-          </a:p>
-          <a:p xmlns:a="http://schemas.openxmlformats.org/drawingml/2006/main">
-            <a:r>
-              <a:t>.</a:t>
-            </a:r>
-          </a:p>
-          <a:p xmlns:a="http://schemas.openxmlformats.org/drawingml/2006/main">
-            <a:r>
-              <a:t/>
-            </a:r>
-          </a:p>
-          <a:p xmlns:a="http://schemas.openxmlformats.org/drawingml/2006/main">
-            <a:r>
-              <a:t>Substitute the demand functions into the profit function and calculate the two first-order conditions.</a:t>
+              <a:t>Oligopoly: the Home firm’s problem Choose sales in each market to maximise profit: max x , x * p x + p * x * − c x − c g x * − F \max_{x,x^*}\;px+p^*x^*-cx-\frac{c}{g}x^*-F Home demand p = a − b ( x + y ) p=a-b(x+y) Foreign demand p * = a − b ( x * + y * ) p^*=a-b(x^*+y^*) Substitute the demand functions into the profit function and calculate the two first-order conditions .</a:t>
             </a:r>
           </a:p>
           <a:p xmlns:a="http://schemas.openxmlformats.org/drawingml/2006/main">
@@ -7294,432 +3938,7 @@
           </a:p>
           <a:p xmlns:a="http://schemas.openxmlformats.org/drawingml/2006/main">
             <a:r>
-              <a:t>Oligopoly: first-order conditions</a:t>
-            </a:r>
-          </a:p>
-          <a:p xmlns:a="http://schemas.openxmlformats.org/drawingml/2006/main">
-            <a:r>
-              <a:t>Home firm</a:t>
-            </a:r>
-          </a:p>
-          <a:p xmlns:a="http://schemas.openxmlformats.org/drawingml/2006/main">
-            <a:r>
-              <a:t/>
-            </a:r>
-          </a:p>
-          <a:p xmlns:a="http://schemas.openxmlformats.org/drawingml/2006/main">
-            <a:r>
-              <a:t>𝑥</a:t>
-            </a:r>
-          </a:p>
-          <a:p xmlns:a="http://schemas.openxmlformats.org/drawingml/2006/main">
-            <a:r>
-              <a:t>:</a:t>
-            </a:r>
-          </a:p>
-          <a:p xmlns:a="http://schemas.openxmlformats.org/drawingml/2006/main">
-            <a:r>
-              <a:t>𝑎</a:t>
-            </a:r>
-          </a:p>
-          <a:p xmlns:a="http://schemas.openxmlformats.org/drawingml/2006/main">
-            <a:r>
-              <a:t>−</a:t>
-            </a:r>
-          </a:p>
-          <a:p xmlns:a="http://schemas.openxmlformats.org/drawingml/2006/main">
-            <a:r>
-              <a:t>2</a:t>
-            </a:r>
-          </a:p>
-          <a:p xmlns:a="http://schemas.openxmlformats.org/drawingml/2006/main">
-            <a:r>
-              <a:t>𝑏</a:t>
-            </a:r>
-          </a:p>
-          <a:p xmlns:a="http://schemas.openxmlformats.org/drawingml/2006/main">
-            <a:r>
-              <a:t>𝑥</a:t>
-            </a:r>
-          </a:p>
-          <a:p xmlns:a="http://schemas.openxmlformats.org/drawingml/2006/main">
-            <a:r>
-              <a:t>−</a:t>
-            </a:r>
-          </a:p>
-          <a:p xmlns:a="http://schemas.openxmlformats.org/drawingml/2006/main">
-            <a:r>
-              <a:t>𝑏</a:t>
-            </a:r>
-          </a:p>
-          <a:p xmlns:a="http://schemas.openxmlformats.org/drawingml/2006/main">
-            <a:r>
-              <a:t>𝑦</a:t>
-            </a:r>
-          </a:p>
-          <a:p xmlns:a="http://schemas.openxmlformats.org/drawingml/2006/main">
-            <a:r>
-              <a:t>−</a:t>
-            </a:r>
-          </a:p>
-          <a:p xmlns:a="http://schemas.openxmlformats.org/drawingml/2006/main">
-            <a:r>
-              <a:t>𝑐</a:t>
-            </a:r>
-          </a:p>
-          <a:p xmlns:a="http://schemas.openxmlformats.org/drawingml/2006/main">
-            <a:r>
-              <a:t>=</a:t>
-            </a:r>
-          </a:p>
-          <a:p xmlns:a="http://schemas.openxmlformats.org/drawingml/2006/main">
-            <a:r>
-              <a:t>0</a:t>
-            </a:r>
-          </a:p>
-          <a:p xmlns:a="http://schemas.openxmlformats.org/drawingml/2006/main">
-            <a:r>
-              <a:t>(</a:t>
-            </a:r>
-          </a:p>
-          <a:p xmlns:a="http://schemas.openxmlformats.org/drawingml/2006/main">
-            <a:r>
-              <a:t>1</a:t>
-            </a:r>
-          </a:p>
-          <a:p xmlns:a="http://schemas.openxmlformats.org/drawingml/2006/main">
-            <a:r>
-              <a:t>)</a:t>
-            </a:r>
-          </a:p>
-          <a:p xmlns:a="http://schemas.openxmlformats.org/drawingml/2006/main">
-            <a:r>
-              <a:t/>
-            </a:r>
-          </a:p>
-          <a:p xmlns:a="http://schemas.openxmlformats.org/drawingml/2006/main">
-            <a:r>
-              <a:t>𝑥</a:t>
-            </a:r>
-          </a:p>
-          <a:p xmlns:a="http://schemas.openxmlformats.org/drawingml/2006/main">
-            <a:r>
-              <a:t>*</a:t>
-            </a:r>
-          </a:p>
-          <a:p xmlns:a="http://schemas.openxmlformats.org/drawingml/2006/main">
-            <a:r>
-              <a:t>:</a:t>
-            </a:r>
-          </a:p>
-          <a:p xmlns:a="http://schemas.openxmlformats.org/drawingml/2006/main">
-            <a:r>
-              <a:t>𝑎</a:t>
-            </a:r>
-          </a:p>
-          <a:p xmlns:a="http://schemas.openxmlformats.org/drawingml/2006/main">
-            <a:r>
-              <a:t>−</a:t>
-            </a:r>
-          </a:p>
-          <a:p xmlns:a="http://schemas.openxmlformats.org/drawingml/2006/main">
-            <a:r>
-              <a:t>2</a:t>
-            </a:r>
-          </a:p>
-          <a:p xmlns:a="http://schemas.openxmlformats.org/drawingml/2006/main">
-            <a:r>
-              <a:t>𝑏</a:t>
-            </a:r>
-          </a:p>
-          <a:p xmlns:a="http://schemas.openxmlformats.org/drawingml/2006/main">
-            <a:r>
-              <a:t>𝑥</a:t>
-            </a:r>
-          </a:p>
-          <a:p xmlns:a="http://schemas.openxmlformats.org/drawingml/2006/main">
-            <a:r>
-              <a:t>*</a:t>
-            </a:r>
-          </a:p>
-          <a:p xmlns:a="http://schemas.openxmlformats.org/drawingml/2006/main">
-            <a:r>
-              <a:t>−</a:t>
-            </a:r>
-          </a:p>
-          <a:p xmlns:a="http://schemas.openxmlformats.org/drawingml/2006/main">
-            <a:r>
-              <a:t>𝑏</a:t>
-            </a:r>
-          </a:p>
-          <a:p xmlns:a="http://schemas.openxmlformats.org/drawingml/2006/main">
-            <a:r>
-              <a:t>𝑦</a:t>
-            </a:r>
-          </a:p>
-          <a:p xmlns:a="http://schemas.openxmlformats.org/drawingml/2006/main">
-            <a:r>
-              <a:t>*</a:t>
-            </a:r>
-          </a:p>
-          <a:p xmlns:a="http://schemas.openxmlformats.org/drawingml/2006/main">
-            <a:r>
-              <a:t>−</a:t>
-            </a:r>
-          </a:p>
-          <a:p xmlns:a="http://schemas.openxmlformats.org/drawingml/2006/main">
-            <a:r>
-              <a:t>𝑐</a:t>
-            </a:r>
-          </a:p>
-          <a:p xmlns:a="http://schemas.openxmlformats.org/drawingml/2006/main">
-            <a:r>
-              <a:t>𝑔</a:t>
-            </a:r>
-          </a:p>
-          <a:p xmlns:a="http://schemas.openxmlformats.org/drawingml/2006/main">
-            <a:r>
-              <a:t>=</a:t>
-            </a:r>
-          </a:p>
-          <a:p xmlns:a="http://schemas.openxmlformats.org/drawingml/2006/main">
-            <a:r>
-              <a:t>0</a:t>
-            </a:r>
-          </a:p>
-          <a:p xmlns:a="http://schemas.openxmlformats.org/drawingml/2006/main">
-            <a:r>
-              <a:t>(</a:t>
-            </a:r>
-          </a:p>
-          <a:p xmlns:a="http://schemas.openxmlformats.org/drawingml/2006/main">
-            <a:r>
-              <a:t>2</a:t>
-            </a:r>
-          </a:p>
-          <a:p xmlns:a="http://schemas.openxmlformats.org/drawingml/2006/main">
-            <a:r>
-              <a:t>)</a:t>
-            </a:r>
-          </a:p>
-          <a:p xmlns:a="http://schemas.openxmlformats.org/drawingml/2006/main">
-            <a:r>
-              <a:t/>
-            </a:r>
-          </a:p>
-          <a:p xmlns:a="http://schemas.openxmlformats.org/drawingml/2006/main">
-            <a:r>
-              <a:t>Foreign firm</a:t>
-            </a:r>
-          </a:p>
-          <a:p xmlns:a="http://schemas.openxmlformats.org/drawingml/2006/main">
-            <a:r>
-              <a:t/>
-            </a:r>
-          </a:p>
-          <a:p xmlns:a="http://schemas.openxmlformats.org/drawingml/2006/main">
-            <a:r>
-              <a:t>𝑦</a:t>
-            </a:r>
-          </a:p>
-          <a:p xmlns:a="http://schemas.openxmlformats.org/drawingml/2006/main">
-            <a:r>
-              <a:t>:</a:t>
-            </a:r>
-          </a:p>
-          <a:p xmlns:a="http://schemas.openxmlformats.org/drawingml/2006/main">
-            <a:r>
-              <a:t>𝑎</a:t>
-            </a:r>
-          </a:p>
-          <a:p xmlns:a="http://schemas.openxmlformats.org/drawingml/2006/main">
-            <a:r>
-              <a:t>−</a:t>
-            </a:r>
-          </a:p>
-          <a:p xmlns:a="http://schemas.openxmlformats.org/drawingml/2006/main">
-            <a:r>
-              <a:t>2</a:t>
-            </a:r>
-          </a:p>
-          <a:p xmlns:a="http://schemas.openxmlformats.org/drawingml/2006/main">
-            <a:r>
-              <a:t>𝑏</a:t>
-            </a:r>
-          </a:p>
-          <a:p xmlns:a="http://schemas.openxmlformats.org/drawingml/2006/main">
-            <a:r>
-              <a:t>𝑦</a:t>
-            </a:r>
-          </a:p>
-          <a:p xmlns:a="http://schemas.openxmlformats.org/drawingml/2006/main">
-            <a:r>
-              <a:t>−</a:t>
-            </a:r>
-          </a:p>
-          <a:p xmlns:a="http://schemas.openxmlformats.org/drawingml/2006/main">
-            <a:r>
-              <a:t>𝑏</a:t>
-            </a:r>
-          </a:p>
-          <a:p xmlns:a="http://schemas.openxmlformats.org/drawingml/2006/main">
-            <a:r>
-              <a:t>𝑥</a:t>
-            </a:r>
-          </a:p>
-          <a:p xmlns:a="http://schemas.openxmlformats.org/drawingml/2006/main">
-            <a:r>
-              <a:t>−</a:t>
-            </a:r>
-          </a:p>
-          <a:p xmlns:a="http://schemas.openxmlformats.org/drawingml/2006/main">
-            <a:r>
-              <a:t>𝑐</a:t>
-            </a:r>
-          </a:p>
-          <a:p xmlns:a="http://schemas.openxmlformats.org/drawingml/2006/main">
-            <a:r>
-              <a:t>𝑔</a:t>
-            </a:r>
-          </a:p>
-          <a:p xmlns:a="http://schemas.openxmlformats.org/drawingml/2006/main">
-            <a:r>
-              <a:t>=</a:t>
-            </a:r>
-          </a:p>
-          <a:p xmlns:a="http://schemas.openxmlformats.org/drawingml/2006/main">
-            <a:r>
-              <a:t>0</a:t>
-            </a:r>
-          </a:p>
-          <a:p xmlns:a="http://schemas.openxmlformats.org/drawingml/2006/main">
-            <a:r>
-              <a:t>(</a:t>
-            </a:r>
-          </a:p>
-          <a:p xmlns:a="http://schemas.openxmlformats.org/drawingml/2006/main">
-            <a:r>
-              <a:t>3</a:t>
-            </a:r>
-          </a:p>
-          <a:p xmlns:a="http://schemas.openxmlformats.org/drawingml/2006/main">
-            <a:r>
-              <a:t>)</a:t>
-            </a:r>
-          </a:p>
-          <a:p xmlns:a="http://schemas.openxmlformats.org/drawingml/2006/main">
-            <a:r>
-              <a:t/>
-            </a:r>
-          </a:p>
-          <a:p xmlns:a="http://schemas.openxmlformats.org/drawingml/2006/main">
-            <a:r>
-              <a:t>𝑦</a:t>
-            </a:r>
-          </a:p>
-          <a:p xmlns:a="http://schemas.openxmlformats.org/drawingml/2006/main">
-            <a:r>
-              <a:t>*</a:t>
-            </a:r>
-          </a:p>
-          <a:p xmlns:a="http://schemas.openxmlformats.org/drawingml/2006/main">
-            <a:r>
-              <a:t>:</a:t>
-            </a:r>
-          </a:p>
-          <a:p xmlns:a="http://schemas.openxmlformats.org/drawingml/2006/main">
-            <a:r>
-              <a:t>𝑎</a:t>
-            </a:r>
-          </a:p>
-          <a:p xmlns:a="http://schemas.openxmlformats.org/drawingml/2006/main">
-            <a:r>
-              <a:t>−</a:t>
-            </a:r>
-          </a:p>
-          <a:p xmlns:a="http://schemas.openxmlformats.org/drawingml/2006/main">
-            <a:r>
-              <a:t>2</a:t>
-            </a:r>
-          </a:p>
-          <a:p xmlns:a="http://schemas.openxmlformats.org/drawingml/2006/main">
-            <a:r>
-              <a:t>𝑏</a:t>
-            </a:r>
-          </a:p>
-          <a:p xmlns:a="http://schemas.openxmlformats.org/drawingml/2006/main">
-            <a:r>
-              <a:t>𝑦</a:t>
-            </a:r>
-          </a:p>
-          <a:p xmlns:a="http://schemas.openxmlformats.org/drawingml/2006/main">
-            <a:r>
-              <a:t>*</a:t>
-            </a:r>
-          </a:p>
-          <a:p xmlns:a="http://schemas.openxmlformats.org/drawingml/2006/main">
-            <a:r>
-              <a:t>−</a:t>
-            </a:r>
-          </a:p>
-          <a:p xmlns:a="http://schemas.openxmlformats.org/drawingml/2006/main">
-            <a:r>
-              <a:t>𝑏</a:t>
-            </a:r>
-          </a:p>
-          <a:p xmlns:a="http://schemas.openxmlformats.org/drawingml/2006/main">
-            <a:r>
-              <a:t>𝑥</a:t>
-            </a:r>
-          </a:p>
-          <a:p xmlns:a="http://schemas.openxmlformats.org/drawingml/2006/main">
-            <a:r>
-              <a:t>*</a:t>
-            </a:r>
-          </a:p>
-          <a:p xmlns:a="http://schemas.openxmlformats.org/drawingml/2006/main">
-            <a:r>
-              <a:t>−</a:t>
-            </a:r>
-          </a:p>
-          <a:p xmlns:a="http://schemas.openxmlformats.org/drawingml/2006/main">
-            <a:r>
-              <a:t>𝑐</a:t>
-            </a:r>
-          </a:p>
-          <a:p xmlns:a="http://schemas.openxmlformats.org/drawingml/2006/main">
-            <a:r>
-              <a:t>=</a:t>
-            </a:r>
-          </a:p>
-          <a:p xmlns:a="http://schemas.openxmlformats.org/drawingml/2006/main">
-            <a:r>
-              <a:t>0</a:t>
-            </a:r>
-          </a:p>
-          <a:p xmlns:a="http://schemas.openxmlformats.org/drawingml/2006/main">
-            <a:r>
-              <a:t>(</a:t>
-            </a:r>
-          </a:p>
-          <a:p xmlns:a="http://schemas.openxmlformats.org/drawingml/2006/main">
-            <a:r>
-              <a:t>4</a:t>
-            </a:r>
-          </a:p>
-          <a:p xmlns:a="http://schemas.openxmlformats.org/drawingml/2006/main">
-            <a:r>
-              <a:t>)</a:t>
-            </a:r>
-          </a:p>
-          <a:p xmlns:a="http://schemas.openxmlformats.org/drawingml/2006/main">
-            <a:r>
-              <a:t/>
-            </a:r>
-          </a:p>
-          <a:p xmlns:a="http://schemas.openxmlformats.org/drawingml/2006/main">
-            <a:r>
-              <a:t>The Foreign firm’s conditions follow from its corresponding maximisation problem.</a:t>
+              <a:t>Oligopoly: first-order conditions Home firm x : a − 2 b x − b y − c = 0 ( 1 ) x:\quad a-2bx-by-c=0 \qquad(1) x * : a − 2 b x * − b y * − c g = 0 ( 2 ) x^*:\quad a-2bx^*-by^*-\frac{c}{g}=0 \qquad(2) Foreign firm y : a − 2 b y − b x − c g = 0 ( 3 ) y:\quad a-2by-bx-\frac{c}{g}=0 \qquad(3) y * : a − 2 b y * − b x * − c = 0 ( 4 ) y^*:\quad a-2by^*-bx^*-c=0 \qquad(4) The Foreign firm’s conditions follow from its corresponding maximisation problem.</a:t>
             </a:r>
           </a:p>
           <a:p xmlns:a="http://schemas.openxmlformats.org/drawingml/2006/main">
@@ -7824,172 +4043,27 @@
           </a:p>
           <a:p xmlns:a="http://schemas.openxmlformats.org/drawingml/2006/main">
             <a:r>
-              <a:t>https://davidchivers.co.uk/teaching/macro-applications/lecture_3.html#/l3-s09</a:t>
-            </a:r>
-          </a:p>
-          <a:p xmlns:a="http://schemas.openxmlformats.org/drawingml/2006/main">
-            <a:r>
-              <a:t/>
-            </a:r>
-          </a:p>
-          <a:p xmlns:a="http://schemas.openxmlformats.org/drawingml/2006/main">
-            <a:r>
-              <a:t>Oligopoly: reaction functions</a:t>
-            </a:r>
-          </a:p>
-          <a:p xmlns:a="http://schemas.openxmlformats.org/drawingml/2006/main">
-            <a:r>
-              <a:t/>
-            </a:r>
-          </a:p>
-          <a:p xmlns:a="http://schemas.openxmlformats.org/drawingml/2006/main">
-            <a:r>
-              <a:t>The problem is symmetric, so focus on the Home market.</a:t>
-            </a:r>
-          </a:p>
-          <a:p xmlns:a="http://schemas.openxmlformats.org/drawingml/2006/main">
-            <a:r>
-              <a:t/>
-            </a:r>
-          </a:p>
-          <a:p xmlns:a="http://schemas.openxmlformats.org/drawingml/2006/main">
-            <a:r>
-              <a:t>Rewrite (1) and (3) to obtain the two firms’ reaction functions:</a:t>
-            </a:r>
-          </a:p>
-          <a:p xmlns:a="http://schemas.openxmlformats.org/drawingml/2006/main">
-            <a:r>
-              <a:t/>
-            </a:r>
-          </a:p>
-          <a:p xmlns:a="http://schemas.openxmlformats.org/drawingml/2006/main">
-            <a:r>
-              <a:t>𝑥</a:t>
-            </a:r>
-          </a:p>
-          <a:p xmlns:a="http://schemas.openxmlformats.org/drawingml/2006/main">
-            <a:r>
-              <a:t>=</a:t>
-            </a:r>
-          </a:p>
-          <a:p xmlns:a="http://schemas.openxmlformats.org/drawingml/2006/main">
-            <a:r>
-              <a:t>𝑎</a:t>
-            </a:r>
-          </a:p>
-          <a:p xmlns:a="http://schemas.openxmlformats.org/drawingml/2006/main">
-            <a:r>
-              <a:t>−</a:t>
-            </a:r>
-          </a:p>
-          <a:p xmlns:a="http://schemas.openxmlformats.org/drawingml/2006/main">
-            <a:r>
-              <a:t>𝑏</a:t>
-            </a:r>
-          </a:p>
-          <a:p xmlns:a="http://schemas.openxmlformats.org/drawingml/2006/main">
-            <a:r>
-              <a:t>𝑦</a:t>
-            </a:r>
-          </a:p>
-          <a:p xmlns:a="http://schemas.openxmlformats.org/drawingml/2006/main">
-            <a:r>
-              <a:t>−</a:t>
-            </a:r>
-          </a:p>
-          <a:p xmlns:a="http://schemas.openxmlformats.org/drawingml/2006/main">
-            <a:r>
-              <a:t>𝑐</a:t>
-            </a:r>
-          </a:p>
-          <a:p xmlns:a="http://schemas.openxmlformats.org/drawingml/2006/main">
-            <a:r>
-              <a:t>2</a:t>
-            </a:r>
-          </a:p>
-          <a:p xmlns:a="http://schemas.openxmlformats.org/drawingml/2006/main">
-            <a:r>
-              <a:t>𝑏</a:t>
-            </a:r>
-          </a:p>
-          <a:p xmlns:a="http://schemas.openxmlformats.org/drawingml/2006/main">
-            <a:r>
-              <a:t>,</a:t>
-            </a:r>
-          </a:p>
-          <a:p xmlns:a="http://schemas.openxmlformats.org/drawingml/2006/main">
-            <a:r>
-              <a:t>𝑦</a:t>
-            </a:r>
-          </a:p>
-          <a:p xmlns:a="http://schemas.openxmlformats.org/drawingml/2006/main">
-            <a:r>
-              <a:t>=</a:t>
-            </a:r>
-          </a:p>
-          <a:p xmlns:a="http://schemas.openxmlformats.org/drawingml/2006/main">
-            <a:r>
-              <a:t>𝑎</a:t>
-            </a:r>
-          </a:p>
-          <a:p xmlns:a="http://schemas.openxmlformats.org/drawingml/2006/main">
-            <a:r>
-              <a:t>−</a:t>
-            </a:r>
-          </a:p>
-          <a:p xmlns:a="http://schemas.openxmlformats.org/drawingml/2006/main">
-            <a:r>
-              <a:t>𝑏</a:t>
-            </a:r>
-          </a:p>
-          <a:p xmlns:a="http://schemas.openxmlformats.org/drawingml/2006/main">
-            <a:r>
-              <a:t>𝑥</a:t>
-            </a:r>
-          </a:p>
-          <a:p xmlns:a="http://schemas.openxmlformats.org/drawingml/2006/main">
-            <a:r>
-              <a:t>−</a:t>
-            </a:r>
-          </a:p>
-          <a:p xmlns:a="http://schemas.openxmlformats.org/drawingml/2006/main">
-            <a:r>
-              <a:t>𝑐</a:t>
-            </a:r>
-          </a:p>
-          <a:p xmlns:a="http://schemas.openxmlformats.org/drawingml/2006/main">
-            <a:r>
-              <a:t>/</a:t>
-            </a:r>
-          </a:p>
-          <a:p xmlns:a="http://schemas.openxmlformats.org/drawingml/2006/main">
-            <a:r>
-              <a:t>𝑔</a:t>
-            </a:r>
-          </a:p>
-          <a:p xmlns:a="http://schemas.openxmlformats.org/drawingml/2006/main">
-            <a:r>
-              <a:t>2</a:t>
-            </a:r>
-          </a:p>
-          <a:p xmlns:a="http://schemas.openxmlformats.org/drawingml/2006/main">
-            <a:r>
-              <a:t>𝑏</a:t>
-            </a:r>
-          </a:p>
-          <a:p xmlns:a="http://schemas.openxmlformats.org/drawingml/2006/main">
-            <a:r>
-              <a:t>.</a:t>
-            </a:r>
-          </a:p>
-          <a:p xmlns:a="http://schemas.openxmlformats.org/drawingml/2006/main">
-            <a:r>
-              <a:t/>
-            </a:r>
-          </a:p>
-          <a:p xmlns:a="http://schemas.openxmlformats.org/drawingml/2006/main">
-            <a:r>
-              <a:t/>
+              <a:t>https://davidchivers.co.uk/teaching/macro-applications/lecture_3.html#/l3-s10</a:t>
+            </a:r>
+          </a:p>
+          <a:p xmlns:a="http://schemas.openxmlformats.org/drawingml/2006/main">
+            <a:r>
+              <a:t/>
+            </a:r>
+          </a:p>
+          <a:p xmlns:a="http://schemas.openxmlformats.org/drawingml/2006/main">
+            <a:r>
+              <a:t>Equilibrium in the Home market Reaction functions Rewrite (1) and (3): x = a − b y − c 2 b x=\frac{a-by-c}{2b} y = a − b x − c / g 2 b y=\frac{a-bx-c/g}{2b} With transport costs, x &gt; y x&gt;y : each firm has a larger share at home. By symmetry: x * = y x^*=y and y * = x y^*=x . Each reaction function gives a firm’s best response to the other firm’s sales.</a:t>
+            </a:r>
+          </a:p>
+          <a:p xmlns:a="http://schemas.openxmlformats.org/drawingml/2006/main">
+            <a:r>
+              <a:t/>
+            </a:r>
+          </a:p>
+          <a:p xmlns:a="http://schemas.openxmlformats.org/drawingml/2006/main">
+            <a:r>
+              <a:t>Home and Foreign reaction functions intersect at E. Home sales x exceed imports y when transport costs are positive.</a:t>
             </a:r>
           </a:p>
           <a:p xmlns:a="http://schemas.openxmlformats.org/drawingml/2006/main">
@@ -8042,6 +4116,2381 @@
 <file path=ppt/slideLayouts/slideLayout1.xml><?xml version="1.0" encoding="utf-8"?>
 <p:sldLayout xmlns:p="http://schemas.openxmlformats.org/presentationml/2006/main" type="title">
   <p:cSld name="Title Slide">
+    <p:spTree>
+      <p:nvGrpSpPr>
+        <p:cNvPr id="1" name=""/>
+        <p:cNvGrpSpPr/>
+        <p:nvPr/>
+      </p:nvGrpSpPr>
+      <p:grpSpPr>
+        <a:xfrm xmlns:a="http://schemas.openxmlformats.org/drawingml/2006/main"/>
+      </p:grpSpPr>
+      <p:sp>
+        <p:nvSpPr>
+          <p:cNvPr id="3" name="Title">
+            <a:extLst xmlns:a="http://schemas.openxmlformats.org/drawingml/2006/main">
+              <a:ext uri="{FF2B5EF4-FFF2-40B4-BE49-F238E27FC236}">
+                <a16:creationId xmlns:a16="http://schemas.microsoft.com/office/drawing/2014/main" id="{A8087353-6E70-43C4-9679-882CD8D35D8B}"/>
+              </a:ext>
+            </a:extLst>
+          </p:cNvPr>
+          <p:cNvSpPr>
+            <a:spLocks xmlns:a="http://schemas.openxmlformats.org/drawingml/2006/main" noGrp="1"/>
+          </p:cNvSpPr>
+          <p:nvPr>
+            <p:ph type="title" idx="0"/>
+          </p:nvPr>
+        </p:nvSpPr>
+        <p:spPr>
+          <a:xfrm xmlns:a="http://schemas.openxmlformats.org/drawingml/2006/main">
+            <a:off x="1219200" y="2590800"/>
+            <a:ext cx="9753600" cy="990600"/>
+          </a:xfrm>
+          <a:prstGeom xmlns:a="http://schemas.openxmlformats.org/drawingml/2006/main" prst="rect">
+            <a:avLst/>
+          </a:prstGeom>
+          <a:noFill xmlns:a="http://schemas.openxmlformats.org/drawingml/2006/main"/>
+          <a:ln xmlns:a="http://schemas.openxmlformats.org/drawingml/2006/main">
+            <a:noFill/>
+            <a:prstDash val="solid"/>
+          </a:ln>
+        </p:spPr>
+        <p:txBody>
+          <a:bodyPr xmlns:a="http://schemas.openxmlformats.org/drawingml/2006/main" wrap="square" lIns="0" tIns="0" rIns="0" bIns="0" anchor="ctr">
+            <a:normAutofit/>
+          </a:bodyPr>
+          <a:lstStyle xmlns:a="http://schemas.openxmlformats.org/drawingml/2006/main">
+            <a:defPPr algn="ctr">
+              <a:defRPr sz="4800" b="1">
+                <a:solidFill>
+                  <a:schemeClr val="tx1"/>
+                </a:solidFill>
+                <a:latin typeface="+mj-lt"/>
+                <a:ea typeface="+mj-lt"/>
+                <a:cs typeface="+mj-lt"/>
+              </a:defRPr>
+            </a:defPPr>
+            <a:lvl1pPr marL="0" indent="0" algn="ctr">
+              <a:lnSpc>
+                <a:spcPct val="110000"/>
+              </a:lnSpc>
+              <a:spcBef>
+                <a:spcPts val="0"/>
+              </a:spcBef>
+              <a:spcAft>
+                <a:spcPts val="0"/>
+              </a:spcAft>
+              <a:buNone/>
+              <a:defRPr sz="4800" b="1">
+                <a:solidFill>
+                  <a:schemeClr val="tx1"/>
+                </a:solidFill>
+                <a:latin typeface="+mj-lt"/>
+                <a:ea typeface="+mj-lt"/>
+                <a:cs typeface="+mj-lt"/>
+              </a:defRPr>
+            </a:lvl1pPr>
+            <a:lvl2pPr marL="0" indent="0" algn="ctr">
+              <a:lnSpc>
+                <a:spcPct val="110000"/>
+              </a:lnSpc>
+              <a:spcBef>
+                <a:spcPts val="0"/>
+              </a:spcBef>
+              <a:spcAft>
+                <a:spcPts val="0"/>
+              </a:spcAft>
+              <a:buNone/>
+              <a:defRPr sz="4800" b="1">
+                <a:solidFill>
+                  <a:schemeClr val="tx1"/>
+                </a:solidFill>
+                <a:latin typeface="+mj-lt"/>
+                <a:ea typeface="+mj-lt"/>
+                <a:cs typeface="+mj-lt"/>
+              </a:defRPr>
+            </a:lvl2pPr>
+            <a:lvl3pPr marL="0" indent="0" algn="ctr">
+              <a:lnSpc>
+                <a:spcPct val="110000"/>
+              </a:lnSpc>
+              <a:spcBef>
+                <a:spcPts val="0"/>
+              </a:spcBef>
+              <a:spcAft>
+                <a:spcPts val="0"/>
+              </a:spcAft>
+              <a:buNone/>
+              <a:defRPr sz="4800" b="1">
+                <a:solidFill>
+                  <a:schemeClr val="tx1"/>
+                </a:solidFill>
+                <a:latin typeface="+mj-lt"/>
+                <a:ea typeface="+mj-lt"/>
+                <a:cs typeface="+mj-lt"/>
+              </a:defRPr>
+            </a:lvl3pPr>
+            <a:lvl4pPr marL="0" indent="0" algn="ctr">
+              <a:lnSpc>
+                <a:spcPct val="110000"/>
+              </a:lnSpc>
+              <a:spcBef>
+                <a:spcPts val="0"/>
+              </a:spcBef>
+              <a:spcAft>
+                <a:spcPts val="0"/>
+              </a:spcAft>
+              <a:buNone/>
+              <a:defRPr sz="4800" b="1">
+                <a:solidFill>
+                  <a:schemeClr val="tx1"/>
+                </a:solidFill>
+                <a:latin typeface="+mj-lt"/>
+                <a:ea typeface="+mj-lt"/>
+                <a:cs typeface="+mj-lt"/>
+              </a:defRPr>
+            </a:lvl4pPr>
+            <a:lvl5pPr marL="0" indent="0" algn="ctr">
+              <a:lnSpc>
+                <a:spcPct val="110000"/>
+              </a:lnSpc>
+              <a:spcBef>
+                <a:spcPts val="0"/>
+              </a:spcBef>
+              <a:spcAft>
+                <a:spcPts val="0"/>
+              </a:spcAft>
+              <a:buNone/>
+              <a:defRPr sz="4800" b="1">
+                <a:solidFill>
+                  <a:schemeClr val="tx1"/>
+                </a:solidFill>
+                <a:latin typeface="+mj-lt"/>
+                <a:ea typeface="+mj-lt"/>
+                <a:cs typeface="+mj-lt"/>
+              </a:defRPr>
+            </a:lvl5pPr>
+            <a:lvl6pPr marL="0" indent="0" algn="ctr">
+              <a:lnSpc>
+                <a:spcPct val="110000"/>
+              </a:lnSpc>
+              <a:spcBef>
+                <a:spcPts val="0"/>
+              </a:spcBef>
+              <a:spcAft>
+                <a:spcPts val="0"/>
+              </a:spcAft>
+              <a:buNone/>
+              <a:defRPr sz="4800" b="1">
+                <a:solidFill>
+                  <a:schemeClr val="tx1"/>
+                </a:solidFill>
+                <a:latin typeface="+mj-lt"/>
+                <a:ea typeface="+mj-lt"/>
+                <a:cs typeface="+mj-lt"/>
+              </a:defRPr>
+            </a:lvl6pPr>
+            <a:lvl7pPr marL="0" indent="0" algn="ctr">
+              <a:lnSpc>
+                <a:spcPct val="110000"/>
+              </a:lnSpc>
+              <a:spcBef>
+                <a:spcPts val="0"/>
+              </a:spcBef>
+              <a:spcAft>
+                <a:spcPts val="0"/>
+              </a:spcAft>
+              <a:buNone/>
+              <a:defRPr sz="4800" b="1">
+                <a:solidFill>
+                  <a:schemeClr val="tx1"/>
+                </a:solidFill>
+                <a:latin typeface="+mj-lt"/>
+                <a:ea typeface="+mj-lt"/>
+                <a:cs typeface="+mj-lt"/>
+              </a:defRPr>
+            </a:lvl7pPr>
+            <a:lvl8pPr marL="0" indent="0" algn="ctr">
+              <a:lnSpc>
+                <a:spcPct val="110000"/>
+              </a:lnSpc>
+              <a:spcBef>
+                <a:spcPts val="0"/>
+              </a:spcBef>
+              <a:spcAft>
+                <a:spcPts val="0"/>
+              </a:spcAft>
+              <a:buNone/>
+              <a:defRPr sz="4800" b="1">
+                <a:solidFill>
+                  <a:schemeClr val="tx1"/>
+                </a:solidFill>
+                <a:latin typeface="+mj-lt"/>
+                <a:ea typeface="+mj-lt"/>
+                <a:cs typeface="+mj-lt"/>
+              </a:defRPr>
+            </a:lvl8pPr>
+            <a:lvl9pPr marL="0" indent="0" algn="ctr">
+              <a:lnSpc>
+                <a:spcPct val="110000"/>
+              </a:lnSpc>
+              <a:spcBef>
+                <a:spcPts val="0"/>
+              </a:spcBef>
+              <a:spcAft>
+                <a:spcPts val="0"/>
+              </a:spcAft>
+              <a:buNone/>
+              <a:defRPr sz="4800" b="1">
+                <a:solidFill>
+                  <a:schemeClr val="tx1"/>
+                </a:solidFill>
+                <a:latin typeface="+mj-lt"/>
+                <a:ea typeface="+mj-lt"/>
+                <a:cs typeface="+mj-lt"/>
+              </a:defRPr>
+            </a:lvl9pPr>
+          </a:lstStyle>
+          <a:p xmlns:a="http://schemas.openxmlformats.org/drawingml/2006/main"/>
+        </p:txBody>
+      </p:sp>
+      <p:sp>
+        <p:nvSpPr>
+          <p:cNvPr id="2" name="Subtitle">
+            <a:extLst xmlns:a="http://schemas.openxmlformats.org/drawingml/2006/main">
+              <a:ext uri="{FF2B5EF4-FFF2-40B4-BE49-F238E27FC236}">
+                <a16:creationId xmlns:a16="http://schemas.microsoft.com/office/drawing/2014/main" id="{BBD43156-C61A-43C4-8212-2E6FBAABE838}"/>
+              </a:ext>
+            </a:extLst>
+          </p:cNvPr>
+          <p:cNvSpPr>
+            <a:spLocks xmlns:a="http://schemas.openxmlformats.org/drawingml/2006/main" noGrp="1"/>
+          </p:cNvSpPr>
+          <p:nvPr>
+            <p:ph type="subTitle" idx="1"/>
+          </p:nvPr>
+        </p:nvSpPr>
+        <p:spPr>
+          <a:xfrm xmlns:a="http://schemas.openxmlformats.org/drawingml/2006/main">
+            <a:off x="1828800" y="3771900"/>
+            <a:ext cx="8534400" cy="762000"/>
+          </a:xfrm>
+          <a:prstGeom xmlns:a="http://schemas.openxmlformats.org/drawingml/2006/main" prst="rect">
+            <a:avLst/>
+          </a:prstGeom>
+          <a:noFill xmlns:a="http://schemas.openxmlformats.org/drawingml/2006/main"/>
+          <a:ln xmlns:a="http://schemas.openxmlformats.org/drawingml/2006/main">
+            <a:noFill/>
+            <a:prstDash val="solid"/>
+          </a:ln>
+        </p:spPr>
+        <p:txBody>
+          <a:bodyPr xmlns:a="http://schemas.openxmlformats.org/drawingml/2006/main" wrap="square" lIns="0" tIns="0" rIns="0" bIns="0" anchor="ctr">
+            <a:normAutofit/>
+          </a:bodyPr>
+          <a:lstStyle xmlns:a="http://schemas.openxmlformats.org/drawingml/2006/main">
+            <a:defPPr algn="ctr">
+              <a:defRPr sz="2100" b="0">
+                <a:solidFill>
+                  <a:schemeClr val="tx1"/>
+                </a:solidFill>
+                <a:latin typeface="+mn-lt"/>
+                <a:ea typeface="+mn-lt"/>
+                <a:cs typeface="+mn-lt"/>
+              </a:defRPr>
+            </a:defPPr>
+            <a:lvl1pPr marL="0" indent="0" algn="ctr">
+              <a:lnSpc>
+                <a:spcPct val="110000"/>
+              </a:lnSpc>
+              <a:spcBef>
+                <a:spcPts val="0"/>
+              </a:spcBef>
+              <a:spcAft>
+                <a:spcPts val="0"/>
+              </a:spcAft>
+              <a:buNone/>
+              <a:defRPr sz="2100" b="0">
+                <a:solidFill>
+                  <a:schemeClr val="tx1"/>
+                </a:solidFill>
+                <a:latin typeface="+mn-lt"/>
+                <a:ea typeface="+mn-lt"/>
+                <a:cs typeface="+mn-lt"/>
+              </a:defRPr>
+            </a:lvl1pPr>
+            <a:lvl2pPr marL="0" indent="0" algn="ctr">
+              <a:lnSpc>
+                <a:spcPct val="110000"/>
+              </a:lnSpc>
+              <a:spcBef>
+                <a:spcPts val="0"/>
+              </a:spcBef>
+              <a:spcAft>
+                <a:spcPts val="0"/>
+              </a:spcAft>
+              <a:buNone/>
+              <a:defRPr sz="2100" b="0">
+                <a:solidFill>
+                  <a:schemeClr val="tx1"/>
+                </a:solidFill>
+                <a:latin typeface="+mn-lt"/>
+                <a:ea typeface="+mn-lt"/>
+                <a:cs typeface="+mn-lt"/>
+              </a:defRPr>
+            </a:lvl2pPr>
+            <a:lvl3pPr marL="0" indent="0" algn="ctr">
+              <a:lnSpc>
+                <a:spcPct val="110000"/>
+              </a:lnSpc>
+              <a:spcBef>
+                <a:spcPts val="0"/>
+              </a:spcBef>
+              <a:spcAft>
+                <a:spcPts val="0"/>
+              </a:spcAft>
+              <a:buNone/>
+              <a:defRPr sz="2100" b="0">
+                <a:solidFill>
+                  <a:schemeClr val="tx1"/>
+                </a:solidFill>
+                <a:latin typeface="+mn-lt"/>
+                <a:ea typeface="+mn-lt"/>
+                <a:cs typeface="+mn-lt"/>
+              </a:defRPr>
+            </a:lvl3pPr>
+            <a:lvl4pPr marL="0" indent="0" algn="ctr">
+              <a:lnSpc>
+                <a:spcPct val="110000"/>
+              </a:lnSpc>
+              <a:spcBef>
+                <a:spcPts val="0"/>
+              </a:spcBef>
+              <a:spcAft>
+                <a:spcPts val="0"/>
+              </a:spcAft>
+              <a:buNone/>
+              <a:defRPr sz="2100" b="0">
+                <a:solidFill>
+                  <a:schemeClr val="tx1"/>
+                </a:solidFill>
+                <a:latin typeface="+mn-lt"/>
+                <a:ea typeface="+mn-lt"/>
+                <a:cs typeface="+mn-lt"/>
+              </a:defRPr>
+            </a:lvl4pPr>
+            <a:lvl5pPr marL="0" indent="0" algn="ctr">
+              <a:lnSpc>
+                <a:spcPct val="110000"/>
+              </a:lnSpc>
+              <a:spcBef>
+                <a:spcPts val="0"/>
+              </a:spcBef>
+              <a:spcAft>
+                <a:spcPts val="0"/>
+              </a:spcAft>
+              <a:buNone/>
+              <a:defRPr sz="2100" b="0">
+                <a:solidFill>
+                  <a:schemeClr val="tx1"/>
+                </a:solidFill>
+                <a:latin typeface="+mn-lt"/>
+                <a:ea typeface="+mn-lt"/>
+                <a:cs typeface="+mn-lt"/>
+              </a:defRPr>
+            </a:lvl5pPr>
+            <a:lvl6pPr marL="0" indent="0" algn="ctr">
+              <a:lnSpc>
+                <a:spcPct val="110000"/>
+              </a:lnSpc>
+              <a:spcBef>
+                <a:spcPts val="0"/>
+              </a:spcBef>
+              <a:spcAft>
+                <a:spcPts val="0"/>
+              </a:spcAft>
+              <a:buNone/>
+              <a:defRPr sz="2100" b="0">
+                <a:solidFill>
+                  <a:schemeClr val="tx1"/>
+                </a:solidFill>
+                <a:latin typeface="+mn-lt"/>
+                <a:ea typeface="+mn-lt"/>
+                <a:cs typeface="+mn-lt"/>
+              </a:defRPr>
+            </a:lvl6pPr>
+            <a:lvl7pPr marL="0" indent="0" algn="ctr">
+              <a:lnSpc>
+                <a:spcPct val="110000"/>
+              </a:lnSpc>
+              <a:spcBef>
+                <a:spcPts val="0"/>
+              </a:spcBef>
+              <a:spcAft>
+                <a:spcPts val="0"/>
+              </a:spcAft>
+              <a:buNone/>
+              <a:defRPr sz="2100" b="0">
+                <a:solidFill>
+                  <a:schemeClr val="tx1"/>
+                </a:solidFill>
+                <a:latin typeface="+mn-lt"/>
+                <a:ea typeface="+mn-lt"/>
+                <a:cs typeface="+mn-lt"/>
+              </a:defRPr>
+            </a:lvl7pPr>
+            <a:lvl8pPr marL="0" indent="0" algn="ctr">
+              <a:lnSpc>
+                <a:spcPct val="110000"/>
+              </a:lnSpc>
+              <a:spcBef>
+                <a:spcPts val="0"/>
+              </a:spcBef>
+              <a:spcAft>
+                <a:spcPts val="0"/>
+              </a:spcAft>
+              <a:buNone/>
+              <a:defRPr sz="2100" b="0">
+                <a:solidFill>
+                  <a:schemeClr val="tx1"/>
+                </a:solidFill>
+                <a:latin typeface="+mn-lt"/>
+                <a:ea typeface="+mn-lt"/>
+                <a:cs typeface="+mn-lt"/>
+              </a:defRPr>
+            </a:lvl8pPr>
+            <a:lvl9pPr marL="0" indent="0" algn="ctr">
+              <a:lnSpc>
+                <a:spcPct val="110000"/>
+              </a:lnSpc>
+              <a:spcBef>
+                <a:spcPts val="0"/>
+              </a:spcBef>
+              <a:spcAft>
+                <a:spcPts val="0"/>
+              </a:spcAft>
+              <a:buNone/>
+              <a:defRPr sz="2100" b="0">
+                <a:solidFill>
+                  <a:schemeClr val="tx1"/>
+                </a:solidFill>
+                <a:latin typeface="+mn-lt"/>
+                <a:ea typeface="+mn-lt"/>
+                <a:cs typeface="+mn-lt"/>
+              </a:defRPr>
+            </a:lvl9pPr>
+          </a:lstStyle>
+          <a:p xmlns:a="http://schemas.openxmlformats.org/drawingml/2006/main"/>
+        </p:txBody>
+      </p:sp>
+    </p:spTree>
+  </p:cSld>
+</p:sldLayout>
+</file>
+
+<file path=ppt/slideLayouts/slideLayout2.xml><?xml version="1.0" encoding="utf-8"?>
+<p:sldLayout xmlns:p="http://schemas.openxmlformats.org/presentationml/2006/main">
+  <p:cSld name="Section Header">
+    <p:spTree>
+      <p:nvGrpSpPr>
+        <p:cNvPr id="1" name=""/>
+        <p:cNvGrpSpPr/>
+        <p:nvPr/>
+      </p:nvGrpSpPr>
+      <p:grpSpPr>
+        <a:xfrm xmlns:a="http://schemas.openxmlformats.org/drawingml/2006/main"/>
+      </p:grpSpPr>
+      <p:sp>
+        <p:nvSpPr>
+          <p:cNvPr id="2" name="Section title">
+            <a:extLst xmlns:a="http://schemas.openxmlformats.org/drawingml/2006/main">
+              <a:ext uri="{FF2B5EF4-FFF2-40B4-BE49-F238E27FC236}">
+                <a16:creationId xmlns:a16="http://schemas.microsoft.com/office/drawing/2014/main" id="{F9DA45F2-8814-4FE9-9D8F-857C80632030}"/>
+              </a:ext>
+            </a:extLst>
+          </p:cNvPr>
+          <p:cNvSpPr>
+            <a:spLocks xmlns:a="http://schemas.openxmlformats.org/drawingml/2006/main" noGrp="1"/>
+          </p:cNvSpPr>
+          <p:nvPr>
+            <p:ph type="title" idx="0"/>
+          </p:nvPr>
+        </p:nvSpPr>
+        <p:spPr>
+          <a:xfrm xmlns:a="http://schemas.openxmlformats.org/drawingml/2006/main">
+            <a:off x="1219200" y="2857500"/>
+            <a:ext cx="9753600" cy="1143000"/>
+          </a:xfrm>
+          <a:prstGeom xmlns:a="http://schemas.openxmlformats.org/drawingml/2006/main" prst="rect">
+            <a:avLst/>
+          </a:prstGeom>
+          <a:noFill xmlns:a="http://schemas.openxmlformats.org/drawingml/2006/main"/>
+          <a:ln xmlns:a="http://schemas.openxmlformats.org/drawingml/2006/main">
+            <a:noFill/>
+            <a:prstDash val="solid"/>
+          </a:ln>
+        </p:spPr>
+        <p:txBody>
+          <a:bodyPr xmlns:a="http://schemas.openxmlformats.org/drawingml/2006/main" wrap="square" lIns="0" tIns="0" rIns="0" bIns="0" anchor="ctr">
+            <a:normAutofit/>
+          </a:bodyPr>
+          <a:lstStyle xmlns:a="http://schemas.openxmlformats.org/drawingml/2006/main">
+            <a:defPPr algn="ctr">
+              <a:defRPr sz="4200" b="1">
+                <a:solidFill>
+                  <a:schemeClr val="tx1"/>
+                </a:solidFill>
+                <a:latin typeface="+mj-lt"/>
+                <a:ea typeface="+mj-lt"/>
+                <a:cs typeface="+mj-lt"/>
+              </a:defRPr>
+            </a:defPPr>
+            <a:lvl1pPr marL="0" indent="0" algn="ctr">
+              <a:lnSpc>
+                <a:spcPct val="110000"/>
+              </a:lnSpc>
+              <a:spcBef>
+                <a:spcPts val="0"/>
+              </a:spcBef>
+              <a:spcAft>
+                <a:spcPts val="0"/>
+              </a:spcAft>
+              <a:buNone/>
+              <a:defRPr sz="4200" b="1">
+                <a:solidFill>
+                  <a:schemeClr val="tx1"/>
+                </a:solidFill>
+                <a:latin typeface="+mj-lt"/>
+                <a:ea typeface="+mj-lt"/>
+                <a:cs typeface="+mj-lt"/>
+              </a:defRPr>
+            </a:lvl1pPr>
+            <a:lvl2pPr marL="0" indent="0" algn="ctr">
+              <a:lnSpc>
+                <a:spcPct val="110000"/>
+              </a:lnSpc>
+              <a:spcBef>
+                <a:spcPts val="0"/>
+              </a:spcBef>
+              <a:spcAft>
+                <a:spcPts val="0"/>
+              </a:spcAft>
+              <a:buNone/>
+              <a:defRPr sz="4200" b="1">
+                <a:solidFill>
+                  <a:schemeClr val="tx1"/>
+                </a:solidFill>
+                <a:latin typeface="+mj-lt"/>
+                <a:ea typeface="+mj-lt"/>
+                <a:cs typeface="+mj-lt"/>
+              </a:defRPr>
+            </a:lvl2pPr>
+            <a:lvl3pPr marL="0" indent="0" algn="ctr">
+              <a:lnSpc>
+                <a:spcPct val="110000"/>
+              </a:lnSpc>
+              <a:spcBef>
+                <a:spcPts val="0"/>
+              </a:spcBef>
+              <a:spcAft>
+                <a:spcPts val="0"/>
+              </a:spcAft>
+              <a:buNone/>
+              <a:defRPr sz="4200" b="1">
+                <a:solidFill>
+                  <a:schemeClr val="tx1"/>
+                </a:solidFill>
+                <a:latin typeface="+mj-lt"/>
+                <a:ea typeface="+mj-lt"/>
+                <a:cs typeface="+mj-lt"/>
+              </a:defRPr>
+            </a:lvl3pPr>
+            <a:lvl4pPr marL="0" indent="0" algn="ctr">
+              <a:lnSpc>
+                <a:spcPct val="110000"/>
+              </a:lnSpc>
+              <a:spcBef>
+                <a:spcPts val="0"/>
+              </a:spcBef>
+              <a:spcAft>
+                <a:spcPts val="0"/>
+              </a:spcAft>
+              <a:buNone/>
+              <a:defRPr sz="4200" b="1">
+                <a:solidFill>
+                  <a:schemeClr val="tx1"/>
+                </a:solidFill>
+                <a:latin typeface="+mj-lt"/>
+                <a:ea typeface="+mj-lt"/>
+                <a:cs typeface="+mj-lt"/>
+              </a:defRPr>
+            </a:lvl4pPr>
+            <a:lvl5pPr marL="0" indent="0" algn="ctr">
+              <a:lnSpc>
+                <a:spcPct val="110000"/>
+              </a:lnSpc>
+              <a:spcBef>
+                <a:spcPts val="0"/>
+              </a:spcBef>
+              <a:spcAft>
+                <a:spcPts val="0"/>
+              </a:spcAft>
+              <a:buNone/>
+              <a:defRPr sz="4200" b="1">
+                <a:solidFill>
+                  <a:schemeClr val="tx1"/>
+                </a:solidFill>
+                <a:latin typeface="+mj-lt"/>
+                <a:ea typeface="+mj-lt"/>
+                <a:cs typeface="+mj-lt"/>
+              </a:defRPr>
+            </a:lvl5pPr>
+            <a:lvl6pPr marL="0" indent="0" algn="ctr">
+              <a:lnSpc>
+                <a:spcPct val="110000"/>
+              </a:lnSpc>
+              <a:spcBef>
+                <a:spcPts val="0"/>
+              </a:spcBef>
+              <a:spcAft>
+                <a:spcPts val="0"/>
+              </a:spcAft>
+              <a:buNone/>
+              <a:defRPr sz="4200" b="1">
+                <a:solidFill>
+                  <a:schemeClr val="tx1"/>
+                </a:solidFill>
+                <a:latin typeface="+mj-lt"/>
+                <a:ea typeface="+mj-lt"/>
+                <a:cs typeface="+mj-lt"/>
+              </a:defRPr>
+            </a:lvl6pPr>
+            <a:lvl7pPr marL="0" indent="0" algn="ctr">
+              <a:lnSpc>
+                <a:spcPct val="110000"/>
+              </a:lnSpc>
+              <a:spcBef>
+                <a:spcPts val="0"/>
+              </a:spcBef>
+              <a:spcAft>
+                <a:spcPts val="0"/>
+              </a:spcAft>
+              <a:buNone/>
+              <a:defRPr sz="4200" b="1">
+                <a:solidFill>
+                  <a:schemeClr val="tx1"/>
+                </a:solidFill>
+                <a:latin typeface="+mj-lt"/>
+                <a:ea typeface="+mj-lt"/>
+                <a:cs typeface="+mj-lt"/>
+              </a:defRPr>
+            </a:lvl7pPr>
+            <a:lvl8pPr marL="0" indent="0" algn="ctr">
+              <a:lnSpc>
+                <a:spcPct val="110000"/>
+              </a:lnSpc>
+              <a:spcBef>
+                <a:spcPts val="0"/>
+              </a:spcBef>
+              <a:spcAft>
+                <a:spcPts val="0"/>
+              </a:spcAft>
+              <a:buNone/>
+              <a:defRPr sz="4200" b="1">
+                <a:solidFill>
+                  <a:schemeClr val="tx1"/>
+                </a:solidFill>
+                <a:latin typeface="+mj-lt"/>
+                <a:ea typeface="+mj-lt"/>
+                <a:cs typeface="+mj-lt"/>
+              </a:defRPr>
+            </a:lvl8pPr>
+            <a:lvl9pPr marL="0" indent="0" algn="ctr">
+              <a:lnSpc>
+                <a:spcPct val="110000"/>
+              </a:lnSpc>
+              <a:spcBef>
+                <a:spcPts val="0"/>
+              </a:spcBef>
+              <a:spcAft>
+                <a:spcPts val="0"/>
+              </a:spcAft>
+              <a:buNone/>
+              <a:defRPr sz="4200" b="1">
+                <a:solidFill>
+                  <a:schemeClr val="tx1"/>
+                </a:solidFill>
+                <a:latin typeface="+mj-lt"/>
+                <a:ea typeface="+mj-lt"/>
+                <a:cs typeface="+mj-lt"/>
+              </a:defRPr>
+            </a:lvl9pPr>
+          </a:lstStyle>
+          <a:p xmlns:a="http://schemas.openxmlformats.org/drawingml/2006/main"/>
+        </p:txBody>
+      </p:sp>
+    </p:spTree>
+  </p:cSld>
+</p:sldLayout>
+</file>
+
+<file path=ppt/slideLayouts/slideLayout3.xml><?xml version="1.0" encoding="utf-8"?>
+<p:sldLayout xmlns:p="http://schemas.openxmlformats.org/presentationml/2006/main">
+  <p:cSld name="Title and Body">
+    <p:spTree>
+      <p:nvGrpSpPr>
+        <p:cNvPr id="1" name=""/>
+        <p:cNvGrpSpPr/>
+        <p:nvPr/>
+      </p:nvGrpSpPr>
+      <p:grpSpPr>
+        <a:xfrm xmlns:a="http://schemas.openxmlformats.org/drawingml/2006/main"/>
+      </p:grpSpPr>
+      <p:sp>
+        <p:nvSpPr>
+          <p:cNvPr id="3" name="Title">
+            <a:extLst xmlns:a="http://schemas.openxmlformats.org/drawingml/2006/main">
+              <a:ext uri="{FF2B5EF4-FFF2-40B4-BE49-F238E27FC236}">
+                <a16:creationId xmlns:a16="http://schemas.microsoft.com/office/drawing/2014/main" id="{C98A9A78-1DFE-4984-B408-E24CF3087244}"/>
+              </a:ext>
+            </a:extLst>
+          </p:cNvPr>
+          <p:cNvSpPr>
+            <a:spLocks xmlns:a="http://schemas.openxmlformats.org/drawingml/2006/main" noGrp="1"/>
+          </p:cNvSpPr>
+          <p:nvPr>
+            <p:ph type="title" idx="0"/>
+          </p:nvPr>
+        </p:nvSpPr>
+        <p:spPr>
+          <a:xfrm xmlns:a="http://schemas.openxmlformats.org/drawingml/2006/main">
+            <a:off x="685800" y="533400"/>
+            <a:ext cx="10820400" cy="838200"/>
+          </a:xfrm>
+          <a:prstGeom xmlns:a="http://schemas.openxmlformats.org/drawingml/2006/main" prst="rect">
+            <a:avLst/>
+          </a:prstGeom>
+          <a:noFill xmlns:a="http://schemas.openxmlformats.org/drawingml/2006/main"/>
+          <a:ln xmlns:a="http://schemas.openxmlformats.org/drawingml/2006/main">
+            <a:noFill/>
+            <a:prstDash val="solid"/>
+          </a:ln>
+        </p:spPr>
+        <p:txBody>
+          <a:bodyPr xmlns:a="http://schemas.openxmlformats.org/drawingml/2006/main" wrap="square" lIns="0" tIns="0" rIns="0" bIns="0" anchor="t">
+            <a:normAutofit/>
+          </a:bodyPr>
+          <a:lstStyle xmlns:a="http://schemas.openxmlformats.org/drawingml/2006/main">
+            <a:defPPr algn="l">
+              <a:defRPr sz="3300" b="1">
+                <a:solidFill>
+                  <a:schemeClr val="tx1"/>
+                </a:solidFill>
+                <a:latin typeface="+mj-lt"/>
+                <a:ea typeface="+mj-lt"/>
+                <a:cs typeface="+mj-lt"/>
+              </a:defRPr>
+            </a:defPPr>
+            <a:lvl1pPr marL="0" indent="0" algn="l">
+              <a:lnSpc>
+                <a:spcPct val="110000"/>
+              </a:lnSpc>
+              <a:spcBef>
+                <a:spcPts val="0"/>
+              </a:spcBef>
+              <a:spcAft>
+                <a:spcPts val="0"/>
+              </a:spcAft>
+              <a:buNone/>
+              <a:defRPr sz="3300" b="1">
+                <a:solidFill>
+                  <a:schemeClr val="tx1"/>
+                </a:solidFill>
+                <a:latin typeface="+mj-lt"/>
+                <a:ea typeface="+mj-lt"/>
+                <a:cs typeface="+mj-lt"/>
+              </a:defRPr>
+            </a:lvl1pPr>
+            <a:lvl2pPr marL="0" indent="0" algn="l">
+              <a:lnSpc>
+                <a:spcPct val="110000"/>
+              </a:lnSpc>
+              <a:spcBef>
+                <a:spcPts val="0"/>
+              </a:spcBef>
+              <a:spcAft>
+                <a:spcPts val="0"/>
+              </a:spcAft>
+              <a:buNone/>
+              <a:defRPr sz="3300" b="1">
+                <a:solidFill>
+                  <a:schemeClr val="tx1"/>
+                </a:solidFill>
+                <a:latin typeface="+mj-lt"/>
+                <a:ea typeface="+mj-lt"/>
+                <a:cs typeface="+mj-lt"/>
+              </a:defRPr>
+            </a:lvl2pPr>
+            <a:lvl3pPr marL="0" indent="0" algn="l">
+              <a:lnSpc>
+                <a:spcPct val="110000"/>
+              </a:lnSpc>
+              <a:spcBef>
+                <a:spcPts val="0"/>
+              </a:spcBef>
+              <a:spcAft>
+                <a:spcPts val="0"/>
+              </a:spcAft>
+              <a:buNone/>
+              <a:defRPr sz="3300" b="1">
+                <a:solidFill>
+                  <a:schemeClr val="tx1"/>
+                </a:solidFill>
+                <a:latin typeface="+mj-lt"/>
+                <a:ea typeface="+mj-lt"/>
+                <a:cs typeface="+mj-lt"/>
+              </a:defRPr>
+            </a:lvl3pPr>
+            <a:lvl4pPr marL="0" indent="0" algn="l">
+              <a:lnSpc>
+                <a:spcPct val="110000"/>
+              </a:lnSpc>
+              <a:spcBef>
+                <a:spcPts val="0"/>
+              </a:spcBef>
+              <a:spcAft>
+                <a:spcPts val="0"/>
+              </a:spcAft>
+              <a:buNone/>
+              <a:defRPr sz="3300" b="1">
+                <a:solidFill>
+                  <a:schemeClr val="tx1"/>
+                </a:solidFill>
+                <a:latin typeface="+mj-lt"/>
+                <a:ea typeface="+mj-lt"/>
+                <a:cs typeface="+mj-lt"/>
+              </a:defRPr>
+            </a:lvl4pPr>
+            <a:lvl5pPr marL="0" indent="0" algn="l">
+              <a:lnSpc>
+                <a:spcPct val="110000"/>
+              </a:lnSpc>
+              <a:spcBef>
+                <a:spcPts val="0"/>
+              </a:spcBef>
+              <a:spcAft>
+                <a:spcPts val="0"/>
+              </a:spcAft>
+              <a:buNone/>
+              <a:defRPr sz="3300" b="1">
+                <a:solidFill>
+                  <a:schemeClr val="tx1"/>
+                </a:solidFill>
+                <a:latin typeface="+mj-lt"/>
+                <a:ea typeface="+mj-lt"/>
+                <a:cs typeface="+mj-lt"/>
+              </a:defRPr>
+            </a:lvl5pPr>
+            <a:lvl6pPr marL="0" indent="0" algn="l">
+              <a:lnSpc>
+                <a:spcPct val="110000"/>
+              </a:lnSpc>
+              <a:spcBef>
+                <a:spcPts val="0"/>
+              </a:spcBef>
+              <a:spcAft>
+                <a:spcPts val="0"/>
+              </a:spcAft>
+              <a:buNone/>
+              <a:defRPr sz="3300" b="1">
+                <a:solidFill>
+                  <a:schemeClr val="tx1"/>
+                </a:solidFill>
+                <a:latin typeface="+mj-lt"/>
+                <a:ea typeface="+mj-lt"/>
+                <a:cs typeface="+mj-lt"/>
+              </a:defRPr>
+            </a:lvl6pPr>
+            <a:lvl7pPr marL="0" indent="0" algn="l">
+              <a:lnSpc>
+                <a:spcPct val="110000"/>
+              </a:lnSpc>
+              <a:spcBef>
+                <a:spcPts val="0"/>
+              </a:spcBef>
+              <a:spcAft>
+                <a:spcPts val="0"/>
+              </a:spcAft>
+              <a:buNone/>
+              <a:defRPr sz="3300" b="1">
+                <a:solidFill>
+                  <a:schemeClr val="tx1"/>
+                </a:solidFill>
+                <a:latin typeface="+mj-lt"/>
+                <a:ea typeface="+mj-lt"/>
+                <a:cs typeface="+mj-lt"/>
+              </a:defRPr>
+            </a:lvl7pPr>
+            <a:lvl8pPr marL="0" indent="0" algn="l">
+              <a:lnSpc>
+                <a:spcPct val="110000"/>
+              </a:lnSpc>
+              <a:spcBef>
+                <a:spcPts val="0"/>
+              </a:spcBef>
+              <a:spcAft>
+                <a:spcPts val="0"/>
+              </a:spcAft>
+              <a:buNone/>
+              <a:defRPr sz="3300" b="1">
+                <a:solidFill>
+                  <a:schemeClr val="tx1"/>
+                </a:solidFill>
+                <a:latin typeface="+mj-lt"/>
+                <a:ea typeface="+mj-lt"/>
+                <a:cs typeface="+mj-lt"/>
+              </a:defRPr>
+            </a:lvl8pPr>
+            <a:lvl9pPr marL="0" indent="0" algn="l">
+              <a:lnSpc>
+                <a:spcPct val="110000"/>
+              </a:lnSpc>
+              <a:spcBef>
+                <a:spcPts val="0"/>
+              </a:spcBef>
+              <a:spcAft>
+                <a:spcPts val="0"/>
+              </a:spcAft>
+              <a:buNone/>
+              <a:defRPr sz="3300" b="1">
+                <a:solidFill>
+                  <a:schemeClr val="tx1"/>
+                </a:solidFill>
+                <a:latin typeface="+mj-lt"/>
+                <a:ea typeface="+mj-lt"/>
+                <a:cs typeface="+mj-lt"/>
+              </a:defRPr>
+            </a:lvl9pPr>
+          </a:lstStyle>
+          <a:p xmlns:a="http://schemas.openxmlformats.org/drawingml/2006/main"/>
+        </p:txBody>
+      </p:sp>
+      <p:sp>
+        <p:nvSpPr>
+          <p:cNvPr id="2" name="Body">
+            <a:extLst xmlns:a="http://schemas.openxmlformats.org/drawingml/2006/main">
+              <a:ext uri="{FF2B5EF4-FFF2-40B4-BE49-F238E27FC236}">
+                <a16:creationId xmlns:a16="http://schemas.microsoft.com/office/drawing/2014/main" id="{125CE909-8BA1-445E-8896-71B269325F7E}"/>
+              </a:ext>
+            </a:extLst>
+          </p:cNvPr>
+          <p:cNvSpPr>
+            <a:spLocks xmlns:a="http://schemas.openxmlformats.org/drawingml/2006/main" noGrp="1"/>
+          </p:cNvSpPr>
+          <p:nvPr>
+            <p:ph type="body" idx="1"/>
+          </p:nvPr>
+        </p:nvSpPr>
+        <p:spPr>
+          <a:xfrm xmlns:a="http://schemas.openxmlformats.org/drawingml/2006/main">
+            <a:off x="685800" y="1905000"/>
+            <a:ext cx="10820400" cy="4267200"/>
+          </a:xfrm>
+          <a:prstGeom xmlns:a="http://schemas.openxmlformats.org/drawingml/2006/main" prst="rect">
+            <a:avLst/>
+          </a:prstGeom>
+          <a:noFill xmlns:a="http://schemas.openxmlformats.org/drawingml/2006/main"/>
+          <a:ln xmlns:a="http://schemas.openxmlformats.org/drawingml/2006/main">
+            <a:noFill/>
+            <a:prstDash val="solid"/>
+          </a:ln>
+        </p:spPr>
+        <p:txBody>
+          <a:bodyPr xmlns:a="http://schemas.openxmlformats.org/drawingml/2006/main" wrap="square" lIns="0" tIns="0" rIns="0" bIns="0" anchor="t">
+            <a:normAutofit/>
+          </a:bodyPr>
+          <a:lstStyle xmlns:a="http://schemas.openxmlformats.org/drawingml/2006/main">
+            <a:defPPr algn="l">
+              <a:defRPr sz="2250" b="0">
+                <a:solidFill>
+                  <a:schemeClr val="tx1"/>
+                </a:solidFill>
+                <a:latin typeface="+mn-lt"/>
+                <a:ea typeface="+mn-lt"/>
+                <a:cs typeface="+mn-lt"/>
+              </a:defRPr>
+            </a:defPPr>
+            <a:lvl1pPr marL="228600" indent="-228600" algn="l">
+              <a:lnSpc>
+                <a:spcPct val="110000"/>
+              </a:lnSpc>
+              <a:spcBef>
+                <a:spcPts val="0"/>
+              </a:spcBef>
+              <a:spcAft>
+                <a:spcPts val="1200"/>
+              </a:spcAft>
+              <a:buChar char="•"/>
+              <a:defRPr sz="2250" b="0">
+                <a:solidFill>
+                  <a:schemeClr val="tx1"/>
+                </a:solidFill>
+                <a:latin typeface="+mn-lt"/>
+                <a:ea typeface="+mn-lt"/>
+                <a:cs typeface="+mn-lt"/>
+              </a:defRPr>
+            </a:lvl1pPr>
+            <a:lvl2pPr marL="533400" indent="-228600" algn="l">
+              <a:lnSpc>
+                <a:spcPct val="110000"/>
+              </a:lnSpc>
+              <a:spcBef>
+                <a:spcPts val="0"/>
+              </a:spcBef>
+              <a:spcAft>
+                <a:spcPts val="1200"/>
+              </a:spcAft>
+              <a:buChar char="•"/>
+              <a:defRPr sz="2250" b="0">
+                <a:solidFill>
+                  <a:schemeClr val="tx1"/>
+                </a:solidFill>
+                <a:latin typeface="+mn-lt"/>
+                <a:ea typeface="+mn-lt"/>
+                <a:cs typeface="+mn-lt"/>
+              </a:defRPr>
+            </a:lvl2pPr>
+            <a:lvl3pPr marL="838200" indent="-228600" algn="l">
+              <a:lnSpc>
+                <a:spcPct val="110000"/>
+              </a:lnSpc>
+              <a:spcBef>
+                <a:spcPts val="0"/>
+              </a:spcBef>
+              <a:spcAft>
+                <a:spcPts val="1200"/>
+              </a:spcAft>
+              <a:buChar char="•"/>
+              <a:defRPr sz="2250" b="0">
+                <a:solidFill>
+                  <a:schemeClr val="tx1"/>
+                </a:solidFill>
+                <a:latin typeface="+mn-lt"/>
+                <a:ea typeface="+mn-lt"/>
+                <a:cs typeface="+mn-lt"/>
+              </a:defRPr>
+            </a:lvl3pPr>
+            <a:lvl4pPr marL="1143000" indent="-228600" algn="l">
+              <a:lnSpc>
+                <a:spcPct val="110000"/>
+              </a:lnSpc>
+              <a:spcBef>
+                <a:spcPts val="0"/>
+              </a:spcBef>
+              <a:spcAft>
+                <a:spcPts val="1200"/>
+              </a:spcAft>
+              <a:buChar char="•"/>
+              <a:defRPr sz="2250" b="0">
+                <a:solidFill>
+                  <a:schemeClr val="tx1"/>
+                </a:solidFill>
+                <a:latin typeface="+mn-lt"/>
+                <a:ea typeface="+mn-lt"/>
+                <a:cs typeface="+mn-lt"/>
+              </a:defRPr>
+            </a:lvl4pPr>
+            <a:lvl5pPr marL="1447800" indent="-228600" algn="l">
+              <a:lnSpc>
+                <a:spcPct val="110000"/>
+              </a:lnSpc>
+              <a:spcBef>
+                <a:spcPts val="0"/>
+              </a:spcBef>
+              <a:spcAft>
+                <a:spcPts val="1200"/>
+              </a:spcAft>
+              <a:buChar char="•"/>
+              <a:defRPr sz="2250" b="0">
+                <a:solidFill>
+                  <a:schemeClr val="tx1"/>
+                </a:solidFill>
+                <a:latin typeface="+mn-lt"/>
+                <a:ea typeface="+mn-lt"/>
+                <a:cs typeface="+mn-lt"/>
+              </a:defRPr>
+            </a:lvl5pPr>
+            <a:lvl6pPr marL="1752600" indent="-228600" algn="l">
+              <a:lnSpc>
+                <a:spcPct val="110000"/>
+              </a:lnSpc>
+              <a:spcBef>
+                <a:spcPts val="0"/>
+              </a:spcBef>
+              <a:spcAft>
+                <a:spcPts val="1200"/>
+              </a:spcAft>
+              <a:buChar char="•"/>
+              <a:defRPr sz="2250" b="0">
+                <a:solidFill>
+                  <a:schemeClr val="tx1"/>
+                </a:solidFill>
+                <a:latin typeface="+mn-lt"/>
+                <a:ea typeface="+mn-lt"/>
+                <a:cs typeface="+mn-lt"/>
+              </a:defRPr>
+            </a:lvl6pPr>
+            <a:lvl7pPr marL="2057400" indent="-228600" algn="l">
+              <a:lnSpc>
+                <a:spcPct val="110000"/>
+              </a:lnSpc>
+              <a:spcBef>
+                <a:spcPts val="0"/>
+              </a:spcBef>
+              <a:spcAft>
+                <a:spcPts val="1200"/>
+              </a:spcAft>
+              <a:buChar char="•"/>
+              <a:defRPr sz="2250" b="0">
+                <a:solidFill>
+                  <a:schemeClr val="tx1"/>
+                </a:solidFill>
+                <a:latin typeface="+mn-lt"/>
+                <a:ea typeface="+mn-lt"/>
+                <a:cs typeface="+mn-lt"/>
+              </a:defRPr>
+            </a:lvl7pPr>
+            <a:lvl8pPr marL="2362200" indent="-228600" algn="l">
+              <a:lnSpc>
+                <a:spcPct val="110000"/>
+              </a:lnSpc>
+              <a:spcBef>
+                <a:spcPts val="0"/>
+              </a:spcBef>
+              <a:spcAft>
+                <a:spcPts val="1200"/>
+              </a:spcAft>
+              <a:buChar char="•"/>
+              <a:defRPr sz="2250" b="0">
+                <a:solidFill>
+                  <a:schemeClr val="tx1"/>
+                </a:solidFill>
+                <a:latin typeface="+mn-lt"/>
+                <a:ea typeface="+mn-lt"/>
+                <a:cs typeface="+mn-lt"/>
+              </a:defRPr>
+            </a:lvl8pPr>
+            <a:lvl9pPr marL="2667000" indent="-228600" algn="l">
+              <a:lnSpc>
+                <a:spcPct val="110000"/>
+              </a:lnSpc>
+              <a:spcBef>
+                <a:spcPts val="0"/>
+              </a:spcBef>
+              <a:spcAft>
+                <a:spcPts val="1200"/>
+              </a:spcAft>
+              <a:buChar char="•"/>
+              <a:defRPr sz="2250" b="0">
+                <a:solidFill>
+                  <a:schemeClr val="tx1"/>
+                </a:solidFill>
+                <a:latin typeface="+mn-lt"/>
+                <a:ea typeface="+mn-lt"/>
+                <a:cs typeface="+mn-lt"/>
+              </a:defRPr>
+            </a:lvl9pPr>
+          </a:lstStyle>
+          <a:p xmlns:a="http://schemas.openxmlformats.org/drawingml/2006/main"/>
+        </p:txBody>
+      </p:sp>
+    </p:spTree>
+  </p:cSld>
+</p:sldLayout>
+</file>
+
+<file path=ppt/slideLayouts/slideLayout4.xml><?xml version="1.0" encoding="utf-8"?>
+<p:sldLayout xmlns:p="http://schemas.openxmlformats.org/presentationml/2006/main">
+  <p:cSld name="Title and Two Column">
+    <p:spTree>
+      <p:nvGrpSpPr>
+        <p:cNvPr id="1" name=""/>
+        <p:cNvGrpSpPr/>
+        <p:nvPr/>
+      </p:nvGrpSpPr>
+      <p:grpSpPr>
+        <a:xfrm xmlns:a="http://schemas.openxmlformats.org/drawingml/2006/main"/>
+      </p:grpSpPr>
+      <p:sp>
+        <p:nvSpPr>
+          <p:cNvPr id="4" name="Title">
+            <a:extLst xmlns:a="http://schemas.openxmlformats.org/drawingml/2006/main">
+              <a:ext uri="{FF2B5EF4-FFF2-40B4-BE49-F238E27FC236}">
+                <a16:creationId xmlns:a16="http://schemas.microsoft.com/office/drawing/2014/main" id="{835BE333-E54D-4E8B-9AA5-1F6EC886D669}"/>
+              </a:ext>
+            </a:extLst>
+          </p:cNvPr>
+          <p:cNvSpPr>
+            <a:spLocks xmlns:a="http://schemas.openxmlformats.org/drawingml/2006/main" noGrp="1"/>
+          </p:cNvSpPr>
+          <p:nvPr>
+            <p:ph type="title" idx="0"/>
+          </p:nvPr>
+        </p:nvSpPr>
+        <p:spPr>
+          <a:xfrm xmlns:a="http://schemas.openxmlformats.org/drawingml/2006/main">
+            <a:off x="685800" y="533400"/>
+            <a:ext cx="10820400" cy="838200"/>
+          </a:xfrm>
+          <a:prstGeom xmlns:a="http://schemas.openxmlformats.org/drawingml/2006/main" prst="rect">
+            <a:avLst/>
+          </a:prstGeom>
+          <a:noFill xmlns:a="http://schemas.openxmlformats.org/drawingml/2006/main"/>
+          <a:ln xmlns:a="http://schemas.openxmlformats.org/drawingml/2006/main">
+            <a:noFill/>
+            <a:prstDash val="solid"/>
+          </a:ln>
+        </p:spPr>
+        <p:txBody>
+          <a:bodyPr xmlns:a="http://schemas.openxmlformats.org/drawingml/2006/main" wrap="square" lIns="0" tIns="0" rIns="0" bIns="0" anchor="t">
+            <a:normAutofit/>
+          </a:bodyPr>
+          <a:lstStyle xmlns:a="http://schemas.openxmlformats.org/drawingml/2006/main">
+            <a:defPPr algn="l">
+              <a:defRPr sz="3300" b="1">
+                <a:solidFill>
+                  <a:schemeClr val="tx1"/>
+                </a:solidFill>
+                <a:latin typeface="+mj-lt"/>
+                <a:ea typeface="+mj-lt"/>
+                <a:cs typeface="+mj-lt"/>
+              </a:defRPr>
+            </a:defPPr>
+            <a:lvl1pPr marL="0" indent="0" algn="l">
+              <a:lnSpc>
+                <a:spcPct val="110000"/>
+              </a:lnSpc>
+              <a:spcBef>
+                <a:spcPts val="0"/>
+              </a:spcBef>
+              <a:spcAft>
+                <a:spcPts val="0"/>
+              </a:spcAft>
+              <a:buNone/>
+              <a:defRPr sz="3300" b="1">
+                <a:solidFill>
+                  <a:schemeClr val="tx1"/>
+                </a:solidFill>
+                <a:latin typeface="+mj-lt"/>
+                <a:ea typeface="+mj-lt"/>
+                <a:cs typeface="+mj-lt"/>
+              </a:defRPr>
+            </a:lvl1pPr>
+            <a:lvl2pPr marL="0" indent="0" algn="l">
+              <a:lnSpc>
+                <a:spcPct val="110000"/>
+              </a:lnSpc>
+              <a:spcBef>
+                <a:spcPts val="0"/>
+              </a:spcBef>
+              <a:spcAft>
+                <a:spcPts val="0"/>
+              </a:spcAft>
+              <a:buNone/>
+              <a:defRPr sz="3300" b="1">
+                <a:solidFill>
+                  <a:schemeClr val="tx1"/>
+                </a:solidFill>
+                <a:latin typeface="+mj-lt"/>
+                <a:ea typeface="+mj-lt"/>
+                <a:cs typeface="+mj-lt"/>
+              </a:defRPr>
+            </a:lvl2pPr>
+            <a:lvl3pPr marL="0" indent="0" algn="l">
+              <a:lnSpc>
+                <a:spcPct val="110000"/>
+              </a:lnSpc>
+              <a:spcBef>
+                <a:spcPts val="0"/>
+              </a:spcBef>
+              <a:spcAft>
+                <a:spcPts val="0"/>
+              </a:spcAft>
+              <a:buNone/>
+              <a:defRPr sz="3300" b="1">
+                <a:solidFill>
+                  <a:schemeClr val="tx1"/>
+                </a:solidFill>
+                <a:latin typeface="+mj-lt"/>
+                <a:ea typeface="+mj-lt"/>
+                <a:cs typeface="+mj-lt"/>
+              </a:defRPr>
+            </a:lvl3pPr>
+            <a:lvl4pPr marL="0" indent="0" algn="l">
+              <a:lnSpc>
+                <a:spcPct val="110000"/>
+              </a:lnSpc>
+              <a:spcBef>
+                <a:spcPts val="0"/>
+              </a:spcBef>
+              <a:spcAft>
+                <a:spcPts val="0"/>
+              </a:spcAft>
+              <a:buNone/>
+              <a:defRPr sz="3300" b="1">
+                <a:solidFill>
+                  <a:schemeClr val="tx1"/>
+                </a:solidFill>
+                <a:latin typeface="+mj-lt"/>
+                <a:ea typeface="+mj-lt"/>
+                <a:cs typeface="+mj-lt"/>
+              </a:defRPr>
+            </a:lvl4pPr>
+            <a:lvl5pPr marL="0" indent="0" algn="l">
+              <a:lnSpc>
+                <a:spcPct val="110000"/>
+              </a:lnSpc>
+              <a:spcBef>
+                <a:spcPts val="0"/>
+              </a:spcBef>
+              <a:spcAft>
+                <a:spcPts val="0"/>
+              </a:spcAft>
+              <a:buNone/>
+              <a:defRPr sz="3300" b="1">
+                <a:solidFill>
+                  <a:schemeClr val="tx1"/>
+                </a:solidFill>
+                <a:latin typeface="+mj-lt"/>
+                <a:ea typeface="+mj-lt"/>
+                <a:cs typeface="+mj-lt"/>
+              </a:defRPr>
+            </a:lvl5pPr>
+            <a:lvl6pPr marL="0" indent="0" algn="l">
+              <a:lnSpc>
+                <a:spcPct val="110000"/>
+              </a:lnSpc>
+              <a:spcBef>
+                <a:spcPts val="0"/>
+              </a:spcBef>
+              <a:spcAft>
+                <a:spcPts val="0"/>
+              </a:spcAft>
+              <a:buNone/>
+              <a:defRPr sz="3300" b="1">
+                <a:solidFill>
+                  <a:schemeClr val="tx1"/>
+                </a:solidFill>
+                <a:latin typeface="+mj-lt"/>
+                <a:ea typeface="+mj-lt"/>
+                <a:cs typeface="+mj-lt"/>
+              </a:defRPr>
+            </a:lvl6pPr>
+            <a:lvl7pPr marL="0" indent="0" algn="l">
+              <a:lnSpc>
+                <a:spcPct val="110000"/>
+              </a:lnSpc>
+              <a:spcBef>
+                <a:spcPts val="0"/>
+              </a:spcBef>
+              <a:spcAft>
+                <a:spcPts val="0"/>
+              </a:spcAft>
+              <a:buNone/>
+              <a:defRPr sz="3300" b="1">
+                <a:solidFill>
+                  <a:schemeClr val="tx1"/>
+                </a:solidFill>
+                <a:latin typeface="+mj-lt"/>
+                <a:ea typeface="+mj-lt"/>
+                <a:cs typeface="+mj-lt"/>
+              </a:defRPr>
+            </a:lvl7pPr>
+            <a:lvl8pPr marL="0" indent="0" algn="l">
+              <a:lnSpc>
+                <a:spcPct val="110000"/>
+              </a:lnSpc>
+              <a:spcBef>
+                <a:spcPts val="0"/>
+              </a:spcBef>
+              <a:spcAft>
+                <a:spcPts val="0"/>
+              </a:spcAft>
+              <a:buNone/>
+              <a:defRPr sz="3300" b="1">
+                <a:solidFill>
+                  <a:schemeClr val="tx1"/>
+                </a:solidFill>
+                <a:latin typeface="+mj-lt"/>
+                <a:ea typeface="+mj-lt"/>
+                <a:cs typeface="+mj-lt"/>
+              </a:defRPr>
+            </a:lvl8pPr>
+            <a:lvl9pPr marL="0" indent="0" algn="l">
+              <a:lnSpc>
+                <a:spcPct val="110000"/>
+              </a:lnSpc>
+              <a:spcBef>
+                <a:spcPts val="0"/>
+              </a:spcBef>
+              <a:spcAft>
+                <a:spcPts val="0"/>
+              </a:spcAft>
+              <a:buNone/>
+              <a:defRPr sz="3300" b="1">
+                <a:solidFill>
+                  <a:schemeClr val="tx1"/>
+                </a:solidFill>
+                <a:latin typeface="+mj-lt"/>
+                <a:ea typeface="+mj-lt"/>
+                <a:cs typeface="+mj-lt"/>
+              </a:defRPr>
+            </a:lvl9pPr>
+          </a:lstStyle>
+          <a:p xmlns:a="http://schemas.openxmlformats.org/drawingml/2006/main"/>
+        </p:txBody>
+      </p:sp>
+      <p:sp>
+        <p:nvSpPr>
+          <p:cNvPr id="2" name="Left column">
+            <a:extLst xmlns:a="http://schemas.openxmlformats.org/drawingml/2006/main">
+              <a:ext uri="{FF2B5EF4-FFF2-40B4-BE49-F238E27FC236}">
+                <a16:creationId xmlns:a16="http://schemas.microsoft.com/office/drawing/2014/main" id="{629FD119-807B-4A31-B8B4-7C8BB9367D1D}"/>
+              </a:ext>
+            </a:extLst>
+          </p:cNvPr>
+          <p:cNvSpPr>
+            <a:spLocks xmlns:a="http://schemas.openxmlformats.org/drawingml/2006/main" noGrp="1"/>
+          </p:cNvSpPr>
+          <p:nvPr>
+            <p:ph type="body" idx="1"/>
+          </p:nvPr>
+        </p:nvSpPr>
+        <p:spPr>
+          <a:xfrm xmlns:a="http://schemas.openxmlformats.org/drawingml/2006/main">
+            <a:off x="685800" y="1905000"/>
+            <a:ext cx="5029200" cy="4267200"/>
+          </a:xfrm>
+          <a:prstGeom xmlns:a="http://schemas.openxmlformats.org/drawingml/2006/main" prst="rect">
+            <a:avLst/>
+          </a:prstGeom>
+          <a:noFill xmlns:a="http://schemas.openxmlformats.org/drawingml/2006/main"/>
+          <a:ln xmlns:a="http://schemas.openxmlformats.org/drawingml/2006/main">
+            <a:noFill/>
+            <a:prstDash val="solid"/>
+          </a:ln>
+        </p:spPr>
+        <p:txBody>
+          <a:bodyPr xmlns:a="http://schemas.openxmlformats.org/drawingml/2006/main" wrap="square" lIns="0" tIns="0" rIns="0" bIns="0" anchor="t">
+            <a:normAutofit/>
+          </a:bodyPr>
+          <a:lstStyle xmlns:a="http://schemas.openxmlformats.org/drawingml/2006/main">
+            <a:defPPr algn="l">
+              <a:defRPr sz="2100" b="0">
+                <a:solidFill>
+                  <a:schemeClr val="tx1"/>
+                </a:solidFill>
+                <a:latin typeface="+mn-lt"/>
+                <a:ea typeface="+mn-lt"/>
+                <a:cs typeface="+mn-lt"/>
+              </a:defRPr>
+            </a:defPPr>
+            <a:lvl1pPr marL="228600" indent="-228600" algn="l">
+              <a:lnSpc>
+                <a:spcPct val="110000"/>
+              </a:lnSpc>
+              <a:spcBef>
+                <a:spcPts val="0"/>
+              </a:spcBef>
+              <a:spcAft>
+                <a:spcPts val="1200"/>
+              </a:spcAft>
+              <a:buChar char="•"/>
+              <a:defRPr sz="2100" b="0">
+                <a:solidFill>
+                  <a:schemeClr val="tx1"/>
+                </a:solidFill>
+                <a:latin typeface="+mn-lt"/>
+                <a:ea typeface="+mn-lt"/>
+                <a:cs typeface="+mn-lt"/>
+              </a:defRPr>
+            </a:lvl1pPr>
+            <a:lvl2pPr marL="533400" indent="-228600" algn="l">
+              <a:lnSpc>
+                <a:spcPct val="110000"/>
+              </a:lnSpc>
+              <a:spcBef>
+                <a:spcPts val="0"/>
+              </a:spcBef>
+              <a:spcAft>
+                <a:spcPts val="1200"/>
+              </a:spcAft>
+              <a:buChar char="•"/>
+              <a:defRPr sz="2100" b="0">
+                <a:solidFill>
+                  <a:schemeClr val="tx1"/>
+                </a:solidFill>
+                <a:latin typeface="+mn-lt"/>
+                <a:ea typeface="+mn-lt"/>
+                <a:cs typeface="+mn-lt"/>
+              </a:defRPr>
+            </a:lvl2pPr>
+            <a:lvl3pPr marL="838200" indent="-228600" algn="l">
+              <a:lnSpc>
+                <a:spcPct val="110000"/>
+              </a:lnSpc>
+              <a:spcBef>
+                <a:spcPts val="0"/>
+              </a:spcBef>
+              <a:spcAft>
+                <a:spcPts val="1200"/>
+              </a:spcAft>
+              <a:buChar char="•"/>
+              <a:defRPr sz="2100" b="0">
+                <a:solidFill>
+                  <a:schemeClr val="tx1"/>
+                </a:solidFill>
+                <a:latin typeface="+mn-lt"/>
+                <a:ea typeface="+mn-lt"/>
+                <a:cs typeface="+mn-lt"/>
+              </a:defRPr>
+            </a:lvl3pPr>
+            <a:lvl4pPr marL="1143000" indent="-228600" algn="l">
+              <a:lnSpc>
+                <a:spcPct val="110000"/>
+              </a:lnSpc>
+              <a:spcBef>
+                <a:spcPts val="0"/>
+              </a:spcBef>
+              <a:spcAft>
+                <a:spcPts val="1200"/>
+              </a:spcAft>
+              <a:buChar char="•"/>
+              <a:defRPr sz="2100" b="0">
+                <a:solidFill>
+                  <a:schemeClr val="tx1"/>
+                </a:solidFill>
+                <a:latin typeface="+mn-lt"/>
+                <a:ea typeface="+mn-lt"/>
+                <a:cs typeface="+mn-lt"/>
+              </a:defRPr>
+            </a:lvl4pPr>
+            <a:lvl5pPr marL="1447800" indent="-228600" algn="l">
+              <a:lnSpc>
+                <a:spcPct val="110000"/>
+              </a:lnSpc>
+              <a:spcBef>
+                <a:spcPts val="0"/>
+              </a:spcBef>
+              <a:spcAft>
+                <a:spcPts val="1200"/>
+              </a:spcAft>
+              <a:buChar char="•"/>
+              <a:defRPr sz="2100" b="0">
+                <a:solidFill>
+                  <a:schemeClr val="tx1"/>
+                </a:solidFill>
+                <a:latin typeface="+mn-lt"/>
+                <a:ea typeface="+mn-lt"/>
+                <a:cs typeface="+mn-lt"/>
+              </a:defRPr>
+            </a:lvl5pPr>
+            <a:lvl6pPr marL="1752600" indent="-228600" algn="l">
+              <a:lnSpc>
+                <a:spcPct val="110000"/>
+              </a:lnSpc>
+              <a:spcBef>
+                <a:spcPts val="0"/>
+              </a:spcBef>
+              <a:spcAft>
+                <a:spcPts val="1200"/>
+              </a:spcAft>
+              <a:buChar char="•"/>
+              <a:defRPr sz="2100" b="0">
+                <a:solidFill>
+                  <a:schemeClr val="tx1"/>
+                </a:solidFill>
+                <a:latin typeface="+mn-lt"/>
+                <a:ea typeface="+mn-lt"/>
+                <a:cs typeface="+mn-lt"/>
+              </a:defRPr>
+            </a:lvl6pPr>
+            <a:lvl7pPr marL="2057400" indent="-228600" algn="l">
+              <a:lnSpc>
+                <a:spcPct val="110000"/>
+              </a:lnSpc>
+              <a:spcBef>
+                <a:spcPts val="0"/>
+              </a:spcBef>
+              <a:spcAft>
+                <a:spcPts val="1200"/>
+              </a:spcAft>
+              <a:buChar char="•"/>
+              <a:defRPr sz="2100" b="0">
+                <a:solidFill>
+                  <a:schemeClr val="tx1"/>
+                </a:solidFill>
+                <a:latin typeface="+mn-lt"/>
+                <a:ea typeface="+mn-lt"/>
+                <a:cs typeface="+mn-lt"/>
+              </a:defRPr>
+            </a:lvl7pPr>
+            <a:lvl8pPr marL="2362200" indent="-228600" algn="l">
+              <a:lnSpc>
+                <a:spcPct val="110000"/>
+              </a:lnSpc>
+              <a:spcBef>
+                <a:spcPts val="0"/>
+              </a:spcBef>
+              <a:spcAft>
+                <a:spcPts val="1200"/>
+              </a:spcAft>
+              <a:buChar char="•"/>
+              <a:defRPr sz="2100" b="0">
+                <a:solidFill>
+                  <a:schemeClr val="tx1"/>
+                </a:solidFill>
+                <a:latin typeface="+mn-lt"/>
+                <a:ea typeface="+mn-lt"/>
+                <a:cs typeface="+mn-lt"/>
+              </a:defRPr>
+            </a:lvl8pPr>
+            <a:lvl9pPr marL="2667000" indent="-228600" algn="l">
+              <a:lnSpc>
+                <a:spcPct val="110000"/>
+              </a:lnSpc>
+              <a:spcBef>
+                <a:spcPts val="0"/>
+              </a:spcBef>
+              <a:spcAft>
+                <a:spcPts val="1200"/>
+              </a:spcAft>
+              <a:buChar char="•"/>
+              <a:defRPr sz="2100" b="0">
+                <a:solidFill>
+                  <a:schemeClr val="tx1"/>
+                </a:solidFill>
+                <a:latin typeface="+mn-lt"/>
+                <a:ea typeface="+mn-lt"/>
+                <a:cs typeface="+mn-lt"/>
+              </a:defRPr>
+            </a:lvl9pPr>
+          </a:lstStyle>
+          <a:p xmlns:a="http://schemas.openxmlformats.org/drawingml/2006/main"/>
+        </p:txBody>
+      </p:sp>
+      <p:sp>
+        <p:nvSpPr>
+          <p:cNvPr id="3" name="Right column">
+            <a:extLst xmlns:a="http://schemas.openxmlformats.org/drawingml/2006/main">
+              <a:ext uri="{FF2B5EF4-FFF2-40B4-BE49-F238E27FC236}">
+                <a16:creationId xmlns:a16="http://schemas.microsoft.com/office/drawing/2014/main" id="{6C57513F-60A0-417E-8A45-128A25C8C57A}"/>
+              </a:ext>
+            </a:extLst>
+          </p:cNvPr>
+          <p:cNvSpPr>
+            <a:spLocks xmlns:a="http://schemas.openxmlformats.org/drawingml/2006/main" noGrp="1"/>
+          </p:cNvSpPr>
+          <p:nvPr>
+            <p:ph type="body" idx="2"/>
+          </p:nvPr>
+        </p:nvSpPr>
+        <p:spPr>
+          <a:xfrm xmlns:a="http://schemas.openxmlformats.org/drawingml/2006/main">
+            <a:off x="6477000" y="1905000"/>
+            <a:ext cx="5029200" cy="4267200"/>
+          </a:xfrm>
+          <a:prstGeom xmlns:a="http://schemas.openxmlformats.org/drawingml/2006/main" prst="rect">
+            <a:avLst/>
+          </a:prstGeom>
+          <a:noFill xmlns:a="http://schemas.openxmlformats.org/drawingml/2006/main"/>
+          <a:ln xmlns:a="http://schemas.openxmlformats.org/drawingml/2006/main">
+            <a:noFill/>
+            <a:prstDash val="solid"/>
+          </a:ln>
+        </p:spPr>
+        <p:txBody>
+          <a:bodyPr xmlns:a="http://schemas.openxmlformats.org/drawingml/2006/main" wrap="square" lIns="0" tIns="0" rIns="0" bIns="0" anchor="t">
+            <a:normAutofit/>
+          </a:bodyPr>
+          <a:lstStyle xmlns:a="http://schemas.openxmlformats.org/drawingml/2006/main">
+            <a:defPPr algn="l">
+              <a:defRPr sz="2100" b="0">
+                <a:solidFill>
+                  <a:schemeClr val="tx1"/>
+                </a:solidFill>
+                <a:latin typeface="+mn-lt"/>
+                <a:ea typeface="+mn-lt"/>
+                <a:cs typeface="+mn-lt"/>
+              </a:defRPr>
+            </a:defPPr>
+            <a:lvl1pPr marL="228600" indent="-228600" algn="l">
+              <a:lnSpc>
+                <a:spcPct val="110000"/>
+              </a:lnSpc>
+              <a:spcBef>
+                <a:spcPts val="0"/>
+              </a:spcBef>
+              <a:spcAft>
+                <a:spcPts val="1200"/>
+              </a:spcAft>
+              <a:buChar char="•"/>
+              <a:defRPr sz="2100" b="0">
+                <a:solidFill>
+                  <a:schemeClr val="tx1"/>
+                </a:solidFill>
+                <a:latin typeface="+mn-lt"/>
+                <a:ea typeface="+mn-lt"/>
+                <a:cs typeface="+mn-lt"/>
+              </a:defRPr>
+            </a:lvl1pPr>
+            <a:lvl2pPr marL="533400" indent="-228600" algn="l">
+              <a:lnSpc>
+                <a:spcPct val="110000"/>
+              </a:lnSpc>
+              <a:spcBef>
+                <a:spcPts val="0"/>
+              </a:spcBef>
+              <a:spcAft>
+                <a:spcPts val="1200"/>
+              </a:spcAft>
+              <a:buChar char="•"/>
+              <a:defRPr sz="2100" b="0">
+                <a:solidFill>
+                  <a:schemeClr val="tx1"/>
+                </a:solidFill>
+                <a:latin typeface="+mn-lt"/>
+                <a:ea typeface="+mn-lt"/>
+                <a:cs typeface="+mn-lt"/>
+              </a:defRPr>
+            </a:lvl2pPr>
+            <a:lvl3pPr marL="838200" indent="-228600" algn="l">
+              <a:lnSpc>
+                <a:spcPct val="110000"/>
+              </a:lnSpc>
+              <a:spcBef>
+                <a:spcPts val="0"/>
+              </a:spcBef>
+              <a:spcAft>
+                <a:spcPts val="1200"/>
+              </a:spcAft>
+              <a:buChar char="•"/>
+              <a:defRPr sz="2100" b="0">
+                <a:solidFill>
+                  <a:schemeClr val="tx1"/>
+                </a:solidFill>
+                <a:latin typeface="+mn-lt"/>
+                <a:ea typeface="+mn-lt"/>
+                <a:cs typeface="+mn-lt"/>
+              </a:defRPr>
+            </a:lvl3pPr>
+            <a:lvl4pPr marL="1143000" indent="-228600" algn="l">
+              <a:lnSpc>
+                <a:spcPct val="110000"/>
+              </a:lnSpc>
+              <a:spcBef>
+                <a:spcPts val="0"/>
+              </a:spcBef>
+              <a:spcAft>
+                <a:spcPts val="1200"/>
+              </a:spcAft>
+              <a:buChar char="•"/>
+              <a:defRPr sz="2100" b="0">
+                <a:solidFill>
+                  <a:schemeClr val="tx1"/>
+                </a:solidFill>
+                <a:latin typeface="+mn-lt"/>
+                <a:ea typeface="+mn-lt"/>
+                <a:cs typeface="+mn-lt"/>
+              </a:defRPr>
+            </a:lvl4pPr>
+            <a:lvl5pPr marL="1447800" indent="-228600" algn="l">
+              <a:lnSpc>
+                <a:spcPct val="110000"/>
+              </a:lnSpc>
+              <a:spcBef>
+                <a:spcPts val="0"/>
+              </a:spcBef>
+              <a:spcAft>
+                <a:spcPts val="1200"/>
+              </a:spcAft>
+              <a:buChar char="•"/>
+              <a:defRPr sz="2100" b="0">
+                <a:solidFill>
+                  <a:schemeClr val="tx1"/>
+                </a:solidFill>
+                <a:latin typeface="+mn-lt"/>
+                <a:ea typeface="+mn-lt"/>
+                <a:cs typeface="+mn-lt"/>
+              </a:defRPr>
+            </a:lvl5pPr>
+            <a:lvl6pPr marL="1752600" indent="-228600" algn="l">
+              <a:lnSpc>
+                <a:spcPct val="110000"/>
+              </a:lnSpc>
+              <a:spcBef>
+                <a:spcPts val="0"/>
+              </a:spcBef>
+              <a:spcAft>
+                <a:spcPts val="1200"/>
+              </a:spcAft>
+              <a:buChar char="•"/>
+              <a:defRPr sz="2100" b="0">
+                <a:solidFill>
+                  <a:schemeClr val="tx1"/>
+                </a:solidFill>
+                <a:latin typeface="+mn-lt"/>
+                <a:ea typeface="+mn-lt"/>
+                <a:cs typeface="+mn-lt"/>
+              </a:defRPr>
+            </a:lvl6pPr>
+            <a:lvl7pPr marL="2057400" indent="-228600" algn="l">
+              <a:lnSpc>
+                <a:spcPct val="110000"/>
+              </a:lnSpc>
+              <a:spcBef>
+                <a:spcPts val="0"/>
+              </a:spcBef>
+              <a:spcAft>
+                <a:spcPts val="1200"/>
+              </a:spcAft>
+              <a:buChar char="•"/>
+              <a:defRPr sz="2100" b="0">
+                <a:solidFill>
+                  <a:schemeClr val="tx1"/>
+                </a:solidFill>
+                <a:latin typeface="+mn-lt"/>
+                <a:ea typeface="+mn-lt"/>
+                <a:cs typeface="+mn-lt"/>
+              </a:defRPr>
+            </a:lvl7pPr>
+            <a:lvl8pPr marL="2362200" indent="-228600" algn="l">
+              <a:lnSpc>
+                <a:spcPct val="110000"/>
+              </a:lnSpc>
+              <a:spcBef>
+                <a:spcPts val="0"/>
+              </a:spcBef>
+              <a:spcAft>
+                <a:spcPts val="1200"/>
+              </a:spcAft>
+              <a:buChar char="•"/>
+              <a:defRPr sz="2100" b="0">
+                <a:solidFill>
+                  <a:schemeClr val="tx1"/>
+                </a:solidFill>
+                <a:latin typeface="+mn-lt"/>
+                <a:ea typeface="+mn-lt"/>
+                <a:cs typeface="+mn-lt"/>
+              </a:defRPr>
+            </a:lvl8pPr>
+            <a:lvl9pPr marL="2667000" indent="-228600" algn="l">
+              <a:lnSpc>
+                <a:spcPct val="110000"/>
+              </a:lnSpc>
+              <a:spcBef>
+                <a:spcPts val="0"/>
+              </a:spcBef>
+              <a:spcAft>
+                <a:spcPts val="1200"/>
+              </a:spcAft>
+              <a:buChar char="•"/>
+              <a:defRPr sz="2100" b="0">
+                <a:solidFill>
+                  <a:schemeClr val="tx1"/>
+                </a:solidFill>
+                <a:latin typeface="+mn-lt"/>
+                <a:ea typeface="+mn-lt"/>
+                <a:cs typeface="+mn-lt"/>
+              </a:defRPr>
+            </a:lvl9pPr>
+          </a:lstStyle>
+          <a:p xmlns:a="http://schemas.openxmlformats.org/drawingml/2006/main"/>
+        </p:txBody>
+      </p:sp>
+    </p:spTree>
+  </p:cSld>
+</p:sldLayout>
+</file>
+
+<file path=ppt/slideLayouts/slideLayout5.xml><?xml version="1.0" encoding="utf-8"?>
+<p:sldLayout xmlns:p="http://schemas.openxmlformats.org/presentationml/2006/main">
+  <p:cSld name="Title and One Column">
+    <p:spTree>
+      <p:nvGrpSpPr>
+        <p:cNvPr id="1" name=""/>
+        <p:cNvGrpSpPr/>
+        <p:nvPr/>
+      </p:nvGrpSpPr>
+      <p:grpSpPr>
+        <a:xfrm xmlns:a="http://schemas.openxmlformats.org/drawingml/2006/main"/>
+      </p:grpSpPr>
+      <p:sp>
+        <p:nvSpPr>
+          <p:cNvPr id="3" name="Title">
+            <a:extLst xmlns:a="http://schemas.openxmlformats.org/drawingml/2006/main">
+              <a:ext uri="{FF2B5EF4-FFF2-40B4-BE49-F238E27FC236}">
+                <a16:creationId xmlns:a16="http://schemas.microsoft.com/office/drawing/2014/main" id="{0240BFEF-852C-401E-97E5-3174E238DF2D}"/>
+              </a:ext>
+            </a:extLst>
+          </p:cNvPr>
+          <p:cNvSpPr>
+            <a:spLocks xmlns:a="http://schemas.openxmlformats.org/drawingml/2006/main" noGrp="1"/>
+          </p:cNvSpPr>
+          <p:nvPr>
+            <p:ph type="title" idx="0"/>
+          </p:nvPr>
+        </p:nvSpPr>
+        <p:spPr>
+          <a:xfrm xmlns:a="http://schemas.openxmlformats.org/drawingml/2006/main">
+            <a:off x="685800" y="533400"/>
+            <a:ext cx="10820400" cy="838200"/>
+          </a:xfrm>
+          <a:prstGeom xmlns:a="http://schemas.openxmlformats.org/drawingml/2006/main" prst="rect">
+            <a:avLst/>
+          </a:prstGeom>
+          <a:noFill xmlns:a="http://schemas.openxmlformats.org/drawingml/2006/main"/>
+          <a:ln xmlns:a="http://schemas.openxmlformats.org/drawingml/2006/main">
+            <a:noFill/>
+            <a:prstDash val="solid"/>
+          </a:ln>
+        </p:spPr>
+        <p:txBody>
+          <a:bodyPr xmlns:a="http://schemas.openxmlformats.org/drawingml/2006/main" wrap="square" lIns="0" tIns="0" rIns="0" bIns="0" anchor="t">
+            <a:normAutofit/>
+          </a:bodyPr>
+          <a:lstStyle xmlns:a="http://schemas.openxmlformats.org/drawingml/2006/main">
+            <a:defPPr algn="l">
+              <a:defRPr sz="3300" b="1">
+                <a:solidFill>
+                  <a:schemeClr val="tx1"/>
+                </a:solidFill>
+                <a:latin typeface="+mj-lt"/>
+                <a:ea typeface="+mj-lt"/>
+                <a:cs typeface="+mj-lt"/>
+              </a:defRPr>
+            </a:defPPr>
+            <a:lvl1pPr marL="0" indent="0" algn="l">
+              <a:lnSpc>
+                <a:spcPct val="110000"/>
+              </a:lnSpc>
+              <a:spcBef>
+                <a:spcPts val="0"/>
+              </a:spcBef>
+              <a:spcAft>
+                <a:spcPts val="0"/>
+              </a:spcAft>
+              <a:buNone/>
+              <a:defRPr sz="3300" b="1">
+                <a:solidFill>
+                  <a:schemeClr val="tx1"/>
+                </a:solidFill>
+                <a:latin typeface="+mj-lt"/>
+                <a:ea typeface="+mj-lt"/>
+                <a:cs typeface="+mj-lt"/>
+              </a:defRPr>
+            </a:lvl1pPr>
+            <a:lvl2pPr marL="0" indent="0" algn="l">
+              <a:lnSpc>
+                <a:spcPct val="110000"/>
+              </a:lnSpc>
+              <a:spcBef>
+                <a:spcPts val="0"/>
+              </a:spcBef>
+              <a:spcAft>
+                <a:spcPts val="0"/>
+              </a:spcAft>
+              <a:buNone/>
+              <a:defRPr sz="3300" b="1">
+                <a:solidFill>
+                  <a:schemeClr val="tx1"/>
+                </a:solidFill>
+                <a:latin typeface="+mj-lt"/>
+                <a:ea typeface="+mj-lt"/>
+                <a:cs typeface="+mj-lt"/>
+              </a:defRPr>
+            </a:lvl2pPr>
+            <a:lvl3pPr marL="0" indent="0" algn="l">
+              <a:lnSpc>
+                <a:spcPct val="110000"/>
+              </a:lnSpc>
+              <a:spcBef>
+                <a:spcPts val="0"/>
+              </a:spcBef>
+              <a:spcAft>
+                <a:spcPts val="0"/>
+              </a:spcAft>
+              <a:buNone/>
+              <a:defRPr sz="3300" b="1">
+                <a:solidFill>
+                  <a:schemeClr val="tx1"/>
+                </a:solidFill>
+                <a:latin typeface="+mj-lt"/>
+                <a:ea typeface="+mj-lt"/>
+                <a:cs typeface="+mj-lt"/>
+              </a:defRPr>
+            </a:lvl3pPr>
+            <a:lvl4pPr marL="0" indent="0" algn="l">
+              <a:lnSpc>
+                <a:spcPct val="110000"/>
+              </a:lnSpc>
+              <a:spcBef>
+                <a:spcPts val="0"/>
+              </a:spcBef>
+              <a:spcAft>
+                <a:spcPts val="0"/>
+              </a:spcAft>
+              <a:buNone/>
+              <a:defRPr sz="3300" b="1">
+                <a:solidFill>
+                  <a:schemeClr val="tx1"/>
+                </a:solidFill>
+                <a:latin typeface="+mj-lt"/>
+                <a:ea typeface="+mj-lt"/>
+                <a:cs typeface="+mj-lt"/>
+              </a:defRPr>
+            </a:lvl4pPr>
+            <a:lvl5pPr marL="0" indent="0" algn="l">
+              <a:lnSpc>
+                <a:spcPct val="110000"/>
+              </a:lnSpc>
+              <a:spcBef>
+                <a:spcPts val="0"/>
+              </a:spcBef>
+              <a:spcAft>
+                <a:spcPts val="0"/>
+              </a:spcAft>
+              <a:buNone/>
+              <a:defRPr sz="3300" b="1">
+                <a:solidFill>
+                  <a:schemeClr val="tx1"/>
+                </a:solidFill>
+                <a:latin typeface="+mj-lt"/>
+                <a:ea typeface="+mj-lt"/>
+                <a:cs typeface="+mj-lt"/>
+              </a:defRPr>
+            </a:lvl5pPr>
+            <a:lvl6pPr marL="0" indent="0" algn="l">
+              <a:lnSpc>
+                <a:spcPct val="110000"/>
+              </a:lnSpc>
+              <a:spcBef>
+                <a:spcPts val="0"/>
+              </a:spcBef>
+              <a:spcAft>
+                <a:spcPts val="0"/>
+              </a:spcAft>
+              <a:buNone/>
+              <a:defRPr sz="3300" b="1">
+                <a:solidFill>
+                  <a:schemeClr val="tx1"/>
+                </a:solidFill>
+                <a:latin typeface="+mj-lt"/>
+                <a:ea typeface="+mj-lt"/>
+                <a:cs typeface="+mj-lt"/>
+              </a:defRPr>
+            </a:lvl6pPr>
+            <a:lvl7pPr marL="0" indent="0" algn="l">
+              <a:lnSpc>
+                <a:spcPct val="110000"/>
+              </a:lnSpc>
+              <a:spcBef>
+                <a:spcPts val="0"/>
+              </a:spcBef>
+              <a:spcAft>
+                <a:spcPts val="0"/>
+              </a:spcAft>
+              <a:buNone/>
+              <a:defRPr sz="3300" b="1">
+                <a:solidFill>
+                  <a:schemeClr val="tx1"/>
+                </a:solidFill>
+                <a:latin typeface="+mj-lt"/>
+                <a:ea typeface="+mj-lt"/>
+                <a:cs typeface="+mj-lt"/>
+              </a:defRPr>
+            </a:lvl7pPr>
+            <a:lvl8pPr marL="0" indent="0" algn="l">
+              <a:lnSpc>
+                <a:spcPct val="110000"/>
+              </a:lnSpc>
+              <a:spcBef>
+                <a:spcPts val="0"/>
+              </a:spcBef>
+              <a:spcAft>
+                <a:spcPts val="0"/>
+              </a:spcAft>
+              <a:buNone/>
+              <a:defRPr sz="3300" b="1">
+                <a:solidFill>
+                  <a:schemeClr val="tx1"/>
+                </a:solidFill>
+                <a:latin typeface="+mj-lt"/>
+                <a:ea typeface="+mj-lt"/>
+                <a:cs typeface="+mj-lt"/>
+              </a:defRPr>
+            </a:lvl8pPr>
+            <a:lvl9pPr marL="0" indent="0" algn="l">
+              <a:lnSpc>
+                <a:spcPct val="110000"/>
+              </a:lnSpc>
+              <a:spcBef>
+                <a:spcPts val="0"/>
+              </a:spcBef>
+              <a:spcAft>
+                <a:spcPts val="0"/>
+              </a:spcAft>
+              <a:buNone/>
+              <a:defRPr sz="3300" b="1">
+                <a:solidFill>
+                  <a:schemeClr val="tx1"/>
+                </a:solidFill>
+                <a:latin typeface="+mj-lt"/>
+                <a:ea typeface="+mj-lt"/>
+                <a:cs typeface="+mj-lt"/>
+              </a:defRPr>
+            </a:lvl9pPr>
+          </a:lstStyle>
+          <a:p xmlns:a="http://schemas.openxmlformats.org/drawingml/2006/main"/>
+        </p:txBody>
+      </p:sp>
+      <p:sp>
+        <p:nvSpPr>
+          <p:cNvPr id="2" name="Left column">
+            <a:extLst xmlns:a="http://schemas.openxmlformats.org/drawingml/2006/main">
+              <a:ext uri="{FF2B5EF4-FFF2-40B4-BE49-F238E27FC236}">
+                <a16:creationId xmlns:a16="http://schemas.microsoft.com/office/drawing/2014/main" id="{57277D9C-3D75-4EBF-A283-137A61B35720}"/>
+              </a:ext>
+            </a:extLst>
+          </p:cNvPr>
+          <p:cNvSpPr>
+            <a:spLocks xmlns:a="http://schemas.openxmlformats.org/drawingml/2006/main" noGrp="1"/>
+          </p:cNvSpPr>
+          <p:nvPr>
+            <p:ph type="body" idx="1"/>
+          </p:nvPr>
+        </p:nvSpPr>
+        <p:spPr>
+          <a:xfrm xmlns:a="http://schemas.openxmlformats.org/drawingml/2006/main">
+            <a:off x="685800" y="1905000"/>
+            <a:ext cx="5029200" cy="4267200"/>
+          </a:xfrm>
+          <a:prstGeom xmlns:a="http://schemas.openxmlformats.org/drawingml/2006/main" prst="rect">
+            <a:avLst/>
+          </a:prstGeom>
+          <a:noFill xmlns:a="http://schemas.openxmlformats.org/drawingml/2006/main"/>
+          <a:ln xmlns:a="http://schemas.openxmlformats.org/drawingml/2006/main">
+            <a:noFill/>
+            <a:prstDash val="solid"/>
+          </a:ln>
+        </p:spPr>
+        <p:txBody>
+          <a:bodyPr xmlns:a="http://schemas.openxmlformats.org/drawingml/2006/main" wrap="square" lIns="0" tIns="0" rIns="0" bIns="0" anchor="t">
+            <a:normAutofit/>
+          </a:bodyPr>
+          <a:lstStyle xmlns:a="http://schemas.openxmlformats.org/drawingml/2006/main">
+            <a:defPPr algn="l">
+              <a:defRPr sz="2250" b="0">
+                <a:solidFill>
+                  <a:schemeClr val="tx1"/>
+                </a:solidFill>
+                <a:latin typeface="+mn-lt"/>
+                <a:ea typeface="+mn-lt"/>
+                <a:cs typeface="+mn-lt"/>
+              </a:defRPr>
+            </a:defPPr>
+            <a:lvl1pPr marL="228600" indent="-228600" algn="l">
+              <a:lnSpc>
+                <a:spcPct val="110000"/>
+              </a:lnSpc>
+              <a:spcBef>
+                <a:spcPts val="0"/>
+              </a:spcBef>
+              <a:spcAft>
+                <a:spcPts val="1200"/>
+              </a:spcAft>
+              <a:buChar char="•"/>
+              <a:defRPr sz="2250" b="0">
+                <a:solidFill>
+                  <a:schemeClr val="tx1"/>
+                </a:solidFill>
+                <a:latin typeface="+mn-lt"/>
+                <a:ea typeface="+mn-lt"/>
+                <a:cs typeface="+mn-lt"/>
+              </a:defRPr>
+            </a:lvl1pPr>
+            <a:lvl2pPr marL="533400" indent="-228600" algn="l">
+              <a:lnSpc>
+                <a:spcPct val="110000"/>
+              </a:lnSpc>
+              <a:spcBef>
+                <a:spcPts val="0"/>
+              </a:spcBef>
+              <a:spcAft>
+                <a:spcPts val="1200"/>
+              </a:spcAft>
+              <a:buChar char="•"/>
+              <a:defRPr sz="2250" b="0">
+                <a:solidFill>
+                  <a:schemeClr val="tx1"/>
+                </a:solidFill>
+                <a:latin typeface="+mn-lt"/>
+                <a:ea typeface="+mn-lt"/>
+                <a:cs typeface="+mn-lt"/>
+              </a:defRPr>
+            </a:lvl2pPr>
+            <a:lvl3pPr marL="838200" indent="-228600" algn="l">
+              <a:lnSpc>
+                <a:spcPct val="110000"/>
+              </a:lnSpc>
+              <a:spcBef>
+                <a:spcPts val="0"/>
+              </a:spcBef>
+              <a:spcAft>
+                <a:spcPts val="1200"/>
+              </a:spcAft>
+              <a:buChar char="•"/>
+              <a:defRPr sz="2250" b="0">
+                <a:solidFill>
+                  <a:schemeClr val="tx1"/>
+                </a:solidFill>
+                <a:latin typeface="+mn-lt"/>
+                <a:ea typeface="+mn-lt"/>
+                <a:cs typeface="+mn-lt"/>
+              </a:defRPr>
+            </a:lvl3pPr>
+            <a:lvl4pPr marL="1143000" indent="-228600" algn="l">
+              <a:lnSpc>
+                <a:spcPct val="110000"/>
+              </a:lnSpc>
+              <a:spcBef>
+                <a:spcPts val="0"/>
+              </a:spcBef>
+              <a:spcAft>
+                <a:spcPts val="1200"/>
+              </a:spcAft>
+              <a:buChar char="•"/>
+              <a:defRPr sz="2250" b="0">
+                <a:solidFill>
+                  <a:schemeClr val="tx1"/>
+                </a:solidFill>
+                <a:latin typeface="+mn-lt"/>
+                <a:ea typeface="+mn-lt"/>
+                <a:cs typeface="+mn-lt"/>
+              </a:defRPr>
+            </a:lvl4pPr>
+            <a:lvl5pPr marL="1447800" indent="-228600" algn="l">
+              <a:lnSpc>
+                <a:spcPct val="110000"/>
+              </a:lnSpc>
+              <a:spcBef>
+                <a:spcPts val="0"/>
+              </a:spcBef>
+              <a:spcAft>
+                <a:spcPts val="1200"/>
+              </a:spcAft>
+              <a:buChar char="•"/>
+              <a:defRPr sz="2250" b="0">
+                <a:solidFill>
+                  <a:schemeClr val="tx1"/>
+                </a:solidFill>
+                <a:latin typeface="+mn-lt"/>
+                <a:ea typeface="+mn-lt"/>
+                <a:cs typeface="+mn-lt"/>
+              </a:defRPr>
+            </a:lvl5pPr>
+            <a:lvl6pPr marL="1752600" indent="-228600" algn="l">
+              <a:lnSpc>
+                <a:spcPct val="110000"/>
+              </a:lnSpc>
+              <a:spcBef>
+                <a:spcPts val="0"/>
+              </a:spcBef>
+              <a:spcAft>
+                <a:spcPts val="1200"/>
+              </a:spcAft>
+              <a:buChar char="•"/>
+              <a:defRPr sz="2250" b="0">
+                <a:solidFill>
+                  <a:schemeClr val="tx1"/>
+                </a:solidFill>
+                <a:latin typeface="+mn-lt"/>
+                <a:ea typeface="+mn-lt"/>
+                <a:cs typeface="+mn-lt"/>
+              </a:defRPr>
+            </a:lvl6pPr>
+            <a:lvl7pPr marL="2057400" indent="-228600" algn="l">
+              <a:lnSpc>
+                <a:spcPct val="110000"/>
+              </a:lnSpc>
+              <a:spcBef>
+                <a:spcPts val="0"/>
+              </a:spcBef>
+              <a:spcAft>
+                <a:spcPts val="1200"/>
+              </a:spcAft>
+              <a:buChar char="•"/>
+              <a:defRPr sz="2250" b="0">
+                <a:solidFill>
+                  <a:schemeClr val="tx1"/>
+                </a:solidFill>
+                <a:latin typeface="+mn-lt"/>
+                <a:ea typeface="+mn-lt"/>
+                <a:cs typeface="+mn-lt"/>
+              </a:defRPr>
+            </a:lvl7pPr>
+            <a:lvl8pPr marL="2362200" indent="-228600" algn="l">
+              <a:lnSpc>
+                <a:spcPct val="110000"/>
+              </a:lnSpc>
+              <a:spcBef>
+                <a:spcPts val="0"/>
+              </a:spcBef>
+              <a:spcAft>
+                <a:spcPts val="1200"/>
+              </a:spcAft>
+              <a:buChar char="•"/>
+              <a:defRPr sz="2250" b="0">
+                <a:solidFill>
+                  <a:schemeClr val="tx1"/>
+                </a:solidFill>
+                <a:latin typeface="+mn-lt"/>
+                <a:ea typeface="+mn-lt"/>
+                <a:cs typeface="+mn-lt"/>
+              </a:defRPr>
+            </a:lvl8pPr>
+            <a:lvl9pPr marL="2667000" indent="-228600" algn="l">
+              <a:lnSpc>
+                <a:spcPct val="110000"/>
+              </a:lnSpc>
+              <a:spcBef>
+                <a:spcPts val="0"/>
+              </a:spcBef>
+              <a:spcAft>
+                <a:spcPts val="1200"/>
+              </a:spcAft>
+              <a:buChar char="•"/>
+              <a:defRPr sz="2250" b="0">
+                <a:solidFill>
+                  <a:schemeClr val="tx1"/>
+                </a:solidFill>
+                <a:latin typeface="+mn-lt"/>
+                <a:ea typeface="+mn-lt"/>
+                <a:cs typeface="+mn-lt"/>
+              </a:defRPr>
+            </a:lvl9pPr>
+          </a:lstStyle>
+          <a:p xmlns:a="http://schemas.openxmlformats.org/drawingml/2006/main"/>
+        </p:txBody>
+      </p:sp>
+    </p:spTree>
+  </p:cSld>
+</p:sldLayout>
+</file>
+
+<file path=ppt/slideLayouts/slideLayout6.xml><?xml version="1.0" encoding="utf-8"?>
+<p:sldLayout xmlns:p="http://schemas.openxmlformats.org/presentationml/2006/main" type="blank">
+  <p:cSld name="Blank">
     <p:spTree>
       <p:nvGrpSpPr>
         <p:cNvPr id="1" name=""/>
@@ -8077,7 +6526,12 @@
   </p:cSld>
   <p:clrMap bg1="lt1" tx1="dk1" bg2="lt2" tx2="dk2" accent1="accent1" accent2="accent2" accent3="accent3" accent4="accent4" accent5="accent5" accent6="accent6" hlink="hlink" folHlink="folHlink"/>
   <p:sldLayoutIdLst>
-    <p:sldLayoutId xmlns:r="http://schemas.openxmlformats.org/officeDocument/2006/relationships" id="2147483649" r:id="Recb8d1db4fb64261"/>
+    <p:sldLayoutId xmlns:r="http://schemas.openxmlformats.org/officeDocument/2006/relationships" id="2147483649" r:id="Rb731846be5d84fed"/>
+    <p:sldLayoutId xmlns:r="http://schemas.openxmlformats.org/officeDocument/2006/relationships" id="2147483650" r:id="R89fd37438aba46ca"/>
+    <p:sldLayoutId xmlns:r="http://schemas.openxmlformats.org/officeDocument/2006/relationships" id="2147483651" r:id="Rd5ad8edf40d14e99"/>
+    <p:sldLayoutId xmlns:r="http://schemas.openxmlformats.org/officeDocument/2006/relationships" id="2147483652" r:id="R56737b3ea403486a"/>
+    <p:sldLayoutId xmlns:r="http://schemas.openxmlformats.org/officeDocument/2006/relationships" id="2147483653" r:id="R28af1f16fd214794"/>
+    <p:sldLayoutId xmlns:r="http://schemas.openxmlformats.org/officeDocument/2006/relationships" id="2147483654" r:id="Rb3eb172a4bc34baa"/>
   </p:sldLayoutIdLst>
   <p:txStyles>
     <p:titleStyle>
@@ -8400,16 +6854,16 @@
         <a:srgbClr val="96607D"/>
       </a:folHlink>
     </a:clrScheme>
-    <a:fontScheme name="Office">
+    <a:fontScheme name="">
       <a:majorFont>
-        <a:latin typeface="Calibri Light"/>
-        <a:ea typeface="Calibri Light"/>
-        <a:cs typeface="Calibri Light"/>
+        <a:latin typeface="Aptos"/>
+        <a:ea typeface=""/>
+        <a:cs typeface=""/>
       </a:majorFont>
       <a:minorFont>
-        <a:latin typeface="Calibri"/>
-        <a:ea typeface="Calibri"/>
-        <a:cs typeface="Calibri"/>
+        <a:latin typeface="Aptos"/>
+        <a:ea typeface=""/>
+        <a:cs typeface=""/>
       </a:minorFont>
     </a:fontScheme>
     <a:fmtScheme name="ChatGPT">
@@ -8618,14 +7072,20 @@
       </p:grpSpPr>
       <p:pic>
         <p:nvPicPr>
-          <p:cNvPr id="2" name=""/>
+          <p:cNvPr id="2" name="">
+            <a:extLst xmlns:a="http://schemas.openxmlformats.org/drawingml/2006/main">
+              <a:ext uri="{FF2B5EF4-FFF2-40B4-BE49-F238E27FC236}">
+                <a16:creationId xmlns:a16="http://schemas.microsoft.com/office/drawing/2014/main" id="{D95C3FF6-E303-4626-817A-EF9445ABAE85}"/>
+              </a:ext>
+            </a:extLst>
+          </p:cNvPr>
           <p:cNvPicPr>
             <a:picLocks xmlns:a="http://schemas.openxmlformats.org/drawingml/2006/main" noChangeAspect="1"/>
           </p:cNvPicPr>
           <p:nvPr/>
         </p:nvPicPr>
         <p:blipFill>
-          <a:blip xmlns:r="http://schemas.openxmlformats.org/officeDocument/2006/relationships" xmlns:a="http://schemas.openxmlformats.org/drawingml/2006/main" r:embed="R7ca2f456f3654f2f"/>
+          <a:blip xmlns:r="http://schemas.openxmlformats.org/officeDocument/2006/relationships" xmlns:a="http://schemas.openxmlformats.org/drawingml/2006/main" r:embed="R0ca5741eaf014a43"/>
           <a:stretch xmlns:a="http://schemas.openxmlformats.org/drawingml/2006/main"/>
         </p:blipFill>
         <p:spPr>
@@ -8641,7 +7101,7 @@
     </p:spTree>
     <p:extLst>
       <p:ext uri="{BB962C8B-B14F-4D97-AF65-F5344CB8AC3E}">
-        <p14:creationId xmlns:p14="http://schemas.microsoft.com/office/powerpoint/2010/main" val="730208630"/>
+        <p14:creationId xmlns:p14="http://schemas.microsoft.com/office/powerpoint/2010/main" val="161742045"/>
       </p:ext>
     </p:extLst>
   </p:cSld>
@@ -8662,14 +7122,20 @@
       </p:grpSpPr>
       <p:pic>
         <p:nvPicPr>
-          <p:cNvPr id="2" name=""/>
+          <p:cNvPr id="2" name="">
+            <a:extLst xmlns:a="http://schemas.openxmlformats.org/drawingml/2006/main">
+              <a:ext uri="{FF2B5EF4-FFF2-40B4-BE49-F238E27FC236}">
+                <a16:creationId xmlns:a16="http://schemas.microsoft.com/office/drawing/2014/main" id="{C46487DA-E983-4D47-BDB7-3C472E1BD201}"/>
+              </a:ext>
+            </a:extLst>
+          </p:cNvPr>
           <p:cNvPicPr>
             <a:picLocks xmlns:a="http://schemas.openxmlformats.org/drawingml/2006/main" noChangeAspect="1"/>
           </p:cNvPicPr>
           <p:nvPr/>
         </p:nvPicPr>
         <p:blipFill>
-          <a:blip xmlns:r="http://schemas.openxmlformats.org/officeDocument/2006/relationships" xmlns:a="http://schemas.openxmlformats.org/drawingml/2006/main" r:embed="Rc6aeaa36afe14ca0"/>
+          <a:blip xmlns:r="http://schemas.openxmlformats.org/officeDocument/2006/relationships" xmlns:a="http://schemas.openxmlformats.org/drawingml/2006/main" r:embed="R25fae956fb0a4493"/>
           <a:stretch xmlns:a="http://schemas.openxmlformats.org/drawingml/2006/main"/>
         </p:blipFill>
         <p:spPr>
@@ -8685,7 +7151,7 @@
     </p:spTree>
     <p:extLst>
       <p:ext uri="{BB962C8B-B14F-4D97-AF65-F5344CB8AC3E}">
-        <p14:creationId xmlns:p14="http://schemas.microsoft.com/office/powerpoint/2010/main" val="1290275323"/>
+        <p14:creationId xmlns:p14="http://schemas.microsoft.com/office/powerpoint/2010/main" val="563916584"/>
       </p:ext>
     </p:extLst>
   </p:cSld>
@@ -8706,14 +7172,20 @@
       </p:grpSpPr>
       <p:pic>
         <p:nvPicPr>
-          <p:cNvPr id="2" name=""/>
+          <p:cNvPr id="2" name="">
+            <a:extLst xmlns:a="http://schemas.openxmlformats.org/drawingml/2006/main">
+              <a:ext uri="{FF2B5EF4-FFF2-40B4-BE49-F238E27FC236}">
+                <a16:creationId xmlns:a16="http://schemas.microsoft.com/office/drawing/2014/main" id="{B6DAE3BF-271F-4581-BB2E-ED615D4D093B}"/>
+              </a:ext>
+            </a:extLst>
+          </p:cNvPr>
           <p:cNvPicPr>
             <a:picLocks xmlns:a="http://schemas.openxmlformats.org/drawingml/2006/main" noChangeAspect="1"/>
           </p:cNvPicPr>
           <p:nvPr/>
         </p:nvPicPr>
         <p:blipFill>
-          <a:blip xmlns:r="http://schemas.openxmlformats.org/officeDocument/2006/relationships" xmlns:a="http://schemas.openxmlformats.org/drawingml/2006/main" r:embed="R3bba21ead0364eae"/>
+          <a:blip xmlns:r="http://schemas.openxmlformats.org/officeDocument/2006/relationships" xmlns:a="http://schemas.openxmlformats.org/drawingml/2006/main" r:embed="R0f349ca14db34717"/>
           <a:stretch xmlns:a="http://schemas.openxmlformats.org/drawingml/2006/main"/>
         </p:blipFill>
         <p:spPr>
@@ -8729,7 +7201,7 @@
     </p:spTree>
     <p:extLst>
       <p:ext uri="{BB962C8B-B14F-4D97-AF65-F5344CB8AC3E}">
-        <p14:creationId xmlns:p14="http://schemas.microsoft.com/office/powerpoint/2010/main" val="1568940190"/>
+        <p14:creationId xmlns:p14="http://schemas.microsoft.com/office/powerpoint/2010/main" val="241663102"/>
       </p:ext>
     </p:extLst>
   </p:cSld>
@@ -8750,14 +7222,20 @@
       </p:grpSpPr>
       <p:pic>
         <p:nvPicPr>
-          <p:cNvPr id="2" name=""/>
+          <p:cNvPr id="2" name="">
+            <a:extLst xmlns:a="http://schemas.openxmlformats.org/drawingml/2006/main">
+              <a:ext uri="{FF2B5EF4-FFF2-40B4-BE49-F238E27FC236}">
+                <a16:creationId xmlns:a16="http://schemas.microsoft.com/office/drawing/2014/main" id="{F3476B65-2824-4CB9-B47E-670204B1D3FA}"/>
+              </a:ext>
+            </a:extLst>
+          </p:cNvPr>
           <p:cNvPicPr>
             <a:picLocks xmlns:a="http://schemas.openxmlformats.org/drawingml/2006/main" noChangeAspect="1"/>
           </p:cNvPicPr>
           <p:nvPr/>
         </p:nvPicPr>
         <p:blipFill>
-          <a:blip xmlns:r="http://schemas.openxmlformats.org/officeDocument/2006/relationships" xmlns:a="http://schemas.openxmlformats.org/drawingml/2006/main" r:embed="R4e5d58706e4f4102"/>
+          <a:blip xmlns:r="http://schemas.openxmlformats.org/officeDocument/2006/relationships" xmlns:a="http://schemas.openxmlformats.org/drawingml/2006/main" r:embed="R4735594d8bf04e0c"/>
           <a:stretch xmlns:a="http://schemas.openxmlformats.org/drawingml/2006/main"/>
         </p:blipFill>
         <p:spPr>
@@ -8773,7 +7251,7 @@
     </p:spTree>
     <p:extLst>
       <p:ext uri="{BB962C8B-B14F-4D97-AF65-F5344CB8AC3E}">
-        <p14:creationId xmlns:p14="http://schemas.microsoft.com/office/powerpoint/2010/main" val="772422270"/>
+        <p14:creationId xmlns:p14="http://schemas.microsoft.com/office/powerpoint/2010/main" val="1318028482"/>
       </p:ext>
     </p:extLst>
   </p:cSld>
@@ -8794,14 +7272,20 @@
       </p:grpSpPr>
       <p:pic>
         <p:nvPicPr>
-          <p:cNvPr id="2" name=""/>
+          <p:cNvPr id="2" name="">
+            <a:extLst xmlns:a="http://schemas.openxmlformats.org/drawingml/2006/main">
+              <a:ext uri="{FF2B5EF4-FFF2-40B4-BE49-F238E27FC236}">
+                <a16:creationId xmlns:a16="http://schemas.microsoft.com/office/drawing/2014/main" id="{18F1C948-7C42-4D4C-9F56-57C5D4365075}"/>
+              </a:ext>
+            </a:extLst>
+          </p:cNvPr>
           <p:cNvPicPr>
             <a:picLocks xmlns:a="http://schemas.openxmlformats.org/drawingml/2006/main" noChangeAspect="1"/>
           </p:cNvPicPr>
           <p:nvPr/>
         </p:nvPicPr>
         <p:blipFill>
-          <a:blip xmlns:r="http://schemas.openxmlformats.org/officeDocument/2006/relationships" xmlns:a="http://schemas.openxmlformats.org/drawingml/2006/main" r:embed="R991496b0b2f94f06"/>
+          <a:blip xmlns:r="http://schemas.openxmlformats.org/officeDocument/2006/relationships" xmlns:a="http://schemas.openxmlformats.org/drawingml/2006/main" r:embed="Ra4cc91e498cf49b3"/>
           <a:stretch xmlns:a="http://schemas.openxmlformats.org/drawingml/2006/main"/>
         </p:blipFill>
         <p:spPr>
@@ -8817,7 +7301,7 @@
     </p:spTree>
     <p:extLst>
       <p:ext uri="{BB962C8B-B14F-4D97-AF65-F5344CB8AC3E}">
-        <p14:creationId xmlns:p14="http://schemas.microsoft.com/office/powerpoint/2010/main" val="1641774883"/>
+        <p14:creationId xmlns:p14="http://schemas.microsoft.com/office/powerpoint/2010/main" val="615098568"/>
       </p:ext>
     </p:extLst>
   </p:cSld>
@@ -8838,14 +7322,20 @@
       </p:grpSpPr>
       <p:pic>
         <p:nvPicPr>
-          <p:cNvPr id="2" name=""/>
+          <p:cNvPr id="2" name="">
+            <a:extLst xmlns:a="http://schemas.openxmlformats.org/drawingml/2006/main">
+              <a:ext uri="{FF2B5EF4-FFF2-40B4-BE49-F238E27FC236}">
+                <a16:creationId xmlns:a16="http://schemas.microsoft.com/office/drawing/2014/main" id="{CC7E0602-F0D5-433D-AFAC-2ABF11CACB2C}"/>
+              </a:ext>
+            </a:extLst>
+          </p:cNvPr>
           <p:cNvPicPr>
             <a:picLocks xmlns:a="http://schemas.openxmlformats.org/drawingml/2006/main" noChangeAspect="1"/>
           </p:cNvPicPr>
           <p:nvPr/>
         </p:nvPicPr>
         <p:blipFill>
-          <a:blip xmlns:r="http://schemas.openxmlformats.org/officeDocument/2006/relationships" xmlns:a="http://schemas.openxmlformats.org/drawingml/2006/main" r:embed="Rd55f50d3b6e04502"/>
+          <a:blip xmlns:r="http://schemas.openxmlformats.org/officeDocument/2006/relationships" xmlns:a="http://schemas.openxmlformats.org/drawingml/2006/main" r:embed="R8fcc6e4a65a740d8"/>
           <a:stretch xmlns:a="http://schemas.openxmlformats.org/drawingml/2006/main"/>
         </p:blipFill>
         <p:spPr>
@@ -8861,7 +7351,7 @@
     </p:spTree>
     <p:extLst>
       <p:ext uri="{BB962C8B-B14F-4D97-AF65-F5344CB8AC3E}">
-        <p14:creationId xmlns:p14="http://schemas.microsoft.com/office/powerpoint/2010/main" val="1718575186"/>
+        <p14:creationId xmlns:p14="http://schemas.microsoft.com/office/powerpoint/2010/main" val="1528002657"/>
       </p:ext>
     </p:extLst>
   </p:cSld>
@@ -8882,14 +7372,20 @@
       </p:grpSpPr>
       <p:pic>
         <p:nvPicPr>
-          <p:cNvPr id="2" name=""/>
+          <p:cNvPr id="2" name="">
+            <a:extLst xmlns:a="http://schemas.openxmlformats.org/drawingml/2006/main">
+              <a:ext uri="{FF2B5EF4-FFF2-40B4-BE49-F238E27FC236}">
+                <a16:creationId xmlns:a16="http://schemas.microsoft.com/office/drawing/2014/main" id="{9708FD25-C0C0-4D00-930E-AECA56E36834}"/>
+              </a:ext>
+            </a:extLst>
+          </p:cNvPr>
           <p:cNvPicPr>
             <a:picLocks xmlns:a="http://schemas.openxmlformats.org/drawingml/2006/main" noChangeAspect="1"/>
           </p:cNvPicPr>
           <p:nvPr/>
         </p:nvPicPr>
         <p:blipFill>
-          <a:blip xmlns:r="http://schemas.openxmlformats.org/officeDocument/2006/relationships" xmlns:a="http://schemas.openxmlformats.org/drawingml/2006/main" r:embed="R92f9f2983e8c42da"/>
+          <a:blip xmlns:r="http://schemas.openxmlformats.org/officeDocument/2006/relationships" xmlns:a="http://schemas.openxmlformats.org/drawingml/2006/main" r:embed="R989a3b125d95498c"/>
           <a:stretch xmlns:a="http://schemas.openxmlformats.org/drawingml/2006/main"/>
         </p:blipFill>
         <p:spPr>
@@ -8905,7 +7401,7 @@
     </p:spTree>
     <p:extLst>
       <p:ext uri="{BB962C8B-B14F-4D97-AF65-F5344CB8AC3E}">
-        <p14:creationId xmlns:p14="http://schemas.microsoft.com/office/powerpoint/2010/main" val="685744990"/>
+        <p14:creationId xmlns:p14="http://schemas.microsoft.com/office/powerpoint/2010/main" val="1377683802"/>
       </p:ext>
     </p:extLst>
   </p:cSld>
@@ -8926,14 +7422,20 @@
       </p:grpSpPr>
       <p:pic>
         <p:nvPicPr>
-          <p:cNvPr id="2" name=""/>
+          <p:cNvPr id="2" name="">
+            <a:extLst xmlns:a="http://schemas.openxmlformats.org/drawingml/2006/main">
+              <a:ext uri="{FF2B5EF4-FFF2-40B4-BE49-F238E27FC236}">
+                <a16:creationId xmlns:a16="http://schemas.microsoft.com/office/drawing/2014/main" id="{2302EE8E-F310-41AE-9602-10E6D1519652}"/>
+              </a:ext>
+            </a:extLst>
+          </p:cNvPr>
           <p:cNvPicPr>
             <a:picLocks xmlns:a="http://schemas.openxmlformats.org/drawingml/2006/main" noChangeAspect="1"/>
           </p:cNvPicPr>
           <p:nvPr/>
         </p:nvPicPr>
         <p:blipFill>
-          <a:blip xmlns:r="http://schemas.openxmlformats.org/officeDocument/2006/relationships" xmlns:a="http://schemas.openxmlformats.org/drawingml/2006/main" r:embed="R18d721dcda6c460e"/>
+          <a:blip xmlns:r="http://schemas.openxmlformats.org/officeDocument/2006/relationships" xmlns:a="http://schemas.openxmlformats.org/drawingml/2006/main" r:embed="R604de42d34014c7d"/>
           <a:stretch xmlns:a="http://schemas.openxmlformats.org/drawingml/2006/main"/>
         </p:blipFill>
         <p:spPr>
@@ -8949,7 +7451,7 @@
     </p:spTree>
     <p:extLst>
       <p:ext uri="{BB962C8B-B14F-4D97-AF65-F5344CB8AC3E}">
-        <p14:creationId xmlns:p14="http://schemas.microsoft.com/office/powerpoint/2010/main" val="343734880"/>
+        <p14:creationId xmlns:p14="http://schemas.microsoft.com/office/powerpoint/2010/main" val="2050252709"/>
       </p:ext>
     </p:extLst>
   </p:cSld>
@@ -8970,14 +7472,20 @@
       </p:grpSpPr>
       <p:pic>
         <p:nvPicPr>
-          <p:cNvPr id="2" name=""/>
+          <p:cNvPr id="2" name="">
+            <a:extLst xmlns:a="http://schemas.openxmlformats.org/drawingml/2006/main">
+              <a:ext uri="{FF2B5EF4-FFF2-40B4-BE49-F238E27FC236}">
+                <a16:creationId xmlns:a16="http://schemas.microsoft.com/office/drawing/2014/main" id="{89D6EF7E-32A3-48F3-82D0-28A815F804A2}"/>
+              </a:ext>
+            </a:extLst>
+          </p:cNvPr>
           <p:cNvPicPr>
             <a:picLocks xmlns:a="http://schemas.openxmlformats.org/drawingml/2006/main" noChangeAspect="1"/>
           </p:cNvPicPr>
           <p:nvPr/>
         </p:nvPicPr>
         <p:blipFill>
-          <a:blip xmlns:r="http://schemas.openxmlformats.org/officeDocument/2006/relationships" xmlns:a="http://schemas.openxmlformats.org/drawingml/2006/main" r:embed="R4d67481445904d1c"/>
+          <a:blip xmlns:r="http://schemas.openxmlformats.org/officeDocument/2006/relationships" xmlns:a="http://schemas.openxmlformats.org/drawingml/2006/main" r:embed="R95f043b25b304431"/>
           <a:stretch xmlns:a="http://schemas.openxmlformats.org/drawingml/2006/main"/>
         </p:blipFill>
         <p:spPr>
@@ -8993,7 +7501,7 @@
     </p:spTree>
     <p:extLst>
       <p:ext uri="{BB962C8B-B14F-4D97-AF65-F5344CB8AC3E}">
-        <p14:creationId xmlns:p14="http://schemas.microsoft.com/office/powerpoint/2010/main" val="636703067"/>
+        <p14:creationId xmlns:p14="http://schemas.microsoft.com/office/powerpoint/2010/main" val="1340104102"/>
       </p:ext>
     </p:extLst>
   </p:cSld>
@@ -9014,14 +7522,20 @@
       </p:grpSpPr>
       <p:pic>
         <p:nvPicPr>
-          <p:cNvPr id="2" name=""/>
+          <p:cNvPr id="2" name="">
+            <a:extLst xmlns:a="http://schemas.openxmlformats.org/drawingml/2006/main">
+              <a:ext uri="{FF2B5EF4-FFF2-40B4-BE49-F238E27FC236}">
+                <a16:creationId xmlns:a16="http://schemas.microsoft.com/office/drawing/2014/main" id="{65E571CD-B1BA-4B70-B0FF-A4418ADE4957}"/>
+              </a:ext>
+            </a:extLst>
+          </p:cNvPr>
           <p:cNvPicPr>
             <a:picLocks xmlns:a="http://schemas.openxmlformats.org/drawingml/2006/main" noChangeAspect="1"/>
           </p:cNvPicPr>
           <p:nvPr/>
         </p:nvPicPr>
         <p:blipFill>
-          <a:blip xmlns:r="http://schemas.openxmlformats.org/officeDocument/2006/relationships" xmlns:a="http://schemas.openxmlformats.org/drawingml/2006/main" r:embed="Re9ad6eeca6aa4989"/>
+          <a:blip xmlns:r="http://schemas.openxmlformats.org/officeDocument/2006/relationships" xmlns:a="http://schemas.openxmlformats.org/drawingml/2006/main" r:embed="Rc20630fa475747bb"/>
           <a:stretch xmlns:a="http://schemas.openxmlformats.org/drawingml/2006/main"/>
         </p:blipFill>
         <p:spPr>
@@ -9037,7 +7551,7 @@
     </p:spTree>
     <p:extLst>
       <p:ext uri="{BB962C8B-B14F-4D97-AF65-F5344CB8AC3E}">
-        <p14:creationId xmlns:p14="http://schemas.microsoft.com/office/powerpoint/2010/main" val="357424713"/>
+        <p14:creationId xmlns:p14="http://schemas.microsoft.com/office/powerpoint/2010/main" val="1200192484"/>
       </p:ext>
     </p:extLst>
   </p:cSld>
@@ -9058,14 +7572,20 @@
       </p:grpSpPr>
       <p:pic>
         <p:nvPicPr>
-          <p:cNvPr id="2" name=""/>
+          <p:cNvPr id="2" name="">
+            <a:extLst xmlns:a="http://schemas.openxmlformats.org/drawingml/2006/main">
+              <a:ext uri="{FF2B5EF4-FFF2-40B4-BE49-F238E27FC236}">
+                <a16:creationId xmlns:a16="http://schemas.microsoft.com/office/drawing/2014/main" id="{C153CB0B-64A8-4000-82A3-59771F09A4A0}"/>
+              </a:ext>
+            </a:extLst>
+          </p:cNvPr>
           <p:cNvPicPr>
             <a:picLocks xmlns:a="http://schemas.openxmlformats.org/drawingml/2006/main" noChangeAspect="1"/>
           </p:cNvPicPr>
           <p:nvPr/>
         </p:nvPicPr>
         <p:blipFill>
-          <a:blip xmlns:r="http://schemas.openxmlformats.org/officeDocument/2006/relationships" xmlns:a="http://schemas.openxmlformats.org/drawingml/2006/main" r:embed="R70ce435d45ac4f63"/>
+          <a:blip xmlns:r="http://schemas.openxmlformats.org/officeDocument/2006/relationships" xmlns:a="http://schemas.openxmlformats.org/drawingml/2006/main" r:embed="Re3fc016040134ff3"/>
           <a:stretch xmlns:a="http://schemas.openxmlformats.org/drawingml/2006/main"/>
         </p:blipFill>
         <p:spPr>
@@ -9081,7 +7601,7 @@
     </p:spTree>
     <p:extLst>
       <p:ext uri="{BB962C8B-B14F-4D97-AF65-F5344CB8AC3E}">
-        <p14:creationId xmlns:p14="http://schemas.microsoft.com/office/powerpoint/2010/main" val="1760389807"/>
+        <p14:creationId xmlns:p14="http://schemas.microsoft.com/office/powerpoint/2010/main" val="1149050775"/>
       </p:ext>
     </p:extLst>
   </p:cSld>
@@ -9102,14 +7622,20 @@
       </p:grpSpPr>
       <p:pic>
         <p:nvPicPr>
-          <p:cNvPr id="2" name=""/>
+          <p:cNvPr id="2" name="">
+            <a:extLst xmlns:a="http://schemas.openxmlformats.org/drawingml/2006/main">
+              <a:ext uri="{FF2B5EF4-FFF2-40B4-BE49-F238E27FC236}">
+                <a16:creationId xmlns:a16="http://schemas.microsoft.com/office/drawing/2014/main" id="{39B94570-AA02-4494-9AB3-922E6154AAAF}"/>
+              </a:ext>
+            </a:extLst>
+          </p:cNvPr>
           <p:cNvPicPr>
             <a:picLocks xmlns:a="http://schemas.openxmlformats.org/drawingml/2006/main" noChangeAspect="1"/>
           </p:cNvPicPr>
           <p:nvPr/>
         </p:nvPicPr>
         <p:blipFill>
-          <a:blip xmlns:r="http://schemas.openxmlformats.org/officeDocument/2006/relationships" xmlns:a="http://schemas.openxmlformats.org/drawingml/2006/main" r:embed="R8bfc5e681fdd453c"/>
+          <a:blip xmlns:r="http://schemas.openxmlformats.org/officeDocument/2006/relationships" xmlns:a="http://schemas.openxmlformats.org/drawingml/2006/main" r:embed="R809ef47e378d4115"/>
           <a:stretch xmlns:a="http://schemas.openxmlformats.org/drawingml/2006/main"/>
         </p:blipFill>
         <p:spPr>
@@ -9125,7 +7651,7 @@
     </p:spTree>
     <p:extLst>
       <p:ext uri="{BB962C8B-B14F-4D97-AF65-F5344CB8AC3E}">
-        <p14:creationId xmlns:p14="http://schemas.microsoft.com/office/powerpoint/2010/main" val="599259677"/>
+        <p14:creationId xmlns:p14="http://schemas.microsoft.com/office/powerpoint/2010/main" val="1066350706"/>
       </p:ext>
     </p:extLst>
   </p:cSld>
@@ -9146,14 +7672,20 @@
       </p:grpSpPr>
       <p:pic>
         <p:nvPicPr>
-          <p:cNvPr id="2" name=""/>
+          <p:cNvPr id="2" name="">
+            <a:extLst xmlns:a="http://schemas.openxmlformats.org/drawingml/2006/main">
+              <a:ext uri="{FF2B5EF4-FFF2-40B4-BE49-F238E27FC236}">
+                <a16:creationId xmlns:a16="http://schemas.microsoft.com/office/drawing/2014/main" id="{E740FC08-F16E-4C2A-A09B-904E1E4A76C7}"/>
+              </a:ext>
+            </a:extLst>
+          </p:cNvPr>
           <p:cNvPicPr>
             <a:picLocks xmlns:a="http://schemas.openxmlformats.org/drawingml/2006/main" noChangeAspect="1"/>
           </p:cNvPicPr>
           <p:nvPr/>
         </p:nvPicPr>
         <p:blipFill>
-          <a:blip xmlns:r="http://schemas.openxmlformats.org/officeDocument/2006/relationships" xmlns:a="http://schemas.openxmlformats.org/drawingml/2006/main" r:embed="R1df0a5320c314e88"/>
+          <a:blip xmlns:r="http://schemas.openxmlformats.org/officeDocument/2006/relationships" xmlns:a="http://schemas.openxmlformats.org/drawingml/2006/main" r:embed="R225a6f2be2574361"/>
           <a:stretch xmlns:a="http://schemas.openxmlformats.org/drawingml/2006/main"/>
         </p:blipFill>
         <p:spPr>
@@ -9169,7 +7701,7 @@
     </p:spTree>
     <p:extLst>
       <p:ext uri="{BB962C8B-B14F-4D97-AF65-F5344CB8AC3E}">
-        <p14:creationId xmlns:p14="http://schemas.microsoft.com/office/powerpoint/2010/main" val="112991222"/>
+        <p14:creationId xmlns:p14="http://schemas.microsoft.com/office/powerpoint/2010/main" val="930463080"/>
       </p:ext>
     </p:extLst>
   </p:cSld>
@@ -9190,14 +7722,20 @@
       </p:grpSpPr>
       <p:pic>
         <p:nvPicPr>
-          <p:cNvPr id="2" name=""/>
+          <p:cNvPr id="2" name="">
+            <a:extLst xmlns:a="http://schemas.openxmlformats.org/drawingml/2006/main">
+              <a:ext uri="{FF2B5EF4-FFF2-40B4-BE49-F238E27FC236}">
+                <a16:creationId xmlns:a16="http://schemas.microsoft.com/office/drawing/2014/main" id="{BC6D3A00-9B3C-403E-9D3B-B10E816CA86C}"/>
+              </a:ext>
+            </a:extLst>
+          </p:cNvPr>
           <p:cNvPicPr>
             <a:picLocks xmlns:a="http://schemas.openxmlformats.org/drawingml/2006/main" noChangeAspect="1"/>
           </p:cNvPicPr>
           <p:nvPr/>
         </p:nvPicPr>
         <p:blipFill>
-          <a:blip xmlns:r="http://schemas.openxmlformats.org/officeDocument/2006/relationships" xmlns:a="http://schemas.openxmlformats.org/drawingml/2006/main" r:embed="Rd9df7a2abbd4458b"/>
+          <a:blip xmlns:r="http://schemas.openxmlformats.org/officeDocument/2006/relationships" xmlns:a="http://schemas.openxmlformats.org/drawingml/2006/main" r:embed="R886aa5d5163e479f"/>
           <a:stretch xmlns:a="http://schemas.openxmlformats.org/drawingml/2006/main"/>
         </p:blipFill>
         <p:spPr>
@@ -9213,7 +7751,7 @@
     </p:spTree>
     <p:extLst>
       <p:ext uri="{BB962C8B-B14F-4D97-AF65-F5344CB8AC3E}">
-        <p14:creationId xmlns:p14="http://schemas.microsoft.com/office/powerpoint/2010/main" val="172987080"/>
+        <p14:creationId xmlns:p14="http://schemas.microsoft.com/office/powerpoint/2010/main" val="243431418"/>
       </p:ext>
     </p:extLst>
   </p:cSld>
@@ -9234,14 +7772,20 @@
       </p:grpSpPr>
       <p:pic>
         <p:nvPicPr>
-          <p:cNvPr id="2" name=""/>
+          <p:cNvPr id="2" name="">
+            <a:extLst xmlns:a="http://schemas.openxmlformats.org/drawingml/2006/main">
+              <a:ext uri="{FF2B5EF4-FFF2-40B4-BE49-F238E27FC236}">
+                <a16:creationId xmlns:a16="http://schemas.microsoft.com/office/drawing/2014/main" id="{C9D7EB98-BB6C-4995-9FB9-DA0934A5DBC5}"/>
+              </a:ext>
+            </a:extLst>
+          </p:cNvPr>
           <p:cNvPicPr>
             <a:picLocks xmlns:a="http://schemas.openxmlformats.org/drawingml/2006/main" noChangeAspect="1"/>
           </p:cNvPicPr>
           <p:nvPr/>
         </p:nvPicPr>
         <p:blipFill>
-          <a:blip xmlns:r="http://schemas.openxmlformats.org/officeDocument/2006/relationships" xmlns:a="http://schemas.openxmlformats.org/drawingml/2006/main" r:embed="R51ec3b1c82b44978"/>
+          <a:blip xmlns:r="http://schemas.openxmlformats.org/officeDocument/2006/relationships" xmlns:a="http://schemas.openxmlformats.org/drawingml/2006/main" r:embed="R6610206a823b4b10"/>
           <a:stretch xmlns:a="http://schemas.openxmlformats.org/drawingml/2006/main"/>
         </p:blipFill>
         <p:spPr>
@@ -9257,7 +7801,7 @@
     </p:spTree>
     <p:extLst>
       <p:ext uri="{BB962C8B-B14F-4D97-AF65-F5344CB8AC3E}">
-        <p14:creationId xmlns:p14="http://schemas.microsoft.com/office/powerpoint/2010/main" val="430188842"/>
+        <p14:creationId xmlns:p14="http://schemas.microsoft.com/office/powerpoint/2010/main" val="106518143"/>
       </p:ext>
     </p:extLst>
   </p:cSld>
@@ -9278,14 +7822,20 @@
       </p:grpSpPr>
       <p:pic>
         <p:nvPicPr>
-          <p:cNvPr id="2" name=""/>
+          <p:cNvPr id="2" name="">
+            <a:extLst xmlns:a="http://schemas.openxmlformats.org/drawingml/2006/main">
+              <a:ext uri="{FF2B5EF4-FFF2-40B4-BE49-F238E27FC236}">
+                <a16:creationId xmlns:a16="http://schemas.microsoft.com/office/drawing/2014/main" id="{42ED0262-76BB-4EC6-891D-F48564E93245}"/>
+              </a:ext>
+            </a:extLst>
+          </p:cNvPr>
           <p:cNvPicPr>
             <a:picLocks xmlns:a="http://schemas.openxmlformats.org/drawingml/2006/main" noChangeAspect="1"/>
           </p:cNvPicPr>
           <p:nvPr/>
         </p:nvPicPr>
         <p:blipFill>
-          <a:blip xmlns:r="http://schemas.openxmlformats.org/officeDocument/2006/relationships" xmlns:a="http://schemas.openxmlformats.org/drawingml/2006/main" r:embed="R614d2488d54a4e43"/>
+          <a:blip xmlns:r="http://schemas.openxmlformats.org/officeDocument/2006/relationships" xmlns:a="http://schemas.openxmlformats.org/drawingml/2006/main" r:embed="R2651b264893f4c27"/>
           <a:stretch xmlns:a="http://schemas.openxmlformats.org/drawingml/2006/main"/>
         </p:blipFill>
         <p:spPr>
@@ -9301,7 +7851,7 @@
     </p:spTree>
     <p:extLst>
       <p:ext uri="{BB962C8B-B14F-4D97-AF65-F5344CB8AC3E}">
-        <p14:creationId xmlns:p14="http://schemas.microsoft.com/office/powerpoint/2010/main" val="1235526068"/>
+        <p14:creationId xmlns:p14="http://schemas.microsoft.com/office/powerpoint/2010/main" val="1506859425"/>
       </p:ext>
     </p:extLst>
   </p:cSld>
@@ -9322,14 +7872,20 @@
       </p:grpSpPr>
       <p:pic>
         <p:nvPicPr>
-          <p:cNvPr id="2" name=""/>
+          <p:cNvPr id="2" name="">
+            <a:extLst xmlns:a="http://schemas.openxmlformats.org/drawingml/2006/main">
+              <a:ext uri="{FF2B5EF4-FFF2-40B4-BE49-F238E27FC236}">
+                <a16:creationId xmlns:a16="http://schemas.microsoft.com/office/drawing/2014/main" id="{B1DAE57D-0B1D-4765-A3EB-A76DBE6CF05E}"/>
+              </a:ext>
+            </a:extLst>
+          </p:cNvPr>
           <p:cNvPicPr>
             <a:picLocks xmlns:a="http://schemas.openxmlformats.org/drawingml/2006/main" noChangeAspect="1"/>
           </p:cNvPicPr>
           <p:nvPr/>
         </p:nvPicPr>
         <p:blipFill>
-          <a:blip xmlns:r="http://schemas.openxmlformats.org/officeDocument/2006/relationships" xmlns:a="http://schemas.openxmlformats.org/drawingml/2006/main" r:embed="R47c058ae77a34377"/>
+          <a:blip xmlns:r="http://schemas.openxmlformats.org/officeDocument/2006/relationships" xmlns:a="http://schemas.openxmlformats.org/drawingml/2006/main" r:embed="R81ae99bd06194b63"/>
           <a:stretch xmlns:a="http://schemas.openxmlformats.org/drawingml/2006/main"/>
         </p:blipFill>
         <p:spPr>
@@ -9345,7 +7901,7 @@
     </p:spTree>
     <p:extLst>
       <p:ext uri="{BB962C8B-B14F-4D97-AF65-F5344CB8AC3E}">
-        <p14:creationId xmlns:p14="http://schemas.microsoft.com/office/powerpoint/2010/main" val="1768702578"/>
+        <p14:creationId xmlns:p14="http://schemas.microsoft.com/office/powerpoint/2010/main" val="271262879"/>
       </p:ext>
     </p:extLst>
   </p:cSld>
@@ -9366,14 +7922,20 @@
       </p:grpSpPr>
       <p:pic>
         <p:nvPicPr>
-          <p:cNvPr id="2" name=""/>
+          <p:cNvPr id="2" name="">
+            <a:extLst xmlns:a="http://schemas.openxmlformats.org/drawingml/2006/main">
+              <a:ext uri="{FF2B5EF4-FFF2-40B4-BE49-F238E27FC236}">
+                <a16:creationId xmlns:a16="http://schemas.microsoft.com/office/drawing/2014/main" id="{3C8DD8AF-9BF2-4715-A4A8-1DB7E614222B}"/>
+              </a:ext>
+            </a:extLst>
+          </p:cNvPr>
           <p:cNvPicPr>
             <a:picLocks xmlns:a="http://schemas.openxmlformats.org/drawingml/2006/main" noChangeAspect="1"/>
           </p:cNvPicPr>
           <p:nvPr/>
         </p:nvPicPr>
         <p:blipFill>
-          <a:blip xmlns:r="http://schemas.openxmlformats.org/officeDocument/2006/relationships" xmlns:a="http://schemas.openxmlformats.org/drawingml/2006/main" r:embed="R6fef4f87c98a4002"/>
+          <a:blip xmlns:r="http://schemas.openxmlformats.org/officeDocument/2006/relationships" xmlns:a="http://schemas.openxmlformats.org/drawingml/2006/main" r:embed="R40ec0824b825448b"/>
           <a:stretch xmlns:a="http://schemas.openxmlformats.org/drawingml/2006/main"/>
         </p:blipFill>
         <p:spPr>
@@ -9389,7 +7951,7 @@
     </p:spTree>
     <p:extLst>
       <p:ext uri="{BB962C8B-B14F-4D97-AF65-F5344CB8AC3E}">
-        <p14:creationId xmlns:p14="http://schemas.microsoft.com/office/powerpoint/2010/main" val="2059707571"/>
+        <p14:creationId xmlns:p14="http://schemas.microsoft.com/office/powerpoint/2010/main" val="431396000"/>
       </p:ext>
     </p:extLst>
   </p:cSld>
@@ -9410,14 +7972,20 @@
       </p:grpSpPr>
       <p:pic>
         <p:nvPicPr>
-          <p:cNvPr id="2" name=""/>
+          <p:cNvPr id="2" name="">
+            <a:extLst xmlns:a="http://schemas.openxmlformats.org/drawingml/2006/main">
+              <a:ext uri="{FF2B5EF4-FFF2-40B4-BE49-F238E27FC236}">
+                <a16:creationId xmlns:a16="http://schemas.microsoft.com/office/drawing/2014/main" id="{FBCE621E-6452-4A23-BA6D-E00ACDEB3A3E}"/>
+              </a:ext>
+            </a:extLst>
+          </p:cNvPr>
           <p:cNvPicPr>
             <a:picLocks xmlns:a="http://schemas.openxmlformats.org/drawingml/2006/main" noChangeAspect="1"/>
           </p:cNvPicPr>
           <p:nvPr/>
         </p:nvPicPr>
         <p:blipFill>
-          <a:blip xmlns:r="http://schemas.openxmlformats.org/officeDocument/2006/relationships" xmlns:a="http://schemas.openxmlformats.org/drawingml/2006/main" r:embed="R7781546a7aee4e8f"/>
+          <a:blip xmlns:r="http://schemas.openxmlformats.org/officeDocument/2006/relationships" xmlns:a="http://schemas.openxmlformats.org/drawingml/2006/main" r:embed="R9a9bd3e0f1764832"/>
           <a:stretch xmlns:a="http://schemas.openxmlformats.org/drawingml/2006/main"/>
         </p:blipFill>
         <p:spPr>
@@ -9433,7 +8001,7 @@
     </p:spTree>
     <p:extLst>
       <p:ext uri="{BB962C8B-B14F-4D97-AF65-F5344CB8AC3E}">
-        <p14:creationId xmlns:p14="http://schemas.microsoft.com/office/powerpoint/2010/main" val="658779497"/>
+        <p14:creationId xmlns:p14="http://schemas.microsoft.com/office/powerpoint/2010/main" val="795562573"/>
       </p:ext>
     </p:extLst>
   </p:cSld>
@@ -9454,14 +8022,20 @@
       </p:grpSpPr>
       <p:pic>
         <p:nvPicPr>
-          <p:cNvPr id="2" name=""/>
+          <p:cNvPr id="2" name="">
+            <a:extLst xmlns:a="http://schemas.openxmlformats.org/drawingml/2006/main">
+              <a:ext uri="{FF2B5EF4-FFF2-40B4-BE49-F238E27FC236}">
+                <a16:creationId xmlns:a16="http://schemas.microsoft.com/office/drawing/2014/main" id="{71C5017F-1E8A-4042-A4DF-D9937E904CCA}"/>
+              </a:ext>
+            </a:extLst>
+          </p:cNvPr>
           <p:cNvPicPr>
             <a:picLocks xmlns:a="http://schemas.openxmlformats.org/drawingml/2006/main" noChangeAspect="1"/>
           </p:cNvPicPr>
           <p:nvPr/>
         </p:nvPicPr>
         <p:blipFill>
-          <a:blip xmlns:r="http://schemas.openxmlformats.org/officeDocument/2006/relationships" xmlns:a="http://schemas.openxmlformats.org/drawingml/2006/main" r:embed="R77868d59593c40b6"/>
+          <a:blip xmlns:r="http://schemas.openxmlformats.org/officeDocument/2006/relationships" xmlns:a="http://schemas.openxmlformats.org/drawingml/2006/main" r:embed="R761e68ddb5184f77"/>
           <a:stretch xmlns:a="http://schemas.openxmlformats.org/drawingml/2006/main"/>
         </p:blipFill>
         <p:spPr>
@@ -9477,7 +8051,7 @@
     </p:spTree>
     <p:extLst>
       <p:ext uri="{BB962C8B-B14F-4D97-AF65-F5344CB8AC3E}">
-        <p14:creationId xmlns:p14="http://schemas.microsoft.com/office/powerpoint/2010/main" val="1033401023"/>
+        <p14:creationId xmlns:p14="http://schemas.microsoft.com/office/powerpoint/2010/main" val="824163855"/>
       </p:ext>
     </p:extLst>
   </p:cSld>
@@ -9498,14 +8072,20 @@
       </p:grpSpPr>
       <p:pic>
         <p:nvPicPr>
-          <p:cNvPr id="2" name=""/>
+          <p:cNvPr id="2" name="">
+            <a:extLst xmlns:a="http://schemas.openxmlformats.org/drawingml/2006/main">
+              <a:ext uri="{FF2B5EF4-FFF2-40B4-BE49-F238E27FC236}">
+                <a16:creationId xmlns:a16="http://schemas.microsoft.com/office/drawing/2014/main" id="{81F800E6-73B2-4212-862D-7CFBD248C6DC}"/>
+              </a:ext>
+            </a:extLst>
+          </p:cNvPr>
           <p:cNvPicPr>
             <a:picLocks xmlns:a="http://schemas.openxmlformats.org/drawingml/2006/main" noChangeAspect="1"/>
           </p:cNvPicPr>
           <p:nvPr/>
         </p:nvPicPr>
         <p:blipFill>
-          <a:blip xmlns:r="http://schemas.openxmlformats.org/officeDocument/2006/relationships" xmlns:a="http://schemas.openxmlformats.org/drawingml/2006/main" r:embed="R68476122b2eb4838"/>
+          <a:blip xmlns:r="http://schemas.openxmlformats.org/officeDocument/2006/relationships" xmlns:a="http://schemas.openxmlformats.org/drawingml/2006/main" r:embed="Rb510dfd5b0ab4cee"/>
           <a:stretch xmlns:a="http://schemas.openxmlformats.org/drawingml/2006/main"/>
         </p:blipFill>
         <p:spPr>
@@ -9521,7 +8101,7 @@
     </p:spTree>
     <p:extLst>
       <p:ext uri="{BB962C8B-B14F-4D97-AF65-F5344CB8AC3E}">
-        <p14:creationId xmlns:p14="http://schemas.microsoft.com/office/powerpoint/2010/main" val="514865416"/>
+        <p14:creationId xmlns:p14="http://schemas.microsoft.com/office/powerpoint/2010/main" val="1374284958"/>
       </p:ext>
     </p:extLst>
   </p:cSld>
@@ -9542,14 +8122,20 @@
       </p:grpSpPr>
       <p:pic>
         <p:nvPicPr>
-          <p:cNvPr id="2" name=""/>
+          <p:cNvPr id="2" name="">
+            <a:extLst xmlns:a="http://schemas.openxmlformats.org/drawingml/2006/main">
+              <a:ext uri="{FF2B5EF4-FFF2-40B4-BE49-F238E27FC236}">
+                <a16:creationId xmlns:a16="http://schemas.microsoft.com/office/drawing/2014/main" id="{1CC0AE92-4867-4336-876E-C1C34438AC9B}"/>
+              </a:ext>
+            </a:extLst>
+          </p:cNvPr>
           <p:cNvPicPr>
             <a:picLocks xmlns:a="http://schemas.openxmlformats.org/drawingml/2006/main" noChangeAspect="1"/>
           </p:cNvPicPr>
           <p:nvPr/>
         </p:nvPicPr>
         <p:blipFill>
-          <a:blip xmlns:r="http://schemas.openxmlformats.org/officeDocument/2006/relationships" xmlns:a="http://schemas.openxmlformats.org/drawingml/2006/main" r:embed="Radf8f70f76b748f0"/>
+          <a:blip xmlns:r="http://schemas.openxmlformats.org/officeDocument/2006/relationships" xmlns:a="http://schemas.openxmlformats.org/drawingml/2006/main" r:embed="R904cb27a2cc143f0"/>
           <a:stretch xmlns:a="http://schemas.openxmlformats.org/drawingml/2006/main"/>
         </p:blipFill>
         <p:spPr>
@@ -9565,7 +8151,7 @@
     </p:spTree>
     <p:extLst>
       <p:ext uri="{BB962C8B-B14F-4D97-AF65-F5344CB8AC3E}">
-        <p14:creationId xmlns:p14="http://schemas.microsoft.com/office/powerpoint/2010/main" val="2031932851"/>
+        <p14:creationId xmlns:p14="http://schemas.microsoft.com/office/powerpoint/2010/main" val="504745213"/>
       </p:ext>
     </p:extLst>
   </p:cSld>
@@ -9586,14 +8172,20 @@
       </p:grpSpPr>
       <p:pic>
         <p:nvPicPr>
-          <p:cNvPr id="2" name=""/>
+          <p:cNvPr id="2" name="">
+            <a:extLst xmlns:a="http://schemas.openxmlformats.org/drawingml/2006/main">
+              <a:ext uri="{FF2B5EF4-FFF2-40B4-BE49-F238E27FC236}">
+                <a16:creationId xmlns:a16="http://schemas.microsoft.com/office/drawing/2014/main" id="{A4EA3D53-4CC9-4A9C-96CF-20E043702CA4}"/>
+              </a:ext>
+            </a:extLst>
+          </p:cNvPr>
           <p:cNvPicPr>
             <a:picLocks xmlns:a="http://schemas.openxmlformats.org/drawingml/2006/main" noChangeAspect="1"/>
           </p:cNvPicPr>
           <p:nvPr/>
         </p:nvPicPr>
         <p:blipFill>
-          <a:blip xmlns:r="http://schemas.openxmlformats.org/officeDocument/2006/relationships" xmlns:a="http://schemas.openxmlformats.org/drawingml/2006/main" r:embed="Rbc3f306af2e14104"/>
+          <a:blip xmlns:r="http://schemas.openxmlformats.org/officeDocument/2006/relationships" xmlns:a="http://schemas.openxmlformats.org/drawingml/2006/main" r:embed="R58f704f8c7ce473f"/>
           <a:stretch xmlns:a="http://schemas.openxmlformats.org/drawingml/2006/main"/>
         </p:blipFill>
         <p:spPr>
@@ -9609,7 +8201,7 @@
     </p:spTree>
     <p:extLst>
       <p:ext uri="{BB962C8B-B14F-4D97-AF65-F5344CB8AC3E}">
-        <p14:creationId xmlns:p14="http://schemas.microsoft.com/office/powerpoint/2010/main" val="1292999561"/>
+        <p14:creationId xmlns:p14="http://schemas.microsoft.com/office/powerpoint/2010/main" val="641552671"/>
       </p:ext>
     </p:extLst>
   </p:cSld>
@@ -9630,14 +8222,20 @@
       </p:grpSpPr>
       <p:pic>
         <p:nvPicPr>
-          <p:cNvPr id="2" name=""/>
+          <p:cNvPr id="2" name="">
+            <a:extLst xmlns:a="http://schemas.openxmlformats.org/drawingml/2006/main">
+              <a:ext uri="{FF2B5EF4-FFF2-40B4-BE49-F238E27FC236}">
+                <a16:creationId xmlns:a16="http://schemas.microsoft.com/office/drawing/2014/main" id="{97466CA1-B901-4CF8-989B-76CEEEF467D0}"/>
+              </a:ext>
+            </a:extLst>
+          </p:cNvPr>
           <p:cNvPicPr>
             <a:picLocks xmlns:a="http://schemas.openxmlformats.org/drawingml/2006/main" noChangeAspect="1"/>
           </p:cNvPicPr>
           <p:nvPr/>
         </p:nvPicPr>
         <p:blipFill>
-          <a:blip xmlns:r="http://schemas.openxmlformats.org/officeDocument/2006/relationships" xmlns:a="http://schemas.openxmlformats.org/drawingml/2006/main" r:embed="Raf53ce28d992480f"/>
+          <a:blip xmlns:r="http://schemas.openxmlformats.org/officeDocument/2006/relationships" xmlns:a="http://schemas.openxmlformats.org/drawingml/2006/main" r:embed="R804af969c9f34a5d"/>
           <a:stretch xmlns:a="http://schemas.openxmlformats.org/drawingml/2006/main"/>
         </p:blipFill>
         <p:spPr>
@@ -9653,7 +8251,7 @@
     </p:spTree>
     <p:extLst>
       <p:ext uri="{BB962C8B-B14F-4D97-AF65-F5344CB8AC3E}">
-        <p14:creationId xmlns:p14="http://schemas.microsoft.com/office/powerpoint/2010/main" val="36797643"/>
+        <p14:creationId xmlns:p14="http://schemas.microsoft.com/office/powerpoint/2010/main" val="1447680306"/>
       </p:ext>
     </p:extLst>
   </p:cSld>
@@ -9674,14 +8272,20 @@
       </p:grpSpPr>
       <p:pic>
         <p:nvPicPr>
-          <p:cNvPr id="2" name=""/>
+          <p:cNvPr id="2" name="">
+            <a:extLst xmlns:a="http://schemas.openxmlformats.org/drawingml/2006/main">
+              <a:ext uri="{FF2B5EF4-FFF2-40B4-BE49-F238E27FC236}">
+                <a16:creationId xmlns:a16="http://schemas.microsoft.com/office/drawing/2014/main" id="{A527B719-3E9C-4E76-8FC1-282C40833324}"/>
+              </a:ext>
+            </a:extLst>
+          </p:cNvPr>
           <p:cNvPicPr>
             <a:picLocks xmlns:a="http://schemas.openxmlformats.org/drawingml/2006/main" noChangeAspect="1"/>
           </p:cNvPicPr>
           <p:nvPr/>
         </p:nvPicPr>
         <p:blipFill>
-          <a:blip xmlns:r="http://schemas.openxmlformats.org/officeDocument/2006/relationships" xmlns:a="http://schemas.openxmlformats.org/drawingml/2006/main" r:embed="R93792bdd41ab4bd2"/>
+          <a:blip xmlns:r="http://schemas.openxmlformats.org/officeDocument/2006/relationships" xmlns:a="http://schemas.openxmlformats.org/drawingml/2006/main" r:embed="R41bf9226936d4424"/>
           <a:stretch xmlns:a="http://schemas.openxmlformats.org/drawingml/2006/main"/>
         </p:blipFill>
         <p:spPr>
@@ -9697,7 +8301,7 @@
     </p:spTree>
     <p:extLst>
       <p:ext uri="{BB962C8B-B14F-4D97-AF65-F5344CB8AC3E}">
-        <p14:creationId xmlns:p14="http://schemas.microsoft.com/office/powerpoint/2010/main" val="1238093157"/>
+        <p14:creationId xmlns:p14="http://schemas.microsoft.com/office/powerpoint/2010/main" val="1344628528"/>
       </p:ext>
     </p:extLst>
   </p:cSld>
@@ -9718,14 +8322,20 @@
       </p:grpSpPr>
       <p:pic>
         <p:nvPicPr>
-          <p:cNvPr id="2" name=""/>
+          <p:cNvPr id="2" name="">
+            <a:extLst xmlns:a="http://schemas.openxmlformats.org/drawingml/2006/main">
+              <a:ext uri="{FF2B5EF4-FFF2-40B4-BE49-F238E27FC236}">
+                <a16:creationId xmlns:a16="http://schemas.microsoft.com/office/drawing/2014/main" id="{D07389A8-6AB7-4A7C-B9C5-17EAFC7822FB}"/>
+              </a:ext>
+            </a:extLst>
+          </p:cNvPr>
           <p:cNvPicPr>
             <a:picLocks xmlns:a="http://schemas.openxmlformats.org/drawingml/2006/main" noChangeAspect="1"/>
           </p:cNvPicPr>
           <p:nvPr/>
         </p:nvPicPr>
         <p:blipFill>
-          <a:blip xmlns:r="http://schemas.openxmlformats.org/officeDocument/2006/relationships" xmlns:a="http://schemas.openxmlformats.org/drawingml/2006/main" r:embed="Rea7a2e391d214974"/>
+          <a:blip xmlns:r="http://schemas.openxmlformats.org/officeDocument/2006/relationships" xmlns:a="http://schemas.openxmlformats.org/drawingml/2006/main" r:embed="R127429ae689242a7"/>
           <a:stretch xmlns:a="http://schemas.openxmlformats.org/drawingml/2006/main"/>
         </p:blipFill>
         <p:spPr>
@@ -9741,51 +8351,7 @@
     </p:spTree>
     <p:extLst>
       <p:ext uri="{BB962C8B-B14F-4D97-AF65-F5344CB8AC3E}">
-        <p14:creationId xmlns:p14="http://schemas.microsoft.com/office/powerpoint/2010/main" val="488130477"/>
-      </p:ext>
-    </p:extLst>
-  </p:cSld>
-</p:sld>
-</file>
-
-<file path=ppt/slides/slide33.xml><?xml version="1.0" encoding="utf-8"?>
-<p:sld xmlns:p="http://schemas.openxmlformats.org/presentationml/2006/main">
-  <p:cSld>
-    <p:spTree>
-      <p:nvGrpSpPr>
-        <p:cNvPr id="1" name=""/>
-        <p:cNvGrpSpPr/>
-        <p:nvPr/>
-      </p:nvGrpSpPr>
-      <p:grpSpPr>
-        <a:xfrm xmlns:a="http://schemas.openxmlformats.org/drawingml/2006/main"/>
-      </p:grpSpPr>
-      <p:pic>
-        <p:nvPicPr>
-          <p:cNvPr id="2" name=""/>
-          <p:cNvPicPr>
-            <a:picLocks xmlns:a="http://schemas.openxmlformats.org/drawingml/2006/main" noChangeAspect="1"/>
-          </p:cNvPicPr>
-          <p:nvPr/>
-        </p:nvPicPr>
-        <p:blipFill>
-          <a:blip xmlns:r="http://schemas.openxmlformats.org/officeDocument/2006/relationships" xmlns:a="http://schemas.openxmlformats.org/drawingml/2006/main" r:embed="R31022efe4dcd4877"/>
-          <a:stretch xmlns:a="http://schemas.openxmlformats.org/drawingml/2006/main"/>
-        </p:blipFill>
-        <p:spPr>
-          <a:xfrm xmlns:a="http://schemas.openxmlformats.org/drawingml/2006/main">
-            <a:off x="0" y="0"/>
-            <a:ext cx="12192000" cy="6858000"/>
-          </a:xfrm>
-          <a:prstGeom xmlns:a="http://schemas.openxmlformats.org/drawingml/2006/main" prst="rect">
-            <a:avLst/>
-          </a:prstGeom>
-        </p:spPr>
-      </p:pic>
-    </p:spTree>
-    <p:extLst>
-      <p:ext uri="{BB962C8B-B14F-4D97-AF65-F5344CB8AC3E}">
-        <p14:creationId xmlns:p14="http://schemas.microsoft.com/office/powerpoint/2010/main" val="516139923"/>
+        <p14:creationId xmlns:p14="http://schemas.microsoft.com/office/powerpoint/2010/main" val="1790808536"/>
       </p:ext>
     </p:extLst>
   </p:cSld>
@@ -9806,14 +8372,20 @@
       </p:grpSpPr>
       <p:pic>
         <p:nvPicPr>
-          <p:cNvPr id="2" name=""/>
+          <p:cNvPr id="2" name="">
+            <a:extLst xmlns:a="http://schemas.openxmlformats.org/drawingml/2006/main">
+              <a:ext uri="{FF2B5EF4-FFF2-40B4-BE49-F238E27FC236}">
+                <a16:creationId xmlns:a16="http://schemas.microsoft.com/office/drawing/2014/main" id="{9A2BA1EE-529B-4518-950B-53516485779D}"/>
+              </a:ext>
+            </a:extLst>
+          </p:cNvPr>
           <p:cNvPicPr>
             <a:picLocks xmlns:a="http://schemas.openxmlformats.org/drawingml/2006/main" noChangeAspect="1"/>
           </p:cNvPicPr>
           <p:nvPr/>
         </p:nvPicPr>
         <p:blipFill>
-          <a:blip xmlns:r="http://schemas.openxmlformats.org/officeDocument/2006/relationships" xmlns:a="http://schemas.openxmlformats.org/drawingml/2006/main" r:embed="Rce5dd81ddb464f9d"/>
+          <a:blip xmlns:r="http://schemas.openxmlformats.org/officeDocument/2006/relationships" xmlns:a="http://schemas.openxmlformats.org/drawingml/2006/main" r:embed="Rd4f5123bcade4c46"/>
           <a:stretch xmlns:a="http://schemas.openxmlformats.org/drawingml/2006/main"/>
         </p:blipFill>
         <p:spPr>
@@ -9829,7 +8401,7 @@
     </p:spTree>
     <p:extLst>
       <p:ext uri="{BB962C8B-B14F-4D97-AF65-F5344CB8AC3E}">
-        <p14:creationId xmlns:p14="http://schemas.microsoft.com/office/powerpoint/2010/main" val="1881968188"/>
+        <p14:creationId xmlns:p14="http://schemas.microsoft.com/office/powerpoint/2010/main" val="855270486"/>
       </p:ext>
     </p:extLst>
   </p:cSld>
@@ -9850,14 +8422,20 @@
       </p:grpSpPr>
       <p:pic>
         <p:nvPicPr>
-          <p:cNvPr id="2" name=""/>
+          <p:cNvPr id="2" name="">
+            <a:extLst xmlns:a="http://schemas.openxmlformats.org/drawingml/2006/main">
+              <a:ext uri="{FF2B5EF4-FFF2-40B4-BE49-F238E27FC236}">
+                <a16:creationId xmlns:a16="http://schemas.microsoft.com/office/drawing/2014/main" id="{9CF50844-81CB-4EFA-91B0-6F0C0030C081}"/>
+              </a:ext>
+            </a:extLst>
+          </p:cNvPr>
           <p:cNvPicPr>
             <a:picLocks xmlns:a="http://schemas.openxmlformats.org/drawingml/2006/main" noChangeAspect="1"/>
           </p:cNvPicPr>
           <p:nvPr/>
         </p:nvPicPr>
         <p:blipFill>
-          <a:blip xmlns:r="http://schemas.openxmlformats.org/officeDocument/2006/relationships" xmlns:a="http://schemas.openxmlformats.org/drawingml/2006/main" r:embed="R32a98937064f486c"/>
+          <a:blip xmlns:r="http://schemas.openxmlformats.org/officeDocument/2006/relationships" xmlns:a="http://schemas.openxmlformats.org/drawingml/2006/main" r:embed="R3d2b31b478b54ccc"/>
           <a:stretch xmlns:a="http://schemas.openxmlformats.org/drawingml/2006/main"/>
         </p:blipFill>
         <p:spPr>
@@ -9873,7 +8451,7 @@
     </p:spTree>
     <p:extLst>
       <p:ext uri="{BB962C8B-B14F-4D97-AF65-F5344CB8AC3E}">
-        <p14:creationId xmlns:p14="http://schemas.microsoft.com/office/powerpoint/2010/main" val="1922700190"/>
+        <p14:creationId xmlns:p14="http://schemas.microsoft.com/office/powerpoint/2010/main" val="1310276277"/>
       </p:ext>
     </p:extLst>
   </p:cSld>
@@ -9894,14 +8472,20 @@
       </p:grpSpPr>
       <p:pic>
         <p:nvPicPr>
-          <p:cNvPr id="2" name=""/>
+          <p:cNvPr id="2" name="">
+            <a:extLst xmlns:a="http://schemas.openxmlformats.org/drawingml/2006/main">
+              <a:ext uri="{FF2B5EF4-FFF2-40B4-BE49-F238E27FC236}">
+                <a16:creationId xmlns:a16="http://schemas.microsoft.com/office/drawing/2014/main" id="{56E02E7C-E08C-4546-BFF4-0A3D0F27DADE}"/>
+              </a:ext>
+            </a:extLst>
+          </p:cNvPr>
           <p:cNvPicPr>
             <a:picLocks xmlns:a="http://schemas.openxmlformats.org/drawingml/2006/main" noChangeAspect="1"/>
           </p:cNvPicPr>
           <p:nvPr/>
         </p:nvPicPr>
         <p:blipFill>
-          <a:blip xmlns:r="http://schemas.openxmlformats.org/officeDocument/2006/relationships" xmlns:a="http://schemas.openxmlformats.org/drawingml/2006/main" r:embed="Rbee8e4c32c664822"/>
+          <a:blip xmlns:r="http://schemas.openxmlformats.org/officeDocument/2006/relationships" xmlns:a="http://schemas.openxmlformats.org/drawingml/2006/main" r:embed="R21dc0e47a4e947a0"/>
           <a:stretch xmlns:a="http://schemas.openxmlformats.org/drawingml/2006/main"/>
         </p:blipFill>
         <p:spPr>
@@ -9917,7 +8501,7 @@
     </p:spTree>
     <p:extLst>
       <p:ext uri="{BB962C8B-B14F-4D97-AF65-F5344CB8AC3E}">
-        <p14:creationId xmlns:p14="http://schemas.microsoft.com/office/powerpoint/2010/main" val="1580050360"/>
+        <p14:creationId xmlns:p14="http://schemas.microsoft.com/office/powerpoint/2010/main" val="148095976"/>
       </p:ext>
     </p:extLst>
   </p:cSld>
@@ -9938,14 +8522,20 @@
       </p:grpSpPr>
       <p:pic>
         <p:nvPicPr>
-          <p:cNvPr id="2" name=""/>
+          <p:cNvPr id="2" name="">
+            <a:extLst xmlns:a="http://schemas.openxmlformats.org/drawingml/2006/main">
+              <a:ext uri="{FF2B5EF4-FFF2-40B4-BE49-F238E27FC236}">
+                <a16:creationId xmlns:a16="http://schemas.microsoft.com/office/drawing/2014/main" id="{C516CB7C-77BF-4DBA-B46A-2A2BBA273F85}"/>
+              </a:ext>
+            </a:extLst>
+          </p:cNvPr>
           <p:cNvPicPr>
             <a:picLocks xmlns:a="http://schemas.openxmlformats.org/drawingml/2006/main" noChangeAspect="1"/>
           </p:cNvPicPr>
           <p:nvPr/>
         </p:nvPicPr>
         <p:blipFill>
-          <a:blip xmlns:r="http://schemas.openxmlformats.org/officeDocument/2006/relationships" xmlns:a="http://schemas.openxmlformats.org/drawingml/2006/main" r:embed="R4e96ebf37660406d"/>
+          <a:blip xmlns:r="http://schemas.openxmlformats.org/officeDocument/2006/relationships" xmlns:a="http://schemas.openxmlformats.org/drawingml/2006/main" r:embed="R0c0f67a1673f4da0"/>
           <a:stretch xmlns:a="http://schemas.openxmlformats.org/drawingml/2006/main"/>
         </p:blipFill>
         <p:spPr>
@@ -9961,7 +8551,7 @@
     </p:spTree>
     <p:extLst>
       <p:ext uri="{BB962C8B-B14F-4D97-AF65-F5344CB8AC3E}">
-        <p14:creationId xmlns:p14="http://schemas.microsoft.com/office/powerpoint/2010/main" val="1568591842"/>
+        <p14:creationId xmlns:p14="http://schemas.microsoft.com/office/powerpoint/2010/main" val="1462774307"/>
       </p:ext>
     </p:extLst>
   </p:cSld>
@@ -9982,14 +8572,20 @@
       </p:grpSpPr>
       <p:pic>
         <p:nvPicPr>
-          <p:cNvPr id="2" name=""/>
+          <p:cNvPr id="2" name="">
+            <a:extLst xmlns:a="http://schemas.openxmlformats.org/drawingml/2006/main">
+              <a:ext uri="{FF2B5EF4-FFF2-40B4-BE49-F238E27FC236}">
+                <a16:creationId xmlns:a16="http://schemas.microsoft.com/office/drawing/2014/main" id="{84D19087-58E6-4398-9D2D-7001C67A0E94}"/>
+              </a:ext>
+            </a:extLst>
+          </p:cNvPr>
           <p:cNvPicPr>
             <a:picLocks xmlns:a="http://schemas.openxmlformats.org/drawingml/2006/main" noChangeAspect="1"/>
           </p:cNvPicPr>
           <p:nvPr/>
         </p:nvPicPr>
         <p:blipFill>
-          <a:blip xmlns:r="http://schemas.openxmlformats.org/officeDocument/2006/relationships" xmlns:a="http://schemas.openxmlformats.org/drawingml/2006/main" r:embed="Rb03ae48d69ea4a63"/>
+          <a:blip xmlns:r="http://schemas.openxmlformats.org/officeDocument/2006/relationships" xmlns:a="http://schemas.openxmlformats.org/drawingml/2006/main" r:embed="Rb84a8f9cb88944e7"/>
           <a:stretch xmlns:a="http://schemas.openxmlformats.org/drawingml/2006/main"/>
         </p:blipFill>
         <p:spPr>
@@ -10005,7 +8601,7 @@
     </p:spTree>
     <p:extLst>
       <p:ext uri="{BB962C8B-B14F-4D97-AF65-F5344CB8AC3E}">
-        <p14:creationId xmlns:p14="http://schemas.microsoft.com/office/powerpoint/2010/main" val="1814749150"/>
+        <p14:creationId xmlns:p14="http://schemas.microsoft.com/office/powerpoint/2010/main" val="628308980"/>
       </p:ext>
     </p:extLst>
   </p:cSld>
@@ -10026,14 +8622,20 @@
       </p:grpSpPr>
       <p:pic>
         <p:nvPicPr>
-          <p:cNvPr id="2" name=""/>
+          <p:cNvPr id="2" name="">
+            <a:extLst xmlns:a="http://schemas.openxmlformats.org/drawingml/2006/main">
+              <a:ext uri="{FF2B5EF4-FFF2-40B4-BE49-F238E27FC236}">
+                <a16:creationId xmlns:a16="http://schemas.microsoft.com/office/drawing/2014/main" id="{D03BC003-7D04-4138-B764-B6E7C41665CC}"/>
+              </a:ext>
+            </a:extLst>
+          </p:cNvPr>
           <p:cNvPicPr>
             <a:picLocks xmlns:a="http://schemas.openxmlformats.org/drawingml/2006/main" noChangeAspect="1"/>
           </p:cNvPicPr>
           <p:nvPr/>
         </p:nvPicPr>
         <p:blipFill>
-          <a:blip xmlns:r="http://schemas.openxmlformats.org/officeDocument/2006/relationships" xmlns:a="http://schemas.openxmlformats.org/drawingml/2006/main" r:embed="R8824a03df8f0431c"/>
+          <a:blip xmlns:r="http://schemas.openxmlformats.org/officeDocument/2006/relationships" xmlns:a="http://schemas.openxmlformats.org/drawingml/2006/main" r:embed="R753767e02544444b"/>
           <a:stretch xmlns:a="http://schemas.openxmlformats.org/drawingml/2006/main"/>
         </p:blipFill>
         <p:spPr>
@@ -10049,7 +8651,7 @@
     </p:spTree>
     <p:extLst>
       <p:ext uri="{BB962C8B-B14F-4D97-AF65-F5344CB8AC3E}">
-        <p14:creationId xmlns:p14="http://schemas.microsoft.com/office/powerpoint/2010/main" val="1591897054"/>
+        <p14:creationId xmlns:p14="http://schemas.microsoft.com/office/powerpoint/2010/main" val="276807108"/>
       </p:ext>
     </p:extLst>
   </p:cSld>
@@ -10097,16 +8699,16 @@
         <a:srgbClr val="96607D"/>
       </a:folHlink>
     </a:clrScheme>
-    <a:fontScheme name="Office">
+    <a:fontScheme name="">
       <a:majorFont>
-        <a:latin typeface="Calibri Light"/>
-        <a:ea typeface="Calibri Light"/>
-        <a:cs typeface="Calibri Light"/>
+        <a:latin typeface="Aptos"/>
+        <a:ea typeface=""/>
+        <a:cs typeface=""/>
       </a:majorFont>
       <a:minorFont>
-        <a:latin typeface="Calibri"/>
-        <a:ea typeface="Calibri"/>
-        <a:cs typeface="Calibri"/>
+        <a:latin typeface="Aptos"/>
+        <a:ea typeface=""/>
+        <a:cs typeface=""/>
       </a:minorFont>
     </a:fontScheme>
     <a:fmtScheme name="ChatGPT">

--- a/teaching/macro-applications/downloads/lecture_3.pptx
+++ b/teaching/macro-applications/downloads/lecture_3.pptx
@@ -2,44 +2,44 @@
 <file path=ppt/presentation.xml><?xml version="1.0" encoding="utf-8"?>
 <p:presentation xmlns:p="http://schemas.openxmlformats.org/presentationml/2006/main">
   <p:sldMasterIdLst>
-    <p:sldMasterId xmlns:r="http://schemas.openxmlformats.org/officeDocument/2006/relationships" id="2147483648" r:id="R50c393809d2f4320"/>
+    <p:sldMasterId xmlns:r="http://schemas.openxmlformats.org/officeDocument/2006/relationships" id="2147483648" r:id="Ra5eb8b45cc744182"/>
   </p:sldMasterIdLst>
   <p:notesMasterIdLst>
-    <p:notesMasterId xmlns:r="http://schemas.openxmlformats.org/officeDocument/2006/relationships" r:id="R5b15bebef47e4eb0"/>
+    <p:notesMasterId xmlns:r="http://schemas.openxmlformats.org/officeDocument/2006/relationships" r:id="R0cf7183bec1c4b93"/>
   </p:notesMasterIdLst>
   <p:sldIdLst>
-    <p:sldId xmlns:r="http://schemas.openxmlformats.org/officeDocument/2006/relationships" id="256" r:id="R252c09e5729a441d"/>
-    <p:sldId xmlns:r="http://schemas.openxmlformats.org/officeDocument/2006/relationships" id="257" r:id="Rc985a8e7d2144049"/>
-    <p:sldId xmlns:r="http://schemas.openxmlformats.org/officeDocument/2006/relationships" id="258" r:id="Rf22156d1d08c4516"/>
-    <p:sldId xmlns:r="http://schemas.openxmlformats.org/officeDocument/2006/relationships" id="259" r:id="Re49233a4b5b84850"/>
-    <p:sldId xmlns:r="http://schemas.openxmlformats.org/officeDocument/2006/relationships" id="260" r:id="Rf07d86aefc6840b6"/>
-    <p:sldId xmlns:r="http://schemas.openxmlformats.org/officeDocument/2006/relationships" id="261" r:id="R2dbc37c34463404b"/>
-    <p:sldId xmlns:r="http://schemas.openxmlformats.org/officeDocument/2006/relationships" id="262" r:id="R1eecb2244ab948ac"/>
-    <p:sldId xmlns:r="http://schemas.openxmlformats.org/officeDocument/2006/relationships" id="263" r:id="Rb76cedb5378742af"/>
-    <p:sldId xmlns:r="http://schemas.openxmlformats.org/officeDocument/2006/relationships" id="264" r:id="R3217505334584724"/>
-    <p:sldId xmlns:r="http://schemas.openxmlformats.org/officeDocument/2006/relationships" id="265" r:id="Re97dfc4b37844def"/>
-    <p:sldId xmlns:r="http://schemas.openxmlformats.org/officeDocument/2006/relationships" id="266" r:id="Rb2441d981c614fed"/>
-    <p:sldId xmlns:r="http://schemas.openxmlformats.org/officeDocument/2006/relationships" id="267" r:id="R5dbcd65fdd834a02"/>
-    <p:sldId xmlns:r="http://schemas.openxmlformats.org/officeDocument/2006/relationships" id="268" r:id="R5210a919b857464e"/>
-    <p:sldId xmlns:r="http://schemas.openxmlformats.org/officeDocument/2006/relationships" id="269" r:id="R5314bd8dfa9f4e3b"/>
-    <p:sldId xmlns:r="http://schemas.openxmlformats.org/officeDocument/2006/relationships" id="270" r:id="R1ef619e6079844f7"/>
-    <p:sldId xmlns:r="http://schemas.openxmlformats.org/officeDocument/2006/relationships" id="271" r:id="Re11dce7cebd34d4a"/>
-    <p:sldId xmlns:r="http://schemas.openxmlformats.org/officeDocument/2006/relationships" id="272" r:id="R4a163c9e0e2449e7"/>
-    <p:sldId xmlns:r="http://schemas.openxmlformats.org/officeDocument/2006/relationships" id="273" r:id="Rc413555e1ddb4c8c"/>
-    <p:sldId xmlns:r="http://schemas.openxmlformats.org/officeDocument/2006/relationships" id="274" r:id="Re5a3ba9066754ab7"/>
-    <p:sldId xmlns:r="http://schemas.openxmlformats.org/officeDocument/2006/relationships" id="275" r:id="R6c6aee24b238410a"/>
-    <p:sldId xmlns:r="http://schemas.openxmlformats.org/officeDocument/2006/relationships" id="276" r:id="R9312c297670e4d03"/>
-    <p:sldId xmlns:r="http://schemas.openxmlformats.org/officeDocument/2006/relationships" id="277" r:id="Ra272090f07724bb1"/>
-    <p:sldId xmlns:r="http://schemas.openxmlformats.org/officeDocument/2006/relationships" id="278" r:id="R08df9296c9584852"/>
-    <p:sldId xmlns:r="http://schemas.openxmlformats.org/officeDocument/2006/relationships" id="279" r:id="Ra46cb714fd944bf1"/>
-    <p:sldId xmlns:r="http://schemas.openxmlformats.org/officeDocument/2006/relationships" id="280" r:id="R2a1c653fda07419e"/>
-    <p:sldId xmlns:r="http://schemas.openxmlformats.org/officeDocument/2006/relationships" id="281" r:id="R8e081b0b21dc4266"/>
-    <p:sldId xmlns:r="http://schemas.openxmlformats.org/officeDocument/2006/relationships" id="282" r:id="Re83a14fcd2b243ab"/>
-    <p:sldId xmlns:r="http://schemas.openxmlformats.org/officeDocument/2006/relationships" id="283" r:id="Rf890eef86b0949c0"/>
-    <p:sldId xmlns:r="http://schemas.openxmlformats.org/officeDocument/2006/relationships" id="284" r:id="Rd532589008c34c4b"/>
-    <p:sldId xmlns:r="http://schemas.openxmlformats.org/officeDocument/2006/relationships" id="285" r:id="R6a49e00e3ad74a17"/>
-    <p:sldId xmlns:r="http://schemas.openxmlformats.org/officeDocument/2006/relationships" id="286" r:id="R872d0432b6ce41a4"/>
-    <p:sldId xmlns:r="http://schemas.openxmlformats.org/officeDocument/2006/relationships" id="287" r:id="R4360b04ad37f4b87"/>
+    <p:sldId xmlns:r="http://schemas.openxmlformats.org/officeDocument/2006/relationships" id="256" r:id="R40d4c66bb1e640c3"/>
+    <p:sldId xmlns:r="http://schemas.openxmlformats.org/officeDocument/2006/relationships" id="257" r:id="Re7f23336ab5a4d66"/>
+    <p:sldId xmlns:r="http://schemas.openxmlformats.org/officeDocument/2006/relationships" id="258" r:id="R6493c6f2ea924a4d"/>
+    <p:sldId xmlns:r="http://schemas.openxmlformats.org/officeDocument/2006/relationships" id="259" r:id="R6586104c68ad4a8a"/>
+    <p:sldId xmlns:r="http://schemas.openxmlformats.org/officeDocument/2006/relationships" id="260" r:id="R9d5c71df2c51409b"/>
+    <p:sldId xmlns:r="http://schemas.openxmlformats.org/officeDocument/2006/relationships" id="261" r:id="Rf4bff76161644312"/>
+    <p:sldId xmlns:r="http://schemas.openxmlformats.org/officeDocument/2006/relationships" id="262" r:id="Rdc10e91284a24402"/>
+    <p:sldId xmlns:r="http://schemas.openxmlformats.org/officeDocument/2006/relationships" id="263" r:id="R754cac3453054678"/>
+    <p:sldId xmlns:r="http://schemas.openxmlformats.org/officeDocument/2006/relationships" id="264" r:id="Rf81819d9045d4be1"/>
+    <p:sldId xmlns:r="http://schemas.openxmlformats.org/officeDocument/2006/relationships" id="265" r:id="R125875f7add94fff"/>
+    <p:sldId xmlns:r="http://schemas.openxmlformats.org/officeDocument/2006/relationships" id="266" r:id="R56de9e13eb734276"/>
+    <p:sldId xmlns:r="http://schemas.openxmlformats.org/officeDocument/2006/relationships" id="267" r:id="R70d6ff0bb0494258"/>
+    <p:sldId xmlns:r="http://schemas.openxmlformats.org/officeDocument/2006/relationships" id="268" r:id="R63ea99741cd24ea5"/>
+    <p:sldId xmlns:r="http://schemas.openxmlformats.org/officeDocument/2006/relationships" id="269" r:id="R0e37bf8f09bb4499"/>
+    <p:sldId xmlns:r="http://schemas.openxmlformats.org/officeDocument/2006/relationships" id="270" r:id="Rdf72c581371a45b7"/>
+    <p:sldId xmlns:r="http://schemas.openxmlformats.org/officeDocument/2006/relationships" id="271" r:id="R2439f8e531c34723"/>
+    <p:sldId xmlns:r="http://schemas.openxmlformats.org/officeDocument/2006/relationships" id="272" r:id="R146864f9a4c84537"/>
+    <p:sldId xmlns:r="http://schemas.openxmlformats.org/officeDocument/2006/relationships" id="273" r:id="Rdafac062b75042dc"/>
+    <p:sldId xmlns:r="http://schemas.openxmlformats.org/officeDocument/2006/relationships" id="274" r:id="Rfe8a51e152d6462a"/>
+    <p:sldId xmlns:r="http://schemas.openxmlformats.org/officeDocument/2006/relationships" id="275" r:id="R0e801dfb1d664237"/>
+    <p:sldId xmlns:r="http://schemas.openxmlformats.org/officeDocument/2006/relationships" id="276" r:id="R76cda800cd794baa"/>
+    <p:sldId xmlns:r="http://schemas.openxmlformats.org/officeDocument/2006/relationships" id="277" r:id="R71591d7fdc934c12"/>
+    <p:sldId xmlns:r="http://schemas.openxmlformats.org/officeDocument/2006/relationships" id="278" r:id="R4c4df11681624079"/>
+    <p:sldId xmlns:r="http://schemas.openxmlformats.org/officeDocument/2006/relationships" id="279" r:id="Rc6d5402c61204e26"/>
+    <p:sldId xmlns:r="http://schemas.openxmlformats.org/officeDocument/2006/relationships" id="280" r:id="R599c3a8eb90e4b09"/>
+    <p:sldId xmlns:r="http://schemas.openxmlformats.org/officeDocument/2006/relationships" id="281" r:id="R059b60cca18f4f12"/>
+    <p:sldId xmlns:r="http://schemas.openxmlformats.org/officeDocument/2006/relationships" id="282" r:id="R771627d6fb1f4d4b"/>
+    <p:sldId xmlns:r="http://schemas.openxmlformats.org/officeDocument/2006/relationships" id="283" r:id="Re201ef10c9a941f2"/>
+    <p:sldId xmlns:r="http://schemas.openxmlformats.org/officeDocument/2006/relationships" id="284" r:id="R29b652824d234e26"/>
+    <p:sldId xmlns:r="http://schemas.openxmlformats.org/officeDocument/2006/relationships" id="285" r:id="R1b1c1a6e12aa4936"/>
+    <p:sldId xmlns:r="http://schemas.openxmlformats.org/officeDocument/2006/relationships" id="286" r:id="R0f56ef67fc9b487f"/>
+    <p:sldId xmlns:r="http://schemas.openxmlformats.org/officeDocument/2006/relationships" id="287" r:id="Rf0860e0095594101"/>
   </p:sldIdLst>
   <p:sldSz cx="12192000" cy="6858000"/>
   <p:notesSz cx="6858000" cy="9144000"/>
@@ -718,7 +718,7 @@
           </a:p>
           <a:p xmlns:a="http://schemas.openxmlformats.org/drawingml/2006/main">
             <a:r>
-              <a:t>Consequences of international trade Is there a pro-competitive effect? If so, does it increase welfare in all countries?</a:t>
+              <a:t>Consequences of international trade Does more competition always raise welfare? Lower prices help consumers. What happens to producers and transport costs?</a:t>
             </a:r>
           </a:p>
           <a:p xmlns:a="http://schemas.openxmlformats.org/drawingml/2006/main">
@@ -1178,7 +1178,7 @@
           </a:p>
           <a:p xmlns:a="http://schemas.openxmlformats.org/drawingml/2006/main">
             <a:r>
-              <a:t>Market size and industrial restructuring Questions What is the effect of an increased market size on the industry itself? Can some firms leave the market because of the increased competition? If so, is this beneficial for the countries involved?</a:t>
+              <a:t>Market size and industrial restructuring How does a larger market change the industry? More firms compete at first. After exit, the surviving firms are larger. Why might firms exit? The initial price falls below average cost, so firms make losses. Can welfare rise even when firms exit? Yes. In this free-entry model, profits return to zero while consumers pay less.</a:t>
             </a:r>
           </a:p>
           <a:p xmlns:a="http://schemas.openxmlformats.org/drawingml/2006/main">
@@ -1293,7 +1293,7 @@
           </a:p>
           <a:p xmlns:a="http://schemas.openxmlformats.org/drawingml/2006/main">
             <a:r>
-              <a:t>Market size and industrial restructuring Brander and Krugman’s model (1983) with free entry provides an answer. The free entry condition allows us to pin down the number of firms in the market and therefore to understand the effect of trade on the number of firms. First, we look at the closed economy model.</a:t>
+              <a:t>Allowing entry and exit The number of firms can now change. Earlier: a fixed number One firm in each country. Now: free entry Entry and exit determine how many firms remain. Start with a closed economy, then open the markets. Brander and Krugman (1983).</a:t>
             </a:r>
           </a:p>
           <a:p xmlns:a="http://schemas.openxmlformats.org/drawingml/2006/main">
@@ -1753,7 +1753,7 @@
           </a:p>
           <a:p xmlns:a="http://schemas.openxmlformats.org/drawingml/2006/main">
             <a:r>
-              <a:t>Context One of the main benefits of the Single Market is that firms have access to a bigger market . A larger market means more competition between firms, lower prices and increased consumer welfare.</a:t>
+              <a:t>What does a bigger market change? The Single Market lets firms reach customers across borders. More competition Firms face more rivals. Mark-ups and prices fall. Larger firms Surviving firms sell more. Fixed costs are spread over more output. Who gains from integration — and who loses?</a:t>
             </a:r>
           </a:p>
           <a:p xmlns:a="http://schemas.openxmlformats.org/drawingml/2006/main">
@@ -2558,7 +2558,7 @@
           </a:p>
           <a:p xmlns:a="http://schemas.openxmlformats.org/drawingml/2006/main">
             <a:r>
-              <a:t>Next lecture We will talk about migration.</a:t>
+              <a:t>Next lecture Migration What changes when workers, as well as goods, can cross borders? Wages and employment · Who gains and loses · Trade and labour mobility</a:t>
             </a:r>
           </a:p>
           <a:p xmlns:a="http://schemas.openxmlformats.org/drawingml/2006/main">
@@ -3823,7 +3823,7 @@
           </a:p>
           <a:p xmlns:a="http://schemas.openxmlformats.org/drawingml/2006/main">
             <a:r>
-              <a:t>Oligopoly: the Home firm’s problem Choose sales in each market to maximise profit: max x , x * p x + p * x * − c x − c g x * − F \max_{x,x^*}\;px+p^*x^*-cx-\frac{c}{g}x^*-F Home demand p = a − b ( x + y ) p=a-b(x+y) Foreign demand p * = a − b ( x * + y * ) p^*=a-b(x^*+y^*) Substitute the demand functions into the profit function and calculate the two first-order conditions .</a:t>
+              <a:t>Oligopoly: the Home firm’s problem Choose sales at home and abroad to maximise profit: max x , x * ( p − c ) x + ( p * − c g ) x * − F \max_{x,x^*}\;(p-c)x+\left(p^*-\frac{c}{g}\right)x^*-F Market Demand Marginal cost Home p = a − b ( x + y ) p=a-b(x+y) c c Foreign p * = a − b ( x * + y * ) p^*=a-b(x^*+y^*) c / g c/g Substitute these demand functions and find the two first-order conditions .</a:t>
             </a:r>
           </a:p>
           <a:p xmlns:a="http://schemas.openxmlformats.org/drawingml/2006/main">
@@ -4130,7 +4130,7 @@
           <p:cNvPr id="3" name="Title">
             <a:extLst xmlns:a="http://schemas.openxmlformats.org/drawingml/2006/main">
               <a:ext uri="{FF2B5EF4-FFF2-40B4-BE49-F238E27FC236}">
-                <a16:creationId xmlns:a16="http://schemas.microsoft.com/office/drawing/2014/main" id="{A8087353-6E70-43C4-9679-882CD8D35D8B}"/>
+                <a16:creationId xmlns:a16="http://schemas.microsoft.com/office/drawing/2014/main" id="{D6493360-2D5D-4750-AADB-AAF63D1BD169}"/>
               </a:ext>
             </a:extLst>
           </p:cNvPr>
@@ -4359,7 +4359,7 @@
           <p:cNvPr id="2" name="Subtitle">
             <a:extLst xmlns:a="http://schemas.openxmlformats.org/drawingml/2006/main">
               <a:ext uri="{FF2B5EF4-FFF2-40B4-BE49-F238E27FC236}">
-                <a16:creationId xmlns:a16="http://schemas.microsoft.com/office/drawing/2014/main" id="{BBD43156-C61A-43C4-8212-2E6FBAABE838}"/>
+                <a16:creationId xmlns:a16="http://schemas.microsoft.com/office/drawing/2014/main" id="{A1377BBE-2CA8-4863-B962-EB5FDF6A21FD}"/>
               </a:ext>
             </a:extLst>
           </p:cNvPr>
@@ -4605,7 +4605,7 @@
           <p:cNvPr id="2" name="Section title">
             <a:extLst xmlns:a="http://schemas.openxmlformats.org/drawingml/2006/main">
               <a:ext uri="{FF2B5EF4-FFF2-40B4-BE49-F238E27FC236}">
-                <a16:creationId xmlns:a16="http://schemas.microsoft.com/office/drawing/2014/main" id="{F9DA45F2-8814-4FE9-9D8F-857C80632030}"/>
+                <a16:creationId xmlns:a16="http://schemas.microsoft.com/office/drawing/2014/main" id="{1982C5CA-6E2C-4707-8367-36C45F48FFC5}"/>
               </a:ext>
             </a:extLst>
           </p:cNvPr>
@@ -4851,7 +4851,7 @@
           <p:cNvPr id="3" name="Title">
             <a:extLst xmlns:a="http://schemas.openxmlformats.org/drawingml/2006/main">
               <a:ext uri="{FF2B5EF4-FFF2-40B4-BE49-F238E27FC236}">
-                <a16:creationId xmlns:a16="http://schemas.microsoft.com/office/drawing/2014/main" id="{C98A9A78-1DFE-4984-B408-E24CF3087244}"/>
+                <a16:creationId xmlns:a16="http://schemas.microsoft.com/office/drawing/2014/main" id="{9D7ADCD7-203D-4B89-AA54-AAF5706CA5CD}"/>
               </a:ext>
             </a:extLst>
           </p:cNvPr>
@@ -5080,7 +5080,7 @@
           <p:cNvPr id="2" name="Body">
             <a:extLst xmlns:a="http://schemas.openxmlformats.org/drawingml/2006/main">
               <a:ext uri="{FF2B5EF4-FFF2-40B4-BE49-F238E27FC236}">
-                <a16:creationId xmlns:a16="http://schemas.microsoft.com/office/drawing/2014/main" id="{125CE909-8BA1-445E-8896-71B269325F7E}"/>
+                <a16:creationId xmlns:a16="http://schemas.microsoft.com/office/drawing/2014/main" id="{DE04BED0-DD49-4A84-9935-DD44DB4BDD59}"/>
               </a:ext>
             </a:extLst>
           </p:cNvPr>
@@ -5326,7 +5326,7 @@
           <p:cNvPr id="4" name="Title">
             <a:extLst xmlns:a="http://schemas.openxmlformats.org/drawingml/2006/main">
               <a:ext uri="{FF2B5EF4-FFF2-40B4-BE49-F238E27FC236}">
-                <a16:creationId xmlns:a16="http://schemas.microsoft.com/office/drawing/2014/main" id="{835BE333-E54D-4E8B-9AA5-1F6EC886D669}"/>
+                <a16:creationId xmlns:a16="http://schemas.microsoft.com/office/drawing/2014/main" id="{0A9F45B0-B0F8-47E4-85F1-40A9D66C066F}"/>
               </a:ext>
             </a:extLst>
           </p:cNvPr>
@@ -5555,7 +5555,7 @@
           <p:cNvPr id="2" name="Left column">
             <a:extLst xmlns:a="http://schemas.openxmlformats.org/drawingml/2006/main">
               <a:ext uri="{FF2B5EF4-FFF2-40B4-BE49-F238E27FC236}">
-                <a16:creationId xmlns:a16="http://schemas.microsoft.com/office/drawing/2014/main" id="{629FD119-807B-4A31-B8B4-7C8BB9367D1D}"/>
+                <a16:creationId xmlns:a16="http://schemas.microsoft.com/office/drawing/2014/main" id="{C4C9811F-6721-48A0-934C-25C2FC77EDF4}"/>
               </a:ext>
             </a:extLst>
           </p:cNvPr>
@@ -5784,7 +5784,7 @@
           <p:cNvPr id="3" name="Right column">
             <a:extLst xmlns:a="http://schemas.openxmlformats.org/drawingml/2006/main">
               <a:ext uri="{FF2B5EF4-FFF2-40B4-BE49-F238E27FC236}">
-                <a16:creationId xmlns:a16="http://schemas.microsoft.com/office/drawing/2014/main" id="{6C57513F-60A0-417E-8A45-128A25C8C57A}"/>
+                <a16:creationId xmlns:a16="http://schemas.microsoft.com/office/drawing/2014/main" id="{7D9CC9D6-FA61-439B-B4DB-C89773A5D700}"/>
               </a:ext>
             </a:extLst>
           </p:cNvPr>
@@ -6030,7 +6030,7 @@
           <p:cNvPr id="3" name="Title">
             <a:extLst xmlns:a="http://schemas.openxmlformats.org/drawingml/2006/main">
               <a:ext uri="{FF2B5EF4-FFF2-40B4-BE49-F238E27FC236}">
-                <a16:creationId xmlns:a16="http://schemas.microsoft.com/office/drawing/2014/main" id="{0240BFEF-852C-401E-97E5-3174E238DF2D}"/>
+                <a16:creationId xmlns:a16="http://schemas.microsoft.com/office/drawing/2014/main" id="{3FF72CE8-8762-4469-9535-584F5B8F52C0}"/>
               </a:ext>
             </a:extLst>
           </p:cNvPr>
@@ -6259,7 +6259,7 @@
           <p:cNvPr id="2" name="Left column">
             <a:extLst xmlns:a="http://schemas.openxmlformats.org/drawingml/2006/main">
               <a:ext uri="{FF2B5EF4-FFF2-40B4-BE49-F238E27FC236}">
-                <a16:creationId xmlns:a16="http://schemas.microsoft.com/office/drawing/2014/main" id="{57277D9C-3D75-4EBF-A283-137A61B35720}"/>
+                <a16:creationId xmlns:a16="http://schemas.microsoft.com/office/drawing/2014/main" id="{9BD9BF2D-328E-4E8A-83D6-56DC70FD6DAD}"/>
               </a:ext>
             </a:extLst>
           </p:cNvPr>
@@ -6526,12 +6526,12 @@
   </p:cSld>
   <p:clrMap bg1="lt1" tx1="dk1" bg2="lt2" tx2="dk2" accent1="accent1" accent2="accent2" accent3="accent3" accent4="accent4" accent5="accent5" accent6="accent6" hlink="hlink" folHlink="folHlink"/>
   <p:sldLayoutIdLst>
-    <p:sldLayoutId xmlns:r="http://schemas.openxmlformats.org/officeDocument/2006/relationships" id="2147483649" r:id="Rb731846be5d84fed"/>
-    <p:sldLayoutId xmlns:r="http://schemas.openxmlformats.org/officeDocument/2006/relationships" id="2147483650" r:id="R89fd37438aba46ca"/>
-    <p:sldLayoutId xmlns:r="http://schemas.openxmlformats.org/officeDocument/2006/relationships" id="2147483651" r:id="Rd5ad8edf40d14e99"/>
-    <p:sldLayoutId xmlns:r="http://schemas.openxmlformats.org/officeDocument/2006/relationships" id="2147483652" r:id="R56737b3ea403486a"/>
-    <p:sldLayoutId xmlns:r="http://schemas.openxmlformats.org/officeDocument/2006/relationships" id="2147483653" r:id="R28af1f16fd214794"/>
-    <p:sldLayoutId xmlns:r="http://schemas.openxmlformats.org/officeDocument/2006/relationships" id="2147483654" r:id="Rb3eb172a4bc34baa"/>
+    <p:sldLayoutId xmlns:r="http://schemas.openxmlformats.org/officeDocument/2006/relationships" id="2147483649" r:id="R9be0c7fb28fd4e4b"/>
+    <p:sldLayoutId xmlns:r="http://schemas.openxmlformats.org/officeDocument/2006/relationships" id="2147483650" r:id="R3760e0dcf3a14ff1"/>
+    <p:sldLayoutId xmlns:r="http://schemas.openxmlformats.org/officeDocument/2006/relationships" id="2147483651" r:id="R98d631802cf24050"/>
+    <p:sldLayoutId xmlns:r="http://schemas.openxmlformats.org/officeDocument/2006/relationships" id="2147483652" r:id="Rff18c465b6e94a78"/>
+    <p:sldLayoutId xmlns:r="http://schemas.openxmlformats.org/officeDocument/2006/relationships" id="2147483653" r:id="R0aae4352d6ed400e"/>
+    <p:sldLayoutId xmlns:r="http://schemas.openxmlformats.org/officeDocument/2006/relationships" id="2147483654" r:id="R1798f378e4f24b54"/>
   </p:sldLayoutIdLst>
   <p:txStyles>
     <p:titleStyle>
@@ -7075,7 +7075,7 @@
           <p:cNvPr id="2" name="">
             <a:extLst xmlns:a="http://schemas.openxmlformats.org/drawingml/2006/main">
               <a:ext uri="{FF2B5EF4-FFF2-40B4-BE49-F238E27FC236}">
-                <a16:creationId xmlns:a16="http://schemas.microsoft.com/office/drawing/2014/main" id="{D95C3FF6-E303-4626-817A-EF9445ABAE85}"/>
+                <a16:creationId xmlns:a16="http://schemas.microsoft.com/office/drawing/2014/main" id="{E56599A0-1FDF-40FD-8345-FC9B976E334B}"/>
               </a:ext>
             </a:extLst>
           </p:cNvPr>
@@ -7085,7 +7085,7 @@
           <p:nvPr/>
         </p:nvPicPr>
         <p:blipFill>
-          <a:blip xmlns:r="http://schemas.openxmlformats.org/officeDocument/2006/relationships" xmlns:a="http://schemas.openxmlformats.org/drawingml/2006/main" r:embed="R0ca5741eaf014a43"/>
+          <a:blip xmlns:r="http://schemas.openxmlformats.org/officeDocument/2006/relationships" xmlns:a="http://schemas.openxmlformats.org/drawingml/2006/main" r:embed="R54f0812d6de7468a"/>
           <a:stretch xmlns:a="http://schemas.openxmlformats.org/drawingml/2006/main"/>
         </p:blipFill>
         <p:spPr>
@@ -7101,7 +7101,7 @@
     </p:spTree>
     <p:extLst>
       <p:ext uri="{BB962C8B-B14F-4D97-AF65-F5344CB8AC3E}">
-        <p14:creationId xmlns:p14="http://schemas.microsoft.com/office/powerpoint/2010/main" val="161742045"/>
+        <p14:creationId xmlns:p14="http://schemas.microsoft.com/office/powerpoint/2010/main" val="436615682"/>
       </p:ext>
     </p:extLst>
   </p:cSld>
@@ -7125,7 +7125,7 @@
           <p:cNvPr id="2" name="">
             <a:extLst xmlns:a="http://schemas.openxmlformats.org/drawingml/2006/main">
               <a:ext uri="{FF2B5EF4-FFF2-40B4-BE49-F238E27FC236}">
-                <a16:creationId xmlns:a16="http://schemas.microsoft.com/office/drawing/2014/main" id="{C46487DA-E983-4D47-BDB7-3C472E1BD201}"/>
+                <a16:creationId xmlns:a16="http://schemas.microsoft.com/office/drawing/2014/main" id="{79153719-CFAC-4E3F-8F27-21B1C375C22A}"/>
               </a:ext>
             </a:extLst>
           </p:cNvPr>
@@ -7135,7 +7135,7 @@
           <p:nvPr/>
         </p:nvPicPr>
         <p:blipFill>
-          <a:blip xmlns:r="http://schemas.openxmlformats.org/officeDocument/2006/relationships" xmlns:a="http://schemas.openxmlformats.org/drawingml/2006/main" r:embed="R25fae956fb0a4493"/>
+          <a:blip xmlns:r="http://schemas.openxmlformats.org/officeDocument/2006/relationships" xmlns:a="http://schemas.openxmlformats.org/drawingml/2006/main" r:embed="R42f5c17b53894515"/>
           <a:stretch xmlns:a="http://schemas.openxmlformats.org/drawingml/2006/main"/>
         </p:blipFill>
         <p:spPr>
@@ -7151,7 +7151,7 @@
     </p:spTree>
     <p:extLst>
       <p:ext uri="{BB962C8B-B14F-4D97-AF65-F5344CB8AC3E}">
-        <p14:creationId xmlns:p14="http://schemas.microsoft.com/office/powerpoint/2010/main" val="563916584"/>
+        <p14:creationId xmlns:p14="http://schemas.microsoft.com/office/powerpoint/2010/main" val="1186395042"/>
       </p:ext>
     </p:extLst>
   </p:cSld>
@@ -7175,7 +7175,7 @@
           <p:cNvPr id="2" name="">
             <a:extLst xmlns:a="http://schemas.openxmlformats.org/drawingml/2006/main">
               <a:ext uri="{FF2B5EF4-FFF2-40B4-BE49-F238E27FC236}">
-                <a16:creationId xmlns:a16="http://schemas.microsoft.com/office/drawing/2014/main" id="{B6DAE3BF-271F-4581-BB2E-ED615D4D093B}"/>
+                <a16:creationId xmlns:a16="http://schemas.microsoft.com/office/drawing/2014/main" id="{2C3B90ED-33C8-4C31-A688-E9C9DE82451D}"/>
               </a:ext>
             </a:extLst>
           </p:cNvPr>
@@ -7185,7 +7185,7 @@
           <p:nvPr/>
         </p:nvPicPr>
         <p:blipFill>
-          <a:blip xmlns:r="http://schemas.openxmlformats.org/officeDocument/2006/relationships" xmlns:a="http://schemas.openxmlformats.org/drawingml/2006/main" r:embed="R0f349ca14db34717"/>
+          <a:blip xmlns:r="http://schemas.openxmlformats.org/officeDocument/2006/relationships" xmlns:a="http://schemas.openxmlformats.org/drawingml/2006/main" r:embed="R695b3549edb14e4c"/>
           <a:stretch xmlns:a="http://schemas.openxmlformats.org/drawingml/2006/main"/>
         </p:blipFill>
         <p:spPr>
@@ -7201,7 +7201,7 @@
     </p:spTree>
     <p:extLst>
       <p:ext uri="{BB962C8B-B14F-4D97-AF65-F5344CB8AC3E}">
-        <p14:creationId xmlns:p14="http://schemas.microsoft.com/office/powerpoint/2010/main" val="241663102"/>
+        <p14:creationId xmlns:p14="http://schemas.microsoft.com/office/powerpoint/2010/main" val="882294915"/>
       </p:ext>
     </p:extLst>
   </p:cSld>
@@ -7225,7 +7225,7 @@
           <p:cNvPr id="2" name="">
             <a:extLst xmlns:a="http://schemas.openxmlformats.org/drawingml/2006/main">
               <a:ext uri="{FF2B5EF4-FFF2-40B4-BE49-F238E27FC236}">
-                <a16:creationId xmlns:a16="http://schemas.microsoft.com/office/drawing/2014/main" id="{F3476B65-2824-4CB9-B47E-670204B1D3FA}"/>
+                <a16:creationId xmlns:a16="http://schemas.microsoft.com/office/drawing/2014/main" id="{09B4E229-629C-4556-957F-3AEDB9B7C875}"/>
               </a:ext>
             </a:extLst>
           </p:cNvPr>
@@ -7235,7 +7235,7 @@
           <p:nvPr/>
         </p:nvPicPr>
         <p:blipFill>
-          <a:blip xmlns:r="http://schemas.openxmlformats.org/officeDocument/2006/relationships" xmlns:a="http://schemas.openxmlformats.org/drawingml/2006/main" r:embed="R4735594d8bf04e0c"/>
+          <a:blip xmlns:r="http://schemas.openxmlformats.org/officeDocument/2006/relationships" xmlns:a="http://schemas.openxmlformats.org/drawingml/2006/main" r:embed="R4ba00444db524a6c"/>
           <a:stretch xmlns:a="http://schemas.openxmlformats.org/drawingml/2006/main"/>
         </p:blipFill>
         <p:spPr>
@@ -7251,7 +7251,7 @@
     </p:spTree>
     <p:extLst>
       <p:ext uri="{BB962C8B-B14F-4D97-AF65-F5344CB8AC3E}">
-        <p14:creationId xmlns:p14="http://schemas.microsoft.com/office/powerpoint/2010/main" val="1318028482"/>
+        <p14:creationId xmlns:p14="http://schemas.microsoft.com/office/powerpoint/2010/main" val="242584312"/>
       </p:ext>
     </p:extLst>
   </p:cSld>
@@ -7275,7 +7275,7 @@
           <p:cNvPr id="2" name="">
             <a:extLst xmlns:a="http://schemas.openxmlformats.org/drawingml/2006/main">
               <a:ext uri="{FF2B5EF4-FFF2-40B4-BE49-F238E27FC236}">
-                <a16:creationId xmlns:a16="http://schemas.microsoft.com/office/drawing/2014/main" id="{18F1C948-7C42-4D4C-9F56-57C5D4365075}"/>
+                <a16:creationId xmlns:a16="http://schemas.microsoft.com/office/drawing/2014/main" id="{FF589A52-F175-48CF-8D47-99AD63EE35F3}"/>
               </a:ext>
             </a:extLst>
           </p:cNvPr>
@@ -7285,7 +7285,7 @@
           <p:nvPr/>
         </p:nvPicPr>
         <p:blipFill>
-          <a:blip xmlns:r="http://schemas.openxmlformats.org/officeDocument/2006/relationships" xmlns:a="http://schemas.openxmlformats.org/drawingml/2006/main" r:embed="Ra4cc91e498cf49b3"/>
+          <a:blip xmlns:r="http://schemas.openxmlformats.org/officeDocument/2006/relationships" xmlns:a="http://schemas.openxmlformats.org/drawingml/2006/main" r:embed="R9ee420aa9f854c9e"/>
           <a:stretch xmlns:a="http://schemas.openxmlformats.org/drawingml/2006/main"/>
         </p:blipFill>
         <p:spPr>
@@ -7301,7 +7301,7 @@
     </p:spTree>
     <p:extLst>
       <p:ext uri="{BB962C8B-B14F-4D97-AF65-F5344CB8AC3E}">
-        <p14:creationId xmlns:p14="http://schemas.microsoft.com/office/powerpoint/2010/main" val="615098568"/>
+        <p14:creationId xmlns:p14="http://schemas.microsoft.com/office/powerpoint/2010/main" val="1062306314"/>
       </p:ext>
     </p:extLst>
   </p:cSld>
@@ -7325,7 +7325,7 @@
           <p:cNvPr id="2" name="">
             <a:extLst xmlns:a="http://schemas.openxmlformats.org/drawingml/2006/main">
               <a:ext uri="{FF2B5EF4-FFF2-40B4-BE49-F238E27FC236}">
-                <a16:creationId xmlns:a16="http://schemas.microsoft.com/office/drawing/2014/main" id="{CC7E0602-F0D5-433D-AFAC-2ABF11CACB2C}"/>
+                <a16:creationId xmlns:a16="http://schemas.microsoft.com/office/drawing/2014/main" id="{467E4D84-8608-44E3-AAC2-473195ECC554}"/>
               </a:ext>
             </a:extLst>
           </p:cNvPr>
@@ -7335,7 +7335,7 @@
           <p:nvPr/>
         </p:nvPicPr>
         <p:blipFill>
-          <a:blip xmlns:r="http://schemas.openxmlformats.org/officeDocument/2006/relationships" xmlns:a="http://schemas.openxmlformats.org/drawingml/2006/main" r:embed="R8fcc6e4a65a740d8"/>
+          <a:blip xmlns:r="http://schemas.openxmlformats.org/officeDocument/2006/relationships" xmlns:a="http://schemas.openxmlformats.org/drawingml/2006/main" r:embed="R098979e448824895"/>
           <a:stretch xmlns:a="http://schemas.openxmlformats.org/drawingml/2006/main"/>
         </p:blipFill>
         <p:spPr>
@@ -7351,7 +7351,7 @@
     </p:spTree>
     <p:extLst>
       <p:ext uri="{BB962C8B-B14F-4D97-AF65-F5344CB8AC3E}">
-        <p14:creationId xmlns:p14="http://schemas.microsoft.com/office/powerpoint/2010/main" val="1528002657"/>
+        <p14:creationId xmlns:p14="http://schemas.microsoft.com/office/powerpoint/2010/main" val="126725741"/>
       </p:ext>
     </p:extLst>
   </p:cSld>
@@ -7375,7 +7375,7 @@
           <p:cNvPr id="2" name="">
             <a:extLst xmlns:a="http://schemas.openxmlformats.org/drawingml/2006/main">
               <a:ext uri="{FF2B5EF4-FFF2-40B4-BE49-F238E27FC236}">
-                <a16:creationId xmlns:a16="http://schemas.microsoft.com/office/drawing/2014/main" id="{9708FD25-C0C0-4D00-930E-AECA56E36834}"/>
+                <a16:creationId xmlns:a16="http://schemas.microsoft.com/office/drawing/2014/main" id="{3B0E34EC-559C-4DB0-A4FF-9E20238FE6CA}"/>
               </a:ext>
             </a:extLst>
           </p:cNvPr>
@@ -7385,7 +7385,7 @@
           <p:nvPr/>
         </p:nvPicPr>
         <p:blipFill>
-          <a:blip xmlns:r="http://schemas.openxmlformats.org/officeDocument/2006/relationships" xmlns:a="http://schemas.openxmlformats.org/drawingml/2006/main" r:embed="R989a3b125d95498c"/>
+          <a:blip xmlns:r="http://schemas.openxmlformats.org/officeDocument/2006/relationships" xmlns:a="http://schemas.openxmlformats.org/drawingml/2006/main" r:embed="R6fe78c1013f54ba1"/>
           <a:stretch xmlns:a="http://schemas.openxmlformats.org/drawingml/2006/main"/>
         </p:blipFill>
         <p:spPr>
@@ -7401,7 +7401,7 @@
     </p:spTree>
     <p:extLst>
       <p:ext uri="{BB962C8B-B14F-4D97-AF65-F5344CB8AC3E}">
-        <p14:creationId xmlns:p14="http://schemas.microsoft.com/office/powerpoint/2010/main" val="1377683802"/>
+        <p14:creationId xmlns:p14="http://schemas.microsoft.com/office/powerpoint/2010/main" val="1611762864"/>
       </p:ext>
     </p:extLst>
   </p:cSld>
@@ -7425,7 +7425,7 @@
           <p:cNvPr id="2" name="">
             <a:extLst xmlns:a="http://schemas.openxmlformats.org/drawingml/2006/main">
               <a:ext uri="{FF2B5EF4-FFF2-40B4-BE49-F238E27FC236}">
-                <a16:creationId xmlns:a16="http://schemas.microsoft.com/office/drawing/2014/main" id="{2302EE8E-F310-41AE-9602-10E6D1519652}"/>
+                <a16:creationId xmlns:a16="http://schemas.microsoft.com/office/drawing/2014/main" id="{5C0940DE-63EC-41B0-8DCF-047F4F877750}"/>
               </a:ext>
             </a:extLst>
           </p:cNvPr>
@@ -7435,7 +7435,7 @@
           <p:nvPr/>
         </p:nvPicPr>
         <p:blipFill>
-          <a:blip xmlns:r="http://schemas.openxmlformats.org/officeDocument/2006/relationships" xmlns:a="http://schemas.openxmlformats.org/drawingml/2006/main" r:embed="R604de42d34014c7d"/>
+          <a:blip xmlns:r="http://schemas.openxmlformats.org/officeDocument/2006/relationships" xmlns:a="http://schemas.openxmlformats.org/drawingml/2006/main" r:embed="Ra43442ac7a1d436a"/>
           <a:stretch xmlns:a="http://schemas.openxmlformats.org/drawingml/2006/main"/>
         </p:blipFill>
         <p:spPr>
@@ -7451,7 +7451,7 @@
     </p:spTree>
     <p:extLst>
       <p:ext uri="{BB962C8B-B14F-4D97-AF65-F5344CB8AC3E}">
-        <p14:creationId xmlns:p14="http://schemas.microsoft.com/office/powerpoint/2010/main" val="2050252709"/>
+        <p14:creationId xmlns:p14="http://schemas.microsoft.com/office/powerpoint/2010/main" val="1946253017"/>
       </p:ext>
     </p:extLst>
   </p:cSld>
@@ -7475,7 +7475,7 @@
           <p:cNvPr id="2" name="">
             <a:extLst xmlns:a="http://schemas.openxmlformats.org/drawingml/2006/main">
               <a:ext uri="{FF2B5EF4-FFF2-40B4-BE49-F238E27FC236}">
-                <a16:creationId xmlns:a16="http://schemas.microsoft.com/office/drawing/2014/main" id="{89D6EF7E-32A3-48F3-82D0-28A815F804A2}"/>
+                <a16:creationId xmlns:a16="http://schemas.microsoft.com/office/drawing/2014/main" id="{C33CA065-CFE1-43B8-B0BB-EAAA3034C339}"/>
               </a:ext>
             </a:extLst>
           </p:cNvPr>
@@ -7485,7 +7485,7 @@
           <p:nvPr/>
         </p:nvPicPr>
         <p:blipFill>
-          <a:blip xmlns:r="http://schemas.openxmlformats.org/officeDocument/2006/relationships" xmlns:a="http://schemas.openxmlformats.org/drawingml/2006/main" r:embed="R95f043b25b304431"/>
+          <a:blip xmlns:r="http://schemas.openxmlformats.org/officeDocument/2006/relationships" xmlns:a="http://schemas.openxmlformats.org/drawingml/2006/main" r:embed="Re22173731dba44cb"/>
           <a:stretch xmlns:a="http://schemas.openxmlformats.org/drawingml/2006/main"/>
         </p:blipFill>
         <p:spPr>
@@ -7501,7 +7501,7 @@
     </p:spTree>
     <p:extLst>
       <p:ext uri="{BB962C8B-B14F-4D97-AF65-F5344CB8AC3E}">
-        <p14:creationId xmlns:p14="http://schemas.microsoft.com/office/powerpoint/2010/main" val="1340104102"/>
+        <p14:creationId xmlns:p14="http://schemas.microsoft.com/office/powerpoint/2010/main" val="1323209826"/>
       </p:ext>
     </p:extLst>
   </p:cSld>
@@ -7525,7 +7525,7 @@
           <p:cNvPr id="2" name="">
             <a:extLst xmlns:a="http://schemas.openxmlformats.org/drawingml/2006/main">
               <a:ext uri="{FF2B5EF4-FFF2-40B4-BE49-F238E27FC236}">
-                <a16:creationId xmlns:a16="http://schemas.microsoft.com/office/drawing/2014/main" id="{65E571CD-B1BA-4B70-B0FF-A4418ADE4957}"/>
+                <a16:creationId xmlns:a16="http://schemas.microsoft.com/office/drawing/2014/main" id="{F70F508B-C2B0-4F74-AB36-4F5A3F256614}"/>
               </a:ext>
             </a:extLst>
           </p:cNvPr>
@@ -7535,7 +7535,7 @@
           <p:nvPr/>
         </p:nvPicPr>
         <p:blipFill>
-          <a:blip xmlns:r="http://schemas.openxmlformats.org/officeDocument/2006/relationships" xmlns:a="http://schemas.openxmlformats.org/drawingml/2006/main" r:embed="Rc20630fa475747bb"/>
+          <a:blip xmlns:r="http://schemas.openxmlformats.org/officeDocument/2006/relationships" xmlns:a="http://schemas.openxmlformats.org/drawingml/2006/main" r:embed="R90d3b86478ff443e"/>
           <a:stretch xmlns:a="http://schemas.openxmlformats.org/drawingml/2006/main"/>
         </p:blipFill>
         <p:spPr>
@@ -7551,7 +7551,7 @@
     </p:spTree>
     <p:extLst>
       <p:ext uri="{BB962C8B-B14F-4D97-AF65-F5344CB8AC3E}">
-        <p14:creationId xmlns:p14="http://schemas.microsoft.com/office/powerpoint/2010/main" val="1200192484"/>
+        <p14:creationId xmlns:p14="http://schemas.microsoft.com/office/powerpoint/2010/main" val="981313792"/>
       </p:ext>
     </p:extLst>
   </p:cSld>
@@ -7575,7 +7575,7 @@
           <p:cNvPr id="2" name="">
             <a:extLst xmlns:a="http://schemas.openxmlformats.org/drawingml/2006/main">
               <a:ext uri="{FF2B5EF4-FFF2-40B4-BE49-F238E27FC236}">
-                <a16:creationId xmlns:a16="http://schemas.microsoft.com/office/drawing/2014/main" id="{C153CB0B-64A8-4000-82A3-59771F09A4A0}"/>
+                <a16:creationId xmlns:a16="http://schemas.microsoft.com/office/drawing/2014/main" id="{EF333B66-4DAB-40B8-8FDB-CD427954E0DA}"/>
               </a:ext>
             </a:extLst>
           </p:cNvPr>
@@ -7585,7 +7585,7 @@
           <p:nvPr/>
         </p:nvPicPr>
         <p:blipFill>
-          <a:blip xmlns:r="http://schemas.openxmlformats.org/officeDocument/2006/relationships" xmlns:a="http://schemas.openxmlformats.org/drawingml/2006/main" r:embed="Re3fc016040134ff3"/>
+          <a:blip xmlns:r="http://schemas.openxmlformats.org/officeDocument/2006/relationships" xmlns:a="http://schemas.openxmlformats.org/drawingml/2006/main" r:embed="R4d4b3d5a6de2451a"/>
           <a:stretch xmlns:a="http://schemas.openxmlformats.org/drawingml/2006/main"/>
         </p:blipFill>
         <p:spPr>
@@ -7601,7 +7601,7 @@
     </p:spTree>
     <p:extLst>
       <p:ext uri="{BB962C8B-B14F-4D97-AF65-F5344CB8AC3E}">
-        <p14:creationId xmlns:p14="http://schemas.microsoft.com/office/powerpoint/2010/main" val="1149050775"/>
+        <p14:creationId xmlns:p14="http://schemas.microsoft.com/office/powerpoint/2010/main" val="965524633"/>
       </p:ext>
     </p:extLst>
   </p:cSld>
@@ -7625,7 +7625,7 @@
           <p:cNvPr id="2" name="">
             <a:extLst xmlns:a="http://schemas.openxmlformats.org/drawingml/2006/main">
               <a:ext uri="{FF2B5EF4-FFF2-40B4-BE49-F238E27FC236}">
-                <a16:creationId xmlns:a16="http://schemas.microsoft.com/office/drawing/2014/main" id="{39B94570-AA02-4494-9AB3-922E6154AAAF}"/>
+                <a16:creationId xmlns:a16="http://schemas.microsoft.com/office/drawing/2014/main" id="{0A375572-7CCD-44A7-B592-314687806001}"/>
               </a:ext>
             </a:extLst>
           </p:cNvPr>
@@ -7635,7 +7635,7 @@
           <p:nvPr/>
         </p:nvPicPr>
         <p:blipFill>
-          <a:blip xmlns:r="http://schemas.openxmlformats.org/officeDocument/2006/relationships" xmlns:a="http://schemas.openxmlformats.org/drawingml/2006/main" r:embed="R809ef47e378d4115"/>
+          <a:blip xmlns:r="http://schemas.openxmlformats.org/officeDocument/2006/relationships" xmlns:a="http://schemas.openxmlformats.org/drawingml/2006/main" r:embed="Re4497d1c2ea644c8"/>
           <a:stretch xmlns:a="http://schemas.openxmlformats.org/drawingml/2006/main"/>
         </p:blipFill>
         <p:spPr>
@@ -7651,7 +7651,7 @@
     </p:spTree>
     <p:extLst>
       <p:ext uri="{BB962C8B-B14F-4D97-AF65-F5344CB8AC3E}">
-        <p14:creationId xmlns:p14="http://schemas.microsoft.com/office/powerpoint/2010/main" val="1066350706"/>
+        <p14:creationId xmlns:p14="http://schemas.microsoft.com/office/powerpoint/2010/main" val="929993227"/>
       </p:ext>
     </p:extLst>
   </p:cSld>
@@ -7675,7 +7675,7 @@
           <p:cNvPr id="2" name="">
             <a:extLst xmlns:a="http://schemas.openxmlformats.org/drawingml/2006/main">
               <a:ext uri="{FF2B5EF4-FFF2-40B4-BE49-F238E27FC236}">
-                <a16:creationId xmlns:a16="http://schemas.microsoft.com/office/drawing/2014/main" id="{E740FC08-F16E-4C2A-A09B-904E1E4A76C7}"/>
+                <a16:creationId xmlns:a16="http://schemas.microsoft.com/office/drawing/2014/main" id="{536F0B1A-3209-4E49-8AF2-E9FE10A1989E}"/>
               </a:ext>
             </a:extLst>
           </p:cNvPr>
@@ -7685,7 +7685,7 @@
           <p:nvPr/>
         </p:nvPicPr>
         <p:blipFill>
-          <a:blip xmlns:r="http://schemas.openxmlformats.org/officeDocument/2006/relationships" xmlns:a="http://schemas.openxmlformats.org/drawingml/2006/main" r:embed="R225a6f2be2574361"/>
+          <a:blip xmlns:r="http://schemas.openxmlformats.org/officeDocument/2006/relationships" xmlns:a="http://schemas.openxmlformats.org/drawingml/2006/main" r:embed="R4939dde0ecec4c6d"/>
           <a:stretch xmlns:a="http://schemas.openxmlformats.org/drawingml/2006/main"/>
         </p:blipFill>
         <p:spPr>
@@ -7701,7 +7701,7 @@
     </p:spTree>
     <p:extLst>
       <p:ext uri="{BB962C8B-B14F-4D97-AF65-F5344CB8AC3E}">
-        <p14:creationId xmlns:p14="http://schemas.microsoft.com/office/powerpoint/2010/main" val="930463080"/>
+        <p14:creationId xmlns:p14="http://schemas.microsoft.com/office/powerpoint/2010/main" val="1935373792"/>
       </p:ext>
     </p:extLst>
   </p:cSld>
@@ -7725,7 +7725,7 @@
           <p:cNvPr id="2" name="">
             <a:extLst xmlns:a="http://schemas.openxmlformats.org/drawingml/2006/main">
               <a:ext uri="{FF2B5EF4-FFF2-40B4-BE49-F238E27FC236}">
-                <a16:creationId xmlns:a16="http://schemas.microsoft.com/office/drawing/2014/main" id="{BC6D3A00-9B3C-403E-9D3B-B10E816CA86C}"/>
+                <a16:creationId xmlns:a16="http://schemas.microsoft.com/office/drawing/2014/main" id="{F3056C05-3ACA-44E8-BAF7-1E23DCEC500E}"/>
               </a:ext>
             </a:extLst>
           </p:cNvPr>
@@ -7735,7 +7735,7 @@
           <p:nvPr/>
         </p:nvPicPr>
         <p:blipFill>
-          <a:blip xmlns:r="http://schemas.openxmlformats.org/officeDocument/2006/relationships" xmlns:a="http://schemas.openxmlformats.org/drawingml/2006/main" r:embed="R886aa5d5163e479f"/>
+          <a:blip xmlns:r="http://schemas.openxmlformats.org/officeDocument/2006/relationships" xmlns:a="http://schemas.openxmlformats.org/drawingml/2006/main" r:embed="R3d8fcde613dd4c9a"/>
           <a:stretch xmlns:a="http://schemas.openxmlformats.org/drawingml/2006/main"/>
         </p:blipFill>
         <p:spPr>
@@ -7751,7 +7751,7 @@
     </p:spTree>
     <p:extLst>
       <p:ext uri="{BB962C8B-B14F-4D97-AF65-F5344CB8AC3E}">
-        <p14:creationId xmlns:p14="http://schemas.microsoft.com/office/powerpoint/2010/main" val="243431418"/>
+        <p14:creationId xmlns:p14="http://schemas.microsoft.com/office/powerpoint/2010/main" val="35666833"/>
       </p:ext>
     </p:extLst>
   </p:cSld>
@@ -7775,7 +7775,7 @@
           <p:cNvPr id="2" name="">
             <a:extLst xmlns:a="http://schemas.openxmlformats.org/drawingml/2006/main">
               <a:ext uri="{FF2B5EF4-FFF2-40B4-BE49-F238E27FC236}">
-                <a16:creationId xmlns:a16="http://schemas.microsoft.com/office/drawing/2014/main" id="{C9D7EB98-BB6C-4995-9FB9-DA0934A5DBC5}"/>
+                <a16:creationId xmlns:a16="http://schemas.microsoft.com/office/drawing/2014/main" id="{A6D9A042-DE40-4A84-86C1-129B4E5D8B29}"/>
               </a:ext>
             </a:extLst>
           </p:cNvPr>
@@ -7785,7 +7785,7 @@
           <p:nvPr/>
         </p:nvPicPr>
         <p:blipFill>
-          <a:blip xmlns:r="http://schemas.openxmlformats.org/officeDocument/2006/relationships" xmlns:a="http://schemas.openxmlformats.org/drawingml/2006/main" r:embed="R6610206a823b4b10"/>
+          <a:blip xmlns:r="http://schemas.openxmlformats.org/officeDocument/2006/relationships" xmlns:a="http://schemas.openxmlformats.org/drawingml/2006/main" r:embed="R24ccae8755a04430"/>
           <a:stretch xmlns:a="http://schemas.openxmlformats.org/drawingml/2006/main"/>
         </p:blipFill>
         <p:spPr>
@@ -7801,7 +7801,7 @@
     </p:spTree>
     <p:extLst>
       <p:ext uri="{BB962C8B-B14F-4D97-AF65-F5344CB8AC3E}">
-        <p14:creationId xmlns:p14="http://schemas.microsoft.com/office/powerpoint/2010/main" val="106518143"/>
+        <p14:creationId xmlns:p14="http://schemas.microsoft.com/office/powerpoint/2010/main" val="386954444"/>
       </p:ext>
     </p:extLst>
   </p:cSld>
@@ -7825,7 +7825,7 @@
           <p:cNvPr id="2" name="">
             <a:extLst xmlns:a="http://schemas.openxmlformats.org/drawingml/2006/main">
               <a:ext uri="{FF2B5EF4-FFF2-40B4-BE49-F238E27FC236}">
-                <a16:creationId xmlns:a16="http://schemas.microsoft.com/office/drawing/2014/main" id="{42ED0262-76BB-4EC6-891D-F48564E93245}"/>
+                <a16:creationId xmlns:a16="http://schemas.microsoft.com/office/drawing/2014/main" id="{01B0BCFB-46B4-4D86-A6CA-6399E18DA78C}"/>
               </a:ext>
             </a:extLst>
           </p:cNvPr>
@@ -7835,7 +7835,7 @@
           <p:nvPr/>
         </p:nvPicPr>
         <p:blipFill>
-          <a:blip xmlns:r="http://schemas.openxmlformats.org/officeDocument/2006/relationships" xmlns:a="http://schemas.openxmlformats.org/drawingml/2006/main" r:embed="R2651b264893f4c27"/>
+          <a:blip xmlns:r="http://schemas.openxmlformats.org/officeDocument/2006/relationships" xmlns:a="http://schemas.openxmlformats.org/drawingml/2006/main" r:embed="Rccb47b340bc54d86"/>
           <a:stretch xmlns:a="http://schemas.openxmlformats.org/drawingml/2006/main"/>
         </p:blipFill>
         <p:spPr>
@@ -7851,7 +7851,7 @@
     </p:spTree>
     <p:extLst>
       <p:ext uri="{BB962C8B-B14F-4D97-AF65-F5344CB8AC3E}">
-        <p14:creationId xmlns:p14="http://schemas.microsoft.com/office/powerpoint/2010/main" val="1506859425"/>
+        <p14:creationId xmlns:p14="http://schemas.microsoft.com/office/powerpoint/2010/main" val="1815424753"/>
       </p:ext>
     </p:extLst>
   </p:cSld>
@@ -7875,7 +7875,7 @@
           <p:cNvPr id="2" name="">
             <a:extLst xmlns:a="http://schemas.openxmlformats.org/drawingml/2006/main">
               <a:ext uri="{FF2B5EF4-FFF2-40B4-BE49-F238E27FC236}">
-                <a16:creationId xmlns:a16="http://schemas.microsoft.com/office/drawing/2014/main" id="{B1DAE57D-0B1D-4765-A3EB-A76DBE6CF05E}"/>
+                <a16:creationId xmlns:a16="http://schemas.microsoft.com/office/drawing/2014/main" id="{2346E97A-880D-4CF3-9A6B-1EA60940FEA1}"/>
               </a:ext>
             </a:extLst>
           </p:cNvPr>
@@ -7885,7 +7885,7 @@
           <p:nvPr/>
         </p:nvPicPr>
         <p:blipFill>
-          <a:blip xmlns:r="http://schemas.openxmlformats.org/officeDocument/2006/relationships" xmlns:a="http://schemas.openxmlformats.org/drawingml/2006/main" r:embed="R81ae99bd06194b63"/>
+          <a:blip xmlns:r="http://schemas.openxmlformats.org/officeDocument/2006/relationships" xmlns:a="http://schemas.openxmlformats.org/drawingml/2006/main" r:embed="Rc2331b6c5aa64013"/>
           <a:stretch xmlns:a="http://schemas.openxmlformats.org/drawingml/2006/main"/>
         </p:blipFill>
         <p:spPr>
@@ -7901,7 +7901,7 @@
     </p:spTree>
     <p:extLst>
       <p:ext uri="{BB962C8B-B14F-4D97-AF65-F5344CB8AC3E}">
-        <p14:creationId xmlns:p14="http://schemas.microsoft.com/office/powerpoint/2010/main" val="271262879"/>
+        <p14:creationId xmlns:p14="http://schemas.microsoft.com/office/powerpoint/2010/main" val="976840321"/>
       </p:ext>
     </p:extLst>
   </p:cSld>
@@ -7925,7 +7925,7 @@
           <p:cNvPr id="2" name="">
             <a:extLst xmlns:a="http://schemas.openxmlformats.org/drawingml/2006/main">
               <a:ext uri="{FF2B5EF4-FFF2-40B4-BE49-F238E27FC236}">
-                <a16:creationId xmlns:a16="http://schemas.microsoft.com/office/drawing/2014/main" id="{3C8DD8AF-9BF2-4715-A4A8-1DB7E614222B}"/>
+                <a16:creationId xmlns:a16="http://schemas.microsoft.com/office/drawing/2014/main" id="{87C15964-C622-4F6B-9F28-488D0D535359}"/>
               </a:ext>
             </a:extLst>
           </p:cNvPr>
@@ -7935,7 +7935,7 @@
           <p:nvPr/>
         </p:nvPicPr>
         <p:blipFill>
-          <a:blip xmlns:r="http://schemas.openxmlformats.org/officeDocument/2006/relationships" xmlns:a="http://schemas.openxmlformats.org/drawingml/2006/main" r:embed="R40ec0824b825448b"/>
+          <a:blip xmlns:r="http://schemas.openxmlformats.org/officeDocument/2006/relationships" xmlns:a="http://schemas.openxmlformats.org/drawingml/2006/main" r:embed="Ra2eb12a42c2f4d41"/>
           <a:stretch xmlns:a="http://schemas.openxmlformats.org/drawingml/2006/main"/>
         </p:blipFill>
         <p:spPr>
@@ -7951,7 +7951,7 @@
     </p:spTree>
     <p:extLst>
       <p:ext uri="{BB962C8B-B14F-4D97-AF65-F5344CB8AC3E}">
-        <p14:creationId xmlns:p14="http://schemas.microsoft.com/office/powerpoint/2010/main" val="431396000"/>
+        <p14:creationId xmlns:p14="http://schemas.microsoft.com/office/powerpoint/2010/main" val="269007755"/>
       </p:ext>
     </p:extLst>
   </p:cSld>
@@ -7975,7 +7975,7 @@
           <p:cNvPr id="2" name="">
             <a:extLst xmlns:a="http://schemas.openxmlformats.org/drawingml/2006/main">
               <a:ext uri="{FF2B5EF4-FFF2-40B4-BE49-F238E27FC236}">
-                <a16:creationId xmlns:a16="http://schemas.microsoft.com/office/drawing/2014/main" id="{FBCE621E-6452-4A23-BA6D-E00ACDEB3A3E}"/>
+                <a16:creationId xmlns:a16="http://schemas.microsoft.com/office/drawing/2014/main" id="{3A1BF246-49E5-4378-87E0-BA459E55CD7A}"/>
               </a:ext>
             </a:extLst>
           </p:cNvPr>
@@ -7985,7 +7985,7 @@
           <p:nvPr/>
         </p:nvPicPr>
         <p:blipFill>
-          <a:blip xmlns:r="http://schemas.openxmlformats.org/officeDocument/2006/relationships" xmlns:a="http://schemas.openxmlformats.org/drawingml/2006/main" r:embed="R9a9bd3e0f1764832"/>
+          <a:blip xmlns:r="http://schemas.openxmlformats.org/officeDocument/2006/relationships" xmlns:a="http://schemas.openxmlformats.org/drawingml/2006/main" r:embed="Rfe7878a341354657"/>
           <a:stretch xmlns:a="http://schemas.openxmlformats.org/drawingml/2006/main"/>
         </p:blipFill>
         <p:spPr>
@@ -8001,7 +8001,7 @@
     </p:spTree>
     <p:extLst>
       <p:ext uri="{BB962C8B-B14F-4D97-AF65-F5344CB8AC3E}">
-        <p14:creationId xmlns:p14="http://schemas.microsoft.com/office/powerpoint/2010/main" val="795562573"/>
+        <p14:creationId xmlns:p14="http://schemas.microsoft.com/office/powerpoint/2010/main" val="562520599"/>
       </p:ext>
     </p:extLst>
   </p:cSld>
@@ -8025,7 +8025,7 @@
           <p:cNvPr id="2" name="">
             <a:extLst xmlns:a="http://schemas.openxmlformats.org/drawingml/2006/main">
               <a:ext uri="{FF2B5EF4-FFF2-40B4-BE49-F238E27FC236}">
-                <a16:creationId xmlns:a16="http://schemas.microsoft.com/office/drawing/2014/main" id="{71C5017F-1E8A-4042-A4DF-D9937E904CCA}"/>
+                <a16:creationId xmlns:a16="http://schemas.microsoft.com/office/drawing/2014/main" id="{1C4B7379-39A3-4275-BD4A-FA55CE572761}"/>
               </a:ext>
             </a:extLst>
           </p:cNvPr>
@@ -8035,7 +8035,7 @@
           <p:nvPr/>
         </p:nvPicPr>
         <p:blipFill>
-          <a:blip xmlns:r="http://schemas.openxmlformats.org/officeDocument/2006/relationships" xmlns:a="http://schemas.openxmlformats.org/drawingml/2006/main" r:embed="R761e68ddb5184f77"/>
+          <a:blip xmlns:r="http://schemas.openxmlformats.org/officeDocument/2006/relationships" xmlns:a="http://schemas.openxmlformats.org/drawingml/2006/main" r:embed="R75ab0ccf604741ee"/>
           <a:stretch xmlns:a="http://schemas.openxmlformats.org/drawingml/2006/main"/>
         </p:blipFill>
         <p:spPr>
@@ -8051,7 +8051,7 @@
     </p:spTree>
     <p:extLst>
       <p:ext uri="{BB962C8B-B14F-4D97-AF65-F5344CB8AC3E}">
-        <p14:creationId xmlns:p14="http://schemas.microsoft.com/office/powerpoint/2010/main" val="824163855"/>
+        <p14:creationId xmlns:p14="http://schemas.microsoft.com/office/powerpoint/2010/main" val="1587940061"/>
       </p:ext>
     </p:extLst>
   </p:cSld>
@@ -8075,7 +8075,7 @@
           <p:cNvPr id="2" name="">
             <a:extLst xmlns:a="http://schemas.openxmlformats.org/drawingml/2006/main">
               <a:ext uri="{FF2B5EF4-FFF2-40B4-BE49-F238E27FC236}">
-                <a16:creationId xmlns:a16="http://schemas.microsoft.com/office/drawing/2014/main" id="{81F800E6-73B2-4212-862D-7CFBD248C6DC}"/>
+                <a16:creationId xmlns:a16="http://schemas.microsoft.com/office/drawing/2014/main" id="{7C02171A-96AB-4DE4-B40A-B9DAF602CCD4}"/>
               </a:ext>
             </a:extLst>
           </p:cNvPr>
@@ -8085,7 +8085,7 @@
           <p:nvPr/>
         </p:nvPicPr>
         <p:blipFill>
-          <a:blip xmlns:r="http://schemas.openxmlformats.org/officeDocument/2006/relationships" xmlns:a="http://schemas.openxmlformats.org/drawingml/2006/main" r:embed="Rb510dfd5b0ab4cee"/>
+          <a:blip xmlns:r="http://schemas.openxmlformats.org/officeDocument/2006/relationships" xmlns:a="http://schemas.openxmlformats.org/drawingml/2006/main" r:embed="R72c8815a37114df9"/>
           <a:stretch xmlns:a="http://schemas.openxmlformats.org/drawingml/2006/main"/>
         </p:blipFill>
         <p:spPr>
@@ -8101,7 +8101,7 @@
     </p:spTree>
     <p:extLst>
       <p:ext uri="{BB962C8B-B14F-4D97-AF65-F5344CB8AC3E}">
-        <p14:creationId xmlns:p14="http://schemas.microsoft.com/office/powerpoint/2010/main" val="1374284958"/>
+        <p14:creationId xmlns:p14="http://schemas.microsoft.com/office/powerpoint/2010/main" val="1975559188"/>
       </p:ext>
     </p:extLst>
   </p:cSld>
@@ -8125,7 +8125,7 @@
           <p:cNvPr id="2" name="">
             <a:extLst xmlns:a="http://schemas.openxmlformats.org/drawingml/2006/main">
               <a:ext uri="{FF2B5EF4-FFF2-40B4-BE49-F238E27FC236}">
-                <a16:creationId xmlns:a16="http://schemas.microsoft.com/office/drawing/2014/main" id="{1CC0AE92-4867-4336-876E-C1C34438AC9B}"/>
+                <a16:creationId xmlns:a16="http://schemas.microsoft.com/office/drawing/2014/main" id="{63074B55-808C-46B0-A3A5-8A6B3A30DA35}"/>
               </a:ext>
             </a:extLst>
           </p:cNvPr>
@@ -8135,7 +8135,7 @@
           <p:nvPr/>
         </p:nvPicPr>
         <p:blipFill>
-          <a:blip xmlns:r="http://schemas.openxmlformats.org/officeDocument/2006/relationships" xmlns:a="http://schemas.openxmlformats.org/drawingml/2006/main" r:embed="R904cb27a2cc143f0"/>
+          <a:blip xmlns:r="http://schemas.openxmlformats.org/officeDocument/2006/relationships" xmlns:a="http://schemas.openxmlformats.org/drawingml/2006/main" r:embed="R63aa375ec0a64367"/>
           <a:stretch xmlns:a="http://schemas.openxmlformats.org/drawingml/2006/main"/>
         </p:blipFill>
         <p:spPr>
@@ -8151,7 +8151,7 @@
     </p:spTree>
     <p:extLst>
       <p:ext uri="{BB962C8B-B14F-4D97-AF65-F5344CB8AC3E}">
-        <p14:creationId xmlns:p14="http://schemas.microsoft.com/office/powerpoint/2010/main" val="504745213"/>
+        <p14:creationId xmlns:p14="http://schemas.microsoft.com/office/powerpoint/2010/main" val="134065753"/>
       </p:ext>
     </p:extLst>
   </p:cSld>
@@ -8175,7 +8175,7 @@
           <p:cNvPr id="2" name="">
             <a:extLst xmlns:a="http://schemas.openxmlformats.org/drawingml/2006/main">
               <a:ext uri="{FF2B5EF4-FFF2-40B4-BE49-F238E27FC236}">
-                <a16:creationId xmlns:a16="http://schemas.microsoft.com/office/drawing/2014/main" id="{A4EA3D53-4CC9-4A9C-96CF-20E043702CA4}"/>
+                <a16:creationId xmlns:a16="http://schemas.microsoft.com/office/drawing/2014/main" id="{5747E944-FE6A-43FC-A69A-8B8CAED9CFA0}"/>
               </a:ext>
             </a:extLst>
           </p:cNvPr>
@@ -8185,7 +8185,7 @@
           <p:nvPr/>
         </p:nvPicPr>
         <p:blipFill>
-          <a:blip xmlns:r="http://schemas.openxmlformats.org/officeDocument/2006/relationships" xmlns:a="http://schemas.openxmlformats.org/drawingml/2006/main" r:embed="R58f704f8c7ce473f"/>
+          <a:blip xmlns:r="http://schemas.openxmlformats.org/officeDocument/2006/relationships" xmlns:a="http://schemas.openxmlformats.org/drawingml/2006/main" r:embed="R1c2d083e170b48e3"/>
           <a:stretch xmlns:a="http://schemas.openxmlformats.org/drawingml/2006/main"/>
         </p:blipFill>
         <p:spPr>
@@ -8201,7 +8201,7 @@
     </p:spTree>
     <p:extLst>
       <p:ext uri="{BB962C8B-B14F-4D97-AF65-F5344CB8AC3E}">
-        <p14:creationId xmlns:p14="http://schemas.microsoft.com/office/powerpoint/2010/main" val="641552671"/>
+        <p14:creationId xmlns:p14="http://schemas.microsoft.com/office/powerpoint/2010/main" val="1866776707"/>
       </p:ext>
     </p:extLst>
   </p:cSld>
@@ -8225,7 +8225,7 @@
           <p:cNvPr id="2" name="">
             <a:extLst xmlns:a="http://schemas.openxmlformats.org/drawingml/2006/main">
               <a:ext uri="{FF2B5EF4-FFF2-40B4-BE49-F238E27FC236}">
-                <a16:creationId xmlns:a16="http://schemas.microsoft.com/office/drawing/2014/main" id="{97466CA1-B901-4CF8-989B-76CEEEF467D0}"/>
+                <a16:creationId xmlns:a16="http://schemas.microsoft.com/office/drawing/2014/main" id="{6261833B-9A89-4F22-A4B1-B071CE7360C8}"/>
               </a:ext>
             </a:extLst>
           </p:cNvPr>
@@ -8235,7 +8235,7 @@
           <p:nvPr/>
         </p:nvPicPr>
         <p:blipFill>
-          <a:blip xmlns:r="http://schemas.openxmlformats.org/officeDocument/2006/relationships" xmlns:a="http://schemas.openxmlformats.org/drawingml/2006/main" r:embed="R804af969c9f34a5d"/>
+          <a:blip xmlns:r="http://schemas.openxmlformats.org/officeDocument/2006/relationships" xmlns:a="http://schemas.openxmlformats.org/drawingml/2006/main" r:embed="Rd5913f1e96f94c5b"/>
           <a:stretch xmlns:a="http://schemas.openxmlformats.org/drawingml/2006/main"/>
         </p:blipFill>
         <p:spPr>
@@ -8251,7 +8251,7 @@
     </p:spTree>
     <p:extLst>
       <p:ext uri="{BB962C8B-B14F-4D97-AF65-F5344CB8AC3E}">
-        <p14:creationId xmlns:p14="http://schemas.microsoft.com/office/powerpoint/2010/main" val="1447680306"/>
+        <p14:creationId xmlns:p14="http://schemas.microsoft.com/office/powerpoint/2010/main" val="2143056922"/>
       </p:ext>
     </p:extLst>
   </p:cSld>
@@ -8275,7 +8275,7 @@
           <p:cNvPr id="2" name="">
             <a:extLst xmlns:a="http://schemas.openxmlformats.org/drawingml/2006/main">
               <a:ext uri="{FF2B5EF4-FFF2-40B4-BE49-F238E27FC236}">
-                <a16:creationId xmlns:a16="http://schemas.microsoft.com/office/drawing/2014/main" id="{A527B719-3E9C-4E76-8FC1-282C40833324}"/>
+                <a16:creationId xmlns:a16="http://schemas.microsoft.com/office/drawing/2014/main" id="{521144E1-F363-4DA2-B8B6-C353395CF9CC}"/>
               </a:ext>
             </a:extLst>
           </p:cNvPr>
@@ -8285,7 +8285,7 @@
           <p:nvPr/>
         </p:nvPicPr>
         <p:blipFill>
-          <a:blip xmlns:r="http://schemas.openxmlformats.org/officeDocument/2006/relationships" xmlns:a="http://schemas.openxmlformats.org/drawingml/2006/main" r:embed="R41bf9226936d4424"/>
+          <a:blip xmlns:r="http://schemas.openxmlformats.org/officeDocument/2006/relationships" xmlns:a="http://schemas.openxmlformats.org/drawingml/2006/main" r:embed="R8efc1f0cdfd2407c"/>
           <a:stretch xmlns:a="http://schemas.openxmlformats.org/drawingml/2006/main"/>
         </p:blipFill>
         <p:spPr>
@@ -8301,7 +8301,7 @@
     </p:spTree>
     <p:extLst>
       <p:ext uri="{BB962C8B-B14F-4D97-AF65-F5344CB8AC3E}">
-        <p14:creationId xmlns:p14="http://schemas.microsoft.com/office/powerpoint/2010/main" val="1344628528"/>
+        <p14:creationId xmlns:p14="http://schemas.microsoft.com/office/powerpoint/2010/main" val="410535360"/>
       </p:ext>
     </p:extLst>
   </p:cSld>
@@ -8325,7 +8325,7 @@
           <p:cNvPr id="2" name="">
             <a:extLst xmlns:a="http://schemas.openxmlformats.org/drawingml/2006/main">
               <a:ext uri="{FF2B5EF4-FFF2-40B4-BE49-F238E27FC236}">
-                <a16:creationId xmlns:a16="http://schemas.microsoft.com/office/drawing/2014/main" id="{D07389A8-6AB7-4A7C-B9C5-17EAFC7822FB}"/>
+                <a16:creationId xmlns:a16="http://schemas.microsoft.com/office/drawing/2014/main" id="{26ABBA3C-62D7-4159-8597-0A47DA1A3DB8}"/>
               </a:ext>
             </a:extLst>
           </p:cNvPr>
@@ -8335,7 +8335,7 @@
           <p:nvPr/>
         </p:nvPicPr>
         <p:blipFill>
-          <a:blip xmlns:r="http://schemas.openxmlformats.org/officeDocument/2006/relationships" xmlns:a="http://schemas.openxmlformats.org/drawingml/2006/main" r:embed="R127429ae689242a7"/>
+          <a:blip xmlns:r="http://schemas.openxmlformats.org/officeDocument/2006/relationships" xmlns:a="http://schemas.openxmlformats.org/drawingml/2006/main" r:embed="R393f398d157848d9"/>
           <a:stretch xmlns:a="http://schemas.openxmlformats.org/drawingml/2006/main"/>
         </p:blipFill>
         <p:spPr>
@@ -8351,7 +8351,7 @@
     </p:spTree>
     <p:extLst>
       <p:ext uri="{BB962C8B-B14F-4D97-AF65-F5344CB8AC3E}">
-        <p14:creationId xmlns:p14="http://schemas.microsoft.com/office/powerpoint/2010/main" val="1790808536"/>
+        <p14:creationId xmlns:p14="http://schemas.microsoft.com/office/powerpoint/2010/main" val="860455336"/>
       </p:ext>
     </p:extLst>
   </p:cSld>
@@ -8375,7 +8375,7 @@
           <p:cNvPr id="2" name="">
             <a:extLst xmlns:a="http://schemas.openxmlformats.org/drawingml/2006/main">
               <a:ext uri="{FF2B5EF4-FFF2-40B4-BE49-F238E27FC236}">
-                <a16:creationId xmlns:a16="http://schemas.microsoft.com/office/drawing/2014/main" id="{9A2BA1EE-529B-4518-950B-53516485779D}"/>
+                <a16:creationId xmlns:a16="http://schemas.microsoft.com/office/drawing/2014/main" id="{ABC715D0-3BB3-45D6-89C8-D7EF44804E9A}"/>
               </a:ext>
             </a:extLst>
           </p:cNvPr>
@@ -8385,7 +8385,7 @@
           <p:nvPr/>
         </p:nvPicPr>
         <p:blipFill>
-          <a:blip xmlns:r="http://schemas.openxmlformats.org/officeDocument/2006/relationships" xmlns:a="http://schemas.openxmlformats.org/drawingml/2006/main" r:embed="Rd4f5123bcade4c46"/>
+          <a:blip xmlns:r="http://schemas.openxmlformats.org/officeDocument/2006/relationships" xmlns:a="http://schemas.openxmlformats.org/drawingml/2006/main" r:embed="Rc642574b0ecc46f8"/>
           <a:stretch xmlns:a="http://schemas.openxmlformats.org/drawingml/2006/main"/>
         </p:blipFill>
         <p:spPr>
@@ -8401,7 +8401,7 @@
     </p:spTree>
     <p:extLst>
       <p:ext uri="{BB962C8B-B14F-4D97-AF65-F5344CB8AC3E}">
-        <p14:creationId xmlns:p14="http://schemas.microsoft.com/office/powerpoint/2010/main" val="855270486"/>
+        <p14:creationId xmlns:p14="http://schemas.microsoft.com/office/powerpoint/2010/main" val="769316843"/>
       </p:ext>
     </p:extLst>
   </p:cSld>
@@ -8425,7 +8425,7 @@
           <p:cNvPr id="2" name="">
             <a:extLst xmlns:a="http://schemas.openxmlformats.org/drawingml/2006/main">
               <a:ext uri="{FF2B5EF4-FFF2-40B4-BE49-F238E27FC236}">
-                <a16:creationId xmlns:a16="http://schemas.microsoft.com/office/drawing/2014/main" id="{9CF50844-81CB-4EFA-91B0-6F0C0030C081}"/>
+                <a16:creationId xmlns:a16="http://schemas.microsoft.com/office/drawing/2014/main" id="{25960B0B-FCC4-42FC-9158-34E97041FDE6}"/>
               </a:ext>
             </a:extLst>
           </p:cNvPr>
@@ -8435,7 +8435,7 @@
           <p:nvPr/>
         </p:nvPicPr>
         <p:blipFill>
-          <a:blip xmlns:r="http://schemas.openxmlformats.org/officeDocument/2006/relationships" xmlns:a="http://schemas.openxmlformats.org/drawingml/2006/main" r:embed="R3d2b31b478b54ccc"/>
+          <a:blip xmlns:r="http://schemas.openxmlformats.org/officeDocument/2006/relationships" xmlns:a="http://schemas.openxmlformats.org/drawingml/2006/main" r:embed="R833ad94768674a58"/>
           <a:stretch xmlns:a="http://schemas.openxmlformats.org/drawingml/2006/main"/>
         </p:blipFill>
         <p:spPr>
@@ -8451,7 +8451,7 @@
     </p:spTree>
     <p:extLst>
       <p:ext uri="{BB962C8B-B14F-4D97-AF65-F5344CB8AC3E}">
-        <p14:creationId xmlns:p14="http://schemas.microsoft.com/office/powerpoint/2010/main" val="1310276277"/>
+        <p14:creationId xmlns:p14="http://schemas.microsoft.com/office/powerpoint/2010/main" val="2087080316"/>
       </p:ext>
     </p:extLst>
   </p:cSld>
@@ -8475,7 +8475,7 @@
           <p:cNvPr id="2" name="">
             <a:extLst xmlns:a="http://schemas.openxmlformats.org/drawingml/2006/main">
               <a:ext uri="{FF2B5EF4-FFF2-40B4-BE49-F238E27FC236}">
-                <a16:creationId xmlns:a16="http://schemas.microsoft.com/office/drawing/2014/main" id="{56E02E7C-E08C-4546-BFF4-0A3D0F27DADE}"/>
+                <a16:creationId xmlns:a16="http://schemas.microsoft.com/office/drawing/2014/main" id="{975FAE32-5068-4585-8430-A8392BC75B77}"/>
               </a:ext>
             </a:extLst>
           </p:cNvPr>
@@ -8485,7 +8485,7 @@
           <p:nvPr/>
         </p:nvPicPr>
         <p:blipFill>
-          <a:blip xmlns:r="http://schemas.openxmlformats.org/officeDocument/2006/relationships" xmlns:a="http://schemas.openxmlformats.org/drawingml/2006/main" r:embed="R21dc0e47a4e947a0"/>
+          <a:blip xmlns:r="http://schemas.openxmlformats.org/officeDocument/2006/relationships" xmlns:a="http://schemas.openxmlformats.org/drawingml/2006/main" r:embed="R78145e7dc3ae4340"/>
           <a:stretch xmlns:a="http://schemas.openxmlformats.org/drawingml/2006/main"/>
         </p:blipFill>
         <p:spPr>
@@ -8501,7 +8501,7 @@
     </p:spTree>
     <p:extLst>
       <p:ext uri="{BB962C8B-B14F-4D97-AF65-F5344CB8AC3E}">
-        <p14:creationId xmlns:p14="http://schemas.microsoft.com/office/powerpoint/2010/main" val="148095976"/>
+        <p14:creationId xmlns:p14="http://schemas.microsoft.com/office/powerpoint/2010/main" val="410501011"/>
       </p:ext>
     </p:extLst>
   </p:cSld>
@@ -8525,7 +8525,7 @@
           <p:cNvPr id="2" name="">
             <a:extLst xmlns:a="http://schemas.openxmlformats.org/drawingml/2006/main">
               <a:ext uri="{FF2B5EF4-FFF2-40B4-BE49-F238E27FC236}">
-                <a16:creationId xmlns:a16="http://schemas.microsoft.com/office/drawing/2014/main" id="{C516CB7C-77BF-4DBA-B46A-2A2BBA273F85}"/>
+                <a16:creationId xmlns:a16="http://schemas.microsoft.com/office/drawing/2014/main" id="{59281466-56CF-4DA9-8FB8-B7AB210BD91D}"/>
               </a:ext>
             </a:extLst>
           </p:cNvPr>
@@ -8535,7 +8535,7 @@
           <p:nvPr/>
         </p:nvPicPr>
         <p:blipFill>
-          <a:blip xmlns:r="http://schemas.openxmlformats.org/officeDocument/2006/relationships" xmlns:a="http://schemas.openxmlformats.org/drawingml/2006/main" r:embed="R0c0f67a1673f4da0"/>
+          <a:blip xmlns:r="http://schemas.openxmlformats.org/officeDocument/2006/relationships" xmlns:a="http://schemas.openxmlformats.org/drawingml/2006/main" r:embed="R1a9188079e5c4232"/>
           <a:stretch xmlns:a="http://schemas.openxmlformats.org/drawingml/2006/main"/>
         </p:blipFill>
         <p:spPr>
@@ -8551,7 +8551,7 @@
     </p:spTree>
     <p:extLst>
       <p:ext uri="{BB962C8B-B14F-4D97-AF65-F5344CB8AC3E}">
-        <p14:creationId xmlns:p14="http://schemas.microsoft.com/office/powerpoint/2010/main" val="1462774307"/>
+        <p14:creationId xmlns:p14="http://schemas.microsoft.com/office/powerpoint/2010/main" val="918201764"/>
       </p:ext>
     </p:extLst>
   </p:cSld>
@@ -8575,7 +8575,7 @@
           <p:cNvPr id="2" name="">
             <a:extLst xmlns:a="http://schemas.openxmlformats.org/drawingml/2006/main">
               <a:ext uri="{FF2B5EF4-FFF2-40B4-BE49-F238E27FC236}">
-                <a16:creationId xmlns:a16="http://schemas.microsoft.com/office/drawing/2014/main" id="{84D19087-58E6-4398-9D2D-7001C67A0E94}"/>
+                <a16:creationId xmlns:a16="http://schemas.microsoft.com/office/drawing/2014/main" id="{14AD0975-0482-4EDF-9085-6004CED7C4CE}"/>
               </a:ext>
             </a:extLst>
           </p:cNvPr>
@@ -8585,7 +8585,7 @@
           <p:nvPr/>
         </p:nvPicPr>
         <p:blipFill>
-          <a:blip xmlns:r="http://schemas.openxmlformats.org/officeDocument/2006/relationships" xmlns:a="http://schemas.openxmlformats.org/drawingml/2006/main" r:embed="Rb84a8f9cb88944e7"/>
+          <a:blip xmlns:r="http://schemas.openxmlformats.org/officeDocument/2006/relationships" xmlns:a="http://schemas.openxmlformats.org/drawingml/2006/main" r:embed="R7160b6b86b4e4af5"/>
           <a:stretch xmlns:a="http://schemas.openxmlformats.org/drawingml/2006/main"/>
         </p:blipFill>
         <p:spPr>
@@ -8601,7 +8601,7 @@
     </p:spTree>
     <p:extLst>
       <p:ext uri="{BB962C8B-B14F-4D97-AF65-F5344CB8AC3E}">
-        <p14:creationId xmlns:p14="http://schemas.microsoft.com/office/powerpoint/2010/main" val="628308980"/>
+        <p14:creationId xmlns:p14="http://schemas.microsoft.com/office/powerpoint/2010/main" val="670270994"/>
       </p:ext>
     </p:extLst>
   </p:cSld>
@@ -8625,7 +8625,7 @@
           <p:cNvPr id="2" name="">
             <a:extLst xmlns:a="http://schemas.openxmlformats.org/drawingml/2006/main">
               <a:ext uri="{FF2B5EF4-FFF2-40B4-BE49-F238E27FC236}">
-                <a16:creationId xmlns:a16="http://schemas.microsoft.com/office/drawing/2014/main" id="{D03BC003-7D04-4138-B764-B6E7C41665CC}"/>
+                <a16:creationId xmlns:a16="http://schemas.microsoft.com/office/drawing/2014/main" id="{F78AA631-EC8E-42F7-B840-02E03597A28D}"/>
               </a:ext>
             </a:extLst>
           </p:cNvPr>
@@ -8635,7 +8635,7 @@
           <p:nvPr/>
         </p:nvPicPr>
         <p:blipFill>
-          <a:blip xmlns:r="http://schemas.openxmlformats.org/officeDocument/2006/relationships" xmlns:a="http://schemas.openxmlformats.org/drawingml/2006/main" r:embed="R753767e02544444b"/>
+          <a:blip xmlns:r="http://schemas.openxmlformats.org/officeDocument/2006/relationships" xmlns:a="http://schemas.openxmlformats.org/drawingml/2006/main" r:embed="R1a1cba7485a44bda"/>
           <a:stretch xmlns:a="http://schemas.openxmlformats.org/drawingml/2006/main"/>
         </p:blipFill>
         <p:spPr>
@@ -8651,7 +8651,7 @@
     </p:spTree>
     <p:extLst>
       <p:ext uri="{BB962C8B-B14F-4D97-AF65-F5344CB8AC3E}">
-        <p14:creationId xmlns:p14="http://schemas.microsoft.com/office/powerpoint/2010/main" val="276807108"/>
+        <p14:creationId xmlns:p14="http://schemas.microsoft.com/office/powerpoint/2010/main" val="808816450"/>
       </p:ext>
     </p:extLst>
   </p:cSld>

--- a/teaching/macro-applications/downloads/lecture_3.pptx
+++ b/teaching/macro-applications/downloads/lecture_3.pptx
@@ -2,44 +2,44 @@
 <file path=ppt/presentation.xml><?xml version="1.0" encoding="utf-8"?>
 <p:presentation xmlns:p="http://schemas.openxmlformats.org/presentationml/2006/main">
   <p:sldMasterIdLst>
-    <p:sldMasterId xmlns:r="http://schemas.openxmlformats.org/officeDocument/2006/relationships" id="2147483648" r:id="Ra5eb8b45cc744182"/>
+    <p:sldMasterId xmlns:r="http://schemas.openxmlformats.org/officeDocument/2006/relationships" id="2147483648" r:id="R9f083772bc9548f6"/>
   </p:sldMasterIdLst>
   <p:notesMasterIdLst>
-    <p:notesMasterId xmlns:r="http://schemas.openxmlformats.org/officeDocument/2006/relationships" r:id="R0cf7183bec1c4b93"/>
+    <p:notesMasterId xmlns:r="http://schemas.openxmlformats.org/officeDocument/2006/relationships" r:id="R9ce23a5b7a604578"/>
   </p:notesMasterIdLst>
   <p:sldIdLst>
-    <p:sldId xmlns:r="http://schemas.openxmlformats.org/officeDocument/2006/relationships" id="256" r:id="R40d4c66bb1e640c3"/>
-    <p:sldId xmlns:r="http://schemas.openxmlformats.org/officeDocument/2006/relationships" id="257" r:id="Re7f23336ab5a4d66"/>
-    <p:sldId xmlns:r="http://schemas.openxmlformats.org/officeDocument/2006/relationships" id="258" r:id="R6493c6f2ea924a4d"/>
-    <p:sldId xmlns:r="http://schemas.openxmlformats.org/officeDocument/2006/relationships" id="259" r:id="R6586104c68ad4a8a"/>
-    <p:sldId xmlns:r="http://schemas.openxmlformats.org/officeDocument/2006/relationships" id="260" r:id="R9d5c71df2c51409b"/>
-    <p:sldId xmlns:r="http://schemas.openxmlformats.org/officeDocument/2006/relationships" id="261" r:id="Rf4bff76161644312"/>
-    <p:sldId xmlns:r="http://schemas.openxmlformats.org/officeDocument/2006/relationships" id="262" r:id="Rdc10e91284a24402"/>
-    <p:sldId xmlns:r="http://schemas.openxmlformats.org/officeDocument/2006/relationships" id="263" r:id="R754cac3453054678"/>
-    <p:sldId xmlns:r="http://schemas.openxmlformats.org/officeDocument/2006/relationships" id="264" r:id="Rf81819d9045d4be1"/>
-    <p:sldId xmlns:r="http://schemas.openxmlformats.org/officeDocument/2006/relationships" id="265" r:id="R125875f7add94fff"/>
-    <p:sldId xmlns:r="http://schemas.openxmlformats.org/officeDocument/2006/relationships" id="266" r:id="R56de9e13eb734276"/>
-    <p:sldId xmlns:r="http://schemas.openxmlformats.org/officeDocument/2006/relationships" id="267" r:id="R70d6ff0bb0494258"/>
-    <p:sldId xmlns:r="http://schemas.openxmlformats.org/officeDocument/2006/relationships" id="268" r:id="R63ea99741cd24ea5"/>
-    <p:sldId xmlns:r="http://schemas.openxmlformats.org/officeDocument/2006/relationships" id="269" r:id="R0e37bf8f09bb4499"/>
-    <p:sldId xmlns:r="http://schemas.openxmlformats.org/officeDocument/2006/relationships" id="270" r:id="Rdf72c581371a45b7"/>
-    <p:sldId xmlns:r="http://schemas.openxmlformats.org/officeDocument/2006/relationships" id="271" r:id="R2439f8e531c34723"/>
-    <p:sldId xmlns:r="http://schemas.openxmlformats.org/officeDocument/2006/relationships" id="272" r:id="R146864f9a4c84537"/>
-    <p:sldId xmlns:r="http://schemas.openxmlformats.org/officeDocument/2006/relationships" id="273" r:id="Rdafac062b75042dc"/>
-    <p:sldId xmlns:r="http://schemas.openxmlformats.org/officeDocument/2006/relationships" id="274" r:id="Rfe8a51e152d6462a"/>
-    <p:sldId xmlns:r="http://schemas.openxmlformats.org/officeDocument/2006/relationships" id="275" r:id="R0e801dfb1d664237"/>
-    <p:sldId xmlns:r="http://schemas.openxmlformats.org/officeDocument/2006/relationships" id="276" r:id="R76cda800cd794baa"/>
-    <p:sldId xmlns:r="http://schemas.openxmlformats.org/officeDocument/2006/relationships" id="277" r:id="R71591d7fdc934c12"/>
-    <p:sldId xmlns:r="http://schemas.openxmlformats.org/officeDocument/2006/relationships" id="278" r:id="R4c4df11681624079"/>
-    <p:sldId xmlns:r="http://schemas.openxmlformats.org/officeDocument/2006/relationships" id="279" r:id="Rc6d5402c61204e26"/>
-    <p:sldId xmlns:r="http://schemas.openxmlformats.org/officeDocument/2006/relationships" id="280" r:id="R599c3a8eb90e4b09"/>
-    <p:sldId xmlns:r="http://schemas.openxmlformats.org/officeDocument/2006/relationships" id="281" r:id="R059b60cca18f4f12"/>
-    <p:sldId xmlns:r="http://schemas.openxmlformats.org/officeDocument/2006/relationships" id="282" r:id="R771627d6fb1f4d4b"/>
-    <p:sldId xmlns:r="http://schemas.openxmlformats.org/officeDocument/2006/relationships" id="283" r:id="Re201ef10c9a941f2"/>
-    <p:sldId xmlns:r="http://schemas.openxmlformats.org/officeDocument/2006/relationships" id="284" r:id="R29b652824d234e26"/>
-    <p:sldId xmlns:r="http://schemas.openxmlformats.org/officeDocument/2006/relationships" id="285" r:id="R1b1c1a6e12aa4936"/>
-    <p:sldId xmlns:r="http://schemas.openxmlformats.org/officeDocument/2006/relationships" id="286" r:id="R0f56ef67fc9b487f"/>
-    <p:sldId xmlns:r="http://schemas.openxmlformats.org/officeDocument/2006/relationships" id="287" r:id="Rf0860e0095594101"/>
+    <p:sldId xmlns:r="http://schemas.openxmlformats.org/officeDocument/2006/relationships" id="256" r:id="Rb070119b896340d7"/>
+    <p:sldId xmlns:r="http://schemas.openxmlformats.org/officeDocument/2006/relationships" id="257" r:id="R58230c1d16f442fc"/>
+    <p:sldId xmlns:r="http://schemas.openxmlformats.org/officeDocument/2006/relationships" id="258" r:id="R3bd151648db54d41"/>
+    <p:sldId xmlns:r="http://schemas.openxmlformats.org/officeDocument/2006/relationships" id="259" r:id="R2fbec249f9cb4ddb"/>
+    <p:sldId xmlns:r="http://schemas.openxmlformats.org/officeDocument/2006/relationships" id="260" r:id="R0d88983b7f7949af"/>
+    <p:sldId xmlns:r="http://schemas.openxmlformats.org/officeDocument/2006/relationships" id="261" r:id="R0445a7dfcb6b4cd6"/>
+    <p:sldId xmlns:r="http://schemas.openxmlformats.org/officeDocument/2006/relationships" id="262" r:id="R9fd984b7d8104f76"/>
+    <p:sldId xmlns:r="http://schemas.openxmlformats.org/officeDocument/2006/relationships" id="263" r:id="Rcc08f18c41704533"/>
+    <p:sldId xmlns:r="http://schemas.openxmlformats.org/officeDocument/2006/relationships" id="264" r:id="Rced8c8badef84998"/>
+    <p:sldId xmlns:r="http://schemas.openxmlformats.org/officeDocument/2006/relationships" id="265" r:id="R214f42fb95e347a8"/>
+    <p:sldId xmlns:r="http://schemas.openxmlformats.org/officeDocument/2006/relationships" id="266" r:id="Rbf3e9a3831f64845"/>
+    <p:sldId xmlns:r="http://schemas.openxmlformats.org/officeDocument/2006/relationships" id="267" r:id="R42c04e1ce0654103"/>
+    <p:sldId xmlns:r="http://schemas.openxmlformats.org/officeDocument/2006/relationships" id="268" r:id="Rc9619395cc3a48a5"/>
+    <p:sldId xmlns:r="http://schemas.openxmlformats.org/officeDocument/2006/relationships" id="269" r:id="R5999653797114361"/>
+    <p:sldId xmlns:r="http://schemas.openxmlformats.org/officeDocument/2006/relationships" id="270" r:id="R0c266a57b2864c25"/>
+    <p:sldId xmlns:r="http://schemas.openxmlformats.org/officeDocument/2006/relationships" id="271" r:id="Re9e17f13b2564ca6"/>
+    <p:sldId xmlns:r="http://schemas.openxmlformats.org/officeDocument/2006/relationships" id="272" r:id="Re6a54a81e3694ea9"/>
+    <p:sldId xmlns:r="http://schemas.openxmlformats.org/officeDocument/2006/relationships" id="273" r:id="R08532d6e2a574ea9"/>
+    <p:sldId xmlns:r="http://schemas.openxmlformats.org/officeDocument/2006/relationships" id="274" r:id="R7f69cf23c2ea4aa7"/>
+    <p:sldId xmlns:r="http://schemas.openxmlformats.org/officeDocument/2006/relationships" id="275" r:id="Rbe04f4da00b14295"/>
+    <p:sldId xmlns:r="http://schemas.openxmlformats.org/officeDocument/2006/relationships" id="276" r:id="R2eb53f42c4c44acf"/>
+    <p:sldId xmlns:r="http://schemas.openxmlformats.org/officeDocument/2006/relationships" id="277" r:id="Rf131b6053ead418b"/>
+    <p:sldId xmlns:r="http://schemas.openxmlformats.org/officeDocument/2006/relationships" id="278" r:id="R55e8530f71a94837"/>
+    <p:sldId xmlns:r="http://schemas.openxmlformats.org/officeDocument/2006/relationships" id="279" r:id="R9194e963b35447db"/>
+    <p:sldId xmlns:r="http://schemas.openxmlformats.org/officeDocument/2006/relationships" id="280" r:id="R5cc1b281af1c46d7"/>
+    <p:sldId xmlns:r="http://schemas.openxmlformats.org/officeDocument/2006/relationships" id="281" r:id="R1b96027dcc7248b0"/>
+    <p:sldId xmlns:r="http://schemas.openxmlformats.org/officeDocument/2006/relationships" id="282" r:id="R98576c388a064772"/>
+    <p:sldId xmlns:r="http://schemas.openxmlformats.org/officeDocument/2006/relationships" id="283" r:id="Raa4c3ef7e18a440a"/>
+    <p:sldId xmlns:r="http://schemas.openxmlformats.org/officeDocument/2006/relationships" id="284" r:id="Rd47fc8080719463d"/>
+    <p:sldId xmlns:r="http://schemas.openxmlformats.org/officeDocument/2006/relationships" id="285" r:id="R1b726e66a5c04c15"/>
+    <p:sldId xmlns:r="http://schemas.openxmlformats.org/officeDocument/2006/relationships" id="286" r:id="Reab22736c30c49fc"/>
+    <p:sldId xmlns:r="http://schemas.openxmlformats.org/officeDocument/2006/relationships" id="287" r:id="R487ff40046124866"/>
   </p:sldIdLst>
   <p:sldSz cx="12192000" cy="6858000"/>
   <p:notesSz cx="6858000" cy="9144000"/>
@@ -718,7 +718,7 @@
           </a:p>
           <a:p xmlns:a="http://schemas.openxmlformats.org/drawingml/2006/main">
             <a:r>
-              <a:t>Consequences of international trade Does more competition always raise welfare? Lower prices help consumers. What happens to producers and transport costs?</a:t>
+              <a:t>Does more competition always raise welfare? Think it through Lower prices help consumers. What happens to producers and transport costs?</a:t>
             </a:r>
           </a:p>
           <a:p xmlns:a="http://schemas.openxmlformats.org/drawingml/2006/main">
@@ -833,17 +833,17 @@
           </a:p>
           <a:p xmlns:a="http://schemas.openxmlformats.org/drawingml/2006/main">
             <a:r>
-              <a:t>Welfare effects: consumer surplus Δ C S = A + B \Delta CS=A+B A Lower price on existing consumption. B Surplus from additional consumption. Consumers buy more at a lower price: the pro-competitive effect . Blue: monopoly. Orange: after trade. Consumption rises from x M x^M to Z Z .</a:t>
-            </a:r>
-          </a:p>
-          <a:p xmlns:a="http://schemas.openxmlformats.org/drawingml/2006/main">
-            <a:r>
-              <a:t/>
-            </a:r>
-          </a:p>
-          <a:p xmlns:a="http://schemas.openxmlformats.org/drawingml/2006/main">
-            <a:r>
-              <a:t>Consumer surplus rises by A plus B as the price falls from p M to p FT. A is the saving on original consumption; B is the surplus from additional consumption.</a:t>
+              <a:t>Welfare effects: consumer surplus The price falls from p M to p FT. Consumer surplus increases by rectangle A and triangle B. A B Price / cost Quantity Demand p M p FT x x M Z c/g c × Δ C S = A + B \Delta CS=A+B A Lower price on existing consumption. B Surplus from additional consumption. Consumers buy more at a lower price: the pro-competitive effect . Blue: monopoly. Orange: after trade. Consumption rises from x M x^M to Z Z .</a:t>
+            </a:r>
+          </a:p>
+          <a:p xmlns:a="http://schemas.openxmlformats.org/drawingml/2006/main">
+            <a:r>
+              <a:t/>
+            </a:r>
+          </a:p>
+          <a:p xmlns:a="http://schemas.openxmlformats.org/drawingml/2006/main">
+            <a:r>
+              <a:t>Welfare: consumers</a:t>
             </a:r>
           </a:p>
           <a:p xmlns:a="http://schemas.openxmlformats.org/drawingml/2006/main">
@@ -948,17 +948,17 @@
           </a:p>
           <a:p xmlns:a="http://schemas.openxmlformats.org/drawingml/2006/main">
             <a:r>
-              <a:t>Welfare effects: producer surplus Δ P S = − A − C + D \Delta PS=-A-C+D −A Lower price on original monopoly sales. −C Extra transport cost on original sales now made abroad. +D Margin on new sales, after export costs. By symmetry, each firm’s total sales equal Home consumption, Z Z . Its domestic sales are x x .</a:t>
-            </a:r>
-          </a:p>
-          <a:p xmlns:a="http://schemas.openxmlformats.org/drawingml/2006/main">
-            <a:r>
-              <a:t/>
-            </a:r>
-          </a:p>
-          <a:p xmlns:a="http://schemas.openxmlformats.org/drawingml/2006/main">
-            <a:r>
-              <a:t>Producer surplus changes by minus A minus C plus D. C is extra transport cost on original monopoly sales shifted abroad; D is the margin on additional sales after export costs.</a:t>
+              <a:t>Welfare effects: producer surplus A is the loss from the lower price on original monopoly sales. C is the extra transport cost on original sales shifted abroad. D is the export margin on additional sales, already net of export costs. A C D Price / cost Quantity Demand p M p FT x x M Z c/g c × Δ P S = − A − C + D \Delta PS=-A-C+D −A Lower price on original monopoly sales. −C Extra transport cost on original sales now made abroad. +D Margin on new sales, after export costs. By symmetry, each firm’s total sales equal Home consumption, Z Z . Its domestic sales are x x .</a:t>
+            </a:r>
+          </a:p>
+          <a:p xmlns:a="http://schemas.openxmlformats.org/drawingml/2006/main">
+            <a:r>
+              <a:t/>
+            </a:r>
+          </a:p>
+          <a:p xmlns:a="http://schemas.openxmlformats.org/drawingml/2006/main">
+            <a:r>
+              <a:t>Welfare: producers</a:t>
             </a:r>
           </a:p>
           <a:p xmlns:a="http://schemas.openxmlformats.org/drawingml/2006/main">
@@ -1063,17 +1063,17 @@
           </a:p>
           <a:p xmlns:a="http://schemas.openxmlformats.org/drawingml/2006/main">
             <a:r>
-              <a:t>Welfare effects: aggregate Add the two effects Δ W = B + D − C \Delta W=B+D-C A cancels: it is a transfer from producers to consumers. Welfare rises if B + D &gt; C B+D&gt;C and falls if B + D &lt; C B+D&lt;C . What if transport costs are zero? Then C = 0 C=0 : welfare rises. Green areas are net gains; the hatched orange area is a resource cost.</a:t>
-            </a:r>
-          </a:p>
-          <a:p xmlns:a="http://schemas.openxmlformats.org/drawingml/2006/main">
-            <a:r>
-              <a:t/>
-            </a:r>
-          </a:p>
-          <a:p xmlns:a="http://schemas.openxmlformats.org/drawingml/2006/main">
-            <a:r>
-              <a:t>Area A cancels between consumers and producers. Net welfare is B plus D minus C. With no transport costs C is zero.</a:t>
+              <a:t>Welfare effects: aggregate Area A cancels between producers and consumers. The net welfare change is B plus D minus C, whose sign depends on the relative areas. B C D Price / cost Quantity Demand p M p FT x x M Z c/g c × Add the two effects Δ W = B + D − C \Delta W=B+D-C A cancels: it is a transfer from producers to consumers. Welfare rises if B + D &gt; C B+D&gt;C and falls if B + D &lt; C B+D&lt;C . What if transport costs are zero? Then C = 0 C=0 : welfare rises. Green areas are net gains; the hatched orange area is a resource cost.</a:t>
+            </a:r>
+          </a:p>
+          <a:p xmlns:a="http://schemas.openxmlformats.org/drawingml/2006/main">
+            <a:r>
+              <a:t/>
+            </a:r>
+          </a:p>
+          <a:p xmlns:a="http://schemas.openxmlformats.org/drawingml/2006/main">
+            <a:r>
+              <a:t>Welfare: total</a:t>
             </a:r>
           </a:p>
           <a:p xmlns:a="http://schemas.openxmlformats.org/drawingml/2006/main">
@@ -1178,7 +1178,7 @@
           </a:p>
           <a:p xmlns:a="http://schemas.openxmlformats.org/drawingml/2006/main">
             <a:r>
-              <a:t>Market size and industrial restructuring How does a larger market change the industry? More firms compete at first. After exit, the surviving firms are larger. Why might firms exit? The initial price falls below average cost, so firms make losses. Can welfare rise even when firms exit? Yes. In this free-entry model, profits return to zero while consumers pay less.</a:t>
+              <a:t>Can a larger market mean fewer firms? Reveal the mechanism Competition: more firms initially compete in each market, pushing the price down. Exit: losses force some firms out. The surviving firms become larger. Welfare: profits return to zero while consumers pay less.</a:t>
             </a:r>
           </a:p>
           <a:p xmlns:a="http://schemas.openxmlformats.org/drawingml/2006/main">
@@ -1293,7 +1293,7 @@
           </a:p>
           <a:p xmlns:a="http://schemas.openxmlformats.org/drawingml/2006/main">
             <a:r>
-              <a:t>Allowing entry and exit The number of firms can now change. Earlier: a fixed number One firm in each country. Now: free entry Entry and exit determine how many firms remain. Start with a closed economy, then open the markets. Brander and Krugman (1983).</a:t>
+              <a:t>From two firms to many firms Each country can now have many firms . Competition Each firm chooses its output, taking its rivals’ output as given. Entry and exit Firms enter when there are profits and exit when there are losses. In the long run, profits are zero .</a:t>
             </a:r>
           </a:p>
           <a:p xmlns:a="http://schemas.openxmlformats.org/drawingml/2006/main">
@@ -2213,37 +2213,37 @@
           </a:p>
           <a:p xmlns:a="http://schemas.openxmlformats.org/drawingml/2006/main">
             <a:r>
-              <a:t>Empirical evidence Price-cost margins for French industry, 1986–2004 . Source: Baldwin and Wyplosz (2012).</a:t>
-            </a:r>
-          </a:p>
-          <a:p xmlns:a="http://schemas.openxmlformats.org/drawingml/2006/main">
-            <a:r>
-              <a:t/>
-            </a:r>
-          </a:p>
-          <a:p xmlns:a="http://schemas.openxmlformats.org/drawingml/2006/main">
-            <a:r>
-              <a:t>Line chart of French industrial price-cost margins, 1986 to 2004. Margins fluctuate but are lower at the end of the period than at the beginning. Source: Baldwin and Wyplosz, 2012.</a:t>
-            </a:r>
-          </a:p>
-          <a:p xmlns:a="http://schemas.openxmlformats.org/drawingml/2006/main">
-            <a:r>
-              <a:t/>
-            </a:r>
-          </a:p>
-          <a:p xmlns:a="http://schemas.openxmlformats.org/drawingml/2006/main">
-            <a:r>
-              <a:t/>
-            </a:r>
-          </a:p>
-          <a:p xmlns:a="http://schemas.openxmlformats.org/drawingml/2006/main">
-            <a:r>
-              <a:t/>
-            </a:r>
-          </a:p>
-          <a:p xmlns:a="http://schemas.openxmlformats.org/drawingml/2006/main">
-            <a:r>
-              <a:t/>
+              <a:t>What does the evidence show? The model More competition pushes mark-ups down. The evidence Estimated mark-ups rose by about 7% over 2000–2019. Does that contradict the model? A time trend does not isolate integration. Technology, costs and barriers to entry also change. European Commission (2024), Figure 28, p. 61 , based on OECD (Calligaris et al., 2024). Mark-up: price / marginal cost (our model: price − marginal cost). Approximate endpoints.</a:t>
+            </a:r>
+          </a:p>
+          <a:p xmlns:a="http://schemas.openxmlformats.org/drawingml/2006/main">
+            <a:r>
+              <a:t/>
+            </a:r>
+          </a:p>
+          <a:p xmlns:a="http://schemas.openxmlformats.org/drawingml/2006/main">
+            <a:r>
+              <a:t>Endpoint comparison: the average estimated firm-level mark-up rose by about 7 percent from 2000 to 2019 in a sample of 23 European countries. Indexed to 100 in 2000, the reported approximate endpoint is 107. This is a time trend, not a causal estimate of market integration.</a:t>
+            </a:r>
+          </a:p>
+          <a:p xmlns:a="http://schemas.openxmlformats.org/drawingml/2006/main">
+            <a:r>
+              <a:t/>
+            </a:r>
+          </a:p>
+          <a:p xmlns:a="http://schemas.openxmlformats.org/drawingml/2006/main">
+            <a:r>
+              <a:t/>
+            </a:r>
+          </a:p>
+          <a:p xmlns:a="http://schemas.openxmlformats.org/drawingml/2006/main">
+            <a:r>
+              <a:t/>
+            </a:r>
+          </a:p>
+          <a:p xmlns:a="http://schemas.openxmlformats.org/drawingml/2006/main">
+            <a:r>
+              <a:t>https://competition-policy.ec.europa.eu/system/files/2024-06/KD0924494enn_Protecting_competition_in_a_changing_world_staff_report_2024.pdf#page=69</a:t>
             </a:r>
           </a:p>
         </p:txBody>
@@ -2558,7 +2558,7 @@
           </a:p>
           <a:p xmlns:a="http://schemas.openxmlformats.org/drawingml/2006/main">
             <a:r>
-              <a:t>Next lecture Migration What changes when workers, as well as goods, can cross borders? Wages and employment · Who gains and loses · Trade and labour mobility</a:t>
+              <a:t>Next lecture Migration What changes when workers, as well as goods, can cross borders? Preparation: Revise labour supply, labour demand and marginal productivity.</a:t>
             </a:r>
           </a:p>
           <a:p xmlns:a="http://schemas.openxmlformats.org/drawingml/2006/main">
@@ -2673,7 +2673,7 @@
           </a:p>
           <a:p xmlns:a="http://schemas.openxmlformats.org/drawingml/2006/main">
             <a:r>
-              <a:t>References Essential reading Baldwin and Wyplosz, The Economics of European Integration , Chapter 6 (any edition) . Brander J., and Krugman P. (1983), A ‘reciprocal dumping’ model of international trade, Journal of International Economics, 15, 313-321. Further reading See the ECON2271 Talis reading list , also available through Blackboard.</a:t>
+              <a:t>References Essential reading Baldwin and Wyplosz, The Economics of European Integration , “Scale economies and competition” (Chapter 6 in the seventh edition) . Brander J., and Krugman P. (1983), A ‘reciprocal dumping’ model of international trade, Journal of International Economics, 15, 313-321. Other editions are fine; find the chapter by its title. Further reading See the ECON2271 Talis reading list , also available through Blackboard.</a:t>
             </a:r>
           </a:p>
           <a:p xmlns:a="http://schemas.openxmlformats.org/drawingml/2006/main">
@@ -3593,17 +3593,17 @@
           </a:p>
           <a:p xmlns:a="http://schemas.openxmlformats.org/drawingml/2006/main">
             <a:r>
-              <a:t>Two monopolistic markets One monopolist in each country max x ( p − c ) x − F \max_x\;(p-c)x-F p = a − b x p=a-bx Set MR = MC x M = a − c 2 b , p M = a + c 2 x^M=\frac{a-c}{2b},\quad p^M=\frac{a+c}{2} π M = ( a − c ) 2 4 b − F \pi^M=\frac{(a-c)^2}{4b}-F F F is the fixed cost. The same diagram applies to Home and Foreign before trade.</a:t>
-            </a:r>
-          </a:p>
-          <a:p xmlns:a="http://schemas.openxmlformats.org/drawingml/2006/main">
-            <a:r>
-              <a:t/>
-            </a:r>
-          </a:p>
-          <a:p xmlns:a="http://schemas.openxmlformats.org/drawingml/2006/main">
-            <a:r>
-              <a:t>Each country has a monopolist. Marginal revenue equals marginal cost at x M; demand determines p M. The shaded rectangle is profit after fixed costs.</a:t>
+              <a:t>Two monopolistic markets One monopolist per country max x ( p − c ) x − F \max_x\;(p-c)x-F p = a − b x p=a-bx Set MR = MC Output x M = a − c 2 b x^M=\dfrac{a-c}{2b} Price p M = a + c 2 p^M=\dfrac{a+c}{2} Profit π M = ( a − c ) 2 4 b − F \pi^M=\dfrac{(a-c)^2}{4b}-F F F is the fixed cost. The same diagram applies to Home and Foreign before trade.</a:t>
+            </a:r>
+          </a:p>
+          <a:p xmlns:a="http://schemas.openxmlformats.org/drawingml/2006/main">
+            <a:r>
+              <a:t/>
+            </a:r>
+          </a:p>
+          <a:p xmlns:a="http://schemas.openxmlformats.org/drawingml/2006/main">
+            <a:r>
+              <a:t>Each country has one monopolist. MR equals MC at x M; demand determines p M. The shaded rectangle is profit after fixed costs.</a:t>
             </a:r>
           </a:p>
           <a:p xmlns:a="http://schemas.openxmlformats.org/drawingml/2006/main">
@@ -4053,7 +4053,7 @@
           </a:p>
           <a:p xmlns:a="http://schemas.openxmlformats.org/drawingml/2006/main">
             <a:r>
-              <a:t>Equilibrium in the Home market Reaction functions Rewrite (1) and (3): x = a − b y − c 2 b x=\frac{a-by-c}{2b} y = a − b x − c / g 2 b y=\frac{a-bx-c/g}{2b} With transport costs, x &gt; y x&gt;y : each firm has a larger share at home. By symmetry: x * = y x^*=y and y * = x y^*=x . Each reaction function gives a firm’s best response to the other firm’s sales.</a:t>
+              <a:t>Equilibrium in the Home market Reaction functions The firms’ best responses, from (1) and (3): x = a − b y − c 2 b x=\frac{a-by-c}{2b} y = a − b x − c / g 2 b y=\frac{a-bx-c/g}{2b} With transport costs, x &gt; y x&gt;y : each firm has a larger share at home. By symmetry: x * = y x^*=y and y * = x y^*=x . Each reaction function gives a firm’s best response to the other firm’s sales.</a:t>
             </a:r>
           </a:p>
           <a:p xmlns:a="http://schemas.openxmlformats.org/drawingml/2006/main">
@@ -4130,7 +4130,7 @@
           <p:cNvPr id="3" name="Title">
             <a:extLst xmlns:a="http://schemas.openxmlformats.org/drawingml/2006/main">
               <a:ext uri="{FF2B5EF4-FFF2-40B4-BE49-F238E27FC236}">
-                <a16:creationId xmlns:a16="http://schemas.microsoft.com/office/drawing/2014/main" id="{D6493360-2D5D-4750-AADB-AAF63D1BD169}"/>
+                <a16:creationId xmlns:a16="http://schemas.microsoft.com/office/drawing/2014/main" id="{5F142D9A-66BB-4227-A493-B43D3778A3DA}"/>
               </a:ext>
             </a:extLst>
           </p:cNvPr>
@@ -4359,7 +4359,7 @@
           <p:cNvPr id="2" name="Subtitle">
             <a:extLst xmlns:a="http://schemas.openxmlformats.org/drawingml/2006/main">
               <a:ext uri="{FF2B5EF4-FFF2-40B4-BE49-F238E27FC236}">
-                <a16:creationId xmlns:a16="http://schemas.microsoft.com/office/drawing/2014/main" id="{A1377BBE-2CA8-4863-B962-EB5FDF6A21FD}"/>
+                <a16:creationId xmlns:a16="http://schemas.microsoft.com/office/drawing/2014/main" id="{D82E2AFA-FCE3-4E84-89AF-A6FEE1675130}"/>
               </a:ext>
             </a:extLst>
           </p:cNvPr>
@@ -4605,7 +4605,7 @@
           <p:cNvPr id="2" name="Section title">
             <a:extLst xmlns:a="http://schemas.openxmlformats.org/drawingml/2006/main">
               <a:ext uri="{FF2B5EF4-FFF2-40B4-BE49-F238E27FC236}">
-                <a16:creationId xmlns:a16="http://schemas.microsoft.com/office/drawing/2014/main" id="{1982C5CA-6E2C-4707-8367-36C45F48FFC5}"/>
+                <a16:creationId xmlns:a16="http://schemas.microsoft.com/office/drawing/2014/main" id="{50BBCB3F-6AE3-46CC-9F81-8A61F0E86B53}"/>
               </a:ext>
             </a:extLst>
           </p:cNvPr>
@@ -4851,7 +4851,7 @@
           <p:cNvPr id="3" name="Title">
             <a:extLst xmlns:a="http://schemas.openxmlformats.org/drawingml/2006/main">
               <a:ext uri="{FF2B5EF4-FFF2-40B4-BE49-F238E27FC236}">
-                <a16:creationId xmlns:a16="http://schemas.microsoft.com/office/drawing/2014/main" id="{9D7ADCD7-203D-4B89-AA54-AAF5706CA5CD}"/>
+                <a16:creationId xmlns:a16="http://schemas.microsoft.com/office/drawing/2014/main" id="{87008ADA-34B1-4BD7-9E77-9A4F110AD6D5}"/>
               </a:ext>
             </a:extLst>
           </p:cNvPr>
@@ -5080,7 +5080,7 @@
           <p:cNvPr id="2" name="Body">
             <a:extLst xmlns:a="http://schemas.openxmlformats.org/drawingml/2006/main">
               <a:ext uri="{FF2B5EF4-FFF2-40B4-BE49-F238E27FC236}">
-                <a16:creationId xmlns:a16="http://schemas.microsoft.com/office/drawing/2014/main" id="{DE04BED0-DD49-4A84-9935-DD44DB4BDD59}"/>
+                <a16:creationId xmlns:a16="http://schemas.microsoft.com/office/drawing/2014/main" id="{F77FEB46-D565-4441-834E-D9C7FA06261F}"/>
               </a:ext>
             </a:extLst>
           </p:cNvPr>
@@ -5326,7 +5326,7 @@
           <p:cNvPr id="4" name="Title">
             <a:extLst xmlns:a="http://schemas.openxmlformats.org/drawingml/2006/main">
               <a:ext uri="{FF2B5EF4-FFF2-40B4-BE49-F238E27FC236}">
-                <a16:creationId xmlns:a16="http://schemas.microsoft.com/office/drawing/2014/main" id="{0A9F45B0-B0F8-47E4-85F1-40A9D66C066F}"/>
+                <a16:creationId xmlns:a16="http://schemas.microsoft.com/office/drawing/2014/main" id="{69664585-A10A-4AA8-A611-656B844AB980}"/>
               </a:ext>
             </a:extLst>
           </p:cNvPr>
@@ -5555,7 +5555,7 @@
           <p:cNvPr id="2" name="Left column">
             <a:extLst xmlns:a="http://schemas.openxmlformats.org/drawingml/2006/main">
               <a:ext uri="{FF2B5EF4-FFF2-40B4-BE49-F238E27FC236}">
-                <a16:creationId xmlns:a16="http://schemas.microsoft.com/office/drawing/2014/main" id="{C4C9811F-6721-48A0-934C-25C2FC77EDF4}"/>
+                <a16:creationId xmlns:a16="http://schemas.microsoft.com/office/drawing/2014/main" id="{3D2A724D-5384-4B55-9B21-59CAAF3C893E}"/>
               </a:ext>
             </a:extLst>
           </p:cNvPr>
@@ -5784,7 +5784,7 @@
           <p:cNvPr id="3" name="Right column">
             <a:extLst xmlns:a="http://schemas.openxmlformats.org/drawingml/2006/main">
               <a:ext uri="{FF2B5EF4-FFF2-40B4-BE49-F238E27FC236}">
-                <a16:creationId xmlns:a16="http://schemas.microsoft.com/office/drawing/2014/main" id="{7D9CC9D6-FA61-439B-B4DB-C89773A5D700}"/>
+                <a16:creationId xmlns:a16="http://schemas.microsoft.com/office/drawing/2014/main" id="{7E4E150A-6992-4F3C-9C4E-9F7DD1BB11A7}"/>
               </a:ext>
             </a:extLst>
           </p:cNvPr>
@@ -6030,7 +6030,7 @@
           <p:cNvPr id="3" name="Title">
             <a:extLst xmlns:a="http://schemas.openxmlformats.org/drawingml/2006/main">
               <a:ext uri="{FF2B5EF4-FFF2-40B4-BE49-F238E27FC236}">
-                <a16:creationId xmlns:a16="http://schemas.microsoft.com/office/drawing/2014/main" id="{3FF72CE8-8762-4469-9535-584F5B8F52C0}"/>
+                <a16:creationId xmlns:a16="http://schemas.microsoft.com/office/drawing/2014/main" id="{AB25D953-E8B9-4B48-A6AB-5B8A1937463E}"/>
               </a:ext>
             </a:extLst>
           </p:cNvPr>
@@ -6259,7 +6259,7 @@
           <p:cNvPr id="2" name="Left column">
             <a:extLst xmlns:a="http://schemas.openxmlformats.org/drawingml/2006/main">
               <a:ext uri="{FF2B5EF4-FFF2-40B4-BE49-F238E27FC236}">
-                <a16:creationId xmlns:a16="http://schemas.microsoft.com/office/drawing/2014/main" id="{9BD9BF2D-328E-4E8A-83D6-56DC70FD6DAD}"/>
+                <a16:creationId xmlns:a16="http://schemas.microsoft.com/office/drawing/2014/main" id="{9583988B-FBC4-454F-865C-C29689ACAAB4}"/>
               </a:ext>
             </a:extLst>
           </p:cNvPr>
@@ -6526,12 +6526,12 @@
   </p:cSld>
   <p:clrMap bg1="lt1" tx1="dk1" bg2="lt2" tx2="dk2" accent1="accent1" accent2="accent2" accent3="accent3" accent4="accent4" accent5="accent5" accent6="accent6" hlink="hlink" folHlink="folHlink"/>
   <p:sldLayoutIdLst>
-    <p:sldLayoutId xmlns:r="http://schemas.openxmlformats.org/officeDocument/2006/relationships" id="2147483649" r:id="R9be0c7fb28fd4e4b"/>
-    <p:sldLayoutId xmlns:r="http://schemas.openxmlformats.org/officeDocument/2006/relationships" id="2147483650" r:id="R3760e0dcf3a14ff1"/>
-    <p:sldLayoutId xmlns:r="http://schemas.openxmlformats.org/officeDocument/2006/relationships" id="2147483651" r:id="R98d631802cf24050"/>
-    <p:sldLayoutId xmlns:r="http://schemas.openxmlformats.org/officeDocument/2006/relationships" id="2147483652" r:id="Rff18c465b6e94a78"/>
-    <p:sldLayoutId xmlns:r="http://schemas.openxmlformats.org/officeDocument/2006/relationships" id="2147483653" r:id="R0aae4352d6ed400e"/>
-    <p:sldLayoutId xmlns:r="http://schemas.openxmlformats.org/officeDocument/2006/relationships" id="2147483654" r:id="R1798f378e4f24b54"/>
+    <p:sldLayoutId xmlns:r="http://schemas.openxmlformats.org/officeDocument/2006/relationships" id="2147483649" r:id="Rbce3d129a7fc446b"/>
+    <p:sldLayoutId xmlns:r="http://schemas.openxmlformats.org/officeDocument/2006/relationships" id="2147483650" r:id="R0f48a8b012ee4577"/>
+    <p:sldLayoutId xmlns:r="http://schemas.openxmlformats.org/officeDocument/2006/relationships" id="2147483651" r:id="Rad5a3c2d262e4dc4"/>
+    <p:sldLayoutId xmlns:r="http://schemas.openxmlformats.org/officeDocument/2006/relationships" id="2147483652" r:id="R0c908c4637c042c3"/>
+    <p:sldLayoutId xmlns:r="http://schemas.openxmlformats.org/officeDocument/2006/relationships" id="2147483653" r:id="R4f913ff71ff74a14"/>
+    <p:sldLayoutId xmlns:r="http://schemas.openxmlformats.org/officeDocument/2006/relationships" id="2147483654" r:id="R8442df14134a4a46"/>
   </p:sldLayoutIdLst>
   <p:txStyles>
     <p:titleStyle>
@@ -7075,7 +7075,7 @@
           <p:cNvPr id="2" name="">
             <a:extLst xmlns:a="http://schemas.openxmlformats.org/drawingml/2006/main">
               <a:ext uri="{FF2B5EF4-FFF2-40B4-BE49-F238E27FC236}">
-                <a16:creationId xmlns:a16="http://schemas.microsoft.com/office/drawing/2014/main" id="{E56599A0-1FDF-40FD-8345-FC9B976E334B}"/>
+                <a16:creationId xmlns:a16="http://schemas.microsoft.com/office/drawing/2014/main" id="{65D20A7E-2198-45B1-A6C8-46BD2ACCFCFC}"/>
               </a:ext>
             </a:extLst>
           </p:cNvPr>
@@ -7085,7 +7085,7 @@
           <p:nvPr/>
         </p:nvPicPr>
         <p:blipFill>
-          <a:blip xmlns:r="http://schemas.openxmlformats.org/officeDocument/2006/relationships" xmlns:a="http://schemas.openxmlformats.org/drawingml/2006/main" r:embed="R54f0812d6de7468a"/>
+          <a:blip xmlns:r="http://schemas.openxmlformats.org/officeDocument/2006/relationships" xmlns:a="http://schemas.openxmlformats.org/drawingml/2006/main" r:embed="R73725c2d1d7648f8"/>
           <a:stretch xmlns:a="http://schemas.openxmlformats.org/drawingml/2006/main"/>
         </p:blipFill>
         <p:spPr>
@@ -7101,7 +7101,7 @@
     </p:spTree>
     <p:extLst>
       <p:ext uri="{BB962C8B-B14F-4D97-AF65-F5344CB8AC3E}">
-        <p14:creationId xmlns:p14="http://schemas.microsoft.com/office/powerpoint/2010/main" val="436615682"/>
+        <p14:creationId xmlns:p14="http://schemas.microsoft.com/office/powerpoint/2010/main" val="1099671555"/>
       </p:ext>
     </p:extLst>
   </p:cSld>
@@ -7125,7 +7125,7 @@
           <p:cNvPr id="2" name="">
             <a:extLst xmlns:a="http://schemas.openxmlformats.org/drawingml/2006/main">
               <a:ext uri="{FF2B5EF4-FFF2-40B4-BE49-F238E27FC236}">
-                <a16:creationId xmlns:a16="http://schemas.microsoft.com/office/drawing/2014/main" id="{79153719-CFAC-4E3F-8F27-21B1C375C22A}"/>
+                <a16:creationId xmlns:a16="http://schemas.microsoft.com/office/drawing/2014/main" id="{744BE571-78CC-4394-AEB1-ED378FCE487C}"/>
               </a:ext>
             </a:extLst>
           </p:cNvPr>
@@ -7135,7 +7135,7 @@
           <p:nvPr/>
         </p:nvPicPr>
         <p:blipFill>
-          <a:blip xmlns:r="http://schemas.openxmlformats.org/officeDocument/2006/relationships" xmlns:a="http://schemas.openxmlformats.org/drawingml/2006/main" r:embed="R42f5c17b53894515"/>
+          <a:blip xmlns:r="http://schemas.openxmlformats.org/officeDocument/2006/relationships" xmlns:a="http://schemas.openxmlformats.org/drawingml/2006/main" r:embed="R1e9ce46e260b47d6"/>
           <a:stretch xmlns:a="http://schemas.openxmlformats.org/drawingml/2006/main"/>
         </p:blipFill>
         <p:spPr>
@@ -7151,7 +7151,7 @@
     </p:spTree>
     <p:extLst>
       <p:ext uri="{BB962C8B-B14F-4D97-AF65-F5344CB8AC3E}">
-        <p14:creationId xmlns:p14="http://schemas.microsoft.com/office/powerpoint/2010/main" val="1186395042"/>
+        <p14:creationId xmlns:p14="http://schemas.microsoft.com/office/powerpoint/2010/main" val="604642099"/>
       </p:ext>
     </p:extLst>
   </p:cSld>
@@ -7175,7 +7175,7 @@
           <p:cNvPr id="2" name="">
             <a:extLst xmlns:a="http://schemas.openxmlformats.org/drawingml/2006/main">
               <a:ext uri="{FF2B5EF4-FFF2-40B4-BE49-F238E27FC236}">
-                <a16:creationId xmlns:a16="http://schemas.microsoft.com/office/drawing/2014/main" id="{2C3B90ED-33C8-4C31-A688-E9C9DE82451D}"/>
+                <a16:creationId xmlns:a16="http://schemas.microsoft.com/office/drawing/2014/main" id="{84FD0DFC-0FDA-4488-96EF-8D6B0CE8145D}"/>
               </a:ext>
             </a:extLst>
           </p:cNvPr>
@@ -7185,7 +7185,7 @@
           <p:nvPr/>
         </p:nvPicPr>
         <p:blipFill>
-          <a:blip xmlns:r="http://schemas.openxmlformats.org/officeDocument/2006/relationships" xmlns:a="http://schemas.openxmlformats.org/drawingml/2006/main" r:embed="R695b3549edb14e4c"/>
+          <a:blip xmlns:r="http://schemas.openxmlformats.org/officeDocument/2006/relationships" xmlns:a="http://schemas.openxmlformats.org/drawingml/2006/main" r:embed="Re9f73e15519049ef"/>
           <a:stretch xmlns:a="http://schemas.openxmlformats.org/drawingml/2006/main"/>
         </p:blipFill>
         <p:spPr>
@@ -7201,7 +7201,7 @@
     </p:spTree>
     <p:extLst>
       <p:ext uri="{BB962C8B-B14F-4D97-AF65-F5344CB8AC3E}">
-        <p14:creationId xmlns:p14="http://schemas.microsoft.com/office/powerpoint/2010/main" val="882294915"/>
+        <p14:creationId xmlns:p14="http://schemas.microsoft.com/office/powerpoint/2010/main" val="1931094515"/>
       </p:ext>
     </p:extLst>
   </p:cSld>
@@ -7225,7 +7225,7 @@
           <p:cNvPr id="2" name="">
             <a:extLst xmlns:a="http://schemas.openxmlformats.org/drawingml/2006/main">
               <a:ext uri="{FF2B5EF4-FFF2-40B4-BE49-F238E27FC236}">
-                <a16:creationId xmlns:a16="http://schemas.microsoft.com/office/drawing/2014/main" id="{09B4E229-629C-4556-957F-3AEDB9B7C875}"/>
+                <a16:creationId xmlns:a16="http://schemas.microsoft.com/office/drawing/2014/main" id="{4434BE99-72E5-464E-8BC8-FA3A46993AF7}"/>
               </a:ext>
             </a:extLst>
           </p:cNvPr>
@@ -7235,7 +7235,7 @@
           <p:nvPr/>
         </p:nvPicPr>
         <p:blipFill>
-          <a:blip xmlns:r="http://schemas.openxmlformats.org/officeDocument/2006/relationships" xmlns:a="http://schemas.openxmlformats.org/drawingml/2006/main" r:embed="R4ba00444db524a6c"/>
+          <a:blip xmlns:r="http://schemas.openxmlformats.org/officeDocument/2006/relationships" xmlns:a="http://schemas.openxmlformats.org/drawingml/2006/main" r:embed="Ra59730a25a4b4caf"/>
           <a:stretch xmlns:a="http://schemas.openxmlformats.org/drawingml/2006/main"/>
         </p:blipFill>
         <p:spPr>
@@ -7251,7 +7251,7 @@
     </p:spTree>
     <p:extLst>
       <p:ext uri="{BB962C8B-B14F-4D97-AF65-F5344CB8AC3E}">
-        <p14:creationId xmlns:p14="http://schemas.microsoft.com/office/powerpoint/2010/main" val="242584312"/>
+        <p14:creationId xmlns:p14="http://schemas.microsoft.com/office/powerpoint/2010/main" val="598244585"/>
       </p:ext>
     </p:extLst>
   </p:cSld>
@@ -7275,7 +7275,7 @@
           <p:cNvPr id="2" name="">
             <a:extLst xmlns:a="http://schemas.openxmlformats.org/drawingml/2006/main">
               <a:ext uri="{FF2B5EF4-FFF2-40B4-BE49-F238E27FC236}">
-                <a16:creationId xmlns:a16="http://schemas.microsoft.com/office/drawing/2014/main" id="{FF589A52-F175-48CF-8D47-99AD63EE35F3}"/>
+                <a16:creationId xmlns:a16="http://schemas.microsoft.com/office/drawing/2014/main" id="{970E9976-D175-4EBC-A2DE-0E6D892178B7}"/>
               </a:ext>
             </a:extLst>
           </p:cNvPr>
@@ -7285,7 +7285,7 @@
           <p:nvPr/>
         </p:nvPicPr>
         <p:blipFill>
-          <a:blip xmlns:r="http://schemas.openxmlformats.org/officeDocument/2006/relationships" xmlns:a="http://schemas.openxmlformats.org/drawingml/2006/main" r:embed="R9ee420aa9f854c9e"/>
+          <a:blip xmlns:r="http://schemas.openxmlformats.org/officeDocument/2006/relationships" xmlns:a="http://schemas.openxmlformats.org/drawingml/2006/main" r:embed="R6b667ab1003f4a91"/>
           <a:stretch xmlns:a="http://schemas.openxmlformats.org/drawingml/2006/main"/>
         </p:blipFill>
         <p:spPr>
@@ -7301,7 +7301,7 @@
     </p:spTree>
     <p:extLst>
       <p:ext uri="{BB962C8B-B14F-4D97-AF65-F5344CB8AC3E}">
-        <p14:creationId xmlns:p14="http://schemas.microsoft.com/office/powerpoint/2010/main" val="1062306314"/>
+        <p14:creationId xmlns:p14="http://schemas.microsoft.com/office/powerpoint/2010/main" val="1941823045"/>
       </p:ext>
     </p:extLst>
   </p:cSld>
@@ -7325,7 +7325,7 @@
           <p:cNvPr id="2" name="">
             <a:extLst xmlns:a="http://schemas.openxmlformats.org/drawingml/2006/main">
               <a:ext uri="{FF2B5EF4-FFF2-40B4-BE49-F238E27FC236}">
-                <a16:creationId xmlns:a16="http://schemas.microsoft.com/office/drawing/2014/main" id="{467E4D84-8608-44E3-AAC2-473195ECC554}"/>
+                <a16:creationId xmlns:a16="http://schemas.microsoft.com/office/drawing/2014/main" id="{A8652EB5-CFFF-4937-9C3C-5CAE01179D61}"/>
               </a:ext>
             </a:extLst>
           </p:cNvPr>
@@ -7335,7 +7335,7 @@
           <p:nvPr/>
         </p:nvPicPr>
         <p:blipFill>
-          <a:blip xmlns:r="http://schemas.openxmlformats.org/officeDocument/2006/relationships" xmlns:a="http://schemas.openxmlformats.org/drawingml/2006/main" r:embed="R098979e448824895"/>
+          <a:blip xmlns:r="http://schemas.openxmlformats.org/officeDocument/2006/relationships" xmlns:a="http://schemas.openxmlformats.org/drawingml/2006/main" r:embed="R8f801129aed449a9"/>
           <a:stretch xmlns:a="http://schemas.openxmlformats.org/drawingml/2006/main"/>
         </p:blipFill>
         <p:spPr>
@@ -7351,7 +7351,7 @@
     </p:spTree>
     <p:extLst>
       <p:ext uri="{BB962C8B-B14F-4D97-AF65-F5344CB8AC3E}">
-        <p14:creationId xmlns:p14="http://schemas.microsoft.com/office/powerpoint/2010/main" val="126725741"/>
+        <p14:creationId xmlns:p14="http://schemas.microsoft.com/office/powerpoint/2010/main" val="406051216"/>
       </p:ext>
     </p:extLst>
   </p:cSld>
@@ -7375,7 +7375,7 @@
           <p:cNvPr id="2" name="">
             <a:extLst xmlns:a="http://schemas.openxmlformats.org/drawingml/2006/main">
               <a:ext uri="{FF2B5EF4-FFF2-40B4-BE49-F238E27FC236}">
-                <a16:creationId xmlns:a16="http://schemas.microsoft.com/office/drawing/2014/main" id="{3B0E34EC-559C-4DB0-A4FF-9E20238FE6CA}"/>
+                <a16:creationId xmlns:a16="http://schemas.microsoft.com/office/drawing/2014/main" id="{6A2B926D-6B44-40F0-9EBF-941D6FC7EE34}"/>
               </a:ext>
             </a:extLst>
           </p:cNvPr>
@@ -7385,7 +7385,7 @@
           <p:nvPr/>
         </p:nvPicPr>
         <p:blipFill>
-          <a:blip xmlns:r="http://schemas.openxmlformats.org/officeDocument/2006/relationships" xmlns:a="http://schemas.openxmlformats.org/drawingml/2006/main" r:embed="R6fe78c1013f54ba1"/>
+          <a:blip xmlns:r="http://schemas.openxmlformats.org/officeDocument/2006/relationships" xmlns:a="http://schemas.openxmlformats.org/drawingml/2006/main" r:embed="R37e9c0a4dc9a4b8b"/>
           <a:stretch xmlns:a="http://schemas.openxmlformats.org/drawingml/2006/main"/>
         </p:blipFill>
         <p:spPr>
@@ -7401,7 +7401,7 @@
     </p:spTree>
     <p:extLst>
       <p:ext uri="{BB962C8B-B14F-4D97-AF65-F5344CB8AC3E}">
-        <p14:creationId xmlns:p14="http://schemas.microsoft.com/office/powerpoint/2010/main" val="1611762864"/>
+        <p14:creationId xmlns:p14="http://schemas.microsoft.com/office/powerpoint/2010/main" val="63184080"/>
       </p:ext>
     </p:extLst>
   </p:cSld>
@@ -7425,7 +7425,7 @@
           <p:cNvPr id="2" name="">
             <a:extLst xmlns:a="http://schemas.openxmlformats.org/drawingml/2006/main">
               <a:ext uri="{FF2B5EF4-FFF2-40B4-BE49-F238E27FC236}">
-                <a16:creationId xmlns:a16="http://schemas.microsoft.com/office/drawing/2014/main" id="{5C0940DE-63EC-41B0-8DCF-047F4F877750}"/>
+                <a16:creationId xmlns:a16="http://schemas.microsoft.com/office/drawing/2014/main" id="{4CD3487F-5D68-4A4B-8A59-83543FAA33AA}"/>
               </a:ext>
             </a:extLst>
           </p:cNvPr>
@@ -7435,7 +7435,7 @@
           <p:nvPr/>
         </p:nvPicPr>
         <p:blipFill>
-          <a:blip xmlns:r="http://schemas.openxmlformats.org/officeDocument/2006/relationships" xmlns:a="http://schemas.openxmlformats.org/drawingml/2006/main" r:embed="Ra43442ac7a1d436a"/>
+          <a:blip xmlns:r="http://schemas.openxmlformats.org/officeDocument/2006/relationships" xmlns:a="http://schemas.openxmlformats.org/drawingml/2006/main" r:embed="R33c03a13c1194b5c"/>
           <a:stretch xmlns:a="http://schemas.openxmlformats.org/drawingml/2006/main"/>
         </p:blipFill>
         <p:spPr>
@@ -7451,7 +7451,7 @@
     </p:spTree>
     <p:extLst>
       <p:ext uri="{BB962C8B-B14F-4D97-AF65-F5344CB8AC3E}">
-        <p14:creationId xmlns:p14="http://schemas.microsoft.com/office/powerpoint/2010/main" val="1946253017"/>
+        <p14:creationId xmlns:p14="http://schemas.microsoft.com/office/powerpoint/2010/main" val="96589884"/>
       </p:ext>
     </p:extLst>
   </p:cSld>
@@ -7475,7 +7475,7 @@
           <p:cNvPr id="2" name="">
             <a:extLst xmlns:a="http://schemas.openxmlformats.org/drawingml/2006/main">
               <a:ext uri="{FF2B5EF4-FFF2-40B4-BE49-F238E27FC236}">
-                <a16:creationId xmlns:a16="http://schemas.microsoft.com/office/drawing/2014/main" id="{C33CA065-CFE1-43B8-B0BB-EAAA3034C339}"/>
+                <a16:creationId xmlns:a16="http://schemas.microsoft.com/office/drawing/2014/main" id="{5872AB84-191B-451C-87B5-C4D723FE56CD}"/>
               </a:ext>
             </a:extLst>
           </p:cNvPr>
@@ -7485,7 +7485,7 @@
           <p:nvPr/>
         </p:nvPicPr>
         <p:blipFill>
-          <a:blip xmlns:r="http://schemas.openxmlformats.org/officeDocument/2006/relationships" xmlns:a="http://schemas.openxmlformats.org/drawingml/2006/main" r:embed="Re22173731dba44cb"/>
+          <a:blip xmlns:r="http://schemas.openxmlformats.org/officeDocument/2006/relationships" xmlns:a="http://schemas.openxmlformats.org/drawingml/2006/main" r:embed="Raaaf3cd056b04ac8"/>
           <a:stretch xmlns:a="http://schemas.openxmlformats.org/drawingml/2006/main"/>
         </p:blipFill>
         <p:spPr>
@@ -7501,7 +7501,7 @@
     </p:spTree>
     <p:extLst>
       <p:ext uri="{BB962C8B-B14F-4D97-AF65-F5344CB8AC3E}">
-        <p14:creationId xmlns:p14="http://schemas.microsoft.com/office/powerpoint/2010/main" val="1323209826"/>
+        <p14:creationId xmlns:p14="http://schemas.microsoft.com/office/powerpoint/2010/main" val="1060157809"/>
       </p:ext>
     </p:extLst>
   </p:cSld>
@@ -7525,7 +7525,7 @@
           <p:cNvPr id="2" name="">
             <a:extLst xmlns:a="http://schemas.openxmlformats.org/drawingml/2006/main">
               <a:ext uri="{FF2B5EF4-FFF2-40B4-BE49-F238E27FC236}">
-                <a16:creationId xmlns:a16="http://schemas.microsoft.com/office/drawing/2014/main" id="{F70F508B-C2B0-4F74-AB36-4F5A3F256614}"/>
+                <a16:creationId xmlns:a16="http://schemas.microsoft.com/office/drawing/2014/main" id="{1E7EAD01-1E1D-49E7-89F1-E4F2AD58AD4C}"/>
               </a:ext>
             </a:extLst>
           </p:cNvPr>
@@ -7535,7 +7535,7 @@
           <p:nvPr/>
         </p:nvPicPr>
         <p:blipFill>
-          <a:blip xmlns:r="http://schemas.openxmlformats.org/officeDocument/2006/relationships" xmlns:a="http://schemas.openxmlformats.org/drawingml/2006/main" r:embed="R90d3b86478ff443e"/>
+          <a:blip xmlns:r="http://schemas.openxmlformats.org/officeDocument/2006/relationships" xmlns:a="http://schemas.openxmlformats.org/drawingml/2006/main" r:embed="R8bb90bd1cda44c59"/>
           <a:stretch xmlns:a="http://schemas.openxmlformats.org/drawingml/2006/main"/>
         </p:blipFill>
         <p:spPr>
@@ -7551,7 +7551,7 @@
     </p:spTree>
     <p:extLst>
       <p:ext uri="{BB962C8B-B14F-4D97-AF65-F5344CB8AC3E}">
-        <p14:creationId xmlns:p14="http://schemas.microsoft.com/office/powerpoint/2010/main" val="981313792"/>
+        <p14:creationId xmlns:p14="http://schemas.microsoft.com/office/powerpoint/2010/main" val="312486736"/>
       </p:ext>
     </p:extLst>
   </p:cSld>
@@ -7575,7 +7575,7 @@
           <p:cNvPr id="2" name="">
             <a:extLst xmlns:a="http://schemas.openxmlformats.org/drawingml/2006/main">
               <a:ext uri="{FF2B5EF4-FFF2-40B4-BE49-F238E27FC236}">
-                <a16:creationId xmlns:a16="http://schemas.microsoft.com/office/drawing/2014/main" id="{EF333B66-4DAB-40B8-8FDB-CD427954E0DA}"/>
+                <a16:creationId xmlns:a16="http://schemas.microsoft.com/office/drawing/2014/main" id="{463675EE-E1CE-41A3-A503-87F42B92557D}"/>
               </a:ext>
             </a:extLst>
           </p:cNvPr>
@@ -7585,7 +7585,7 @@
           <p:nvPr/>
         </p:nvPicPr>
         <p:blipFill>
-          <a:blip xmlns:r="http://schemas.openxmlformats.org/officeDocument/2006/relationships" xmlns:a="http://schemas.openxmlformats.org/drawingml/2006/main" r:embed="R4d4b3d5a6de2451a"/>
+          <a:blip xmlns:r="http://schemas.openxmlformats.org/officeDocument/2006/relationships" xmlns:a="http://schemas.openxmlformats.org/drawingml/2006/main" r:embed="R62bb8ca65eac42ef"/>
           <a:stretch xmlns:a="http://schemas.openxmlformats.org/drawingml/2006/main"/>
         </p:blipFill>
         <p:spPr>
@@ -7601,7 +7601,7 @@
     </p:spTree>
     <p:extLst>
       <p:ext uri="{BB962C8B-B14F-4D97-AF65-F5344CB8AC3E}">
-        <p14:creationId xmlns:p14="http://schemas.microsoft.com/office/powerpoint/2010/main" val="965524633"/>
+        <p14:creationId xmlns:p14="http://schemas.microsoft.com/office/powerpoint/2010/main" val="1369822199"/>
       </p:ext>
     </p:extLst>
   </p:cSld>
@@ -7625,7 +7625,7 @@
           <p:cNvPr id="2" name="">
             <a:extLst xmlns:a="http://schemas.openxmlformats.org/drawingml/2006/main">
               <a:ext uri="{FF2B5EF4-FFF2-40B4-BE49-F238E27FC236}">
-                <a16:creationId xmlns:a16="http://schemas.microsoft.com/office/drawing/2014/main" id="{0A375572-7CCD-44A7-B592-314687806001}"/>
+                <a16:creationId xmlns:a16="http://schemas.microsoft.com/office/drawing/2014/main" id="{4149FDF6-4C13-4BA3-8E9D-2CEC8C662FCA}"/>
               </a:ext>
             </a:extLst>
           </p:cNvPr>
@@ -7635,7 +7635,7 @@
           <p:nvPr/>
         </p:nvPicPr>
         <p:blipFill>
-          <a:blip xmlns:r="http://schemas.openxmlformats.org/officeDocument/2006/relationships" xmlns:a="http://schemas.openxmlformats.org/drawingml/2006/main" r:embed="Re4497d1c2ea644c8"/>
+          <a:blip xmlns:r="http://schemas.openxmlformats.org/officeDocument/2006/relationships" xmlns:a="http://schemas.openxmlformats.org/drawingml/2006/main" r:embed="Rb53cef80d1ef4616"/>
           <a:stretch xmlns:a="http://schemas.openxmlformats.org/drawingml/2006/main"/>
         </p:blipFill>
         <p:spPr>
@@ -7651,7 +7651,7 @@
     </p:spTree>
     <p:extLst>
       <p:ext uri="{BB962C8B-B14F-4D97-AF65-F5344CB8AC3E}">
-        <p14:creationId xmlns:p14="http://schemas.microsoft.com/office/powerpoint/2010/main" val="929993227"/>
+        <p14:creationId xmlns:p14="http://schemas.microsoft.com/office/powerpoint/2010/main" val="1273190369"/>
       </p:ext>
     </p:extLst>
   </p:cSld>
@@ -7675,7 +7675,7 @@
           <p:cNvPr id="2" name="">
             <a:extLst xmlns:a="http://schemas.openxmlformats.org/drawingml/2006/main">
               <a:ext uri="{FF2B5EF4-FFF2-40B4-BE49-F238E27FC236}">
-                <a16:creationId xmlns:a16="http://schemas.microsoft.com/office/drawing/2014/main" id="{536F0B1A-3209-4E49-8AF2-E9FE10A1989E}"/>
+                <a16:creationId xmlns:a16="http://schemas.microsoft.com/office/drawing/2014/main" id="{7E53E84F-7FB9-48D9-93D3-DCB04D3E32F0}"/>
               </a:ext>
             </a:extLst>
           </p:cNvPr>
@@ -7685,7 +7685,7 @@
           <p:nvPr/>
         </p:nvPicPr>
         <p:blipFill>
-          <a:blip xmlns:r="http://schemas.openxmlformats.org/officeDocument/2006/relationships" xmlns:a="http://schemas.openxmlformats.org/drawingml/2006/main" r:embed="R4939dde0ecec4c6d"/>
+          <a:blip xmlns:r="http://schemas.openxmlformats.org/officeDocument/2006/relationships" xmlns:a="http://schemas.openxmlformats.org/drawingml/2006/main" r:embed="R713e3af2db6640dc"/>
           <a:stretch xmlns:a="http://schemas.openxmlformats.org/drawingml/2006/main"/>
         </p:blipFill>
         <p:spPr>
@@ -7701,7 +7701,7 @@
     </p:spTree>
     <p:extLst>
       <p:ext uri="{BB962C8B-B14F-4D97-AF65-F5344CB8AC3E}">
-        <p14:creationId xmlns:p14="http://schemas.microsoft.com/office/powerpoint/2010/main" val="1935373792"/>
+        <p14:creationId xmlns:p14="http://schemas.microsoft.com/office/powerpoint/2010/main" val="366447789"/>
       </p:ext>
     </p:extLst>
   </p:cSld>
@@ -7725,7 +7725,7 @@
           <p:cNvPr id="2" name="">
             <a:extLst xmlns:a="http://schemas.openxmlformats.org/drawingml/2006/main">
               <a:ext uri="{FF2B5EF4-FFF2-40B4-BE49-F238E27FC236}">
-                <a16:creationId xmlns:a16="http://schemas.microsoft.com/office/drawing/2014/main" id="{F3056C05-3ACA-44E8-BAF7-1E23DCEC500E}"/>
+                <a16:creationId xmlns:a16="http://schemas.microsoft.com/office/drawing/2014/main" id="{4364AF3E-CCA0-4923-848E-934DF8270567}"/>
               </a:ext>
             </a:extLst>
           </p:cNvPr>
@@ -7735,7 +7735,7 @@
           <p:nvPr/>
         </p:nvPicPr>
         <p:blipFill>
-          <a:blip xmlns:r="http://schemas.openxmlformats.org/officeDocument/2006/relationships" xmlns:a="http://schemas.openxmlformats.org/drawingml/2006/main" r:embed="R3d8fcde613dd4c9a"/>
+          <a:blip xmlns:r="http://schemas.openxmlformats.org/officeDocument/2006/relationships" xmlns:a="http://schemas.openxmlformats.org/drawingml/2006/main" r:embed="R2ef884fac95247c8"/>
           <a:stretch xmlns:a="http://schemas.openxmlformats.org/drawingml/2006/main"/>
         </p:blipFill>
         <p:spPr>
@@ -7751,7 +7751,7 @@
     </p:spTree>
     <p:extLst>
       <p:ext uri="{BB962C8B-B14F-4D97-AF65-F5344CB8AC3E}">
-        <p14:creationId xmlns:p14="http://schemas.microsoft.com/office/powerpoint/2010/main" val="35666833"/>
+        <p14:creationId xmlns:p14="http://schemas.microsoft.com/office/powerpoint/2010/main" val="1209021464"/>
       </p:ext>
     </p:extLst>
   </p:cSld>
@@ -7775,7 +7775,7 @@
           <p:cNvPr id="2" name="">
             <a:extLst xmlns:a="http://schemas.openxmlformats.org/drawingml/2006/main">
               <a:ext uri="{FF2B5EF4-FFF2-40B4-BE49-F238E27FC236}">
-                <a16:creationId xmlns:a16="http://schemas.microsoft.com/office/drawing/2014/main" id="{A6D9A042-DE40-4A84-86C1-129B4E5D8B29}"/>
+                <a16:creationId xmlns:a16="http://schemas.microsoft.com/office/drawing/2014/main" id="{7987DA39-D88F-4622-90D5-316E92AB760E}"/>
               </a:ext>
             </a:extLst>
           </p:cNvPr>
@@ -7785,7 +7785,7 @@
           <p:nvPr/>
         </p:nvPicPr>
         <p:blipFill>
-          <a:blip xmlns:r="http://schemas.openxmlformats.org/officeDocument/2006/relationships" xmlns:a="http://schemas.openxmlformats.org/drawingml/2006/main" r:embed="R24ccae8755a04430"/>
+          <a:blip xmlns:r="http://schemas.openxmlformats.org/officeDocument/2006/relationships" xmlns:a="http://schemas.openxmlformats.org/drawingml/2006/main" r:embed="Rfa25b2cc1f8642d2"/>
           <a:stretch xmlns:a="http://schemas.openxmlformats.org/drawingml/2006/main"/>
         </p:blipFill>
         <p:spPr>
@@ -7801,7 +7801,7 @@
     </p:spTree>
     <p:extLst>
       <p:ext uri="{BB962C8B-B14F-4D97-AF65-F5344CB8AC3E}">
-        <p14:creationId xmlns:p14="http://schemas.microsoft.com/office/powerpoint/2010/main" val="386954444"/>
+        <p14:creationId xmlns:p14="http://schemas.microsoft.com/office/powerpoint/2010/main" val="1521147150"/>
       </p:ext>
     </p:extLst>
   </p:cSld>
@@ -7825,7 +7825,7 @@
           <p:cNvPr id="2" name="">
             <a:extLst xmlns:a="http://schemas.openxmlformats.org/drawingml/2006/main">
               <a:ext uri="{FF2B5EF4-FFF2-40B4-BE49-F238E27FC236}">
-                <a16:creationId xmlns:a16="http://schemas.microsoft.com/office/drawing/2014/main" id="{01B0BCFB-46B4-4D86-A6CA-6399E18DA78C}"/>
+                <a16:creationId xmlns:a16="http://schemas.microsoft.com/office/drawing/2014/main" id="{7654C2A0-4E8B-42E9-AC57-ACF2A7E086C5}"/>
               </a:ext>
             </a:extLst>
           </p:cNvPr>
@@ -7835,7 +7835,7 @@
           <p:nvPr/>
         </p:nvPicPr>
         <p:blipFill>
-          <a:blip xmlns:r="http://schemas.openxmlformats.org/officeDocument/2006/relationships" xmlns:a="http://schemas.openxmlformats.org/drawingml/2006/main" r:embed="Rccb47b340bc54d86"/>
+          <a:blip xmlns:r="http://schemas.openxmlformats.org/officeDocument/2006/relationships" xmlns:a="http://schemas.openxmlformats.org/drawingml/2006/main" r:embed="R654900dbdb834677"/>
           <a:stretch xmlns:a="http://schemas.openxmlformats.org/drawingml/2006/main"/>
         </p:blipFill>
         <p:spPr>
@@ -7851,7 +7851,7 @@
     </p:spTree>
     <p:extLst>
       <p:ext uri="{BB962C8B-B14F-4D97-AF65-F5344CB8AC3E}">
-        <p14:creationId xmlns:p14="http://schemas.microsoft.com/office/powerpoint/2010/main" val="1815424753"/>
+        <p14:creationId xmlns:p14="http://schemas.microsoft.com/office/powerpoint/2010/main" val="1237094069"/>
       </p:ext>
     </p:extLst>
   </p:cSld>
@@ -7875,7 +7875,7 @@
           <p:cNvPr id="2" name="">
             <a:extLst xmlns:a="http://schemas.openxmlformats.org/drawingml/2006/main">
               <a:ext uri="{FF2B5EF4-FFF2-40B4-BE49-F238E27FC236}">
-                <a16:creationId xmlns:a16="http://schemas.microsoft.com/office/drawing/2014/main" id="{2346E97A-880D-4CF3-9A6B-1EA60940FEA1}"/>
+                <a16:creationId xmlns:a16="http://schemas.microsoft.com/office/drawing/2014/main" id="{8B961FAC-660D-4AF1-8364-B59476AE7433}"/>
               </a:ext>
             </a:extLst>
           </p:cNvPr>
@@ -7885,7 +7885,7 @@
           <p:nvPr/>
         </p:nvPicPr>
         <p:blipFill>
-          <a:blip xmlns:r="http://schemas.openxmlformats.org/officeDocument/2006/relationships" xmlns:a="http://schemas.openxmlformats.org/drawingml/2006/main" r:embed="Rc2331b6c5aa64013"/>
+          <a:blip xmlns:r="http://schemas.openxmlformats.org/officeDocument/2006/relationships" xmlns:a="http://schemas.openxmlformats.org/drawingml/2006/main" r:embed="R5997079b33a845f1"/>
           <a:stretch xmlns:a="http://schemas.openxmlformats.org/drawingml/2006/main"/>
         </p:blipFill>
         <p:spPr>
@@ -7901,7 +7901,7 @@
     </p:spTree>
     <p:extLst>
       <p:ext uri="{BB962C8B-B14F-4D97-AF65-F5344CB8AC3E}">
-        <p14:creationId xmlns:p14="http://schemas.microsoft.com/office/powerpoint/2010/main" val="976840321"/>
+        <p14:creationId xmlns:p14="http://schemas.microsoft.com/office/powerpoint/2010/main" val="183322163"/>
       </p:ext>
     </p:extLst>
   </p:cSld>
@@ -7925,7 +7925,7 @@
           <p:cNvPr id="2" name="">
             <a:extLst xmlns:a="http://schemas.openxmlformats.org/drawingml/2006/main">
               <a:ext uri="{FF2B5EF4-FFF2-40B4-BE49-F238E27FC236}">
-                <a16:creationId xmlns:a16="http://schemas.microsoft.com/office/drawing/2014/main" id="{87C15964-C622-4F6B-9F28-488D0D535359}"/>
+                <a16:creationId xmlns:a16="http://schemas.microsoft.com/office/drawing/2014/main" id="{0A0248DF-88A0-4602-B000-63F423CAF3C1}"/>
               </a:ext>
             </a:extLst>
           </p:cNvPr>
@@ -7935,7 +7935,7 @@
           <p:nvPr/>
         </p:nvPicPr>
         <p:blipFill>
-          <a:blip xmlns:r="http://schemas.openxmlformats.org/officeDocument/2006/relationships" xmlns:a="http://schemas.openxmlformats.org/drawingml/2006/main" r:embed="Ra2eb12a42c2f4d41"/>
+          <a:blip xmlns:r="http://schemas.openxmlformats.org/officeDocument/2006/relationships" xmlns:a="http://schemas.openxmlformats.org/drawingml/2006/main" r:embed="Re45032a5b48a49e6"/>
           <a:stretch xmlns:a="http://schemas.openxmlformats.org/drawingml/2006/main"/>
         </p:blipFill>
         <p:spPr>
@@ -7951,7 +7951,7 @@
     </p:spTree>
     <p:extLst>
       <p:ext uri="{BB962C8B-B14F-4D97-AF65-F5344CB8AC3E}">
-        <p14:creationId xmlns:p14="http://schemas.microsoft.com/office/powerpoint/2010/main" val="269007755"/>
+        <p14:creationId xmlns:p14="http://schemas.microsoft.com/office/powerpoint/2010/main" val="1036351740"/>
       </p:ext>
     </p:extLst>
   </p:cSld>
@@ -7975,7 +7975,7 @@
           <p:cNvPr id="2" name="">
             <a:extLst xmlns:a="http://schemas.openxmlformats.org/drawingml/2006/main">
               <a:ext uri="{FF2B5EF4-FFF2-40B4-BE49-F238E27FC236}">
-                <a16:creationId xmlns:a16="http://schemas.microsoft.com/office/drawing/2014/main" id="{3A1BF246-49E5-4378-87E0-BA459E55CD7A}"/>
+                <a16:creationId xmlns:a16="http://schemas.microsoft.com/office/drawing/2014/main" id="{E2F637B2-6138-44F8-87D6-8CFE78E9CA34}"/>
               </a:ext>
             </a:extLst>
           </p:cNvPr>
@@ -7985,7 +7985,7 @@
           <p:nvPr/>
         </p:nvPicPr>
         <p:blipFill>
-          <a:blip xmlns:r="http://schemas.openxmlformats.org/officeDocument/2006/relationships" xmlns:a="http://schemas.openxmlformats.org/drawingml/2006/main" r:embed="Rfe7878a341354657"/>
+          <a:blip xmlns:r="http://schemas.openxmlformats.org/officeDocument/2006/relationships" xmlns:a="http://schemas.openxmlformats.org/drawingml/2006/main" r:embed="R08d9801629524676"/>
           <a:stretch xmlns:a="http://schemas.openxmlformats.org/drawingml/2006/main"/>
         </p:blipFill>
         <p:spPr>
@@ -8001,7 +8001,7 @@
     </p:spTree>
     <p:extLst>
       <p:ext uri="{BB962C8B-B14F-4D97-AF65-F5344CB8AC3E}">
-        <p14:creationId xmlns:p14="http://schemas.microsoft.com/office/powerpoint/2010/main" val="562520599"/>
+        <p14:creationId xmlns:p14="http://schemas.microsoft.com/office/powerpoint/2010/main" val="1170608869"/>
       </p:ext>
     </p:extLst>
   </p:cSld>
@@ -8025,7 +8025,7 @@
           <p:cNvPr id="2" name="">
             <a:extLst xmlns:a="http://schemas.openxmlformats.org/drawingml/2006/main">
               <a:ext uri="{FF2B5EF4-FFF2-40B4-BE49-F238E27FC236}">
-                <a16:creationId xmlns:a16="http://schemas.microsoft.com/office/drawing/2014/main" id="{1C4B7379-39A3-4275-BD4A-FA55CE572761}"/>
+                <a16:creationId xmlns:a16="http://schemas.microsoft.com/office/drawing/2014/main" id="{07BCE2E8-1173-44CC-8965-BD10338E07BA}"/>
               </a:ext>
             </a:extLst>
           </p:cNvPr>
@@ -8035,7 +8035,7 @@
           <p:nvPr/>
         </p:nvPicPr>
         <p:blipFill>
-          <a:blip xmlns:r="http://schemas.openxmlformats.org/officeDocument/2006/relationships" xmlns:a="http://schemas.openxmlformats.org/drawingml/2006/main" r:embed="R75ab0ccf604741ee"/>
+          <a:blip xmlns:r="http://schemas.openxmlformats.org/officeDocument/2006/relationships" xmlns:a="http://schemas.openxmlformats.org/drawingml/2006/main" r:embed="R611d3ffd87f44b67"/>
           <a:stretch xmlns:a="http://schemas.openxmlformats.org/drawingml/2006/main"/>
         </p:blipFill>
         <p:spPr>
@@ -8051,7 +8051,7 @@
     </p:spTree>
     <p:extLst>
       <p:ext uri="{BB962C8B-B14F-4D97-AF65-F5344CB8AC3E}">
-        <p14:creationId xmlns:p14="http://schemas.microsoft.com/office/powerpoint/2010/main" val="1587940061"/>
+        <p14:creationId xmlns:p14="http://schemas.microsoft.com/office/powerpoint/2010/main" val="1724821564"/>
       </p:ext>
     </p:extLst>
   </p:cSld>
@@ -8075,7 +8075,7 @@
           <p:cNvPr id="2" name="">
             <a:extLst xmlns:a="http://schemas.openxmlformats.org/drawingml/2006/main">
               <a:ext uri="{FF2B5EF4-FFF2-40B4-BE49-F238E27FC236}">
-                <a16:creationId xmlns:a16="http://schemas.microsoft.com/office/drawing/2014/main" id="{7C02171A-96AB-4DE4-B40A-B9DAF602CCD4}"/>
+                <a16:creationId xmlns:a16="http://schemas.microsoft.com/office/drawing/2014/main" id="{4C75FACE-204A-4D2A-97C7-FD5409389F57}"/>
               </a:ext>
             </a:extLst>
           </p:cNvPr>
@@ -8085,7 +8085,7 @@
           <p:nvPr/>
         </p:nvPicPr>
         <p:blipFill>
-          <a:blip xmlns:r="http://schemas.openxmlformats.org/officeDocument/2006/relationships" xmlns:a="http://schemas.openxmlformats.org/drawingml/2006/main" r:embed="R72c8815a37114df9"/>
+          <a:blip xmlns:r="http://schemas.openxmlformats.org/officeDocument/2006/relationships" xmlns:a="http://schemas.openxmlformats.org/drawingml/2006/main" r:embed="R5032e245fbf74040"/>
           <a:stretch xmlns:a="http://schemas.openxmlformats.org/drawingml/2006/main"/>
         </p:blipFill>
         <p:spPr>
@@ -8101,7 +8101,7 @@
     </p:spTree>
     <p:extLst>
       <p:ext uri="{BB962C8B-B14F-4D97-AF65-F5344CB8AC3E}">
-        <p14:creationId xmlns:p14="http://schemas.microsoft.com/office/powerpoint/2010/main" val="1975559188"/>
+        <p14:creationId xmlns:p14="http://schemas.microsoft.com/office/powerpoint/2010/main" val="1968711083"/>
       </p:ext>
     </p:extLst>
   </p:cSld>
@@ -8125,7 +8125,7 @@
           <p:cNvPr id="2" name="">
             <a:extLst xmlns:a="http://schemas.openxmlformats.org/drawingml/2006/main">
               <a:ext uri="{FF2B5EF4-FFF2-40B4-BE49-F238E27FC236}">
-                <a16:creationId xmlns:a16="http://schemas.microsoft.com/office/drawing/2014/main" id="{63074B55-808C-46B0-A3A5-8A6B3A30DA35}"/>
+                <a16:creationId xmlns:a16="http://schemas.microsoft.com/office/drawing/2014/main" id="{81613FB6-4D9F-41D4-BB0F-85C2CA2F5B36}"/>
               </a:ext>
             </a:extLst>
           </p:cNvPr>
@@ -8135,7 +8135,7 @@
           <p:nvPr/>
         </p:nvPicPr>
         <p:blipFill>
-          <a:blip xmlns:r="http://schemas.openxmlformats.org/officeDocument/2006/relationships" xmlns:a="http://schemas.openxmlformats.org/drawingml/2006/main" r:embed="R63aa375ec0a64367"/>
+          <a:blip xmlns:r="http://schemas.openxmlformats.org/officeDocument/2006/relationships" xmlns:a="http://schemas.openxmlformats.org/drawingml/2006/main" r:embed="R7f393480af0044a8"/>
           <a:stretch xmlns:a="http://schemas.openxmlformats.org/drawingml/2006/main"/>
         </p:blipFill>
         <p:spPr>
@@ -8151,7 +8151,7 @@
     </p:spTree>
     <p:extLst>
       <p:ext uri="{BB962C8B-B14F-4D97-AF65-F5344CB8AC3E}">
-        <p14:creationId xmlns:p14="http://schemas.microsoft.com/office/powerpoint/2010/main" val="134065753"/>
+        <p14:creationId xmlns:p14="http://schemas.microsoft.com/office/powerpoint/2010/main" val="1623775717"/>
       </p:ext>
     </p:extLst>
   </p:cSld>
@@ -8175,7 +8175,7 @@
           <p:cNvPr id="2" name="">
             <a:extLst xmlns:a="http://schemas.openxmlformats.org/drawingml/2006/main">
               <a:ext uri="{FF2B5EF4-FFF2-40B4-BE49-F238E27FC236}">
-                <a16:creationId xmlns:a16="http://schemas.microsoft.com/office/drawing/2014/main" id="{5747E944-FE6A-43FC-A69A-8B8CAED9CFA0}"/>
+                <a16:creationId xmlns:a16="http://schemas.microsoft.com/office/drawing/2014/main" id="{489890AB-EE03-4513-9EAC-71D7C4FCBD34}"/>
               </a:ext>
             </a:extLst>
           </p:cNvPr>
@@ -8185,7 +8185,7 @@
           <p:nvPr/>
         </p:nvPicPr>
         <p:blipFill>
-          <a:blip xmlns:r="http://schemas.openxmlformats.org/officeDocument/2006/relationships" xmlns:a="http://schemas.openxmlformats.org/drawingml/2006/main" r:embed="R1c2d083e170b48e3"/>
+          <a:blip xmlns:r="http://schemas.openxmlformats.org/officeDocument/2006/relationships" xmlns:a="http://schemas.openxmlformats.org/drawingml/2006/main" r:embed="R748908ff670f4207"/>
           <a:stretch xmlns:a="http://schemas.openxmlformats.org/drawingml/2006/main"/>
         </p:blipFill>
         <p:spPr>
@@ -8201,7 +8201,7 @@
     </p:spTree>
     <p:extLst>
       <p:ext uri="{BB962C8B-B14F-4D97-AF65-F5344CB8AC3E}">
-        <p14:creationId xmlns:p14="http://schemas.microsoft.com/office/powerpoint/2010/main" val="1866776707"/>
+        <p14:creationId xmlns:p14="http://schemas.microsoft.com/office/powerpoint/2010/main" val="1875145162"/>
       </p:ext>
     </p:extLst>
   </p:cSld>
@@ -8225,7 +8225,7 @@
           <p:cNvPr id="2" name="">
             <a:extLst xmlns:a="http://schemas.openxmlformats.org/drawingml/2006/main">
               <a:ext uri="{FF2B5EF4-FFF2-40B4-BE49-F238E27FC236}">
-                <a16:creationId xmlns:a16="http://schemas.microsoft.com/office/drawing/2014/main" id="{6261833B-9A89-4F22-A4B1-B071CE7360C8}"/>
+                <a16:creationId xmlns:a16="http://schemas.microsoft.com/office/drawing/2014/main" id="{2710D82D-C1B6-4390-B6D5-13808A455314}"/>
               </a:ext>
             </a:extLst>
           </p:cNvPr>
@@ -8235,7 +8235,7 @@
           <p:nvPr/>
         </p:nvPicPr>
         <p:blipFill>
-          <a:blip xmlns:r="http://schemas.openxmlformats.org/officeDocument/2006/relationships" xmlns:a="http://schemas.openxmlformats.org/drawingml/2006/main" r:embed="Rd5913f1e96f94c5b"/>
+          <a:blip xmlns:r="http://schemas.openxmlformats.org/officeDocument/2006/relationships" xmlns:a="http://schemas.openxmlformats.org/drawingml/2006/main" r:embed="R6aa61716fed04a55"/>
           <a:stretch xmlns:a="http://schemas.openxmlformats.org/drawingml/2006/main"/>
         </p:blipFill>
         <p:spPr>
@@ -8251,7 +8251,7 @@
     </p:spTree>
     <p:extLst>
       <p:ext uri="{BB962C8B-B14F-4D97-AF65-F5344CB8AC3E}">
-        <p14:creationId xmlns:p14="http://schemas.microsoft.com/office/powerpoint/2010/main" val="2143056922"/>
+        <p14:creationId xmlns:p14="http://schemas.microsoft.com/office/powerpoint/2010/main" val="1617526803"/>
       </p:ext>
     </p:extLst>
   </p:cSld>
@@ -8275,7 +8275,7 @@
           <p:cNvPr id="2" name="">
             <a:extLst xmlns:a="http://schemas.openxmlformats.org/drawingml/2006/main">
               <a:ext uri="{FF2B5EF4-FFF2-40B4-BE49-F238E27FC236}">
-                <a16:creationId xmlns:a16="http://schemas.microsoft.com/office/drawing/2014/main" id="{521144E1-F363-4DA2-B8B6-C353395CF9CC}"/>
+                <a16:creationId xmlns:a16="http://schemas.microsoft.com/office/drawing/2014/main" id="{0BDAB818-4B14-44A1-A6EF-CF1ECB47A313}"/>
               </a:ext>
             </a:extLst>
           </p:cNvPr>
@@ -8285,7 +8285,7 @@
           <p:nvPr/>
         </p:nvPicPr>
         <p:blipFill>
-          <a:blip xmlns:r="http://schemas.openxmlformats.org/officeDocument/2006/relationships" xmlns:a="http://schemas.openxmlformats.org/drawingml/2006/main" r:embed="R8efc1f0cdfd2407c"/>
+          <a:blip xmlns:r="http://schemas.openxmlformats.org/officeDocument/2006/relationships" xmlns:a="http://schemas.openxmlformats.org/drawingml/2006/main" r:embed="R552c870f257b45a6"/>
           <a:stretch xmlns:a="http://schemas.openxmlformats.org/drawingml/2006/main"/>
         </p:blipFill>
         <p:spPr>
@@ -8301,7 +8301,7 @@
     </p:spTree>
     <p:extLst>
       <p:ext uri="{BB962C8B-B14F-4D97-AF65-F5344CB8AC3E}">
-        <p14:creationId xmlns:p14="http://schemas.microsoft.com/office/powerpoint/2010/main" val="410535360"/>
+        <p14:creationId xmlns:p14="http://schemas.microsoft.com/office/powerpoint/2010/main" val="882854979"/>
       </p:ext>
     </p:extLst>
   </p:cSld>
@@ -8325,7 +8325,7 @@
           <p:cNvPr id="2" name="">
             <a:extLst xmlns:a="http://schemas.openxmlformats.org/drawingml/2006/main">
               <a:ext uri="{FF2B5EF4-FFF2-40B4-BE49-F238E27FC236}">
-                <a16:creationId xmlns:a16="http://schemas.microsoft.com/office/drawing/2014/main" id="{26ABBA3C-62D7-4159-8597-0A47DA1A3DB8}"/>
+                <a16:creationId xmlns:a16="http://schemas.microsoft.com/office/drawing/2014/main" id="{8ACCB798-F507-408D-B75A-6BB0435BF75B}"/>
               </a:ext>
             </a:extLst>
           </p:cNvPr>
@@ -8335,7 +8335,7 @@
           <p:nvPr/>
         </p:nvPicPr>
         <p:blipFill>
-          <a:blip xmlns:r="http://schemas.openxmlformats.org/officeDocument/2006/relationships" xmlns:a="http://schemas.openxmlformats.org/drawingml/2006/main" r:embed="R393f398d157848d9"/>
+          <a:blip xmlns:r="http://schemas.openxmlformats.org/officeDocument/2006/relationships" xmlns:a="http://schemas.openxmlformats.org/drawingml/2006/main" r:embed="Rd1c3a6dd86554e98"/>
           <a:stretch xmlns:a="http://schemas.openxmlformats.org/drawingml/2006/main"/>
         </p:blipFill>
         <p:spPr>
@@ -8351,7 +8351,7 @@
     </p:spTree>
     <p:extLst>
       <p:ext uri="{BB962C8B-B14F-4D97-AF65-F5344CB8AC3E}">
-        <p14:creationId xmlns:p14="http://schemas.microsoft.com/office/powerpoint/2010/main" val="860455336"/>
+        <p14:creationId xmlns:p14="http://schemas.microsoft.com/office/powerpoint/2010/main" val="287325579"/>
       </p:ext>
     </p:extLst>
   </p:cSld>
@@ -8375,7 +8375,7 @@
           <p:cNvPr id="2" name="">
             <a:extLst xmlns:a="http://schemas.openxmlformats.org/drawingml/2006/main">
               <a:ext uri="{FF2B5EF4-FFF2-40B4-BE49-F238E27FC236}">
-                <a16:creationId xmlns:a16="http://schemas.microsoft.com/office/drawing/2014/main" id="{ABC715D0-3BB3-45D6-89C8-D7EF44804E9A}"/>
+                <a16:creationId xmlns:a16="http://schemas.microsoft.com/office/drawing/2014/main" id="{D2DCE41B-F25D-4106-9D15-EB718D98F2D8}"/>
               </a:ext>
             </a:extLst>
           </p:cNvPr>
@@ -8385,7 +8385,7 @@
           <p:nvPr/>
         </p:nvPicPr>
         <p:blipFill>
-          <a:blip xmlns:r="http://schemas.openxmlformats.org/officeDocument/2006/relationships" xmlns:a="http://schemas.openxmlformats.org/drawingml/2006/main" r:embed="Rc642574b0ecc46f8"/>
+          <a:blip xmlns:r="http://schemas.openxmlformats.org/officeDocument/2006/relationships" xmlns:a="http://schemas.openxmlformats.org/drawingml/2006/main" r:embed="R0fd1f818b03e482a"/>
           <a:stretch xmlns:a="http://schemas.openxmlformats.org/drawingml/2006/main"/>
         </p:blipFill>
         <p:spPr>
@@ -8401,7 +8401,7 @@
     </p:spTree>
     <p:extLst>
       <p:ext uri="{BB962C8B-B14F-4D97-AF65-F5344CB8AC3E}">
-        <p14:creationId xmlns:p14="http://schemas.microsoft.com/office/powerpoint/2010/main" val="769316843"/>
+        <p14:creationId xmlns:p14="http://schemas.microsoft.com/office/powerpoint/2010/main" val="2093085360"/>
       </p:ext>
     </p:extLst>
   </p:cSld>
@@ -8425,7 +8425,7 @@
           <p:cNvPr id="2" name="">
             <a:extLst xmlns:a="http://schemas.openxmlformats.org/drawingml/2006/main">
               <a:ext uri="{FF2B5EF4-FFF2-40B4-BE49-F238E27FC236}">
-                <a16:creationId xmlns:a16="http://schemas.microsoft.com/office/drawing/2014/main" id="{25960B0B-FCC4-42FC-9158-34E97041FDE6}"/>
+                <a16:creationId xmlns:a16="http://schemas.microsoft.com/office/drawing/2014/main" id="{CDF22B10-2449-446F-8553-EFCA8896372F}"/>
               </a:ext>
             </a:extLst>
           </p:cNvPr>
@@ -8435,7 +8435,7 @@
           <p:nvPr/>
         </p:nvPicPr>
         <p:blipFill>
-          <a:blip xmlns:r="http://schemas.openxmlformats.org/officeDocument/2006/relationships" xmlns:a="http://schemas.openxmlformats.org/drawingml/2006/main" r:embed="R833ad94768674a58"/>
+          <a:blip xmlns:r="http://schemas.openxmlformats.org/officeDocument/2006/relationships" xmlns:a="http://schemas.openxmlformats.org/drawingml/2006/main" r:embed="R5b58cf0f9f1a464e"/>
           <a:stretch xmlns:a="http://schemas.openxmlformats.org/drawingml/2006/main"/>
         </p:blipFill>
         <p:spPr>
@@ -8451,7 +8451,7 @@
     </p:spTree>
     <p:extLst>
       <p:ext uri="{BB962C8B-B14F-4D97-AF65-F5344CB8AC3E}">
-        <p14:creationId xmlns:p14="http://schemas.microsoft.com/office/powerpoint/2010/main" val="2087080316"/>
+        <p14:creationId xmlns:p14="http://schemas.microsoft.com/office/powerpoint/2010/main" val="1777885429"/>
       </p:ext>
     </p:extLst>
   </p:cSld>
@@ -8475,7 +8475,7 @@
           <p:cNvPr id="2" name="">
             <a:extLst xmlns:a="http://schemas.openxmlformats.org/drawingml/2006/main">
               <a:ext uri="{FF2B5EF4-FFF2-40B4-BE49-F238E27FC236}">
-                <a16:creationId xmlns:a16="http://schemas.microsoft.com/office/drawing/2014/main" id="{975FAE32-5068-4585-8430-A8392BC75B77}"/>
+                <a16:creationId xmlns:a16="http://schemas.microsoft.com/office/drawing/2014/main" id="{3B47E9B2-E6A5-4193-8743-5CAE121C3DE0}"/>
               </a:ext>
             </a:extLst>
           </p:cNvPr>
@@ -8485,7 +8485,7 @@
           <p:nvPr/>
         </p:nvPicPr>
         <p:blipFill>
-          <a:blip xmlns:r="http://schemas.openxmlformats.org/officeDocument/2006/relationships" xmlns:a="http://schemas.openxmlformats.org/drawingml/2006/main" r:embed="R78145e7dc3ae4340"/>
+          <a:blip xmlns:r="http://schemas.openxmlformats.org/officeDocument/2006/relationships" xmlns:a="http://schemas.openxmlformats.org/drawingml/2006/main" r:embed="Rf5a044256a5a4edc"/>
           <a:stretch xmlns:a="http://schemas.openxmlformats.org/drawingml/2006/main"/>
         </p:blipFill>
         <p:spPr>
@@ -8501,7 +8501,7 @@
     </p:spTree>
     <p:extLst>
       <p:ext uri="{BB962C8B-B14F-4D97-AF65-F5344CB8AC3E}">
-        <p14:creationId xmlns:p14="http://schemas.microsoft.com/office/powerpoint/2010/main" val="410501011"/>
+        <p14:creationId xmlns:p14="http://schemas.microsoft.com/office/powerpoint/2010/main" val="1789208830"/>
       </p:ext>
     </p:extLst>
   </p:cSld>
@@ -8525,7 +8525,7 @@
           <p:cNvPr id="2" name="">
             <a:extLst xmlns:a="http://schemas.openxmlformats.org/drawingml/2006/main">
               <a:ext uri="{FF2B5EF4-FFF2-40B4-BE49-F238E27FC236}">
-                <a16:creationId xmlns:a16="http://schemas.microsoft.com/office/drawing/2014/main" id="{59281466-56CF-4DA9-8FB8-B7AB210BD91D}"/>
+                <a16:creationId xmlns:a16="http://schemas.microsoft.com/office/drawing/2014/main" id="{46C69E3E-3775-427D-9D15-D3E7D90B83DB}"/>
               </a:ext>
             </a:extLst>
           </p:cNvPr>
@@ -8535,7 +8535,7 @@
           <p:nvPr/>
         </p:nvPicPr>
         <p:blipFill>
-          <a:blip xmlns:r="http://schemas.openxmlformats.org/officeDocument/2006/relationships" xmlns:a="http://schemas.openxmlformats.org/drawingml/2006/main" r:embed="R1a9188079e5c4232"/>
+          <a:blip xmlns:r="http://schemas.openxmlformats.org/officeDocument/2006/relationships" xmlns:a="http://schemas.openxmlformats.org/drawingml/2006/main" r:embed="Rec890f61a9424fb3"/>
           <a:stretch xmlns:a="http://schemas.openxmlformats.org/drawingml/2006/main"/>
         </p:blipFill>
         <p:spPr>
@@ -8551,7 +8551,7 @@
     </p:spTree>
     <p:extLst>
       <p:ext uri="{BB962C8B-B14F-4D97-AF65-F5344CB8AC3E}">
-        <p14:creationId xmlns:p14="http://schemas.microsoft.com/office/powerpoint/2010/main" val="918201764"/>
+        <p14:creationId xmlns:p14="http://schemas.microsoft.com/office/powerpoint/2010/main" val="499054909"/>
       </p:ext>
     </p:extLst>
   </p:cSld>
@@ -8575,7 +8575,7 @@
           <p:cNvPr id="2" name="">
             <a:extLst xmlns:a="http://schemas.openxmlformats.org/drawingml/2006/main">
               <a:ext uri="{FF2B5EF4-FFF2-40B4-BE49-F238E27FC236}">
-                <a16:creationId xmlns:a16="http://schemas.microsoft.com/office/drawing/2014/main" id="{14AD0975-0482-4EDF-9085-6004CED7C4CE}"/>
+                <a16:creationId xmlns:a16="http://schemas.microsoft.com/office/drawing/2014/main" id="{9874D772-830D-4C53-B5F9-F80C4B41A4CA}"/>
               </a:ext>
             </a:extLst>
           </p:cNvPr>
@@ -8585,7 +8585,7 @@
           <p:nvPr/>
         </p:nvPicPr>
         <p:blipFill>
-          <a:blip xmlns:r="http://schemas.openxmlformats.org/officeDocument/2006/relationships" xmlns:a="http://schemas.openxmlformats.org/drawingml/2006/main" r:embed="R7160b6b86b4e4af5"/>
+          <a:blip xmlns:r="http://schemas.openxmlformats.org/officeDocument/2006/relationships" xmlns:a="http://schemas.openxmlformats.org/drawingml/2006/main" r:embed="R178c22c9355e483c"/>
           <a:stretch xmlns:a="http://schemas.openxmlformats.org/drawingml/2006/main"/>
         </p:blipFill>
         <p:spPr>
@@ -8601,7 +8601,7 @@
     </p:spTree>
     <p:extLst>
       <p:ext uri="{BB962C8B-B14F-4D97-AF65-F5344CB8AC3E}">
-        <p14:creationId xmlns:p14="http://schemas.microsoft.com/office/powerpoint/2010/main" val="670270994"/>
+        <p14:creationId xmlns:p14="http://schemas.microsoft.com/office/powerpoint/2010/main" val="322709448"/>
       </p:ext>
     </p:extLst>
   </p:cSld>
@@ -8625,7 +8625,7 @@
           <p:cNvPr id="2" name="">
             <a:extLst xmlns:a="http://schemas.openxmlformats.org/drawingml/2006/main">
               <a:ext uri="{FF2B5EF4-FFF2-40B4-BE49-F238E27FC236}">
-                <a16:creationId xmlns:a16="http://schemas.microsoft.com/office/drawing/2014/main" id="{F78AA631-EC8E-42F7-B840-02E03597A28D}"/>
+                <a16:creationId xmlns:a16="http://schemas.microsoft.com/office/drawing/2014/main" id="{B21B198E-4031-401F-8107-709767B74E67}"/>
               </a:ext>
             </a:extLst>
           </p:cNvPr>
@@ -8635,7 +8635,7 @@
           <p:nvPr/>
         </p:nvPicPr>
         <p:blipFill>
-          <a:blip xmlns:r="http://schemas.openxmlformats.org/officeDocument/2006/relationships" xmlns:a="http://schemas.openxmlformats.org/drawingml/2006/main" r:embed="R1a1cba7485a44bda"/>
+          <a:blip xmlns:r="http://schemas.openxmlformats.org/officeDocument/2006/relationships" xmlns:a="http://schemas.openxmlformats.org/drawingml/2006/main" r:embed="Rffeff1b3c2d4446c"/>
           <a:stretch xmlns:a="http://schemas.openxmlformats.org/drawingml/2006/main"/>
         </p:blipFill>
         <p:spPr>
@@ -8651,7 +8651,7 @@
     </p:spTree>
     <p:extLst>
       <p:ext uri="{BB962C8B-B14F-4D97-AF65-F5344CB8AC3E}">
-        <p14:creationId xmlns:p14="http://schemas.microsoft.com/office/powerpoint/2010/main" val="808816450"/>
+        <p14:creationId xmlns:p14="http://schemas.microsoft.com/office/powerpoint/2010/main" val="786918464"/>
       </p:ext>
     </p:extLst>
   </p:cSld>

--- a/teaching/macro-applications/downloads/lecture_3.pptx
+++ b/teaching/macro-applications/downloads/lecture_3.pptx
@@ -2,44 +2,44 @@
 <file path=ppt/presentation.xml><?xml version="1.0" encoding="utf-8"?>
 <p:presentation xmlns:p="http://schemas.openxmlformats.org/presentationml/2006/main">
   <p:sldMasterIdLst>
-    <p:sldMasterId xmlns:r="http://schemas.openxmlformats.org/officeDocument/2006/relationships" id="2147483648" r:id="R9f083772bc9548f6"/>
+    <p:sldMasterId xmlns:r="http://schemas.openxmlformats.org/officeDocument/2006/relationships" id="2147483648" r:id="R1fd5e4aed1984795"/>
   </p:sldMasterIdLst>
   <p:notesMasterIdLst>
-    <p:notesMasterId xmlns:r="http://schemas.openxmlformats.org/officeDocument/2006/relationships" r:id="R9ce23a5b7a604578"/>
+    <p:notesMasterId xmlns:r="http://schemas.openxmlformats.org/officeDocument/2006/relationships" r:id="R3ab01ffa4fb849c5"/>
   </p:notesMasterIdLst>
   <p:sldIdLst>
-    <p:sldId xmlns:r="http://schemas.openxmlformats.org/officeDocument/2006/relationships" id="256" r:id="Rb070119b896340d7"/>
-    <p:sldId xmlns:r="http://schemas.openxmlformats.org/officeDocument/2006/relationships" id="257" r:id="R58230c1d16f442fc"/>
-    <p:sldId xmlns:r="http://schemas.openxmlformats.org/officeDocument/2006/relationships" id="258" r:id="R3bd151648db54d41"/>
-    <p:sldId xmlns:r="http://schemas.openxmlformats.org/officeDocument/2006/relationships" id="259" r:id="R2fbec249f9cb4ddb"/>
-    <p:sldId xmlns:r="http://schemas.openxmlformats.org/officeDocument/2006/relationships" id="260" r:id="R0d88983b7f7949af"/>
-    <p:sldId xmlns:r="http://schemas.openxmlformats.org/officeDocument/2006/relationships" id="261" r:id="R0445a7dfcb6b4cd6"/>
-    <p:sldId xmlns:r="http://schemas.openxmlformats.org/officeDocument/2006/relationships" id="262" r:id="R9fd984b7d8104f76"/>
-    <p:sldId xmlns:r="http://schemas.openxmlformats.org/officeDocument/2006/relationships" id="263" r:id="Rcc08f18c41704533"/>
-    <p:sldId xmlns:r="http://schemas.openxmlformats.org/officeDocument/2006/relationships" id="264" r:id="Rced8c8badef84998"/>
-    <p:sldId xmlns:r="http://schemas.openxmlformats.org/officeDocument/2006/relationships" id="265" r:id="R214f42fb95e347a8"/>
-    <p:sldId xmlns:r="http://schemas.openxmlformats.org/officeDocument/2006/relationships" id="266" r:id="Rbf3e9a3831f64845"/>
-    <p:sldId xmlns:r="http://schemas.openxmlformats.org/officeDocument/2006/relationships" id="267" r:id="R42c04e1ce0654103"/>
-    <p:sldId xmlns:r="http://schemas.openxmlformats.org/officeDocument/2006/relationships" id="268" r:id="Rc9619395cc3a48a5"/>
-    <p:sldId xmlns:r="http://schemas.openxmlformats.org/officeDocument/2006/relationships" id="269" r:id="R5999653797114361"/>
-    <p:sldId xmlns:r="http://schemas.openxmlformats.org/officeDocument/2006/relationships" id="270" r:id="R0c266a57b2864c25"/>
-    <p:sldId xmlns:r="http://schemas.openxmlformats.org/officeDocument/2006/relationships" id="271" r:id="Re9e17f13b2564ca6"/>
-    <p:sldId xmlns:r="http://schemas.openxmlformats.org/officeDocument/2006/relationships" id="272" r:id="Re6a54a81e3694ea9"/>
-    <p:sldId xmlns:r="http://schemas.openxmlformats.org/officeDocument/2006/relationships" id="273" r:id="R08532d6e2a574ea9"/>
-    <p:sldId xmlns:r="http://schemas.openxmlformats.org/officeDocument/2006/relationships" id="274" r:id="R7f69cf23c2ea4aa7"/>
-    <p:sldId xmlns:r="http://schemas.openxmlformats.org/officeDocument/2006/relationships" id="275" r:id="Rbe04f4da00b14295"/>
-    <p:sldId xmlns:r="http://schemas.openxmlformats.org/officeDocument/2006/relationships" id="276" r:id="R2eb53f42c4c44acf"/>
-    <p:sldId xmlns:r="http://schemas.openxmlformats.org/officeDocument/2006/relationships" id="277" r:id="Rf131b6053ead418b"/>
-    <p:sldId xmlns:r="http://schemas.openxmlformats.org/officeDocument/2006/relationships" id="278" r:id="R55e8530f71a94837"/>
-    <p:sldId xmlns:r="http://schemas.openxmlformats.org/officeDocument/2006/relationships" id="279" r:id="R9194e963b35447db"/>
-    <p:sldId xmlns:r="http://schemas.openxmlformats.org/officeDocument/2006/relationships" id="280" r:id="R5cc1b281af1c46d7"/>
-    <p:sldId xmlns:r="http://schemas.openxmlformats.org/officeDocument/2006/relationships" id="281" r:id="R1b96027dcc7248b0"/>
-    <p:sldId xmlns:r="http://schemas.openxmlformats.org/officeDocument/2006/relationships" id="282" r:id="R98576c388a064772"/>
-    <p:sldId xmlns:r="http://schemas.openxmlformats.org/officeDocument/2006/relationships" id="283" r:id="Raa4c3ef7e18a440a"/>
-    <p:sldId xmlns:r="http://schemas.openxmlformats.org/officeDocument/2006/relationships" id="284" r:id="Rd47fc8080719463d"/>
-    <p:sldId xmlns:r="http://schemas.openxmlformats.org/officeDocument/2006/relationships" id="285" r:id="R1b726e66a5c04c15"/>
-    <p:sldId xmlns:r="http://schemas.openxmlformats.org/officeDocument/2006/relationships" id="286" r:id="Reab22736c30c49fc"/>
-    <p:sldId xmlns:r="http://schemas.openxmlformats.org/officeDocument/2006/relationships" id="287" r:id="R487ff40046124866"/>
+    <p:sldId xmlns:r="http://schemas.openxmlformats.org/officeDocument/2006/relationships" id="256" r:id="R8174a91cc6464d76"/>
+    <p:sldId xmlns:r="http://schemas.openxmlformats.org/officeDocument/2006/relationships" id="257" r:id="R116fca8493d94b1d"/>
+    <p:sldId xmlns:r="http://schemas.openxmlformats.org/officeDocument/2006/relationships" id="258" r:id="R7d2d9be30219409c"/>
+    <p:sldId xmlns:r="http://schemas.openxmlformats.org/officeDocument/2006/relationships" id="259" r:id="R6f603f198dca40b6"/>
+    <p:sldId xmlns:r="http://schemas.openxmlformats.org/officeDocument/2006/relationships" id="260" r:id="Rad724fdca05a433a"/>
+    <p:sldId xmlns:r="http://schemas.openxmlformats.org/officeDocument/2006/relationships" id="261" r:id="R6e8df195bcb34e8c"/>
+    <p:sldId xmlns:r="http://schemas.openxmlformats.org/officeDocument/2006/relationships" id="262" r:id="R30f1c31e76314208"/>
+    <p:sldId xmlns:r="http://schemas.openxmlformats.org/officeDocument/2006/relationships" id="263" r:id="Rf99adf88bc0149b0"/>
+    <p:sldId xmlns:r="http://schemas.openxmlformats.org/officeDocument/2006/relationships" id="264" r:id="R5feacbcfd73b46d7"/>
+    <p:sldId xmlns:r="http://schemas.openxmlformats.org/officeDocument/2006/relationships" id="265" r:id="Rc2afac89d8ef497c"/>
+    <p:sldId xmlns:r="http://schemas.openxmlformats.org/officeDocument/2006/relationships" id="266" r:id="R6eaea2b017bf4865"/>
+    <p:sldId xmlns:r="http://schemas.openxmlformats.org/officeDocument/2006/relationships" id="267" r:id="Rb003109f6ff544f8"/>
+    <p:sldId xmlns:r="http://schemas.openxmlformats.org/officeDocument/2006/relationships" id="268" r:id="Ra92fc64f78464cee"/>
+    <p:sldId xmlns:r="http://schemas.openxmlformats.org/officeDocument/2006/relationships" id="269" r:id="R9078fea5b11d4bd7"/>
+    <p:sldId xmlns:r="http://schemas.openxmlformats.org/officeDocument/2006/relationships" id="270" r:id="Rb410c17c57e14b08"/>
+    <p:sldId xmlns:r="http://schemas.openxmlformats.org/officeDocument/2006/relationships" id="271" r:id="R9ddebffab3aa4daa"/>
+    <p:sldId xmlns:r="http://schemas.openxmlformats.org/officeDocument/2006/relationships" id="272" r:id="R66d130874f794865"/>
+    <p:sldId xmlns:r="http://schemas.openxmlformats.org/officeDocument/2006/relationships" id="273" r:id="Rb3a21d40ae564684"/>
+    <p:sldId xmlns:r="http://schemas.openxmlformats.org/officeDocument/2006/relationships" id="274" r:id="R43f5cf8af6e1468f"/>
+    <p:sldId xmlns:r="http://schemas.openxmlformats.org/officeDocument/2006/relationships" id="275" r:id="Rf0188ad961ba43f7"/>
+    <p:sldId xmlns:r="http://schemas.openxmlformats.org/officeDocument/2006/relationships" id="276" r:id="R2286c53d96224ca1"/>
+    <p:sldId xmlns:r="http://schemas.openxmlformats.org/officeDocument/2006/relationships" id="277" r:id="R518ac4c0e3054666"/>
+    <p:sldId xmlns:r="http://schemas.openxmlformats.org/officeDocument/2006/relationships" id="278" r:id="R9422c65e32ab456a"/>
+    <p:sldId xmlns:r="http://schemas.openxmlformats.org/officeDocument/2006/relationships" id="279" r:id="R5fb4b6b2fe08426b"/>
+    <p:sldId xmlns:r="http://schemas.openxmlformats.org/officeDocument/2006/relationships" id="280" r:id="R5b77e88ab1124e97"/>
+    <p:sldId xmlns:r="http://schemas.openxmlformats.org/officeDocument/2006/relationships" id="281" r:id="R152c6083f2334cad"/>
+    <p:sldId xmlns:r="http://schemas.openxmlformats.org/officeDocument/2006/relationships" id="282" r:id="R95cc9093dca24973"/>
+    <p:sldId xmlns:r="http://schemas.openxmlformats.org/officeDocument/2006/relationships" id="283" r:id="R644fd962fc4343a1"/>
+    <p:sldId xmlns:r="http://schemas.openxmlformats.org/officeDocument/2006/relationships" id="284" r:id="R6bb10906bd374180"/>
+    <p:sldId xmlns:r="http://schemas.openxmlformats.org/officeDocument/2006/relationships" id="285" r:id="Rbd6cb0a0e0ef4da9"/>
+    <p:sldId xmlns:r="http://schemas.openxmlformats.org/officeDocument/2006/relationships" id="286" r:id="Rb1ba7fbafb644ee6"/>
+    <p:sldId xmlns:r="http://schemas.openxmlformats.org/officeDocument/2006/relationships" id="287" r:id="R2ef9b3f7d34b4d5a"/>
   </p:sldIdLst>
   <p:sldSz cx="12192000" cy="6858000"/>
   <p:notesSz cx="6858000" cy="9144000"/>
@@ -521,6 +521,16 @@
               <a:t/>
             </a:r>
           </a:p>
+          <a:p xmlns:a="http://schemas.openxmlformats.org/drawingml/2006/main">
+            <a:r>
+              <a:t/>
+            </a:r>
+          </a:p>
+          <a:p xmlns:a="http://schemas.openxmlformats.org/drawingml/2006/main">
+            <a:r>
+              <a:t/>
+            </a:r>
+          </a:p>
         </p:txBody>
       </p:sp>
       <p:sp>
@@ -636,6 +646,16 @@
               <a:t/>
             </a:r>
           </a:p>
+          <a:p xmlns:a="http://schemas.openxmlformats.org/drawingml/2006/main">
+            <a:r>
+              <a:t/>
+            </a:r>
+          </a:p>
+          <a:p xmlns:a="http://schemas.openxmlformats.org/drawingml/2006/main">
+            <a:r>
+              <a:t/>
+            </a:r>
+          </a:p>
         </p:txBody>
       </p:sp>
       <p:sp>
@@ -751,6 +771,16 @@
               <a:t/>
             </a:r>
           </a:p>
+          <a:p xmlns:a="http://schemas.openxmlformats.org/drawingml/2006/main">
+            <a:r>
+              <a:t/>
+            </a:r>
+          </a:p>
+          <a:p xmlns:a="http://schemas.openxmlformats.org/drawingml/2006/main">
+            <a:r>
+              <a:t/>
+            </a:r>
+          </a:p>
         </p:txBody>
       </p:sp>
       <p:sp>
@@ -863,6 +893,26 @@
           </a:p>
           <a:p xmlns:a="http://schemas.openxmlformats.org/drawingml/2006/main">
             <a:r>
+              <a:t>A: A transfer from producers to consumers. The lower price saves consumers money on their original purchases. Producers lose the same amount, so A cancels when their welfare changes are added.</a:t>
+            </a:r>
+          </a:p>
+          <a:p xmlns:a="http://schemas.openxmlformats.org/drawingml/2006/main">
+            <a:r>
+              <a:t/>
+            </a:r>
+          </a:p>
+          <a:p xmlns:a="http://schemas.openxmlformats.org/drawingml/2006/main">
+            <a:r>
+              <a:t>B: Additional consumer surplus. The price fall encourages extra consumption. B is the willingness to pay for those extra units above the price paid: a gain to consumers.</a:t>
+            </a:r>
+          </a:p>
+          <a:p xmlns:a="http://schemas.openxmlformats.org/drawingml/2006/main">
+            <a:r>
+              <a:t/>
+            </a:r>
+          </a:p>
+          <a:p xmlns:a="http://schemas.openxmlformats.org/drawingml/2006/main">
+            <a:r>
               <a:t/>
             </a:r>
           </a:p>
@@ -978,6 +1028,36 @@
           </a:p>
           <a:p xmlns:a="http://schemas.openxmlformats.org/drawingml/2006/main">
             <a:r>
+              <a:t>A: A transfer from producers to consumers. The lower price saves consumers money on their original purchases. Producers lose the same amount, so A cancels when their welfare changes are added.</a:t>
+            </a:r>
+          </a:p>
+          <a:p xmlns:a="http://schemas.openxmlformats.org/drawingml/2006/main">
+            <a:r>
+              <a:t/>
+            </a:r>
+          </a:p>
+          <a:p xmlns:a="http://schemas.openxmlformats.org/drawingml/2006/main">
+            <a:r>
+              <a:t>C: Extra transport costs. Some original monopoly sales are now made abroad instead of at home. Shipping those units costs extra resources. C is this cost, not total transport spending.</a:t>
+            </a:r>
+          </a:p>
+          <a:p xmlns:a="http://schemas.openxmlformats.org/drawingml/2006/main">
+            <a:r>
+              <a:t/>
+            </a:r>
+          </a:p>
+          <a:p xmlns:a="http://schemas.openxmlformats.org/drawingml/2006/main">
+            <a:r>
+              <a:t>D: Margin on additional sales. Each firm sells more in total. D is the margin on the additional export sales after production and transport costs. Those transport costs have already been deducted.</a:t>
+            </a:r>
+          </a:p>
+          <a:p xmlns:a="http://schemas.openxmlformats.org/drawingml/2006/main">
+            <a:r>
+              <a:t/>
+            </a:r>
+          </a:p>
+          <a:p xmlns:a="http://schemas.openxmlformats.org/drawingml/2006/main">
+            <a:r>
               <a:t/>
             </a:r>
           </a:p>
@@ -1093,6 +1173,36 @@
           </a:p>
           <a:p xmlns:a="http://schemas.openxmlformats.org/drawingml/2006/main">
             <a:r>
+              <a:t>B: Additional consumer surplus. The price fall encourages extra consumption. B is the willingness to pay for those extra units above the price paid: a gain to consumers.</a:t>
+            </a:r>
+          </a:p>
+          <a:p xmlns:a="http://schemas.openxmlformats.org/drawingml/2006/main">
+            <a:r>
+              <a:t/>
+            </a:r>
+          </a:p>
+          <a:p xmlns:a="http://schemas.openxmlformats.org/drawingml/2006/main">
+            <a:r>
+              <a:t>C: Extra transport costs. Some original monopoly sales are now made abroad instead of at home. Shipping those units costs extra resources. C is this cost, not total transport spending.</a:t>
+            </a:r>
+          </a:p>
+          <a:p xmlns:a="http://schemas.openxmlformats.org/drawingml/2006/main">
+            <a:r>
+              <a:t/>
+            </a:r>
+          </a:p>
+          <a:p xmlns:a="http://schemas.openxmlformats.org/drawingml/2006/main">
+            <a:r>
+              <a:t>D: Margin on additional sales. Each firm sells more in total. D is the margin on the additional export sales after production and transport costs. Those transport costs have already been deducted.</a:t>
+            </a:r>
+          </a:p>
+          <a:p xmlns:a="http://schemas.openxmlformats.org/drawingml/2006/main">
+            <a:r>
+              <a:t/>
+            </a:r>
+          </a:p>
+          <a:p xmlns:a="http://schemas.openxmlformats.org/drawingml/2006/main">
+            <a:r>
               <a:t/>
             </a:r>
           </a:p>
@@ -1211,6 +1321,16 @@
               <a:t/>
             </a:r>
           </a:p>
+          <a:p xmlns:a="http://schemas.openxmlformats.org/drawingml/2006/main">
+            <a:r>
+              <a:t/>
+            </a:r>
+          </a:p>
+          <a:p xmlns:a="http://schemas.openxmlformats.org/drawingml/2006/main">
+            <a:r>
+              <a:t/>
+            </a:r>
+          </a:p>
         </p:txBody>
       </p:sp>
       <p:sp>
@@ -1326,6 +1446,16 @@
               <a:t/>
             </a:r>
           </a:p>
+          <a:p xmlns:a="http://schemas.openxmlformats.org/drawingml/2006/main">
+            <a:r>
+              <a:t/>
+            </a:r>
+          </a:p>
+          <a:p xmlns:a="http://schemas.openxmlformats.org/drawingml/2006/main">
+            <a:r>
+              <a:t/>
+            </a:r>
+          </a:p>
         </p:txBody>
       </p:sp>
       <p:sp>
@@ -1441,6 +1571,16 @@
               <a:t/>
             </a:r>
           </a:p>
+          <a:p xmlns:a="http://schemas.openxmlformats.org/drawingml/2006/main">
+            <a:r>
+              <a:t/>
+            </a:r>
+          </a:p>
+          <a:p xmlns:a="http://schemas.openxmlformats.org/drawingml/2006/main">
+            <a:r>
+              <a:t/>
+            </a:r>
+          </a:p>
         </p:txBody>
       </p:sp>
       <p:sp>
@@ -1556,6 +1696,16 @@
               <a:t/>
             </a:r>
           </a:p>
+          <a:p xmlns:a="http://schemas.openxmlformats.org/drawingml/2006/main">
+            <a:r>
+              <a:t/>
+            </a:r>
+          </a:p>
+          <a:p xmlns:a="http://schemas.openxmlformats.org/drawingml/2006/main">
+            <a:r>
+              <a:t/>
+            </a:r>
+          </a:p>
         </p:txBody>
       </p:sp>
       <p:sp>
@@ -1671,6 +1821,16 @@
               <a:t/>
             </a:r>
           </a:p>
+          <a:p xmlns:a="http://schemas.openxmlformats.org/drawingml/2006/main">
+            <a:r>
+              <a:t/>
+            </a:r>
+          </a:p>
+          <a:p xmlns:a="http://schemas.openxmlformats.org/drawingml/2006/main">
+            <a:r>
+              <a:t/>
+            </a:r>
+          </a:p>
         </p:txBody>
       </p:sp>
       <p:sp>
@@ -1783,6 +1943,16 @@
           </a:p>
           <a:p xmlns:a="http://schemas.openxmlformats.org/drawingml/2006/main">
             <a:r>
+              <a:t/>
+            </a:r>
+          </a:p>
+          <a:p xmlns:a="http://schemas.openxmlformats.org/drawingml/2006/main">
+            <a:r>
+              <a:t/>
+            </a:r>
+          </a:p>
+          <a:p xmlns:a="http://schemas.openxmlformats.org/drawingml/2006/main">
+            <a:r>
               <a:t>http://ec.europa.eu/growth/single-market/index_en.htm</a:t>
             </a:r>
           </a:p>
@@ -1901,6 +2071,16 @@
               <a:t/>
             </a:r>
           </a:p>
+          <a:p xmlns:a="http://schemas.openxmlformats.org/drawingml/2006/main">
+            <a:r>
+              <a:t/>
+            </a:r>
+          </a:p>
+          <a:p xmlns:a="http://schemas.openxmlformats.org/drawingml/2006/main">
+            <a:r>
+              <a:t/>
+            </a:r>
+          </a:p>
         </p:txBody>
       </p:sp>
       <p:sp>
@@ -2016,6 +2196,16 @@
               <a:t/>
             </a:r>
           </a:p>
+          <a:p xmlns:a="http://schemas.openxmlformats.org/drawingml/2006/main">
+            <a:r>
+              <a:t/>
+            </a:r>
+          </a:p>
+          <a:p xmlns:a="http://schemas.openxmlformats.org/drawingml/2006/main">
+            <a:r>
+              <a:t/>
+            </a:r>
+          </a:p>
         </p:txBody>
       </p:sp>
       <p:sp>
@@ -2131,6 +2321,16 @@
               <a:t/>
             </a:r>
           </a:p>
+          <a:p xmlns:a="http://schemas.openxmlformats.org/drawingml/2006/main">
+            <a:r>
+              <a:t/>
+            </a:r>
+          </a:p>
+          <a:p xmlns:a="http://schemas.openxmlformats.org/drawingml/2006/main">
+            <a:r>
+              <a:t/>
+            </a:r>
+          </a:p>
         </p:txBody>
       </p:sp>
       <p:sp>
@@ -2243,6 +2443,16 @@
           </a:p>
           <a:p xmlns:a="http://schemas.openxmlformats.org/drawingml/2006/main">
             <a:r>
+              <a:t/>
+            </a:r>
+          </a:p>
+          <a:p xmlns:a="http://schemas.openxmlformats.org/drawingml/2006/main">
+            <a:r>
+              <a:t/>
+            </a:r>
+          </a:p>
+          <a:p xmlns:a="http://schemas.openxmlformats.org/drawingml/2006/main">
+            <a:r>
               <a:t>https://competition-policy.ec.europa.eu/system/files/2024-06/KD0924494enn_Protecting_competition_in_a_changing_world_staff_report_2024.pdf#page=69</a:t>
             </a:r>
           </a:p>
@@ -2361,6 +2571,16 @@
               <a:t/>
             </a:r>
           </a:p>
+          <a:p xmlns:a="http://schemas.openxmlformats.org/drawingml/2006/main">
+            <a:r>
+              <a:t/>
+            </a:r>
+          </a:p>
+          <a:p xmlns:a="http://schemas.openxmlformats.org/drawingml/2006/main">
+            <a:r>
+              <a:t/>
+            </a:r>
+          </a:p>
         </p:txBody>
       </p:sp>
       <p:sp>
@@ -2476,6 +2696,16 @@
               <a:t/>
             </a:r>
           </a:p>
+          <a:p xmlns:a="http://schemas.openxmlformats.org/drawingml/2006/main">
+            <a:r>
+              <a:t/>
+            </a:r>
+          </a:p>
+          <a:p xmlns:a="http://schemas.openxmlformats.org/drawingml/2006/main">
+            <a:r>
+              <a:t/>
+            </a:r>
+          </a:p>
         </p:txBody>
       </p:sp>
       <p:sp>
@@ -2591,6 +2821,16 @@
               <a:t/>
             </a:r>
           </a:p>
+          <a:p xmlns:a="http://schemas.openxmlformats.org/drawingml/2006/main">
+            <a:r>
+              <a:t/>
+            </a:r>
+          </a:p>
+          <a:p xmlns:a="http://schemas.openxmlformats.org/drawingml/2006/main">
+            <a:r>
+              <a:t/>
+            </a:r>
+          </a:p>
         </p:txBody>
       </p:sp>
       <p:sp>
@@ -2703,6 +2943,16 @@
           </a:p>
           <a:p xmlns:a="http://schemas.openxmlformats.org/drawingml/2006/main">
             <a:r>
+              <a:t/>
+            </a:r>
+          </a:p>
+          <a:p xmlns:a="http://schemas.openxmlformats.org/drawingml/2006/main">
+            <a:r>
+              <a:t/>
+            </a:r>
+          </a:p>
+          <a:p xmlns:a="http://schemas.openxmlformats.org/drawingml/2006/main">
+            <a:r>
               <a:t>https://durham.rl.talis.com/lists/d85d1ad3-e9ac-4daf-aa66-e3ddfcf902d7.html</a:t>
             </a:r>
           </a:p>
@@ -2821,6 +3071,16 @@
               <a:t/>
             </a:r>
           </a:p>
+          <a:p xmlns:a="http://schemas.openxmlformats.org/drawingml/2006/main">
+            <a:r>
+              <a:t/>
+            </a:r>
+          </a:p>
+          <a:p xmlns:a="http://schemas.openxmlformats.org/drawingml/2006/main">
+            <a:r>
+              <a:t/>
+            </a:r>
+          </a:p>
         </p:txBody>
       </p:sp>
       <p:sp>
@@ -2936,6 +3196,16 @@
               <a:t/>
             </a:r>
           </a:p>
+          <a:p xmlns:a="http://schemas.openxmlformats.org/drawingml/2006/main">
+            <a:r>
+              <a:t/>
+            </a:r>
+          </a:p>
+          <a:p xmlns:a="http://schemas.openxmlformats.org/drawingml/2006/main">
+            <a:r>
+              <a:t/>
+            </a:r>
+          </a:p>
         </p:txBody>
       </p:sp>
       <p:sp>
@@ -3051,6 +3321,16 @@
               <a:t/>
             </a:r>
           </a:p>
+          <a:p xmlns:a="http://schemas.openxmlformats.org/drawingml/2006/main">
+            <a:r>
+              <a:t/>
+            </a:r>
+          </a:p>
+          <a:p xmlns:a="http://schemas.openxmlformats.org/drawingml/2006/main">
+            <a:r>
+              <a:t/>
+            </a:r>
+          </a:p>
         </p:txBody>
       </p:sp>
       <p:sp>
@@ -3166,6 +3446,16 @@
               <a:t/>
             </a:r>
           </a:p>
+          <a:p xmlns:a="http://schemas.openxmlformats.org/drawingml/2006/main">
+            <a:r>
+              <a:t/>
+            </a:r>
+          </a:p>
+          <a:p xmlns:a="http://schemas.openxmlformats.org/drawingml/2006/main">
+            <a:r>
+              <a:t/>
+            </a:r>
+          </a:p>
         </p:txBody>
       </p:sp>
       <p:sp>
@@ -3281,6 +3571,16 @@
               <a:t/>
             </a:r>
           </a:p>
+          <a:p xmlns:a="http://schemas.openxmlformats.org/drawingml/2006/main">
+            <a:r>
+              <a:t/>
+            </a:r>
+          </a:p>
+          <a:p xmlns:a="http://schemas.openxmlformats.org/drawingml/2006/main">
+            <a:r>
+              <a:t/>
+            </a:r>
+          </a:p>
         </p:txBody>
       </p:sp>
       <p:sp>
@@ -3396,6 +3696,16 @@
               <a:t/>
             </a:r>
           </a:p>
+          <a:p xmlns:a="http://schemas.openxmlformats.org/drawingml/2006/main">
+            <a:r>
+              <a:t/>
+            </a:r>
+          </a:p>
+          <a:p xmlns:a="http://schemas.openxmlformats.org/drawingml/2006/main">
+            <a:r>
+              <a:t/>
+            </a:r>
+          </a:p>
         </p:txBody>
       </p:sp>
       <p:sp>
@@ -3511,6 +3821,16 @@
               <a:t/>
             </a:r>
           </a:p>
+          <a:p xmlns:a="http://schemas.openxmlformats.org/drawingml/2006/main">
+            <a:r>
+              <a:t/>
+            </a:r>
+          </a:p>
+          <a:p xmlns:a="http://schemas.openxmlformats.org/drawingml/2006/main">
+            <a:r>
+              <a:t/>
+            </a:r>
+          </a:p>
         </p:txBody>
       </p:sp>
       <p:sp>
@@ -3626,6 +3946,16 @@
               <a:t/>
             </a:r>
           </a:p>
+          <a:p xmlns:a="http://schemas.openxmlformats.org/drawingml/2006/main">
+            <a:r>
+              <a:t/>
+            </a:r>
+          </a:p>
+          <a:p xmlns:a="http://schemas.openxmlformats.org/drawingml/2006/main">
+            <a:r>
+              <a:t/>
+            </a:r>
+          </a:p>
         </p:txBody>
       </p:sp>
       <p:sp>
@@ -3741,6 +4071,16 @@
               <a:t/>
             </a:r>
           </a:p>
+          <a:p xmlns:a="http://schemas.openxmlformats.org/drawingml/2006/main">
+            <a:r>
+              <a:t/>
+            </a:r>
+          </a:p>
+          <a:p xmlns:a="http://schemas.openxmlformats.org/drawingml/2006/main">
+            <a:r>
+              <a:t/>
+            </a:r>
+          </a:p>
         </p:txBody>
       </p:sp>
       <p:sp>
@@ -3856,6 +4196,16 @@
               <a:t/>
             </a:r>
           </a:p>
+          <a:p xmlns:a="http://schemas.openxmlformats.org/drawingml/2006/main">
+            <a:r>
+              <a:t/>
+            </a:r>
+          </a:p>
+          <a:p xmlns:a="http://schemas.openxmlformats.org/drawingml/2006/main">
+            <a:r>
+              <a:t/>
+            </a:r>
+          </a:p>
         </p:txBody>
       </p:sp>
       <p:sp>
@@ -3971,6 +4321,16 @@
               <a:t/>
             </a:r>
           </a:p>
+          <a:p xmlns:a="http://schemas.openxmlformats.org/drawingml/2006/main">
+            <a:r>
+              <a:t/>
+            </a:r>
+          </a:p>
+          <a:p xmlns:a="http://schemas.openxmlformats.org/drawingml/2006/main">
+            <a:r>
+              <a:t/>
+            </a:r>
+          </a:p>
         </p:txBody>
       </p:sp>
       <p:sp>
@@ -4086,6 +4446,16 @@
               <a:t/>
             </a:r>
           </a:p>
+          <a:p xmlns:a="http://schemas.openxmlformats.org/drawingml/2006/main">
+            <a:r>
+              <a:t/>
+            </a:r>
+          </a:p>
+          <a:p xmlns:a="http://schemas.openxmlformats.org/drawingml/2006/main">
+            <a:r>
+              <a:t/>
+            </a:r>
+          </a:p>
         </p:txBody>
       </p:sp>
       <p:sp>
@@ -4130,7 +4500,7 @@
           <p:cNvPr id="3" name="Title">
             <a:extLst xmlns:a="http://schemas.openxmlformats.org/drawingml/2006/main">
               <a:ext uri="{FF2B5EF4-FFF2-40B4-BE49-F238E27FC236}">
-                <a16:creationId xmlns:a16="http://schemas.microsoft.com/office/drawing/2014/main" id="{5F142D9A-66BB-4227-A493-B43D3778A3DA}"/>
+                <a16:creationId xmlns:a16="http://schemas.microsoft.com/office/drawing/2014/main" id="{6E72B35C-6946-4A3A-839C-A3D926C68BF1}"/>
               </a:ext>
             </a:extLst>
           </p:cNvPr>
@@ -4359,7 +4729,7 @@
           <p:cNvPr id="2" name="Subtitle">
             <a:extLst xmlns:a="http://schemas.openxmlformats.org/drawingml/2006/main">
               <a:ext uri="{FF2B5EF4-FFF2-40B4-BE49-F238E27FC236}">
-                <a16:creationId xmlns:a16="http://schemas.microsoft.com/office/drawing/2014/main" id="{D82E2AFA-FCE3-4E84-89AF-A6FEE1675130}"/>
+                <a16:creationId xmlns:a16="http://schemas.microsoft.com/office/drawing/2014/main" id="{1F1E5D5C-4149-4C8A-87D4-AB0CC45901DF}"/>
               </a:ext>
             </a:extLst>
           </p:cNvPr>
@@ -4605,7 +4975,7 @@
           <p:cNvPr id="2" name="Section title">
             <a:extLst xmlns:a="http://schemas.openxmlformats.org/drawingml/2006/main">
               <a:ext uri="{FF2B5EF4-FFF2-40B4-BE49-F238E27FC236}">
-                <a16:creationId xmlns:a16="http://schemas.microsoft.com/office/drawing/2014/main" id="{50BBCB3F-6AE3-46CC-9F81-8A61F0E86B53}"/>
+                <a16:creationId xmlns:a16="http://schemas.microsoft.com/office/drawing/2014/main" id="{BFDC7144-2C98-474F-A65A-DC74BFD1F8E1}"/>
               </a:ext>
             </a:extLst>
           </p:cNvPr>
@@ -4851,7 +5221,7 @@
           <p:cNvPr id="3" name="Title">
             <a:extLst xmlns:a="http://schemas.openxmlformats.org/drawingml/2006/main">
               <a:ext uri="{FF2B5EF4-FFF2-40B4-BE49-F238E27FC236}">
-                <a16:creationId xmlns:a16="http://schemas.microsoft.com/office/drawing/2014/main" id="{87008ADA-34B1-4BD7-9E77-9A4F110AD6D5}"/>
+                <a16:creationId xmlns:a16="http://schemas.microsoft.com/office/drawing/2014/main" id="{7AE2CE21-DD10-4F15-A2DE-144F17461E11}"/>
               </a:ext>
             </a:extLst>
           </p:cNvPr>
@@ -5080,7 +5450,7 @@
           <p:cNvPr id="2" name="Body">
             <a:extLst xmlns:a="http://schemas.openxmlformats.org/drawingml/2006/main">
               <a:ext uri="{FF2B5EF4-FFF2-40B4-BE49-F238E27FC236}">
-                <a16:creationId xmlns:a16="http://schemas.microsoft.com/office/drawing/2014/main" id="{F77FEB46-D565-4441-834E-D9C7FA06261F}"/>
+                <a16:creationId xmlns:a16="http://schemas.microsoft.com/office/drawing/2014/main" id="{1D6B82EC-E8D8-40C9-BA36-E75A3A28CF0D}"/>
               </a:ext>
             </a:extLst>
           </p:cNvPr>
@@ -5326,7 +5696,7 @@
           <p:cNvPr id="4" name="Title">
             <a:extLst xmlns:a="http://schemas.openxmlformats.org/drawingml/2006/main">
               <a:ext uri="{FF2B5EF4-FFF2-40B4-BE49-F238E27FC236}">
-                <a16:creationId xmlns:a16="http://schemas.microsoft.com/office/drawing/2014/main" id="{69664585-A10A-4AA8-A611-656B844AB980}"/>
+                <a16:creationId xmlns:a16="http://schemas.microsoft.com/office/drawing/2014/main" id="{C61F6CF5-D78C-44B7-8619-E4C69FC4BB5D}"/>
               </a:ext>
             </a:extLst>
           </p:cNvPr>
@@ -5555,7 +5925,7 @@
           <p:cNvPr id="2" name="Left column">
             <a:extLst xmlns:a="http://schemas.openxmlformats.org/drawingml/2006/main">
               <a:ext uri="{FF2B5EF4-FFF2-40B4-BE49-F238E27FC236}">
-                <a16:creationId xmlns:a16="http://schemas.microsoft.com/office/drawing/2014/main" id="{3D2A724D-5384-4B55-9B21-59CAAF3C893E}"/>
+                <a16:creationId xmlns:a16="http://schemas.microsoft.com/office/drawing/2014/main" id="{F0390029-EA7E-41D6-BFCB-545D87C6A377}"/>
               </a:ext>
             </a:extLst>
           </p:cNvPr>
@@ -5784,7 +6154,7 @@
           <p:cNvPr id="3" name="Right column">
             <a:extLst xmlns:a="http://schemas.openxmlformats.org/drawingml/2006/main">
               <a:ext uri="{FF2B5EF4-FFF2-40B4-BE49-F238E27FC236}">
-                <a16:creationId xmlns:a16="http://schemas.microsoft.com/office/drawing/2014/main" id="{7E4E150A-6992-4F3C-9C4E-9F7DD1BB11A7}"/>
+                <a16:creationId xmlns:a16="http://schemas.microsoft.com/office/drawing/2014/main" id="{C1DE6B1E-4A22-4C8A-A394-E798591EE135}"/>
               </a:ext>
             </a:extLst>
           </p:cNvPr>
@@ -6030,7 +6400,7 @@
           <p:cNvPr id="3" name="Title">
             <a:extLst xmlns:a="http://schemas.openxmlformats.org/drawingml/2006/main">
               <a:ext uri="{FF2B5EF4-FFF2-40B4-BE49-F238E27FC236}">
-                <a16:creationId xmlns:a16="http://schemas.microsoft.com/office/drawing/2014/main" id="{AB25D953-E8B9-4B48-A6AB-5B8A1937463E}"/>
+                <a16:creationId xmlns:a16="http://schemas.microsoft.com/office/drawing/2014/main" id="{1CE7BCC8-4708-44F4-BCFC-823678AD0347}"/>
               </a:ext>
             </a:extLst>
           </p:cNvPr>
@@ -6259,7 +6629,7 @@
           <p:cNvPr id="2" name="Left column">
             <a:extLst xmlns:a="http://schemas.openxmlformats.org/drawingml/2006/main">
               <a:ext uri="{FF2B5EF4-FFF2-40B4-BE49-F238E27FC236}">
-                <a16:creationId xmlns:a16="http://schemas.microsoft.com/office/drawing/2014/main" id="{9583988B-FBC4-454F-865C-C29689ACAAB4}"/>
+                <a16:creationId xmlns:a16="http://schemas.microsoft.com/office/drawing/2014/main" id="{11D13228-D923-41BF-98BC-0A196ABC3100}"/>
               </a:ext>
             </a:extLst>
           </p:cNvPr>
@@ -6526,12 +6896,12 @@
   </p:cSld>
   <p:clrMap bg1="lt1" tx1="dk1" bg2="lt2" tx2="dk2" accent1="accent1" accent2="accent2" accent3="accent3" accent4="accent4" accent5="accent5" accent6="accent6" hlink="hlink" folHlink="folHlink"/>
   <p:sldLayoutIdLst>
-    <p:sldLayoutId xmlns:r="http://schemas.openxmlformats.org/officeDocument/2006/relationships" id="2147483649" r:id="Rbce3d129a7fc446b"/>
-    <p:sldLayoutId xmlns:r="http://schemas.openxmlformats.org/officeDocument/2006/relationships" id="2147483650" r:id="R0f48a8b012ee4577"/>
-    <p:sldLayoutId xmlns:r="http://schemas.openxmlformats.org/officeDocument/2006/relationships" id="2147483651" r:id="Rad5a3c2d262e4dc4"/>
-    <p:sldLayoutId xmlns:r="http://schemas.openxmlformats.org/officeDocument/2006/relationships" id="2147483652" r:id="R0c908c4637c042c3"/>
-    <p:sldLayoutId xmlns:r="http://schemas.openxmlformats.org/officeDocument/2006/relationships" id="2147483653" r:id="R4f913ff71ff74a14"/>
-    <p:sldLayoutId xmlns:r="http://schemas.openxmlformats.org/officeDocument/2006/relationships" id="2147483654" r:id="R8442df14134a4a46"/>
+    <p:sldLayoutId xmlns:r="http://schemas.openxmlformats.org/officeDocument/2006/relationships" id="2147483649" r:id="Rb9b82209ab8348d9"/>
+    <p:sldLayoutId xmlns:r="http://schemas.openxmlformats.org/officeDocument/2006/relationships" id="2147483650" r:id="R4fddfe3c0bb84021"/>
+    <p:sldLayoutId xmlns:r="http://schemas.openxmlformats.org/officeDocument/2006/relationships" id="2147483651" r:id="R3e91fceced8b49dd"/>
+    <p:sldLayoutId xmlns:r="http://schemas.openxmlformats.org/officeDocument/2006/relationships" id="2147483652" r:id="R956ba2ca9cfd4a94"/>
+    <p:sldLayoutId xmlns:r="http://schemas.openxmlformats.org/officeDocument/2006/relationships" id="2147483653" r:id="Rd415f5658ca74194"/>
+    <p:sldLayoutId xmlns:r="http://schemas.openxmlformats.org/officeDocument/2006/relationships" id="2147483654" r:id="R94f3651ba6b941db"/>
   </p:sldLayoutIdLst>
   <p:txStyles>
     <p:titleStyle>
@@ -7075,7 +7445,7 @@
           <p:cNvPr id="2" name="">
             <a:extLst xmlns:a="http://schemas.openxmlformats.org/drawingml/2006/main">
               <a:ext uri="{FF2B5EF4-FFF2-40B4-BE49-F238E27FC236}">
-                <a16:creationId xmlns:a16="http://schemas.microsoft.com/office/drawing/2014/main" id="{65D20A7E-2198-45B1-A6C8-46BD2ACCFCFC}"/>
+                <a16:creationId xmlns:a16="http://schemas.microsoft.com/office/drawing/2014/main" id="{9346AE54-177E-4D8E-ADAD-3EFA2136C286}"/>
               </a:ext>
             </a:extLst>
           </p:cNvPr>
@@ -7085,7 +7455,7 @@
           <p:nvPr/>
         </p:nvPicPr>
         <p:blipFill>
-          <a:blip xmlns:r="http://schemas.openxmlformats.org/officeDocument/2006/relationships" xmlns:a="http://schemas.openxmlformats.org/drawingml/2006/main" r:embed="R73725c2d1d7648f8"/>
+          <a:blip xmlns:r="http://schemas.openxmlformats.org/officeDocument/2006/relationships" xmlns:a="http://schemas.openxmlformats.org/drawingml/2006/main" r:embed="Rf324f08b4f2e4a2b"/>
           <a:stretch xmlns:a="http://schemas.openxmlformats.org/drawingml/2006/main"/>
         </p:blipFill>
         <p:spPr>
@@ -7101,7 +7471,7 @@
     </p:spTree>
     <p:extLst>
       <p:ext uri="{BB962C8B-B14F-4D97-AF65-F5344CB8AC3E}">
-        <p14:creationId xmlns:p14="http://schemas.microsoft.com/office/powerpoint/2010/main" val="1099671555"/>
+        <p14:creationId xmlns:p14="http://schemas.microsoft.com/office/powerpoint/2010/main" val="481500502"/>
       </p:ext>
     </p:extLst>
   </p:cSld>
@@ -7125,7 +7495,7 @@
           <p:cNvPr id="2" name="">
             <a:extLst xmlns:a="http://schemas.openxmlformats.org/drawingml/2006/main">
               <a:ext uri="{FF2B5EF4-FFF2-40B4-BE49-F238E27FC236}">
-                <a16:creationId xmlns:a16="http://schemas.microsoft.com/office/drawing/2014/main" id="{744BE571-78CC-4394-AEB1-ED378FCE487C}"/>
+                <a16:creationId xmlns:a16="http://schemas.microsoft.com/office/drawing/2014/main" id="{DFE81813-6122-4931-BE17-74B8B4B00E96}"/>
               </a:ext>
             </a:extLst>
           </p:cNvPr>
@@ -7135,7 +7505,7 @@
           <p:nvPr/>
         </p:nvPicPr>
         <p:blipFill>
-          <a:blip xmlns:r="http://schemas.openxmlformats.org/officeDocument/2006/relationships" xmlns:a="http://schemas.openxmlformats.org/drawingml/2006/main" r:embed="R1e9ce46e260b47d6"/>
+          <a:blip xmlns:r="http://schemas.openxmlformats.org/officeDocument/2006/relationships" xmlns:a="http://schemas.openxmlformats.org/drawingml/2006/main" r:embed="R6546c712a9ea4bf3"/>
           <a:stretch xmlns:a="http://schemas.openxmlformats.org/drawingml/2006/main"/>
         </p:blipFill>
         <p:spPr>
@@ -7151,7 +7521,7 @@
     </p:spTree>
     <p:extLst>
       <p:ext uri="{BB962C8B-B14F-4D97-AF65-F5344CB8AC3E}">
-        <p14:creationId xmlns:p14="http://schemas.microsoft.com/office/powerpoint/2010/main" val="604642099"/>
+        <p14:creationId xmlns:p14="http://schemas.microsoft.com/office/powerpoint/2010/main" val="567197756"/>
       </p:ext>
     </p:extLst>
   </p:cSld>
@@ -7175,7 +7545,7 @@
           <p:cNvPr id="2" name="">
             <a:extLst xmlns:a="http://schemas.openxmlformats.org/drawingml/2006/main">
               <a:ext uri="{FF2B5EF4-FFF2-40B4-BE49-F238E27FC236}">
-                <a16:creationId xmlns:a16="http://schemas.microsoft.com/office/drawing/2014/main" id="{84FD0DFC-0FDA-4488-96EF-8D6B0CE8145D}"/>
+                <a16:creationId xmlns:a16="http://schemas.microsoft.com/office/drawing/2014/main" id="{7FF61178-BAA0-4DE4-A826-FBBA6FF1D6C4}"/>
               </a:ext>
             </a:extLst>
           </p:cNvPr>
@@ -7185,7 +7555,7 @@
           <p:nvPr/>
         </p:nvPicPr>
         <p:blipFill>
-          <a:blip xmlns:r="http://schemas.openxmlformats.org/officeDocument/2006/relationships" xmlns:a="http://schemas.openxmlformats.org/drawingml/2006/main" r:embed="Re9f73e15519049ef"/>
+          <a:blip xmlns:r="http://schemas.openxmlformats.org/officeDocument/2006/relationships" xmlns:a="http://schemas.openxmlformats.org/drawingml/2006/main" r:embed="Rb9464045fa564289"/>
           <a:stretch xmlns:a="http://schemas.openxmlformats.org/drawingml/2006/main"/>
         </p:blipFill>
         <p:spPr>
@@ -7201,7 +7571,7 @@
     </p:spTree>
     <p:extLst>
       <p:ext uri="{BB962C8B-B14F-4D97-AF65-F5344CB8AC3E}">
-        <p14:creationId xmlns:p14="http://schemas.microsoft.com/office/powerpoint/2010/main" val="1931094515"/>
+        <p14:creationId xmlns:p14="http://schemas.microsoft.com/office/powerpoint/2010/main" val="392114784"/>
       </p:ext>
     </p:extLst>
   </p:cSld>
@@ -7225,7 +7595,7 @@
           <p:cNvPr id="2" name="">
             <a:extLst xmlns:a="http://schemas.openxmlformats.org/drawingml/2006/main">
               <a:ext uri="{FF2B5EF4-FFF2-40B4-BE49-F238E27FC236}">
-                <a16:creationId xmlns:a16="http://schemas.microsoft.com/office/drawing/2014/main" id="{4434BE99-72E5-464E-8BC8-FA3A46993AF7}"/>
+                <a16:creationId xmlns:a16="http://schemas.microsoft.com/office/drawing/2014/main" id="{763ED088-7CA3-4827-8100-0B797C025484}"/>
               </a:ext>
             </a:extLst>
           </p:cNvPr>
@@ -7235,7 +7605,7 @@
           <p:nvPr/>
         </p:nvPicPr>
         <p:blipFill>
-          <a:blip xmlns:r="http://schemas.openxmlformats.org/officeDocument/2006/relationships" xmlns:a="http://schemas.openxmlformats.org/drawingml/2006/main" r:embed="Ra59730a25a4b4caf"/>
+          <a:blip xmlns:r="http://schemas.openxmlformats.org/officeDocument/2006/relationships" xmlns:a="http://schemas.openxmlformats.org/drawingml/2006/main" r:embed="R26b15463318a4d27"/>
           <a:stretch xmlns:a="http://schemas.openxmlformats.org/drawingml/2006/main"/>
         </p:blipFill>
         <p:spPr>
@@ -7251,7 +7621,7 @@
     </p:spTree>
     <p:extLst>
       <p:ext uri="{BB962C8B-B14F-4D97-AF65-F5344CB8AC3E}">
-        <p14:creationId xmlns:p14="http://schemas.microsoft.com/office/powerpoint/2010/main" val="598244585"/>
+        <p14:creationId xmlns:p14="http://schemas.microsoft.com/office/powerpoint/2010/main" val="138631805"/>
       </p:ext>
     </p:extLst>
   </p:cSld>
@@ -7275,7 +7645,7 @@
           <p:cNvPr id="2" name="">
             <a:extLst xmlns:a="http://schemas.openxmlformats.org/drawingml/2006/main">
               <a:ext uri="{FF2B5EF4-FFF2-40B4-BE49-F238E27FC236}">
-                <a16:creationId xmlns:a16="http://schemas.microsoft.com/office/drawing/2014/main" id="{970E9976-D175-4EBC-A2DE-0E6D892178B7}"/>
+                <a16:creationId xmlns:a16="http://schemas.microsoft.com/office/drawing/2014/main" id="{291DD284-A8EF-41D2-AC90-C9CC049C371C}"/>
               </a:ext>
             </a:extLst>
           </p:cNvPr>
@@ -7285,7 +7655,7 @@
           <p:nvPr/>
         </p:nvPicPr>
         <p:blipFill>
-          <a:blip xmlns:r="http://schemas.openxmlformats.org/officeDocument/2006/relationships" xmlns:a="http://schemas.openxmlformats.org/drawingml/2006/main" r:embed="R6b667ab1003f4a91"/>
+          <a:blip xmlns:r="http://schemas.openxmlformats.org/officeDocument/2006/relationships" xmlns:a="http://schemas.openxmlformats.org/drawingml/2006/main" r:embed="R9214bbe679f84c38"/>
           <a:stretch xmlns:a="http://schemas.openxmlformats.org/drawingml/2006/main"/>
         </p:blipFill>
         <p:spPr>
@@ -7301,7 +7671,7 @@
     </p:spTree>
     <p:extLst>
       <p:ext uri="{BB962C8B-B14F-4D97-AF65-F5344CB8AC3E}">
-        <p14:creationId xmlns:p14="http://schemas.microsoft.com/office/powerpoint/2010/main" val="1941823045"/>
+        <p14:creationId xmlns:p14="http://schemas.microsoft.com/office/powerpoint/2010/main" val="1832017379"/>
       </p:ext>
     </p:extLst>
   </p:cSld>
@@ -7325,7 +7695,7 @@
           <p:cNvPr id="2" name="">
             <a:extLst xmlns:a="http://schemas.openxmlformats.org/drawingml/2006/main">
               <a:ext uri="{FF2B5EF4-FFF2-40B4-BE49-F238E27FC236}">
-                <a16:creationId xmlns:a16="http://schemas.microsoft.com/office/drawing/2014/main" id="{A8652EB5-CFFF-4937-9C3C-5CAE01179D61}"/>
+                <a16:creationId xmlns:a16="http://schemas.microsoft.com/office/drawing/2014/main" id="{095E58C4-C752-4420-9565-B9AFC54DDD05}"/>
               </a:ext>
             </a:extLst>
           </p:cNvPr>
@@ -7335,7 +7705,7 @@
           <p:nvPr/>
         </p:nvPicPr>
         <p:blipFill>
-          <a:blip xmlns:r="http://schemas.openxmlformats.org/officeDocument/2006/relationships" xmlns:a="http://schemas.openxmlformats.org/drawingml/2006/main" r:embed="R8f801129aed449a9"/>
+          <a:blip xmlns:r="http://schemas.openxmlformats.org/officeDocument/2006/relationships" xmlns:a="http://schemas.openxmlformats.org/drawingml/2006/main" r:embed="Rd23750448c9044bb"/>
           <a:stretch xmlns:a="http://schemas.openxmlformats.org/drawingml/2006/main"/>
         </p:blipFill>
         <p:spPr>
@@ -7351,7 +7721,7 @@
     </p:spTree>
     <p:extLst>
       <p:ext uri="{BB962C8B-B14F-4D97-AF65-F5344CB8AC3E}">
-        <p14:creationId xmlns:p14="http://schemas.microsoft.com/office/powerpoint/2010/main" val="406051216"/>
+        <p14:creationId xmlns:p14="http://schemas.microsoft.com/office/powerpoint/2010/main" val="1866766611"/>
       </p:ext>
     </p:extLst>
   </p:cSld>
@@ -7375,7 +7745,7 @@
           <p:cNvPr id="2" name="">
             <a:extLst xmlns:a="http://schemas.openxmlformats.org/drawingml/2006/main">
               <a:ext uri="{FF2B5EF4-FFF2-40B4-BE49-F238E27FC236}">
-                <a16:creationId xmlns:a16="http://schemas.microsoft.com/office/drawing/2014/main" id="{6A2B926D-6B44-40F0-9EBF-941D6FC7EE34}"/>
+                <a16:creationId xmlns:a16="http://schemas.microsoft.com/office/drawing/2014/main" id="{EDDEFFFC-9510-4A8E-B2C6-4C6ED7FC8E28}"/>
               </a:ext>
             </a:extLst>
           </p:cNvPr>
@@ -7385,7 +7755,7 @@
           <p:nvPr/>
         </p:nvPicPr>
         <p:blipFill>
-          <a:blip xmlns:r="http://schemas.openxmlformats.org/officeDocument/2006/relationships" xmlns:a="http://schemas.openxmlformats.org/drawingml/2006/main" r:embed="R37e9c0a4dc9a4b8b"/>
+          <a:blip xmlns:r="http://schemas.openxmlformats.org/officeDocument/2006/relationships" xmlns:a="http://schemas.openxmlformats.org/drawingml/2006/main" r:embed="R7a5b4422b2c94c97"/>
           <a:stretch xmlns:a="http://schemas.openxmlformats.org/drawingml/2006/main"/>
         </p:blipFill>
         <p:spPr>
@@ -7401,7 +7771,7 @@
     </p:spTree>
     <p:extLst>
       <p:ext uri="{BB962C8B-B14F-4D97-AF65-F5344CB8AC3E}">
-        <p14:creationId xmlns:p14="http://schemas.microsoft.com/office/powerpoint/2010/main" val="63184080"/>
+        <p14:creationId xmlns:p14="http://schemas.microsoft.com/office/powerpoint/2010/main" val="1179128967"/>
       </p:ext>
     </p:extLst>
   </p:cSld>
@@ -7425,7 +7795,7 @@
           <p:cNvPr id="2" name="">
             <a:extLst xmlns:a="http://schemas.openxmlformats.org/drawingml/2006/main">
               <a:ext uri="{FF2B5EF4-FFF2-40B4-BE49-F238E27FC236}">
-                <a16:creationId xmlns:a16="http://schemas.microsoft.com/office/drawing/2014/main" id="{4CD3487F-5D68-4A4B-8A59-83543FAA33AA}"/>
+                <a16:creationId xmlns:a16="http://schemas.microsoft.com/office/drawing/2014/main" id="{B3820D45-A965-459B-97AB-9F6B25319CF7}"/>
               </a:ext>
             </a:extLst>
           </p:cNvPr>
@@ -7435,7 +7805,7 @@
           <p:nvPr/>
         </p:nvPicPr>
         <p:blipFill>
-          <a:blip xmlns:r="http://schemas.openxmlformats.org/officeDocument/2006/relationships" xmlns:a="http://schemas.openxmlformats.org/drawingml/2006/main" r:embed="R33c03a13c1194b5c"/>
+          <a:blip xmlns:r="http://schemas.openxmlformats.org/officeDocument/2006/relationships" xmlns:a="http://schemas.openxmlformats.org/drawingml/2006/main" r:embed="R2b82a14673d0450b"/>
           <a:stretch xmlns:a="http://schemas.openxmlformats.org/drawingml/2006/main"/>
         </p:blipFill>
         <p:spPr>
@@ -7451,7 +7821,7 @@
     </p:spTree>
     <p:extLst>
       <p:ext uri="{BB962C8B-B14F-4D97-AF65-F5344CB8AC3E}">
-        <p14:creationId xmlns:p14="http://schemas.microsoft.com/office/powerpoint/2010/main" val="96589884"/>
+        <p14:creationId xmlns:p14="http://schemas.microsoft.com/office/powerpoint/2010/main" val="641639454"/>
       </p:ext>
     </p:extLst>
   </p:cSld>
@@ -7475,7 +7845,7 @@
           <p:cNvPr id="2" name="">
             <a:extLst xmlns:a="http://schemas.openxmlformats.org/drawingml/2006/main">
               <a:ext uri="{FF2B5EF4-FFF2-40B4-BE49-F238E27FC236}">
-                <a16:creationId xmlns:a16="http://schemas.microsoft.com/office/drawing/2014/main" id="{5872AB84-191B-451C-87B5-C4D723FE56CD}"/>
+                <a16:creationId xmlns:a16="http://schemas.microsoft.com/office/drawing/2014/main" id="{0B452DD4-1CD7-4C41-81F0-CFD330726C54}"/>
               </a:ext>
             </a:extLst>
           </p:cNvPr>
@@ -7485,7 +7855,7 @@
           <p:nvPr/>
         </p:nvPicPr>
         <p:blipFill>
-          <a:blip xmlns:r="http://schemas.openxmlformats.org/officeDocument/2006/relationships" xmlns:a="http://schemas.openxmlformats.org/drawingml/2006/main" r:embed="Raaaf3cd056b04ac8"/>
+          <a:blip xmlns:r="http://schemas.openxmlformats.org/officeDocument/2006/relationships" xmlns:a="http://schemas.openxmlformats.org/drawingml/2006/main" r:embed="R6e481a4130fe4dab"/>
           <a:stretch xmlns:a="http://schemas.openxmlformats.org/drawingml/2006/main"/>
         </p:blipFill>
         <p:spPr>
@@ -7501,7 +7871,7 @@
     </p:spTree>
     <p:extLst>
       <p:ext uri="{BB962C8B-B14F-4D97-AF65-F5344CB8AC3E}">
-        <p14:creationId xmlns:p14="http://schemas.microsoft.com/office/powerpoint/2010/main" val="1060157809"/>
+        <p14:creationId xmlns:p14="http://schemas.microsoft.com/office/powerpoint/2010/main" val="1335169375"/>
       </p:ext>
     </p:extLst>
   </p:cSld>
@@ -7525,7 +7895,7 @@
           <p:cNvPr id="2" name="">
             <a:extLst xmlns:a="http://schemas.openxmlformats.org/drawingml/2006/main">
               <a:ext uri="{FF2B5EF4-FFF2-40B4-BE49-F238E27FC236}">
-                <a16:creationId xmlns:a16="http://schemas.microsoft.com/office/drawing/2014/main" id="{1E7EAD01-1E1D-49E7-89F1-E4F2AD58AD4C}"/>
+                <a16:creationId xmlns:a16="http://schemas.microsoft.com/office/drawing/2014/main" id="{DD7180BC-229D-40C2-A696-E855DC9BDE14}"/>
               </a:ext>
             </a:extLst>
           </p:cNvPr>
@@ -7535,7 +7905,7 @@
           <p:nvPr/>
         </p:nvPicPr>
         <p:blipFill>
-          <a:blip xmlns:r="http://schemas.openxmlformats.org/officeDocument/2006/relationships" xmlns:a="http://schemas.openxmlformats.org/drawingml/2006/main" r:embed="R8bb90bd1cda44c59"/>
+          <a:blip xmlns:r="http://schemas.openxmlformats.org/officeDocument/2006/relationships" xmlns:a="http://schemas.openxmlformats.org/drawingml/2006/main" r:embed="R8add69f53fae48ba"/>
           <a:stretch xmlns:a="http://schemas.openxmlformats.org/drawingml/2006/main"/>
         </p:blipFill>
         <p:spPr>
@@ -7551,7 +7921,7 @@
     </p:spTree>
     <p:extLst>
       <p:ext uri="{BB962C8B-B14F-4D97-AF65-F5344CB8AC3E}">
-        <p14:creationId xmlns:p14="http://schemas.microsoft.com/office/powerpoint/2010/main" val="312486736"/>
+        <p14:creationId xmlns:p14="http://schemas.microsoft.com/office/powerpoint/2010/main" val="940691107"/>
       </p:ext>
     </p:extLst>
   </p:cSld>
@@ -7575,7 +7945,7 @@
           <p:cNvPr id="2" name="">
             <a:extLst xmlns:a="http://schemas.openxmlformats.org/drawingml/2006/main">
               <a:ext uri="{FF2B5EF4-FFF2-40B4-BE49-F238E27FC236}">
-                <a16:creationId xmlns:a16="http://schemas.microsoft.com/office/drawing/2014/main" id="{463675EE-E1CE-41A3-A503-87F42B92557D}"/>
+                <a16:creationId xmlns:a16="http://schemas.microsoft.com/office/drawing/2014/main" id="{BA1E8A48-84A3-4676-9AA6-5EA5CCCA771A}"/>
               </a:ext>
             </a:extLst>
           </p:cNvPr>
@@ -7585,7 +7955,7 @@
           <p:nvPr/>
         </p:nvPicPr>
         <p:blipFill>
-          <a:blip xmlns:r="http://schemas.openxmlformats.org/officeDocument/2006/relationships" xmlns:a="http://schemas.openxmlformats.org/drawingml/2006/main" r:embed="R62bb8ca65eac42ef"/>
+          <a:blip xmlns:r="http://schemas.openxmlformats.org/officeDocument/2006/relationships" xmlns:a="http://schemas.openxmlformats.org/drawingml/2006/main" r:embed="Rb6ddbaa72c2e482b"/>
           <a:stretch xmlns:a="http://schemas.openxmlformats.org/drawingml/2006/main"/>
         </p:blipFill>
         <p:spPr>
@@ -7601,7 +7971,7 @@
     </p:spTree>
     <p:extLst>
       <p:ext uri="{BB962C8B-B14F-4D97-AF65-F5344CB8AC3E}">
-        <p14:creationId xmlns:p14="http://schemas.microsoft.com/office/powerpoint/2010/main" val="1369822199"/>
+        <p14:creationId xmlns:p14="http://schemas.microsoft.com/office/powerpoint/2010/main" val="1922707209"/>
       </p:ext>
     </p:extLst>
   </p:cSld>
@@ -7625,7 +7995,7 @@
           <p:cNvPr id="2" name="">
             <a:extLst xmlns:a="http://schemas.openxmlformats.org/drawingml/2006/main">
               <a:ext uri="{FF2B5EF4-FFF2-40B4-BE49-F238E27FC236}">
-                <a16:creationId xmlns:a16="http://schemas.microsoft.com/office/drawing/2014/main" id="{4149FDF6-4C13-4BA3-8E9D-2CEC8C662FCA}"/>
+                <a16:creationId xmlns:a16="http://schemas.microsoft.com/office/drawing/2014/main" id="{C5B83C1B-A5ED-4D79-BBA0-4A5681D4D5AA}"/>
               </a:ext>
             </a:extLst>
           </p:cNvPr>
@@ -7635,7 +8005,7 @@
           <p:nvPr/>
         </p:nvPicPr>
         <p:blipFill>
-          <a:blip xmlns:r="http://schemas.openxmlformats.org/officeDocument/2006/relationships" xmlns:a="http://schemas.openxmlformats.org/drawingml/2006/main" r:embed="Rb53cef80d1ef4616"/>
+          <a:blip xmlns:r="http://schemas.openxmlformats.org/officeDocument/2006/relationships" xmlns:a="http://schemas.openxmlformats.org/drawingml/2006/main" r:embed="R8b4a252e50c64677"/>
           <a:stretch xmlns:a="http://schemas.openxmlformats.org/drawingml/2006/main"/>
         </p:blipFill>
         <p:spPr>
@@ -7651,7 +8021,7 @@
     </p:spTree>
     <p:extLst>
       <p:ext uri="{BB962C8B-B14F-4D97-AF65-F5344CB8AC3E}">
-        <p14:creationId xmlns:p14="http://schemas.microsoft.com/office/powerpoint/2010/main" val="1273190369"/>
+        <p14:creationId xmlns:p14="http://schemas.microsoft.com/office/powerpoint/2010/main" val="1391088895"/>
       </p:ext>
     </p:extLst>
   </p:cSld>
@@ -7675,7 +8045,7 @@
           <p:cNvPr id="2" name="">
             <a:extLst xmlns:a="http://schemas.openxmlformats.org/drawingml/2006/main">
               <a:ext uri="{FF2B5EF4-FFF2-40B4-BE49-F238E27FC236}">
-                <a16:creationId xmlns:a16="http://schemas.microsoft.com/office/drawing/2014/main" id="{7E53E84F-7FB9-48D9-93D3-DCB04D3E32F0}"/>
+                <a16:creationId xmlns:a16="http://schemas.microsoft.com/office/drawing/2014/main" id="{0CB03F84-DD74-403A-A1F0-C6DC3579B97B}"/>
               </a:ext>
             </a:extLst>
           </p:cNvPr>
@@ -7685,7 +8055,7 @@
           <p:nvPr/>
         </p:nvPicPr>
         <p:blipFill>
-          <a:blip xmlns:r="http://schemas.openxmlformats.org/officeDocument/2006/relationships" xmlns:a="http://schemas.openxmlformats.org/drawingml/2006/main" r:embed="R713e3af2db6640dc"/>
+          <a:blip xmlns:r="http://schemas.openxmlformats.org/officeDocument/2006/relationships" xmlns:a="http://schemas.openxmlformats.org/drawingml/2006/main" r:embed="Rd2dc1699cc8a4d5a"/>
           <a:stretch xmlns:a="http://schemas.openxmlformats.org/drawingml/2006/main"/>
         </p:blipFill>
         <p:spPr>
@@ -7701,7 +8071,7 @@
     </p:spTree>
     <p:extLst>
       <p:ext uri="{BB962C8B-B14F-4D97-AF65-F5344CB8AC3E}">
-        <p14:creationId xmlns:p14="http://schemas.microsoft.com/office/powerpoint/2010/main" val="366447789"/>
+        <p14:creationId xmlns:p14="http://schemas.microsoft.com/office/powerpoint/2010/main" val="1284806923"/>
       </p:ext>
     </p:extLst>
   </p:cSld>
@@ -7725,7 +8095,7 @@
           <p:cNvPr id="2" name="">
             <a:extLst xmlns:a="http://schemas.openxmlformats.org/drawingml/2006/main">
               <a:ext uri="{FF2B5EF4-FFF2-40B4-BE49-F238E27FC236}">
-                <a16:creationId xmlns:a16="http://schemas.microsoft.com/office/drawing/2014/main" id="{4364AF3E-CCA0-4923-848E-934DF8270567}"/>
+                <a16:creationId xmlns:a16="http://schemas.microsoft.com/office/drawing/2014/main" id="{75DF49D1-0007-490F-BA8D-927484F83BCF}"/>
               </a:ext>
             </a:extLst>
           </p:cNvPr>
@@ -7735,7 +8105,7 @@
           <p:nvPr/>
         </p:nvPicPr>
         <p:blipFill>
-          <a:blip xmlns:r="http://schemas.openxmlformats.org/officeDocument/2006/relationships" xmlns:a="http://schemas.openxmlformats.org/drawingml/2006/main" r:embed="R2ef884fac95247c8"/>
+          <a:blip xmlns:r="http://schemas.openxmlformats.org/officeDocument/2006/relationships" xmlns:a="http://schemas.openxmlformats.org/drawingml/2006/main" r:embed="R03cdd360660f481a"/>
           <a:stretch xmlns:a="http://schemas.openxmlformats.org/drawingml/2006/main"/>
         </p:blipFill>
         <p:spPr>
@@ -7751,7 +8121,7 @@
     </p:spTree>
     <p:extLst>
       <p:ext uri="{BB962C8B-B14F-4D97-AF65-F5344CB8AC3E}">
-        <p14:creationId xmlns:p14="http://schemas.microsoft.com/office/powerpoint/2010/main" val="1209021464"/>
+        <p14:creationId xmlns:p14="http://schemas.microsoft.com/office/powerpoint/2010/main" val="180471913"/>
       </p:ext>
     </p:extLst>
   </p:cSld>
@@ -7775,7 +8145,7 @@
           <p:cNvPr id="2" name="">
             <a:extLst xmlns:a="http://schemas.openxmlformats.org/drawingml/2006/main">
               <a:ext uri="{FF2B5EF4-FFF2-40B4-BE49-F238E27FC236}">
-                <a16:creationId xmlns:a16="http://schemas.microsoft.com/office/drawing/2014/main" id="{7987DA39-D88F-4622-90D5-316E92AB760E}"/>
+                <a16:creationId xmlns:a16="http://schemas.microsoft.com/office/drawing/2014/main" id="{C75BC145-8765-46D0-93E5-4E69642FFDAC}"/>
               </a:ext>
             </a:extLst>
           </p:cNvPr>
@@ -7785,7 +8155,7 @@
           <p:nvPr/>
         </p:nvPicPr>
         <p:blipFill>
-          <a:blip xmlns:r="http://schemas.openxmlformats.org/officeDocument/2006/relationships" xmlns:a="http://schemas.openxmlformats.org/drawingml/2006/main" r:embed="Rfa25b2cc1f8642d2"/>
+          <a:blip xmlns:r="http://schemas.openxmlformats.org/officeDocument/2006/relationships" xmlns:a="http://schemas.openxmlformats.org/drawingml/2006/main" r:embed="R994027914a09492f"/>
           <a:stretch xmlns:a="http://schemas.openxmlformats.org/drawingml/2006/main"/>
         </p:blipFill>
         <p:spPr>
@@ -7801,7 +8171,7 @@
     </p:spTree>
     <p:extLst>
       <p:ext uri="{BB962C8B-B14F-4D97-AF65-F5344CB8AC3E}">
-        <p14:creationId xmlns:p14="http://schemas.microsoft.com/office/powerpoint/2010/main" val="1521147150"/>
+        <p14:creationId xmlns:p14="http://schemas.microsoft.com/office/powerpoint/2010/main" val="282207404"/>
       </p:ext>
     </p:extLst>
   </p:cSld>
@@ -7825,7 +8195,7 @@
           <p:cNvPr id="2" name="">
             <a:extLst xmlns:a="http://schemas.openxmlformats.org/drawingml/2006/main">
               <a:ext uri="{FF2B5EF4-FFF2-40B4-BE49-F238E27FC236}">
-                <a16:creationId xmlns:a16="http://schemas.microsoft.com/office/drawing/2014/main" id="{7654C2A0-4E8B-42E9-AC57-ACF2A7E086C5}"/>
+                <a16:creationId xmlns:a16="http://schemas.microsoft.com/office/drawing/2014/main" id="{8693F7D9-CC89-4DB6-9B5A-ADC8649211C6}"/>
               </a:ext>
             </a:extLst>
           </p:cNvPr>
@@ -7835,7 +8205,7 @@
           <p:nvPr/>
         </p:nvPicPr>
         <p:blipFill>
-          <a:blip xmlns:r="http://schemas.openxmlformats.org/officeDocument/2006/relationships" xmlns:a="http://schemas.openxmlformats.org/drawingml/2006/main" r:embed="R654900dbdb834677"/>
+          <a:blip xmlns:r="http://schemas.openxmlformats.org/officeDocument/2006/relationships" xmlns:a="http://schemas.openxmlformats.org/drawingml/2006/main" r:embed="Ref9bd12218ad4e4c"/>
           <a:stretch xmlns:a="http://schemas.openxmlformats.org/drawingml/2006/main"/>
         </p:blipFill>
         <p:spPr>
@@ -7851,7 +8221,7 @@
     </p:spTree>
     <p:extLst>
       <p:ext uri="{BB962C8B-B14F-4D97-AF65-F5344CB8AC3E}">
-        <p14:creationId xmlns:p14="http://schemas.microsoft.com/office/powerpoint/2010/main" val="1237094069"/>
+        <p14:creationId xmlns:p14="http://schemas.microsoft.com/office/powerpoint/2010/main" val="1397530770"/>
       </p:ext>
     </p:extLst>
   </p:cSld>
@@ -7875,7 +8245,7 @@
           <p:cNvPr id="2" name="">
             <a:extLst xmlns:a="http://schemas.openxmlformats.org/drawingml/2006/main">
               <a:ext uri="{FF2B5EF4-FFF2-40B4-BE49-F238E27FC236}">
-                <a16:creationId xmlns:a16="http://schemas.microsoft.com/office/drawing/2014/main" id="{8B961FAC-660D-4AF1-8364-B59476AE7433}"/>
+                <a16:creationId xmlns:a16="http://schemas.microsoft.com/office/drawing/2014/main" id="{A7C1C3AE-56A0-4442-9501-B10490B905AE}"/>
               </a:ext>
             </a:extLst>
           </p:cNvPr>
@@ -7885,7 +8255,7 @@
           <p:nvPr/>
         </p:nvPicPr>
         <p:blipFill>
-          <a:blip xmlns:r="http://schemas.openxmlformats.org/officeDocument/2006/relationships" xmlns:a="http://schemas.openxmlformats.org/drawingml/2006/main" r:embed="R5997079b33a845f1"/>
+          <a:blip xmlns:r="http://schemas.openxmlformats.org/officeDocument/2006/relationships" xmlns:a="http://schemas.openxmlformats.org/drawingml/2006/main" r:embed="R2f22ba38ac274c0e"/>
           <a:stretch xmlns:a="http://schemas.openxmlformats.org/drawingml/2006/main"/>
         </p:blipFill>
         <p:spPr>
@@ -7901,7 +8271,7 @@
     </p:spTree>
     <p:extLst>
       <p:ext uri="{BB962C8B-B14F-4D97-AF65-F5344CB8AC3E}">
-        <p14:creationId xmlns:p14="http://schemas.microsoft.com/office/powerpoint/2010/main" val="183322163"/>
+        <p14:creationId xmlns:p14="http://schemas.microsoft.com/office/powerpoint/2010/main" val="1664458560"/>
       </p:ext>
     </p:extLst>
   </p:cSld>
@@ -7925,7 +8295,7 @@
           <p:cNvPr id="2" name="">
             <a:extLst xmlns:a="http://schemas.openxmlformats.org/drawingml/2006/main">
               <a:ext uri="{FF2B5EF4-FFF2-40B4-BE49-F238E27FC236}">
-                <a16:creationId xmlns:a16="http://schemas.microsoft.com/office/drawing/2014/main" id="{0A0248DF-88A0-4602-B000-63F423CAF3C1}"/>
+                <a16:creationId xmlns:a16="http://schemas.microsoft.com/office/drawing/2014/main" id="{C9B8FA3C-D79C-4127-820B-309A9029B790}"/>
               </a:ext>
             </a:extLst>
           </p:cNvPr>
@@ -7935,7 +8305,7 @@
           <p:nvPr/>
         </p:nvPicPr>
         <p:blipFill>
-          <a:blip xmlns:r="http://schemas.openxmlformats.org/officeDocument/2006/relationships" xmlns:a="http://schemas.openxmlformats.org/drawingml/2006/main" r:embed="Re45032a5b48a49e6"/>
+          <a:blip xmlns:r="http://schemas.openxmlformats.org/officeDocument/2006/relationships" xmlns:a="http://schemas.openxmlformats.org/drawingml/2006/main" r:embed="Rba964675a9444050"/>
           <a:stretch xmlns:a="http://schemas.openxmlformats.org/drawingml/2006/main"/>
         </p:blipFill>
         <p:spPr>
@@ -7951,7 +8321,7 @@
     </p:spTree>
     <p:extLst>
       <p:ext uri="{BB962C8B-B14F-4D97-AF65-F5344CB8AC3E}">
-        <p14:creationId xmlns:p14="http://schemas.microsoft.com/office/powerpoint/2010/main" val="1036351740"/>
+        <p14:creationId xmlns:p14="http://schemas.microsoft.com/office/powerpoint/2010/main" val="909939212"/>
       </p:ext>
     </p:extLst>
   </p:cSld>
@@ -7975,7 +8345,7 @@
           <p:cNvPr id="2" name="">
             <a:extLst xmlns:a="http://schemas.openxmlformats.org/drawingml/2006/main">
               <a:ext uri="{FF2B5EF4-FFF2-40B4-BE49-F238E27FC236}">
-                <a16:creationId xmlns:a16="http://schemas.microsoft.com/office/drawing/2014/main" id="{E2F637B2-6138-44F8-87D6-8CFE78E9CA34}"/>
+                <a16:creationId xmlns:a16="http://schemas.microsoft.com/office/drawing/2014/main" id="{D572ED2C-9270-4732-A85D-FD1E7F2A5A51}"/>
               </a:ext>
             </a:extLst>
           </p:cNvPr>
@@ -7985,7 +8355,7 @@
           <p:nvPr/>
         </p:nvPicPr>
         <p:blipFill>
-          <a:blip xmlns:r="http://schemas.openxmlformats.org/officeDocument/2006/relationships" xmlns:a="http://schemas.openxmlformats.org/drawingml/2006/main" r:embed="R08d9801629524676"/>
+          <a:blip xmlns:r="http://schemas.openxmlformats.org/officeDocument/2006/relationships" xmlns:a="http://schemas.openxmlformats.org/drawingml/2006/main" r:embed="R2d29a09b2a8f4935"/>
           <a:stretch xmlns:a="http://schemas.openxmlformats.org/drawingml/2006/main"/>
         </p:blipFill>
         <p:spPr>
@@ -8001,7 +8371,7 @@
     </p:spTree>
     <p:extLst>
       <p:ext uri="{BB962C8B-B14F-4D97-AF65-F5344CB8AC3E}">
-        <p14:creationId xmlns:p14="http://schemas.microsoft.com/office/powerpoint/2010/main" val="1170608869"/>
+        <p14:creationId xmlns:p14="http://schemas.microsoft.com/office/powerpoint/2010/main" val="548875243"/>
       </p:ext>
     </p:extLst>
   </p:cSld>
@@ -8025,7 +8395,7 @@
           <p:cNvPr id="2" name="">
             <a:extLst xmlns:a="http://schemas.openxmlformats.org/drawingml/2006/main">
               <a:ext uri="{FF2B5EF4-FFF2-40B4-BE49-F238E27FC236}">
-                <a16:creationId xmlns:a16="http://schemas.microsoft.com/office/drawing/2014/main" id="{07BCE2E8-1173-44CC-8965-BD10338E07BA}"/>
+                <a16:creationId xmlns:a16="http://schemas.microsoft.com/office/drawing/2014/main" id="{C85E7F03-6DBB-4B78-B8C3-DBB619974419}"/>
               </a:ext>
             </a:extLst>
           </p:cNvPr>
@@ -8035,7 +8405,7 @@
           <p:nvPr/>
         </p:nvPicPr>
         <p:blipFill>
-          <a:blip xmlns:r="http://schemas.openxmlformats.org/officeDocument/2006/relationships" xmlns:a="http://schemas.openxmlformats.org/drawingml/2006/main" r:embed="R611d3ffd87f44b67"/>
+          <a:blip xmlns:r="http://schemas.openxmlformats.org/officeDocument/2006/relationships" xmlns:a="http://schemas.openxmlformats.org/drawingml/2006/main" r:embed="R658710d95ceb40d3"/>
           <a:stretch xmlns:a="http://schemas.openxmlformats.org/drawingml/2006/main"/>
         </p:blipFill>
         <p:spPr>
@@ -8051,7 +8421,7 @@
     </p:spTree>
     <p:extLst>
       <p:ext uri="{BB962C8B-B14F-4D97-AF65-F5344CB8AC3E}">
-        <p14:creationId xmlns:p14="http://schemas.microsoft.com/office/powerpoint/2010/main" val="1724821564"/>
+        <p14:creationId xmlns:p14="http://schemas.microsoft.com/office/powerpoint/2010/main" val="1459643522"/>
       </p:ext>
     </p:extLst>
   </p:cSld>
@@ -8075,7 +8445,7 @@
           <p:cNvPr id="2" name="">
             <a:extLst xmlns:a="http://schemas.openxmlformats.org/drawingml/2006/main">
               <a:ext uri="{FF2B5EF4-FFF2-40B4-BE49-F238E27FC236}">
-                <a16:creationId xmlns:a16="http://schemas.microsoft.com/office/drawing/2014/main" id="{4C75FACE-204A-4D2A-97C7-FD5409389F57}"/>
+                <a16:creationId xmlns:a16="http://schemas.microsoft.com/office/drawing/2014/main" id="{CCD0CF34-A7A4-45B6-BA5B-7B3E5DB4C0B1}"/>
               </a:ext>
             </a:extLst>
           </p:cNvPr>
@@ -8085,7 +8455,7 @@
           <p:nvPr/>
         </p:nvPicPr>
         <p:blipFill>
-          <a:blip xmlns:r="http://schemas.openxmlformats.org/officeDocument/2006/relationships" xmlns:a="http://schemas.openxmlformats.org/drawingml/2006/main" r:embed="R5032e245fbf74040"/>
+          <a:blip xmlns:r="http://schemas.openxmlformats.org/officeDocument/2006/relationships" xmlns:a="http://schemas.openxmlformats.org/drawingml/2006/main" r:embed="Re84dc7933d374df0"/>
           <a:stretch xmlns:a="http://schemas.openxmlformats.org/drawingml/2006/main"/>
         </p:blipFill>
         <p:spPr>
@@ -8101,7 +8471,7 @@
     </p:spTree>
     <p:extLst>
       <p:ext uri="{BB962C8B-B14F-4D97-AF65-F5344CB8AC3E}">
-        <p14:creationId xmlns:p14="http://schemas.microsoft.com/office/powerpoint/2010/main" val="1968711083"/>
+        <p14:creationId xmlns:p14="http://schemas.microsoft.com/office/powerpoint/2010/main" val="770042804"/>
       </p:ext>
     </p:extLst>
   </p:cSld>
@@ -8125,7 +8495,7 @@
           <p:cNvPr id="2" name="">
             <a:extLst xmlns:a="http://schemas.openxmlformats.org/drawingml/2006/main">
               <a:ext uri="{FF2B5EF4-FFF2-40B4-BE49-F238E27FC236}">
-                <a16:creationId xmlns:a16="http://schemas.microsoft.com/office/drawing/2014/main" id="{81613FB6-4D9F-41D4-BB0F-85C2CA2F5B36}"/>
+                <a16:creationId xmlns:a16="http://schemas.microsoft.com/office/drawing/2014/main" id="{F0D50154-AA64-4374-B76D-927E0EBB336E}"/>
               </a:ext>
             </a:extLst>
           </p:cNvPr>
@@ -8135,7 +8505,7 @@
           <p:nvPr/>
         </p:nvPicPr>
         <p:blipFill>
-          <a:blip xmlns:r="http://schemas.openxmlformats.org/officeDocument/2006/relationships" xmlns:a="http://schemas.openxmlformats.org/drawingml/2006/main" r:embed="R7f393480af0044a8"/>
+          <a:blip xmlns:r="http://schemas.openxmlformats.org/officeDocument/2006/relationships" xmlns:a="http://schemas.openxmlformats.org/drawingml/2006/main" r:embed="R728b1fdaca8f4d37"/>
           <a:stretch xmlns:a="http://schemas.openxmlformats.org/drawingml/2006/main"/>
         </p:blipFill>
         <p:spPr>
@@ -8151,7 +8521,7 @@
     </p:spTree>
     <p:extLst>
       <p:ext uri="{BB962C8B-B14F-4D97-AF65-F5344CB8AC3E}">
-        <p14:creationId xmlns:p14="http://schemas.microsoft.com/office/powerpoint/2010/main" val="1623775717"/>
+        <p14:creationId xmlns:p14="http://schemas.microsoft.com/office/powerpoint/2010/main" val="959395207"/>
       </p:ext>
     </p:extLst>
   </p:cSld>
@@ -8175,7 +8545,7 @@
           <p:cNvPr id="2" name="">
             <a:extLst xmlns:a="http://schemas.openxmlformats.org/drawingml/2006/main">
               <a:ext uri="{FF2B5EF4-FFF2-40B4-BE49-F238E27FC236}">
-                <a16:creationId xmlns:a16="http://schemas.microsoft.com/office/drawing/2014/main" id="{489890AB-EE03-4513-9EAC-71D7C4FCBD34}"/>
+                <a16:creationId xmlns:a16="http://schemas.microsoft.com/office/drawing/2014/main" id="{652629D5-F773-4843-AD98-1C489E87202A}"/>
               </a:ext>
             </a:extLst>
           </p:cNvPr>
@@ -8185,7 +8555,7 @@
           <p:nvPr/>
         </p:nvPicPr>
         <p:blipFill>
-          <a:blip xmlns:r="http://schemas.openxmlformats.org/officeDocument/2006/relationships" xmlns:a="http://schemas.openxmlformats.org/drawingml/2006/main" r:embed="R748908ff670f4207"/>
+          <a:blip xmlns:r="http://schemas.openxmlformats.org/officeDocument/2006/relationships" xmlns:a="http://schemas.openxmlformats.org/drawingml/2006/main" r:embed="R4ffa170da9764bc2"/>
           <a:stretch xmlns:a="http://schemas.openxmlformats.org/drawingml/2006/main"/>
         </p:blipFill>
         <p:spPr>
@@ -8201,7 +8571,7 @@
     </p:spTree>
     <p:extLst>
       <p:ext uri="{BB962C8B-B14F-4D97-AF65-F5344CB8AC3E}">
-        <p14:creationId xmlns:p14="http://schemas.microsoft.com/office/powerpoint/2010/main" val="1875145162"/>
+        <p14:creationId xmlns:p14="http://schemas.microsoft.com/office/powerpoint/2010/main" val="1720729936"/>
       </p:ext>
     </p:extLst>
   </p:cSld>
@@ -8225,7 +8595,7 @@
           <p:cNvPr id="2" name="">
             <a:extLst xmlns:a="http://schemas.openxmlformats.org/drawingml/2006/main">
               <a:ext uri="{FF2B5EF4-FFF2-40B4-BE49-F238E27FC236}">
-                <a16:creationId xmlns:a16="http://schemas.microsoft.com/office/drawing/2014/main" id="{2710D82D-C1B6-4390-B6D5-13808A455314}"/>
+                <a16:creationId xmlns:a16="http://schemas.microsoft.com/office/drawing/2014/main" id="{FD9F904F-A190-4A83-8A75-879E2042773A}"/>
               </a:ext>
             </a:extLst>
           </p:cNvPr>
@@ -8235,7 +8605,7 @@
           <p:nvPr/>
         </p:nvPicPr>
         <p:blipFill>
-          <a:blip xmlns:r="http://schemas.openxmlformats.org/officeDocument/2006/relationships" xmlns:a="http://schemas.openxmlformats.org/drawingml/2006/main" r:embed="R6aa61716fed04a55"/>
+          <a:blip xmlns:r="http://schemas.openxmlformats.org/officeDocument/2006/relationships" xmlns:a="http://schemas.openxmlformats.org/drawingml/2006/main" r:embed="R3fbd334de1c54a3a"/>
           <a:stretch xmlns:a="http://schemas.openxmlformats.org/drawingml/2006/main"/>
         </p:blipFill>
         <p:spPr>
@@ -8251,7 +8621,7 @@
     </p:spTree>
     <p:extLst>
       <p:ext uri="{BB962C8B-B14F-4D97-AF65-F5344CB8AC3E}">
-        <p14:creationId xmlns:p14="http://schemas.microsoft.com/office/powerpoint/2010/main" val="1617526803"/>
+        <p14:creationId xmlns:p14="http://schemas.microsoft.com/office/powerpoint/2010/main" val="64056788"/>
       </p:ext>
     </p:extLst>
   </p:cSld>
@@ -8275,7 +8645,7 @@
           <p:cNvPr id="2" name="">
             <a:extLst xmlns:a="http://schemas.openxmlformats.org/drawingml/2006/main">
               <a:ext uri="{FF2B5EF4-FFF2-40B4-BE49-F238E27FC236}">
-                <a16:creationId xmlns:a16="http://schemas.microsoft.com/office/drawing/2014/main" id="{0BDAB818-4B14-44A1-A6EF-CF1ECB47A313}"/>
+                <a16:creationId xmlns:a16="http://schemas.microsoft.com/office/drawing/2014/main" id="{257F5805-74EA-4986-93EF-EE1704979577}"/>
               </a:ext>
             </a:extLst>
           </p:cNvPr>
@@ -8285,7 +8655,7 @@
           <p:nvPr/>
         </p:nvPicPr>
         <p:blipFill>
-          <a:blip xmlns:r="http://schemas.openxmlformats.org/officeDocument/2006/relationships" xmlns:a="http://schemas.openxmlformats.org/drawingml/2006/main" r:embed="R552c870f257b45a6"/>
+          <a:blip xmlns:r="http://schemas.openxmlformats.org/officeDocument/2006/relationships" xmlns:a="http://schemas.openxmlformats.org/drawingml/2006/main" r:embed="Rcc9347edb36546f8"/>
           <a:stretch xmlns:a="http://schemas.openxmlformats.org/drawingml/2006/main"/>
         </p:blipFill>
         <p:spPr>
@@ -8301,7 +8671,7 @@
     </p:spTree>
     <p:extLst>
       <p:ext uri="{BB962C8B-B14F-4D97-AF65-F5344CB8AC3E}">
-        <p14:creationId xmlns:p14="http://schemas.microsoft.com/office/powerpoint/2010/main" val="882854979"/>
+        <p14:creationId xmlns:p14="http://schemas.microsoft.com/office/powerpoint/2010/main" val="1819880345"/>
       </p:ext>
     </p:extLst>
   </p:cSld>
@@ -8325,7 +8695,7 @@
           <p:cNvPr id="2" name="">
             <a:extLst xmlns:a="http://schemas.openxmlformats.org/drawingml/2006/main">
               <a:ext uri="{FF2B5EF4-FFF2-40B4-BE49-F238E27FC236}">
-                <a16:creationId xmlns:a16="http://schemas.microsoft.com/office/drawing/2014/main" id="{8ACCB798-F507-408D-B75A-6BB0435BF75B}"/>
+                <a16:creationId xmlns:a16="http://schemas.microsoft.com/office/drawing/2014/main" id="{9A9241A4-6F42-443C-BE6B-963BC616F190}"/>
               </a:ext>
             </a:extLst>
           </p:cNvPr>
@@ -8335,7 +8705,7 @@
           <p:nvPr/>
         </p:nvPicPr>
         <p:blipFill>
-          <a:blip xmlns:r="http://schemas.openxmlformats.org/officeDocument/2006/relationships" xmlns:a="http://schemas.openxmlformats.org/drawingml/2006/main" r:embed="Rd1c3a6dd86554e98"/>
+          <a:blip xmlns:r="http://schemas.openxmlformats.org/officeDocument/2006/relationships" xmlns:a="http://schemas.openxmlformats.org/drawingml/2006/main" r:embed="Rfa379b0f78c143b3"/>
           <a:stretch xmlns:a="http://schemas.openxmlformats.org/drawingml/2006/main"/>
         </p:blipFill>
         <p:spPr>
@@ -8351,7 +8721,7 @@
     </p:spTree>
     <p:extLst>
       <p:ext uri="{BB962C8B-B14F-4D97-AF65-F5344CB8AC3E}">
-        <p14:creationId xmlns:p14="http://schemas.microsoft.com/office/powerpoint/2010/main" val="287325579"/>
+        <p14:creationId xmlns:p14="http://schemas.microsoft.com/office/powerpoint/2010/main" val="18209245"/>
       </p:ext>
     </p:extLst>
   </p:cSld>
@@ -8375,7 +8745,7 @@
           <p:cNvPr id="2" name="">
             <a:extLst xmlns:a="http://schemas.openxmlformats.org/drawingml/2006/main">
               <a:ext uri="{FF2B5EF4-FFF2-40B4-BE49-F238E27FC236}">
-                <a16:creationId xmlns:a16="http://schemas.microsoft.com/office/drawing/2014/main" id="{D2DCE41B-F25D-4106-9D15-EB718D98F2D8}"/>
+                <a16:creationId xmlns:a16="http://schemas.microsoft.com/office/drawing/2014/main" id="{F19D56EC-3C3B-4A9F-A1A2-D40D13E0D7B5}"/>
               </a:ext>
             </a:extLst>
           </p:cNvPr>
@@ -8385,7 +8755,7 @@
           <p:nvPr/>
         </p:nvPicPr>
         <p:blipFill>
-          <a:blip xmlns:r="http://schemas.openxmlformats.org/officeDocument/2006/relationships" xmlns:a="http://schemas.openxmlformats.org/drawingml/2006/main" r:embed="R0fd1f818b03e482a"/>
+          <a:blip xmlns:r="http://schemas.openxmlformats.org/officeDocument/2006/relationships" xmlns:a="http://schemas.openxmlformats.org/drawingml/2006/main" r:embed="Rb6b41f9d8b394dc0"/>
           <a:stretch xmlns:a="http://schemas.openxmlformats.org/drawingml/2006/main"/>
         </p:blipFill>
         <p:spPr>
@@ -8401,7 +8771,7 @@
     </p:spTree>
     <p:extLst>
       <p:ext uri="{BB962C8B-B14F-4D97-AF65-F5344CB8AC3E}">
-        <p14:creationId xmlns:p14="http://schemas.microsoft.com/office/powerpoint/2010/main" val="2093085360"/>
+        <p14:creationId xmlns:p14="http://schemas.microsoft.com/office/powerpoint/2010/main" val="1521612252"/>
       </p:ext>
     </p:extLst>
   </p:cSld>
@@ -8425,7 +8795,7 @@
           <p:cNvPr id="2" name="">
             <a:extLst xmlns:a="http://schemas.openxmlformats.org/drawingml/2006/main">
               <a:ext uri="{FF2B5EF4-FFF2-40B4-BE49-F238E27FC236}">
-                <a16:creationId xmlns:a16="http://schemas.microsoft.com/office/drawing/2014/main" id="{CDF22B10-2449-446F-8553-EFCA8896372F}"/>
+                <a16:creationId xmlns:a16="http://schemas.microsoft.com/office/drawing/2014/main" id="{D18696B1-FB3D-4936-BFCB-3AA6BC35D5CC}"/>
               </a:ext>
             </a:extLst>
           </p:cNvPr>
@@ -8435,7 +8805,7 @@
           <p:nvPr/>
         </p:nvPicPr>
         <p:blipFill>
-          <a:blip xmlns:r="http://schemas.openxmlformats.org/officeDocument/2006/relationships" xmlns:a="http://schemas.openxmlformats.org/drawingml/2006/main" r:embed="R5b58cf0f9f1a464e"/>
+          <a:blip xmlns:r="http://schemas.openxmlformats.org/officeDocument/2006/relationships" xmlns:a="http://schemas.openxmlformats.org/drawingml/2006/main" r:embed="R8defef7629724fcb"/>
           <a:stretch xmlns:a="http://schemas.openxmlformats.org/drawingml/2006/main"/>
         </p:blipFill>
         <p:spPr>
@@ -8451,7 +8821,7 @@
     </p:spTree>
     <p:extLst>
       <p:ext uri="{BB962C8B-B14F-4D97-AF65-F5344CB8AC3E}">
-        <p14:creationId xmlns:p14="http://schemas.microsoft.com/office/powerpoint/2010/main" val="1777885429"/>
+        <p14:creationId xmlns:p14="http://schemas.microsoft.com/office/powerpoint/2010/main" val="552616761"/>
       </p:ext>
     </p:extLst>
   </p:cSld>
@@ -8475,7 +8845,7 @@
           <p:cNvPr id="2" name="">
             <a:extLst xmlns:a="http://schemas.openxmlformats.org/drawingml/2006/main">
               <a:ext uri="{FF2B5EF4-FFF2-40B4-BE49-F238E27FC236}">
-                <a16:creationId xmlns:a16="http://schemas.microsoft.com/office/drawing/2014/main" id="{3B47E9B2-E6A5-4193-8743-5CAE121C3DE0}"/>
+                <a16:creationId xmlns:a16="http://schemas.microsoft.com/office/drawing/2014/main" id="{B0D99548-1F2B-489D-8987-D7D62A51F65E}"/>
               </a:ext>
             </a:extLst>
           </p:cNvPr>
@@ -8485,7 +8855,7 @@
           <p:nvPr/>
         </p:nvPicPr>
         <p:blipFill>
-          <a:blip xmlns:r="http://schemas.openxmlformats.org/officeDocument/2006/relationships" xmlns:a="http://schemas.openxmlformats.org/drawingml/2006/main" r:embed="Rf5a044256a5a4edc"/>
+          <a:blip xmlns:r="http://schemas.openxmlformats.org/officeDocument/2006/relationships" xmlns:a="http://schemas.openxmlformats.org/drawingml/2006/main" r:embed="R1b89809b555e4ef1"/>
           <a:stretch xmlns:a="http://schemas.openxmlformats.org/drawingml/2006/main"/>
         </p:blipFill>
         <p:spPr>
@@ -8501,7 +8871,7 @@
     </p:spTree>
     <p:extLst>
       <p:ext uri="{BB962C8B-B14F-4D97-AF65-F5344CB8AC3E}">
-        <p14:creationId xmlns:p14="http://schemas.microsoft.com/office/powerpoint/2010/main" val="1789208830"/>
+        <p14:creationId xmlns:p14="http://schemas.microsoft.com/office/powerpoint/2010/main" val="1145684859"/>
       </p:ext>
     </p:extLst>
   </p:cSld>
@@ -8525,7 +8895,7 @@
           <p:cNvPr id="2" name="">
             <a:extLst xmlns:a="http://schemas.openxmlformats.org/drawingml/2006/main">
               <a:ext uri="{FF2B5EF4-FFF2-40B4-BE49-F238E27FC236}">
-                <a16:creationId xmlns:a16="http://schemas.microsoft.com/office/drawing/2014/main" id="{46C69E3E-3775-427D-9D15-D3E7D90B83DB}"/>
+                <a16:creationId xmlns:a16="http://schemas.microsoft.com/office/drawing/2014/main" id="{487A4653-B0C1-4820-B7EB-9B8EB0A8C5E5}"/>
               </a:ext>
             </a:extLst>
           </p:cNvPr>
@@ -8535,7 +8905,7 @@
           <p:nvPr/>
         </p:nvPicPr>
         <p:blipFill>
-          <a:blip xmlns:r="http://schemas.openxmlformats.org/officeDocument/2006/relationships" xmlns:a="http://schemas.openxmlformats.org/drawingml/2006/main" r:embed="Rec890f61a9424fb3"/>
+          <a:blip xmlns:r="http://schemas.openxmlformats.org/officeDocument/2006/relationships" xmlns:a="http://schemas.openxmlformats.org/drawingml/2006/main" r:embed="R5d518f23984f4547"/>
           <a:stretch xmlns:a="http://schemas.openxmlformats.org/drawingml/2006/main"/>
         </p:blipFill>
         <p:spPr>
@@ -8551,7 +8921,7 @@
     </p:spTree>
     <p:extLst>
       <p:ext uri="{BB962C8B-B14F-4D97-AF65-F5344CB8AC3E}">
-        <p14:creationId xmlns:p14="http://schemas.microsoft.com/office/powerpoint/2010/main" val="499054909"/>
+        <p14:creationId xmlns:p14="http://schemas.microsoft.com/office/powerpoint/2010/main" val="1505978746"/>
       </p:ext>
     </p:extLst>
   </p:cSld>
@@ -8575,7 +8945,7 @@
           <p:cNvPr id="2" name="">
             <a:extLst xmlns:a="http://schemas.openxmlformats.org/drawingml/2006/main">
               <a:ext uri="{FF2B5EF4-FFF2-40B4-BE49-F238E27FC236}">
-                <a16:creationId xmlns:a16="http://schemas.microsoft.com/office/drawing/2014/main" id="{9874D772-830D-4C53-B5F9-F80C4B41A4CA}"/>
+                <a16:creationId xmlns:a16="http://schemas.microsoft.com/office/drawing/2014/main" id="{70057AF3-74BA-4B90-A8B1-4CD3D45B5F45}"/>
               </a:ext>
             </a:extLst>
           </p:cNvPr>
@@ -8585,7 +8955,7 @@
           <p:nvPr/>
         </p:nvPicPr>
         <p:blipFill>
-          <a:blip xmlns:r="http://schemas.openxmlformats.org/officeDocument/2006/relationships" xmlns:a="http://schemas.openxmlformats.org/drawingml/2006/main" r:embed="R178c22c9355e483c"/>
+          <a:blip xmlns:r="http://schemas.openxmlformats.org/officeDocument/2006/relationships" xmlns:a="http://schemas.openxmlformats.org/drawingml/2006/main" r:embed="R8fd99be9321e4d4d"/>
           <a:stretch xmlns:a="http://schemas.openxmlformats.org/drawingml/2006/main"/>
         </p:blipFill>
         <p:spPr>
@@ -8601,7 +8971,7 @@
     </p:spTree>
     <p:extLst>
       <p:ext uri="{BB962C8B-B14F-4D97-AF65-F5344CB8AC3E}">
-        <p14:creationId xmlns:p14="http://schemas.microsoft.com/office/powerpoint/2010/main" val="322709448"/>
+        <p14:creationId xmlns:p14="http://schemas.microsoft.com/office/powerpoint/2010/main" val="958181192"/>
       </p:ext>
     </p:extLst>
   </p:cSld>
@@ -8625,7 +8995,7 @@
           <p:cNvPr id="2" name="">
             <a:extLst xmlns:a="http://schemas.openxmlformats.org/drawingml/2006/main">
               <a:ext uri="{FF2B5EF4-FFF2-40B4-BE49-F238E27FC236}">
-                <a16:creationId xmlns:a16="http://schemas.microsoft.com/office/drawing/2014/main" id="{B21B198E-4031-401F-8107-709767B74E67}"/>
+                <a16:creationId xmlns:a16="http://schemas.microsoft.com/office/drawing/2014/main" id="{A394B688-BAC9-433F-99D0-5CE0F40BAACE}"/>
               </a:ext>
             </a:extLst>
           </p:cNvPr>
@@ -8635,7 +9005,7 @@
           <p:nvPr/>
         </p:nvPicPr>
         <p:blipFill>
-          <a:blip xmlns:r="http://schemas.openxmlformats.org/officeDocument/2006/relationships" xmlns:a="http://schemas.openxmlformats.org/drawingml/2006/main" r:embed="Rffeff1b3c2d4446c"/>
+          <a:blip xmlns:r="http://schemas.openxmlformats.org/officeDocument/2006/relationships" xmlns:a="http://schemas.openxmlformats.org/drawingml/2006/main" r:embed="R268256b249484c39"/>
           <a:stretch xmlns:a="http://schemas.openxmlformats.org/drawingml/2006/main"/>
         </p:blipFill>
         <p:spPr>
@@ -8651,7 +9021,7 @@
     </p:spTree>
     <p:extLst>
       <p:ext uri="{BB962C8B-B14F-4D97-AF65-F5344CB8AC3E}">
-        <p14:creationId xmlns:p14="http://schemas.microsoft.com/office/powerpoint/2010/main" val="786918464"/>
+        <p14:creationId xmlns:p14="http://schemas.microsoft.com/office/powerpoint/2010/main" val="116950988"/>
       </p:ext>
     </p:extLst>
   </p:cSld>
